--- a/Thesis/docs/Презентация.pptx
+++ b/Thesis/docs/Презентация.pptx
@@ -5,40 +5,48 @@
     <p:sldMasterId id="2147483896" r:id="rId1"/>
   </p:sldMasterIdLst>
   <p:notesMasterIdLst>
-    <p:notesMasterId r:id="rId15"/>
+    <p:notesMasterId r:id="rId16"/>
   </p:notesMasterIdLst>
   <p:sldIdLst>
     <p:sldId id="256" r:id="rId2"/>
-    <p:sldId id="257" r:id="rId3"/>
-    <p:sldId id="262" r:id="rId4"/>
-    <p:sldId id="264" r:id="rId5"/>
-    <p:sldId id="265" r:id="rId6"/>
-    <p:sldId id="263" r:id="rId7"/>
-    <p:sldId id="266" r:id="rId8"/>
-    <p:sldId id="267" r:id="rId9"/>
-    <p:sldId id="268" r:id="rId10"/>
-    <p:sldId id="269" r:id="rId11"/>
-    <p:sldId id="271" r:id="rId12"/>
-    <p:sldId id="270" r:id="rId13"/>
-    <p:sldId id="258" r:id="rId14"/>
+    <p:sldId id="274" r:id="rId3"/>
+    <p:sldId id="272" r:id="rId4"/>
+    <p:sldId id="273" r:id="rId5"/>
+    <p:sldId id="275" r:id="rId6"/>
+    <p:sldId id="276" r:id="rId7"/>
+    <p:sldId id="284" r:id="rId8"/>
+    <p:sldId id="277" r:id="rId9"/>
+    <p:sldId id="278" r:id="rId10"/>
+    <p:sldId id="279" r:id="rId11"/>
+    <p:sldId id="280" r:id="rId12"/>
+    <p:sldId id="281" r:id="rId13"/>
+    <p:sldId id="282" r:id="rId14"/>
+    <p:sldId id="283" r:id="rId15"/>
   </p:sldIdLst>
   <p:sldSz cx="12192000" cy="6858000"/>
   <p:notesSz cx="6858000" cy="9144000"/>
   <p:embeddedFontLst>
     <p:embeddedFont>
-      <p:font typeface="Gilroy Bold" panose="00000800000000000000" charset="-52"/>
-      <p:bold r:id="rId16"/>
+      <p:font typeface="Consolas" panose="020B0609020204030204" pitchFamily="49" charset="0"/>
+      <p:regular r:id="rId17"/>
+      <p:bold r:id="rId18"/>
+      <p:italic r:id="rId19"/>
+      <p:boldItalic r:id="rId20"/>
     </p:embeddedFont>
     <p:embeddedFont>
-      <p:font typeface="Gilroy Medium" panose="00000600000000000000" charset="-52"/>
-      <p:regular r:id="rId17"/>
+      <p:font typeface="Gilroy Bold" panose="00000800000000000000" pitchFamily="50" charset="-52"/>
+      <p:bold r:id="rId21"/>
+    </p:embeddedFont>
+    <p:embeddedFont>
+      <p:font typeface="Gilroy Medium" panose="00000600000000000000" pitchFamily="50" charset="-52"/>
+      <p:regular r:id="rId22"/>
     </p:embeddedFont>
     <p:embeddedFont>
       <p:font typeface="Verdana" panose="020B0604030504040204" pitchFamily="34" charset="0"/>
-      <p:regular r:id="rId18"/>
-      <p:bold r:id="rId19"/>
-      <p:italic r:id="rId20"/>
-      <p:boldItalic r:id="rId21"/>
+      <p:regular r:id="rId23"/>
+      <p:bold r:id="rId24"/>
+      <p:italic r:id="rId25"/>
+      <p:boldItalic r:id="rId26"/>
     </p:embeddedFont>
   </p:embeddedFontLst>
   <p:defaultTextStyle>
@@ -138,7 +146,18 @@
   </p:defaultTextStyle>
   <p:extLst>
     <p:ext uri="{EFAFB233-063F-42B5-8137-9DF3F51BA10A}">
-      <p15:sldGuideLst xmlns:p15="http://schemas.microsoft.com/office/powerpoint/2012/main"/>
+      <p15:sldGuideLst xmlns:p15="http://schemas.microsoft.com/office/powerpoint/2012/main">
+        <p15:guide id="1" orient="horz" pos="504" userDrawn="1">
+          <p15:clr>
+            <a:srgbClr val="A4A3A4"/>
+          </p15:clr>
+        </p15:guide>
+        <p15:guide id="2" pos="3863" userDrawn="1">
+          <p15:clr>
+            <a:srgbClr val="A4A3A4"/>
+          </p15:clr>
+        </p15:guide>
+      </p15:sldGuideLst>
     </p:ext>
     <p:ext uri="{2D200454-40CA-4A62-9FC3-DE9A4176ACB9}">
       <p15:notesGuideLst xmlns:p15="http://schemas.microsoft.com/office/powerpoint/2012/main"/>
@@ -229,7 +248,7 @@
           <a:p>
             <a:fld id="{06B9DC91-30C7-46AB-ADDB-A80A0533D77A}" type="datetimeFigureOut">
               <a:rPr lang="ru-RU" smtClean="0"/>
-              <a:t>09.05.2026</a:t>
+              <a:t>10.05.2026</a:t>
             </a:fld>
             <a:endParaRPr lang="ru-RU"/>
           </a:p>
@@ -654,7 +673,7 @@
     </p:spTree>
     <p:extLst>
       <p:ext uri="{BB962C8B-B14F-4D97-AF65-F5344CB8AC3E}">
-        <p14:creationId xmlns:p14="http://schemas.microsoft.com/office/powerpoint/2010/main" val="32527275"/>
+        <p14:creationId xmlns:p14="http://schemas.microsoft.com/office/powerpoint/2010/main" val="3839102358"/>
       </p:ext>
     </p:extLst>
   </p:cSld>
@@ -738,7 +757,7 @@
     </p:spTree>
     <p:extLst>
       <p:ext uri="{BB962C8B-B14F-4D97-AF65-F5344CB8AC3E}">
-        <p14:creationId xmlns:p14="http://schemas.microsoft.com/office/powerpoint/2010/main" val="420633536"/>
+        <p14:creationId xmlns:p14="http://schemas.microsoft.com/office/powerpoint/2010/main" val="563066695"/>
       </p:ext>
     </p:extLst>
   </p:cSld>
@@ -822,7 +841,7 @@
     </p:spTree>
     <p:extLst>
       <p:ext uri="{BB962C8B-B14F-4D97-AF65-F5344CB8AC3E}">
-        <p14:creationId xmlns:p14="http://schemas.microsoft.com/office/powerpoint/2010/main" val="2638112572"/>
+        <p14:creationId xmlns:p14="http://schemas.microsoft.com/office/powerpoint/2010/main" val="2338256013"/>
       </p:ext>
     </p:extLst>
   </p:cSld>
@@ -906,7 +925,91 @@
     </p:spTree>
     <p:extLst>
       <p:ext uri="{BB962C8B-B14F-4D97-AF65-F5344CB8AC3E}">
-        <p14:creationId xmlns:p14="http://schemas.microsoft.com/office/powerpoint/2010/main" val="2452913410"/>
+        <p14:creationId xmlns:p14="http://schemas.microsoft.com/office/powerpoint/2010/main" val="3896993458"/>
+      </p:ext>
+    </p:extLst>
+  </p:cSld>
+  <p:clrMapOvr>
+    <a:masterClrMapping/>
+  </p:clrMapOvr>
+</p:notes>
+</file>
+
+<file path=ppt/notesSlides/notesSlide14.xml><?xml version="1.0" encoding="utf-8"?>
+<p:notes xmlns:a="http://schemas.openxmlformats.org/drawingml/2006/main" xmlns:r="http://schemas.openxmlformats.org/officeDocument/2006/relationships" xmlns:p="http://schemas.openxmlformats.org/presentationml/2006/main">
+  <p:cSld>
+    <p:spTree>
+      <p:nvGrpSpPr>
+        <p:cNvPr id="1" name=""/>
+        <p:cNvGrpSpPr/>
+        <p:nvPr/>
+      </p:nvGrpSpPr>
+      <p:grpSpPr>
+        <a:xfrm>
+          <a:off x="0" y="0"/>
+          <a:ext cx="0" cy="0"/>
+          <a:chOff x="0" y="0"/>
+          <a:chExt cx="0" cy="0"/>
+        </a:xfrm>
+      </p:grpSpPr>
+      <p:sp>
+        <p:nvSpPr>
+          <p:cNvPr id="2" name="Образ слайда 1"/>
+          <p:cNvSpPr>
+            <a:spLocks noGrp="1" noRot="1" noChangeAspect="1"/>
+          </p:cNvSpPr>
+          <p:nvPr>
+            <p:ph type="sldImg"/>
+          </p:nvPr>
+        </p:nvSpPr>
+        <p:spPr/>
+      </p:sp>
+      <p:sp>
+        <p:nvSpPr>
+          <p:cNvPr id="3" name="Заметки 2"/>
+          <p:cNvSpPr>
+            <a:spLocks noGrp="1"/>
+          </p:cNvSpPr>
+          <p:nvPr>
+            <p:ph type="body" idx="1"/>
+          </p:nvPr>
+        </p:nvSpPr>
+        <p:spPr/>
+        <p:txBody>
+          <a:bodyPr/>
+          <a:lstStyle/>
+          <a:p>
+            <a:endParaRPr lang="ru-RU"/>
+          </a:p>
+        </p:txBody>
+      </p:sp>
+      <p:sp>
+        <p:nvSpPr>
+          <p:cNvPr id="4" name="Номер слайда 3"/>
+          <p:cNvSpPr>
+            <a:spLocks noGrp="1"/>
+          </p:cNvSpPr>
+          <p:nvPr>
+            <p:ph type="sldNum" sz="quarter" idx="10"/>
+          </p:nvPr>
+        </p:nvSpPr>
+        <p:spPr/>
+        <p:txBody>
+          <a:bodyPr/>
+          <a:lstStyle/>
+          <a:p>
+            <a:fld id="{84B6BEC5-E5BF-4073-B59F-AF429BC83136}" type="slidenum">
+              <a:rPr lang="ru-RU" smtClean="0"/>
+              <a:t>14</a:t>
+            </a:fld>
+            <a:endParaRPr lang="ru-RU"/>
+          </a:p>
+        </p:txBody>
+      </p:sp>
+    </p:spTree>
+    <p:extLst>
+      <p:ext uri="{BB962C8B-B14F-4D97-AF65-F5344CB8AC3E}">
+        <p14:creationId xmlns:p14="http://schemas.microsoft.com/office/powerpoint/2010/main" val="2296937663"/>
       </p:ext>
     </p:extLst>
   </p:cSld>
@@ -990,7 +1093,7 @@
     </p:spTree>
     <p:extLst>
       <p:ext uri="{BB962C8B-B14F-4D97-AF65-F5344CB8AC3E}">
-        <p14:creationId xmlns:p14="http://schemas.microsoft.com/office/powerpoint/2010/main" val="2908830487"/>
+        <p14:creationId xmlns:p14="http://schemas.microsoft.com/office/powerpoint/2010/main" val="258482062"/>
       </p:ext>
     </p:extLst>
   </p:cSld>
@@ -1074,7 +1177,7 @@
     </p:spTree>
     <p:extLst>
       <p:ext uri="{BB962C8B-B14F-4D97-AF65-F5344CB8AC3E}">
-        <p14:creationId xmlns:p14="http://schemas.microsoft.com/office/powerpoint/2010/main" val="4227204243"/>
+        <p14:creationId xmlns:p14="http://schemas.microsoft.com/office/powerpoint/2010/main" val="443611270"/>
       </p:ext>
     </p:extLst>
   </p:cSld>
@@ -1158,7 +1261,7 @@
     </p:spTree>
     <p:extLst>
       <p:ext uri="{BB962C8B-B14F-4D97-AF65-F5344CB8AC3E}">
-        <p14:creationId xmlns:p14="http://schemas.microsoft.com/office/powerpoint/2010/main" val="416470641"/>
+        <p14:creationId xmlns:p14="http://schemas.microsoft.com/office/powerpoint/2010/main" val="3256698134"/>
       </p:ext>
     </p:extLst>
   </p:cSld>
@@ -1242,7 +1345,7 @@
     </p:spTree>
     <p:extLst>
       <p:ext uri="{BB962C8B-B14F-4D97-AF65-F5344CB8AC3E}">
-        <p14:creationId xmlns:p14="http://schemas.microsoft.com/office/powerpoint/2010/main" val="3548958939"/>
+        <p14:creationId xmlns:p14="http://schemas.microsoft.com/office/powerpoint/2010/main" val="3931049502"/>
       </p:ext>
     </p:extLst>
   </p:cSld>
@@ -1326,7 +1429,7 @@
     </p:spTree>
     <p:extLst>
       <p:ext uri="{BB962C8B-B14F-4D97-AF65-F5344CB8AC3E}">
-        <p14:creationId xmlns:p14="http://schemas.microsoft.com/office/powerpoint/2010/main" val="466177561"/>
+        <p14:creationId xmlns:p14="http://schemas.microsoft.com/office/powerpoint/2010/main" val="2225128738"/>
       </p:ext>
     </p:extLst>
   </p:cSld>
@@ -1410,7 +1513,7 @@
     </p:spTree>
     <p:extLst>
       <p:ext uri="{BB962C8B-B14F-4D97-AF65-F5344CB8AC3E}">
-        <p14:creationId xmlns:p14="http://schemas.microsoft.com/office/powerpoint/2010/main" val="2632647521"/>
+        <p14:creationId xmlns:p14="http://schemas.microsoft.com/office/powerpoint/2010/main" val="507867299"/>
       </p:ext>
     </p:extLst>
   </p:cSld>
@@ -1494,7 +1597,7 @@
     </p:spTree>
     <p:extLst>
       <p:ext uri="{BB962C8B-B14F-4D97-AF65-F5344CB8AC3E}">
-        <p14:creationId xmlns:p14="http://schemas.microsoft.com/office/powerpoint/2010/main" val="680218826"/>
+        <p14:creationId xmlns:p14="http://schemas.microsoft.com/office/powerpoint/2010/main" val="1856106041"/>
       </p:ext>
     </p:extLst>
   </p:cSld>
@@ -1578,7 +1681,7 @@
     </p:spTree>
     <p:extLst>
       <p:ext uri="{BB962C8B-B14F-4D97-AF65-F5344CB8AC3E}">
-        <p14:creationId xmlns:p14="http://schemas.microsoft.com/office/powerpoint/2010/main" val="1773586054"/>
+        <p14:creationId xmlns:p14="http://schemas.microsoft.com/office/powerpoint/2010/main" val="2360274581"/>
       </p:ext>
     </p:extLst>
   </p:cSld>
@@ -1961,7 +2064,7 @@
           <a:p>
             <a:fld id="{D92D3C23-8038-4008-B24E-40A94D79456D}" type="datetime1">
               <a:rPr lang="ru-RU" smtClean="0"/>
-              <a:t>09.05.2026</a:t>
+              <a:t>10.05.2026</a:t>
             </a:fld>
             <a:endParaRPr lang="ru-RU"/>
           </a:p>
@@ -2409,7 +2512,7 @@
           <a:p>
             <a:fld id="{4FBADD92-CC98-4900-BE8A-2068547BBC1A}" type="datetime1">
               <a:rPr lang="ru-RU" smtClean="0"/>
-              <a:t>09.05.2026</a:t>
+              <a:t>10.05.2026</a:t>
             </a:fld>
             <a:endParaRPr lang="ru-RU"/>
           </a:p>
@@ -2727,7 +2830,7 @@
           <a:p>
             <a:fld id="{06738898-160C-4747-9301-0B5702FA49D8}" type="datetime1">
               <a:rPr lang="ru-RU" smtClean="0"/>
-              <a:t>09.05.2026</a:t>
+              <a:t>10.05.2026</a:t>
             </a:fld>
             <a:endParaRPr lang="ru-RU"/>
           </a:p>
@@ -2854,7 +2957,7 @@
           <a:p>
             <a:fld id="{F1EBB16F-DABE-4712-B47F-7722E1CB50FE}" type="datetime1">
               <a:rPr lang="ru-RU" smtClean="0"/>
-              <a:t>09.05.2026</a:t>
+              <a:t>10.05.2026</a:t>
             </a:fld>
             <a:endParaRPr lang="ru-RU" dirty="0"/>
           </a:p>
@@ -2907,7 +3010,7 @@
           <a:p>
             <a:fld id="{2CEBEA22-9938-4273-8C60-D80B349E4BA9}" type="datetime1">
               <a:rPr lang="ru-RU" smtClean="0"/>
-              <a:t>09.05.2026</a:t>
+              <a:t>10.05.2026</a:t>
             </a:fld>
             <a:endParaRPr lang="ru-RU"/>
           </a:p>
@@ -3188,7 +3291,7 @@
           <a:p>
             <a:fld id="{570D790B-F35A-4C90-BC4A-BA7F77964CA4}" type="datetime1">
               <a:rPr lang="ru-RU" smtClean="0"/>
-              <a:t>09.05.2026</a:t>
+              <a:t>10.05.2026</a:t>
             </a:fld>
             <a:endParaRPr lang="ru-RU"/>
           </a:p>
@@ -3425,7 +3528,7 @@
           <a:p>
             <a:fld id="{29AEF080-AA0F-44FA-BA62-A56D8619F7E7}" type="datetime1">
               <a:rPr lang="ru-RU" smtClean="0"/>
-              <a:t>09.05.2026</a:t>
+              <a:t>10.05.2026</a:t>
             </a:fld>
             <a:endParaRPr lang="ru-RU"/>
           </a:p>
@@ -3607,7 +3710,7 @@
           <a:p>
             <a:fld id="{83AB8CDF-4973-4195-91CA-18BA11F1D400}" type="datetime1">
               <a:rPr lang="ru-RU" smtClean="0"/>
-              <a:t>09.05.2026</a:t>
+              <a:t>10.05.2026</a:t>
             </a:fld>
             <a:endParaRPr lang="ru-RU"/>
           </a:p>
@@ -4127,7 +4230,7 @@
         <p:spPr>
           <a:xfrm>
             <a:off x="4067954" y="723037"/>
-            <a:ext cx="8124046" cy="1200329"/>
+            <a:ext cx="8124046" cy="1477328"/>
           </a:xfrm>
           <a:prstGeom prst="rect">
             <a:avLst/>
@@ -4208,7 +4311,7 @@
               <a:rPr lang="ru-RU" dirty="0">
                 <a:latin typeface="Gilroy Medium" panose="00000600000000000000" charset="-52"/>
               </a:rPr>
-              <a:t>Образовательная программа (профиль) «Веб-технологии»</a:t>
+              <a:t>Образовательная программа (профиль) «Системная и программная инженерия»</a:t>
             </a:r>
           </a:p>
         </p:txBody>
@@ -4379,7 +4482,7 @@
         <p:spPr>
           <a:xfrm>
             <a:off x="7373922" y="4597930"/>
-            <a:ext cx="4221759" cy="1374735"/>
+            <a:ext cx="4221759" cy="1631216"/>
           </a:xfrm>
           <a:prstGeom prst="rect">
             <a:avLst/>
@@ -4436,7 +4539,7 @@
               <a:rPr lang="ru-RU" sz="1800" dirty="0">
                 <a:latin typeface="Gilroy Medium" panose="00000600000000000000" charset="-52"/>
               </a:rPr>
-              <a:t>группа 221-329 </a:t>
+              <a:t>группа 221-329. </a:t>
             </a:r>
           </a:p>
           <a:p>
@@ -4474,17 +4577,42 @@
               <a:rPr lang="ru-RU" sz="1800" dirty="0">
                 <a:latin typeface="Gilroy Medium" panose="00000600000000000000" charset="-52"/>
               </a:rPr>
-              <a:t> Алексей Сергеевич, </a:t>
+              <a:t> Алексей Сергеевич,</a:t>
+            </a:r>
+          </a:p>
+          <a:p>
+            <a:pPr algn="r">
+              <a:lnSpc>
+                <a:spcPts val="2000"/>
+              </a:lnSpc>
+              <a:spcBef>
+                <a:spcPts val="0"/>
+              </a:spcBef>
+            </a:pPr>
+            <a:r>
+              <a:rPr lang="ru-RU" dirty="0">
+                <a:latin typeface="Gilroy Medium" panose="00000600000000000000" charset="-52"/>
+              </a:rPr>
+              <a:t>с</a:t>
             </a:r>
             <a:r>
               <a:rPr lang="ru-RU" sz="1800" dirty="0">
-                <a:solidFill>
-                  <a:schemeClr val="tx1"/>
-                </a:solidFill>
                 <a:latin typeface="Gilroy Medium" panose="00000600000000000000" charset="-52"/>
               </a:rPr>
-              <a:t>к.т.н.</a:t>
-            </a:r>
+              <a:t>тарший преп</a:t>
+            </a:r>
+            <a:r>
+              <a:rPr lang="ru-RU" dirty="0">
+                <a:latin typeface="Gilroy Medium" panose="00000600000000000000" charset="-52"/>
+              </a:rPr>
+              <a:t>одаватель.</a:t>
+            </a:r>
+            <a:endParaRPr lang="ru-RU" sz="1800" dirty="0">
+              <a:solidFill>
+                <a:schemeClr val="tx1"/>
+              </a:solidFill>
+              <a:latin typeface="Gilroy Medium" panose="00000600000000000000" charset="-52"/>
+            </a:endParaRPr>
           </a:p>
         </p:txBody>
       </p:sp>
@@ -4644,8 +4772,8 @@
         </p:nvSpPr>
         <p:spPr>
           <a:xfrm>
-            <a:off x="11308360" y="6212686"/>
-            <a:ext cx="656889" cy="610899"/>
+            <a:off x="11580453" y="6171414"/>
+            <a:ext cx="409963" cy="610899"/>
           </a:xfrm>
         </p:spPr>
         <p:txBody>
@@ -4662,50 +4790,7 @@
       </p:sp>
       <p:sp>
         <p:nvSpPr>
-          <p:cNvPr id="11" name="TextBox 10">
-            <a:extLst>
-              <a:ext uri="{FF2B5EF4-FFF2-40B4-BE49-F238E27FC236}">
-                <a16:creationId xmlns:a16="http://schemas.microsoft.com/office/drawing/2014/main" id="{2169E9A5-0F30-46EE-BA6A-78421B32F98B}"/>
-              </a:ext>
-            </a:extLst>
-          </p:cNvPr>
-          <p:cNvSpPr txBox="1"/>
-          <p:nvPr/>
-        </p:nvSpPr>
-        <p:spPr>
-          <a:xfrm>
-            <a:off x="457200" y="244509"/>
-            <a:ext cx="5381538" cy="584775"/>
-          </a:xfrm>
-          <a:prstGeom prst="rect">
-            <a:avLst/>
-          </a:prstGeom>
-          <a:noFill/>
-        </p:spPr>
-        <p:txBody>
-          <a:bodyPr wrap="square">
-            <a:spAutoFit/>
-          </a:bodyPr>
-          <a:lstStyle/>
-          <a:p>
-            <a:r>
-              <a:rPr lang="ru-RU" sz="3200" dirty="0">
-                <a:solidFill>
-                  <a:prstClr val="black"/>
-                </a:solidFill>
-                <a:latin typeface="Gilroy Bold" panose="00000800000000000000" pitchFamily="2" charset="-52"/>
-                <a:ea typeface="+mj-ea"/>
-                <a:cs typeface="+mj-cs"/>
-              </a:rPr>
-              <a:t>Заголовок</a:t>
-            </a:r>
-            <a:endParaRPr lang="ru-RU" dirty="0"/>
-          </a:p>
-        </p:txBody>
-      </p:sp>
-      <p:sp>
-        <p:nvSpPr>
-          <p:cNvPr id="8" name="TextBox 7">
+          <p:cNvPr id="7" name="TextBox 6">
             <a:extLst>
               <a:ext uri="{FF2B5EF4-FFF2-40B4-BE49-F238E27FC236}">
                 <a16:creationId xmlns:a16="http://schemas.microsoft.com/office/drawing/2014/main" id="{D7E8C6BD-D95E-4822-B09A-435E67225EB0}"/>
@@ -4717,8 +4802,8 @@
         </p:nvSpPr>
         <p:spPr>
           <a:xfrm>
-            <a:off x="226751" y="6203808"/>
-            <a:ext cx="10916724" cy="486608"/>
+            <a:off x="339755" y="6178253"/>
+            <a:ext cx="10798742" cy="692305"/>
           </a:xfrm>
           <a:prstGeom prst="rect">
             <a:avLst/>
@@ -4749,7 +4834,7 @@
               <a:defRPr/>
             </a:pPr>
             <a:r>
-              <a:rPr kumimoji="0" lang="ru-RU" sz="1100" b="0" i="0" u="none" strike="noStrike" kern="1200" cap="none" spc="0" normalizeH="0" baseline="0" noProof="0" dirty="0">
+              <a:rPr kumimoji="0" lang="ru-RU" sz="1100" i="0" u="none" strike="noStrike" kern="1200" cap="none" spc="0" normalizeH="0" baseline="0" noProof="0" dirty="0">
                 <a:ln>
                   <a:noFill/>
                 </a:ln>
@@ -4761,7 +4846,31 @@
                 <a:uFillTx/>
                 <a:latin typeface="Gilroy Medium" panose="00000600000000000000" charset="-52"/>
               </a:rPr>
-              <a:t>ИВАНОВ ИВАН ИВАНОВИЧ,  201-321,  04.06.2024</a:t>
+              <a:t>МЕДВЕДЕВ КЛИМ НИКОЛАЕВИЧ, 221-329</a:t>
+            </a:r>
+            <a:r>
+              <a:rPr lang="ru-RU" sz="1100" dirty="0">
+                <a:solidFill>
+                  <a:prstClr val="black"/>
+                </a:solidFill>
+                <a:latin typeface="Gilroy Medium" panose="00000600000000000000" charset="-52"/>
+              </a:rPr>
+              <a:t>,</a:t>
+            </a:r>
+            <a:r>
+              <a:rPr kumimoji="0" lang="ru-RU" sz="1100" i="0" u="none" strike="noStrike" kern="1200" cap="none" spc="0" normalizeH="0" noProof="0" dirty="0">
+                <a:ln>
+                  <a:noFill/>
+                </a:ln>
+                <a:solidFill>
+                  <a:prstClr val="black"/>
+                </a:solidFill>
+                <a:effectLst/>
+                <a:uLnTx/>
+                <a:uFillTx/>
+                <a:latin typeface="Gilroy Medium" panose="00000600000000000000" charset="-52"/>
+              </a:rPr>
+              <a:t> 04.06.2026</a:t>
             </a:r>
           </a:p>
           <a:p>
@@ -4783,7 +4892,7 @@
               <a:defRPr/>
             </a:pPr>
             <a:r>
-              <a:rPr kumimoji="0" lang="ru-RU" sz="1100" b="0" i="0" u="none" strike="noStrike" kern="1200" cap="none" spc="0" normalizeH="0" baseline="0" noProof="0" dirty="0">
+              <a:rPr kumimoji="0" lang="ru-RU" sz="1100" i="0" u="none" strike="noStrike" kern="1200" cap="none" spc="0" normalizeH="0" baseline="0" noProof="0" dirty="0">
                 <a:ln>
                   <a:noFill/>
                 </a:ln>
@@ -4795,8 +4904,27 @@
                 <a:uFillTx/>
                 <a:latin typeface="Gilroy Medium" panose="00000600000000000000" charset="-52"/>
               </a:rPr>
-              <a:t> РАЗРАБОТКА ВЕБ-ПРИЛОЖЕНИЯ ДЛЯ БРОНИРОВАНИЯ ТЕННИСНЫХ КОРТОВ В СПРОТКЛУБЕ СМЭШ</a:t>
-            </a:r>
+              <a:t>РАЗРАБОТКА СИСТЕМЫ ДЛЯ ПРОКСИРОВАНИЯ И МОНИТОРИНГА ИМИТАЦИОННЫХ СЕРВИСОВ В СРЕДЕ НАГРУЗОЧНОГО ТЕСТИРОВАНИЯ</a:t>
+            </a:r>
+          </a:p>
+          <a:p>
+            <a:pPr marL="0" marR="0" lvl="0" indent="0" algn="l" defTabSz="914400" rtl="0" eaLnBrk="1" fontAlgn="auto" latinLnBrk="0" hangingPunct="1">
+              <a:lnSpc>
+                <a:spcPts val="1600"/>
+              </a:lnSpc>
+              <a:spcBef>
+                <a:spcPts val="0"/>
+              </a:spcBef>
+              <a:spcAft>
+                <a:spcPts val="0"/>
+              </a:spcAft>
+              <a:buClrTx/>
+              <a:buSzTx/>
+              <a:buFontTx/>
+              <a:buNone/>
+              <a:tabLst/>
+              <a:defRPr/>
+            </a:pPr>
             <a:endParaRPr kumimoji="0" lang="ru-RU" sz="1100" i="0" u="none" strike="noStrike" kern="1200" cap="none" spc="0" normalizeH="0" baseline="0" noProof="0" dirty="0">
               <a:ln>
                 <a:noFill/>
@@ -4812,10 +4940,184 @@
           </a:p>
         </p:txBody>
       </p:sp>
+      <p:sp>
+        <p:nvSpPr>
+          <p:cNvPr id="11" name="TextBox 10">
+            <a:extLst>
+              <a:ext uri="{FF2B5EF4-FFF2-40B4-BE49-F238E27FC236}">
+                <a16:creationId xmlns:a16="http://schemas.microsoft.com/office/drawing/2014/main" id="{2169E9A5-0F30-46EE-BA6A-78421B32F98B}"/>
+              </a:ext>
+            </a:extLst>
+          </p:cNvPr>
+          <p:cNvSpPr txBox="1"/>
+          <p:nvPr/>
+        </p:nvSpPr>
+        <p:spPr>
+          <a:xfrm>
+            <a:off x="457200" y="537255"/>
+            <a:ext cx="6645617" cy="584775"/>
+          </a:xfrm>
+          <a:prstGeom prst="rect">
+            <a:avLst/>
+          </a:prstGeom>
+          <a:noFill/>
+        </p:spPr>
+        <p:txBody>
+          <a:bodyPr wrap="square">
+            <a:spAutoFit/>
+          </a:bodyPr>
+          <a:lstStyle/>
+          <a:p>
+            <a:r>
+              <a:rPr lang="ru-RU" sz="3200" dirty="0">
+                <a:latin typeface="Gilroy Bold" panose="00000800000000000000" pitchFamily="2" charset="-52"/>
+                <a:ea typeface="+mj-ea"/>
+                <a:cs typeface="+mj-cs"/>
+              </a:rPr>
+              <a:t>Веб-интерфейс</a:t>
+            </a:r>
+          </a:p>
+        </p:txBody>
+      </p:sp>
+      <p:sp>
+        <p:nvSpPr>
+          <p:cNvPr id="2" name="TextBox 1">
+            <a:extLst>
+              <a:ext uri="{FF2B5EF4-FFF2-40B4-BE49-F238E27FC236}">
+                <a16:creationId xmlns:a16="http://schemas.microsoft.com/office/drawing/2014/main" id="{29A6AEEB-6479-6AF6-ED4B-A834C62D6DE6}"/>
+              </a:ext>
+            </a:extLst>
+          </p:cNvPr>
+          <p:cNvSpPr txBox="1"/>
+          <p:nvPr/>
+        </p:nvSpPr>
+        <p:spPr>
+          <a:xfrm>
+            <a:off x="692660" y="1503233"/>
+            <a:ext cx="9814179" cy="1150571"/>
+          </a:xfrm>
+          <a:prstGeom prst="rect">
+            <a:avLst/>
+          </a:prstGeom>
+          <a:noFill/>
+        </p:spPr>
+        <p:txBody>
+          <a:bodyPr wrap="square" rtlCol="0">
+            <a:spAutoFit/>
+          </a:bodyPr>
+          <a:lstStyle/>
+          <a:p>
+            <a:pPr>
+              <a:lnSpc>
+                <a:spcPct val="150000"/>
+              </a:lnSpc>
+            </a:pPr>
+            <a:r>
+              <a:rPr lang="ru-RU" sz="1600" dirty="0"/>
+              <a:t>Реализован на </a:t>
+            </a:r>
+            <a:r>
+              <a:rPr lang="en-US" sz="1600" dirty="0"/>
+              <a:t>Server-Side Rendering (</a:t>
+            </a:r>
+            <a:r>
+              <a:rPr lang="en-US" sz="1600" dirty="0" err="1"/>
+              <a:t>FastAPI</a:t>
+            </a:r>
+            <a:r>
+              <a:rPr lang="en-US" sz="1600" dirty="0"/>
+              <a:t> + Jinja2) </a:t>
+            </a:r>
+            <a:r>
+              <a:rPr lang="ru-RU" sz="1600" dirty="0"/>
+              <a:t>без внешних зависимостей. </a:t>
+            </a:r>
+            <a:endParaRPr lang="en-US" sz="1600" dirty="0"/>
+          </a:p>
+          <a:p>
+            <a:pPr>
+              <a:lnSpc>
+                <a:spcPct val="150000"/>
+              </a:lnSpc>
+            </a:pPr>
+            <a:r>
+              <a:rPr lang="ru-RU" sz="1600" dirty="0"/>
+              <a:t>Статус каждой заглушки кодируется цветом: 🟢 </a:t>
+            </a:r>
+            <a:r>
+              <a:rPr lang="en-US" sz="1600" dirty="0"/>
+              <a:t>RUNNING / </a:t>
+            </a:r>
+            <a:r>
+              <a:rPr lang="ru-RU" sz="1600" dirty="0"/>
+              <a:t>🟡 </a:t>
+            </a:r>
+            <a:r>
+              <a:rPr lang="en-US" sz="1600" dirty="0"/>
+              <a:t>STOPPED / </a:t>
+            </a:r>
+            <a:r>
+              <a:rPr lang="ru-RU" sz="1600" dirty="0"/>
+              <a:t>🔴 </a:t>
+            </a:r>
+            <a:r>
+              <a:rPr lang="en-US" sz="1600" dirty="0"/>
+              <a:t>ERROR. </a:t>
+            </a:r>
+            <a:endParaRPr lang="ru-RU" sz="1600" dirty="0"/>
+          </a:p>
+          <a:p>
+            <a:pPr>
+              <a:lnSpc>
+                <a:spcPct val="150000"/>
+              </a:lnSpc>
+            </a:pPr>
+            <a:r>
+              <a:rPr lang="ru-RU" sz="1600" dirty="0"/>
+              <a:t>Таблица обновляется автоматически каждые 5 секунд.</a:t>
+            </a:r>
+          </a:p>
+        </p:txBody>
+      </p:sp>
+      <p:pic>
+        <p:nvPicPr>
+          <p:cNvPr id="5" name="Рисунок 4" descr="Изображение выглядит как снимок экрана, текст, программное обеспечение, Мультимедийное программное обеспечение&#10;&#10;Контент, сгенерированный ИИ, может содержать ошибки.">
+            <a:extLst>
+              <a:ext uri="{FF2B5EF4-FFF2-40B4-BE49-F238E27FC236}">
+                <a16:creationId xmlns:a16="http://schemas.microsoft.com/office/drawing/2014/main" id="{CC78FB8E-26D2-3DBB-7B5D-C2506D87FF53}"/>
+              </a:ext>
+            </a:extLst>
+          </p:cNvPr>
+          <p:cNvPicPr>
+            <a:picLocks noChangeAspect="1"/>
+          </p:cNvPicPr>
+          <p:nvPr/>
+        </p:nvPicPr>
+        <p:blipFill>
+          <a:blip r:embed="rId3">
+            <a:extLst>
+              <a:ext uri="{28A0092B-C50C-407E-A947-70E740481C1C}">
+                <a14:useLocalDpi xmlns:a14="http://schemas.microsoft.com/office/drawing/2010/main" val="0"/>
+              </a:ext>
+            </a:extLst>
+          </a:blip>
+          <a:srcRect b="49894"/>
+          <a:stretch/>
+        </p:blipFill>
+        <p:spPr>
+          <a:xfrm>
+            <a:off x="692660" y="3035007"/>
+            <a:ext cx="10806680" cy="2708433"/>
+          </a:xfrm>
+          <a:prstGeom prst="rect">
+            <a:avLst/>
+          </a:prstGeom>
+        </p:spPr>
+      </p:pic>
     </p:spTree>
     <p:extLst>
       <p:ext uri="{BB962C8B-B14F-4D97-AF65-F5344CB8AC3E}">
-        <p14:creationId xmlns:p14="http://schemas.microsoft.com/office/powerpoint/2010/main" val="3828556391"/>
+        <p14:creationId xmlns:p14="http://schemas.microsoft.com/office/powerpoint/2010/main" val="3904826061"/>
       </p:ext>
     </p:extLst>
   </p:cSld>
@@ -4905,8 +5207,8 @@
         </p:nvSpPr>
         <p:spPr>
           <a:xfrm>
-            <a:off x="11299972" y="6186955"/>
-            <a:ext cx="811536" cy="610899"/>
+            <a:off x="11580453" y="6171414"/>
+            <a:ext cx="409963" cy="610899"/>
           </a:xfrm>
         </p:spPr>
         <p:txBody>
@@ -4923,50 +5225,7 @@
       </p:sp>
       <p:sp>
         <p:nvSpPr>
-          <p:cNvPr id="11" name="TextBox 10">
-            <a:extLst>
-              <a:ext uri="{FF2B5EF4-FFF2-40B4-BE49-F238E27FC236}">
-                <a16:creationId xmlns:a16="http://schemas.microsoft.com/office/drawing/2014/main" id="{2169E9A5-0F30-46EE-BA6A-78421B32F98B}"/>
-              </a:ext>
-            </a:extLst>
-          </p:cNvPr>
-          <p:cNvSpPr txBox="1"/>
-          <p:nvPr/>
-        </p:nvSpPr>
-        <p:spPr>
-          <a:xfrm>
-            <a:off x="457200" y="244509"/>
-            <a:ext cx="5381538" cy="584775"/>
-          </a:xfrm>
-          <a:prstGeom prst="rect">
-            <a:avLst/>
-          </a:prstGeom>
-          <a:noFill/>
-        </p:spPr>
-        <p:txBody>
-          <a:bodyPr wrap="square">
-            <a:spAutoFit/>
-          </a:bodyPr>
-          <a:lstStyle/>
-          <a:p>
-            <a:r>
-              <a:rPr lang="ru-RU" sz="3200" dirty="0">
-                <a:solidFill>
-                  <a:prstClr val="black"/>
-                </a:solidFill>
-                <a:latin typeface="Gilroy Bold" panose="00000800000000000000" pitchFamily="2" charset="-52"/>
-                <a:ea typeface="+mj-ea"/>
-                <a:cs typeface="+mj-cs"/>
-              </a:rPr>
-              <a:t>Выводы</a:t>
-            </a:r>
-            <a:endParaRPr lang="ru-RU" dirty="0"/>
-          </a:p>
-        </p:txBody>
-      </p:sp>
-      <p:sp>
-        <p:nvSpPr>
-          <p:cNvPr id="8" name="TextBox 7">
+          <p:cNvPr id="7" name="TextBox 6">
             <a:extLst>
               <a:ext uri="{FF2B5EF4-FFF2-40B4-BE49-F238E27FC236}">
                 <a16:creationId xmlns:a16="http://schemas.microsoft.com/office/drawing/2014/main" id="{D7E8C6BD-D95E-4822-B09A-435E67225EB0}"/>
@@ -4978,8 +5237,8 @@
         </p:nvSpPr>
         <p:spPr>
           <a:xfrm>
-            <a:off x="257413" y="6199007"/>
-            <a:ext cx="10916724" cy="487121"/>
+            <a:off x="339755" y="6178253"/>
+            <a:ext cx="10798742" cy="692305"/>
           </a:xfrm>
           <a:prstGeom prst="rect">
             <a:avLst/>
@@ -5010,7 +5269,7 @@
               <a:defRPr/>
             </a:pPr>
             <a:r>
-              <a:rPr kumimoji="0" lang="ru-RU" sz="1100" b="0" i="0" u="none" strike="noStrike" kern="1200" cap="none" spc="0" normalizeH="0" baseline="0" noProof="0" dirty="0">
+              <a:rPr kumimoji="0" lang="ru-RU" sz="1100" i="0" u="none" strike="noStrike" kern="1200" cap="none" spc="0" normalizeH="0" baseline="0" noProof="0" dirty="0">
                 <a:ln>
                   <a:noFill/>
                 </a:ln>
@@ -5022,7 +5281,31 @@
                 <a:uFillTx/>
                 <a:latin typeface="Gilroy Medium" panose="00000600000000000000" charset="-52"/>
               </a:rPr>
-              <a:t>ИВАНОВ ИВАН ИВАНОВИЧ,  201-321,  04.06.2024</a:t>
+              <a:t>МЕДВЕДЕВ КЛИМ НИКОЛАЕВИЧ, 221-329</a:t>
+            </a:r>
+            <a:r>
+              <a:rPr lang="ru-RU" sz="1100" dirty="0">
+                <a:solidFill>
+                  <a:prstClr val="black"/>
+                </a:solidFill>
+                <a:latin typeface="Gilroy Medium" panose="00000600000000000000" charset="-52"/>
+              </a:rPr>
+              <a:t>,</a:t>
+            </a:r>
+            <a:r>
+              <a:rPr kumimoji="0" lang="ru-RU" sz="1100" i="0" u="none" strike="noStrike" kern="1200" cap="none" spc="0" normalizeH="0" noProof="0" dirty="0">
+                <a:ln>
+                  <a:noFill/>
+                </a:ln>
+                <a:solidFill>
+                  <a:prstClr val="black"/>
+                </a:solidFill>
+                <a:effectLst/>
+                <a:uLnTx/>
+                <a:uFillTx/>
+                <a:latin typeface="Gilroy Medium" panose="00000600000000000000" charset="-52"/>
+              </a:rPr>
+              <a:t> 04.06.2026</a:t>
             </a:r>
           </a:p>
           <a:p>
@@ -5044,7 +5327,7 @@
               <a:defRPr/>
             </a:pPr>
             <a:r>
-              <a:rPr kumimoji="0" lang="ru-RU" sz="1100" b="0" i="0" u="none" strike="noStrike" kern="1200" cap="none" spc="0" normalizeH="0" baseline="0" noProof="0" dirty="0">
+              <a:rPr kumimoji="0" lang="ru-RU" sz="1100" i="0" u="none" strike="noStrike" kern="1200" cap="none" spc="0" normalizeH="0" baseline="0" noProof="0" dirty="0">
                 <a:ln>
                   <a:noFill/>
                 </a:ln>
@@ -5056,8 +5339,27 @@
                 <a:uFillTx/>
                 <a:latin typeface="Gilroy Medium" panose="00000600000000000000" charset="-52"/>
               </a:rPr>
-              <a:t>РАЗРАБОТКА ВЕБ-ПРИЛОЖЕНИЯ ДЛЯ БРОНИРОВАНИЯ ТЕННИСНЫХ КОРТОВ В СПРОТКЛУБЕ СМЭШ</a:t>
-            </a:r>
+              <a:t>РАЗРАБОТКА СИСТЕМЫ ДЛЯ ПРОКСИРОВАНИЯ И МОНИТОРИНГА ИМИТАЦИОННЫХ СЕРВИСОВ В СРЕДЕ НАГРУЗОЧНОГО ТЕСТИРОВАНИЯ</a:t>
+            </a:r>
+          </a:p>
+          <a:p>
+            <a:pPr marL="0" marR="0" lvl="0" indent="0" algn="l" defTabSz="914400" rtl="0" eaLnBrk="1" fontAlgn="auto" latinLnBrk="0" hangingPunct="1">
+              <a:lnSpc>
+                <a:spcPts val="1600"/>
+              </a:lnSpc>
+              <a:spcBef>
+                <a:spcPts val="0"/>
+              </a:spcBef>
+              <a:spcAft>
+                <a:spcPts val="0"/>
+              </a:spcAft>
+              <a:buClrTx/>
+              <a:buSzTx/>
+              <a:buFontTx/>
+              <a:buNone/>
+              <a:tabLst/>
+              <a:defRPr/>
+            </a:pPr>
             <a:endParaRPr kumimoji="0" lang="ru-RU" sz="1100" i="0" u="none" strike="noStrike" kern="1200" cap="none" spc="0" normalizeH="0" baseline="0" noProof="0" dirty="0">
               <a:ln>
                 <a:noFill/>
@@ -5073,10 +5375,447 @@
           </a:p>
         </p:txBody>
       </p:sp>
+      <p:sp>
+        <p:nvSpPr>
+          <p:cNvPr id="11" name="TextBox 10">
+            <a:extLst>
+              <a:ext uri="{FF2B5EF4-FFF2-40B4-BE49-F238E27FC236}">
+                <a16:creationId xmlns:a16="http://schemas.microsoft.com/office/drawing/2014/main" id="{2169E9A5-0F30-46EE-BA6A-78421B32F98B}"/>
+              </a:ext>
+            </a:extLst>
+          </p:cNvPr>
+          <p:cNvSpPr txBox="1"/>
+          <p:nvPr/>
+        </p:nvSpPr>
+        <p:spPr>
+          <a:xfrm>
+            <a:off x="457200" y="537255"/>
+            <a:ext cx="6645617" cy="584775"/>
+          </a:xfrm>
+          <a:prstGeom prst="rect">
+            <a:avLst/>
+          </a:prstGeom>
+          <a:noFill/>
+        </p:spPr>
+        <p:txBody>
+          <a:bodyPr wrap="square">
+            <a:spAutoFit/>
+          </a:bodyPr>
+          <a:lstStyle/>
+          <a:p>
+            <a:r>
+              <a:rPr lang="ru-RU" sz="3200" dirty="0">
+                <a:latin typeface="Gilroy Bold" panose="00000800000000000000" pitchFamily="2" charset="-52"/>
+                <a:ea typeface="+mj-ea"/>
+                <a:cs typeface="+mj-cs"/>
+              </a:rPr>
+              <a:t>Функциональное тестирование</a:t>
+            </a:r>
+          </a:p>
+        </p:txBody>
+      </p:sp>
+      <p:sp>
+        <p:nvSpPr>
+          <p:cNvPr id="2" name="TextBox 1">
+            <a:extLst>
+              <a:ext uri="{FF2B5EF4-FFF2-40B4-BE49-F238E27FC236}">
+                <a16:creationId xmlns:a16="http://schemas.microsoft.com/office/drawing/2014/main" id="{29A6AEEB-6479-6AF6-ED4B-A834C62D6DE6}"/>
+              </a:ext>
+            </a:extLst>
+          </p:cNvPr>
+          <p:cNvSpPr txBox="1"/>
+          <p:nvPr/>
+        </p:nvSpPr>
+        <p:spPr>
+          <a:xfrm>
+            <a:off x="954880" y="1586177"/>
+            <a:ext cx="4928281" cy="338554"/>
+          </a:xfrm>
+          <a:prstGeom prst="rect">
+            <a:avLst/>
+          </a:prstGeom>
+          <a:noFill/>
+        </p:spPr>
+        <p:txBody>
+          <a:bodyPr wrap="square" rtlCol="0">
+            <a:spAutoFit/>
+          </a:bodyPr>
+          <a:lstStyle/>
+          <a:p>
+            <a:r>
+              <a:rPr lang="ru-RU" sz="1600" dirty="0"/>
+              <a:t>Результаты функционального тестирования</a:t>
+            </a:r>
+          </a:p>
+        </p:txBody>
+      </p:sp>
+      <p:graphicFrame>
+        <p:nvGraphicFramePr>
+          <p:cNvPr id="4" name="Таблица 3">
+            <a:extLst>
+              <a:ext uri="{FF2B5EF4-FFF2-40B4-BE49-F238E27FC236}">
+                <a16:creationId xmlns:a16="http://schemas.microsoft.com/office/drawing/2014/main" id="{94333BB9-A0A9-AF68-A54E-4D37143ECD4C}"/>
+              </a:ext>
+            </a:extLst>
+          </p:cNvPr>
+          <p:cNvGraphicFramePr>
+            <a:graphicFrameLocks noGrp="1"/>
+          </p:cNvGraphicFramePr>
+          <p:nvPr>
+            <p:extLst>
+              <p:ext uri="{D42A27DB-BD31-4B8C-83A1-F6EECF244321}">
+                <p14:modId xmlns:p14="http://schemas.microsoft.com/office/powerpoint/2010/main" val="1403520182"/>
+              </p:ext>
+            </p:extLst>
+          </p:nvPr>
+        </p:nvGraphicFramePr>
+        <p:xfrm>
+          <a:off x="954880" y="2388879"/>
+          <a:ext cx="10282239" cy="2743200"/>
+        </p:xfrm>
+        <a:graphic>
+          <a:graphicData uri="http://schemas.openxmlformats.org/drawingml/2006/table">
+            <a:tbl>
+              <a:tblPr>
+                <a:tableStyleId>{616DA210-FB5B-4158-B5E0-FEB733F419BA}</a:tableStyleId>
+              </a:tblPr>
+              <a:tblGrid>
+                <a:gridCol w="4620904">
+                  <a:extLst>
+                    <a:ext uri="{9D8B030D-6E8A-4147-A177-3AD203B41FA5}">
+                      <a16:colId xmlns:a16="http://schemas.microsoft.com/office/drawing/2014/main" val="1472585013"/>
+                    </a:ext>
+                  </a:extLst>
+                </a:gridCol>
+                <a:gridCol w="1719618">
+                  <a:extLst>
+                    <a:ext uri="{9D8B030D-6E8A-4147-A177-3AD203B41FA5}">
+                      <a16:colId xmlns:a16="http://schemas.microsoft.com/office/drawing/2014/main" val="3833472201"/>
+                    </a:ext>
+                  </a:extLst>
+                </a:gridCol>
+                <a:gridCol w="3941717">
+                  <a:extLst>
+                    <a:ext uri="{9D8B030D-6E8A-4147-A177-3AD203B41FA5}">
+                      <a16:colId xmlns:a16="http://schemas.microsoft.com/office/drawing/2014/main" val="2534909743"/>
+                    </a:ext>
+                  </a:extLst>
+                </a:gridCol>
+              </a:tblGrid>
+              <a:tr h="0">
+                <a:tc>
+                  <a:txBody>
+                    <a:bodyPr/>
+                    <a:lstStyle/>
+                    <a:p>
+                      <a:r>
+                        <a:rPr lang="ru-RU" sz="1600"/>
+                        <a:t>Сценарий</a:t>
+                      </a:r>
+                    </a:p>
+                  </a:txBody>
+                  <a:tcPr anchor="ctr"/>
+                </a:tc>
+                <a:tc>
+                  <a:txBody>
+                    <a:bodyPr/>
+                    <a:lstStyle/>
+                    <a:p>
+                      <a:pPr algn="ctr"/>
+                      <a:r>
+                        <a:rPr lang="ru-RU" sz="1600" dirty="0"/>
+                        <a:t>Успешность</a:t>
+                      </a:r>
+                    </a:p>
+                  </a:txBody>
+                  <a:tcPr anchor="ctr"/>
+                </a:tc>
+                <a:tc>
+                  <a:txBody>
+                    <a:bodyPr/>
+                    <a:lstStyle/>
+                    <a:p>
+                      <a:r>
+                        <a:rPr lang="ru-RU" sz="1600" dirty="0"/>
+                        <a:t>Результат</a:t>
+                      </a:r>
+                    </a:p>
+                  </a:txBody>
+                  <a:tcPr anchor="ctr"/>
+                </a:tc>
+                <a:extLst>
+                  <a:ext uri="{0D108BD9-81ED-4DB2-BD59-A6C34878D82A}">
+                    <a16:rowId xmlns:a16="http://schemas.microsoft.com/office/drawing/2014/main" val="1108259868"/>
+                  </a:ext>
+                </a:extLst>
+              </a:tr>
+              <a:tr h="0">
+                <a:tc>
+                  <a:txBody>
+                    <a:bodyPr/>
+                    <a:lstStyle/>
+                    <a:p>
+                      <a:r>
+                        <a:rPr lang="ru-RU" sz="1600"/>
+                        <a:t>Перезапуск при работающих процессах</a:t>
+                      </a:r>
+                    </a:p>
+                  </a:txBody>
+                  <a:tcPr anchor="ctr"/>
+                </a:tc>
+                <a:tc>
+                  <a:txBody>
+                    <a:bodyPr/>
+                    <a:lstStyle/>
+                    <a:p>
+                      <a:pPr algn="ctr"/>
+                      <a:r>
+                        <a:rPr lang="ru-RU" sz="1600" dirty="0"/>
+                        <a:t>✅</a:t>
+                      </a:r>
+                    </a:p>
+                  </a:txBody>
+                  <a:tcPr anchor="ctr"/>
+                </a:tc>
+                <a:tc>
+                  <a:txBody>
+                    <a:bodyPr/>
+                    <a:lstStyle/>
+                    <a:p>
+                      <a:r>
+                        <a:rPr lang="ru-RU" sz="1600" dirty="0"/>
+                        <a:t>Статусы </a:t>
+                      </a:r>
+                      <a:r>
+                        <a:rPr lang="en-US" sz="1600" dirty="0"/>
+                        <a:t>RUNNING </a:t>
+                      </a:r>
+                      <a:r>
+                        <a:rPr lang="ru-RU" sz="1600" dirty="0"/>
+                        <a:t>сохранены</a:t>
+                      </a:r>
+                    </a:p>
+                  </a:txBody>
+                  <a:tcPr anchor="ctr"/>
+                </a:tc>
+                <a:extLst>
+                  <a:ext uri="{0D108BD9-81ED-4DB2-BD59-A6C34878D82A}">
+                    <a16:rowId xmlns:a16="http://schemas.microsoft.com/office/drawing/2014/main" val="1155619423"/>
+                  </a:ext>
+                </a:extLst>
+              </a:tr>
+              <a:tr h="0">
+                <a:tc>
+                  <a:txBody>
+                    <a:bodyPr/>
+                    <a:lstStyle/>
+                    <a:p>
+                      <a:r>
+                        <a:rPr lang="ru-RU" sz="1600" dirty="0"/>
+                        <a:t>Перезапуск при завершённых процессах</a:t>
+                      </a:r>
+                    </a:p>
+                  </a:txBody>
+                  <a:tcPr anchor="ctr"/>
+                </a:tc>
+                <a:tc>
+                  <a:txBody>
+                    <a:bodyPr/>
+                    <a:lstStyle/>
+                    <a:p>
+                      <a:pPr algn="ctr"/>
+                      <a:r>
+                        <a:rPr lang="ru-RU" sz="1600" dirty="0"/>
+                        <a:t>✅</a:t>
+                      </a:r>
+                    </a:p>
+                  </a:txBody>
+                  <a:tcPr anchor="ctr"/>
+                </a:tc>
+                <a:tc>
+                  <a:txBody>
+                    <a:bodyPr/>
+                    <a:lstStyle/>
+                    <a:p>
+                      <a:r>
+                        <a:rPr lang="ru-RU" sz="1600" dirty="0"/>
+                        <a:t>Автоматический перезапуск заглушек</a:t>
+                      </a:r>
+                    </a:p>
+                  </a:txBody>
+                  <a:tcPr anchor="ctr"/>
+                </a:tc>
+                <a:extLst>
+                  <a:ext uri="{0D108BD9-81ED-4DB2-BD59-A6C34878D82A}">
+                    <a16:rowId xmlns:a16="http://schemas.microsoft.com/office/drawing/2014/main" val="1958414477"/>
+                  </a:ext>
+                </a:extLst>
+              </a:tr>
+              <a:tr h="0">
+                <a:tc>
+                  <a:txBody>
+                    <a:bodyPr/>
+                    <a:lstStyle/>
+                    <a:p>
+                      <a:r>
+                        <a:rPr lang="ru-RU" sz="1600" dirty="0"/>
+                        <a:t>Восстановление после аварии </a:t>
+                      </a:r>
+                      <a:r>
+                        <a:rPr lang="en-US" sz="1600" dirty="0"/>
+                        <a:t>Redis</a:t>
+                      </a:r>
+                    </a:p>
+                  </a:txBody>
+                  <a:tcPr anchor="ctr"/>
+                </a:tc>
+                <a:tc>
+                  <a:txBody>
+                    <a:bodyPr/>
+                    <a:lstStyle/>
+                    <a:p>
+                      <a:pPr algn="ctr"/>
+                      <a:r>
+                        <a:rPr lang="ru-RU" sz="1600" dirty="0"/>
+                        <a:t>✅</a:t>
+                      </a:r>
+                    </a:p>
+                  </a:txBody>
+                  <a:tcPr anchor="ctr"/>
+                </a:tc>
+                <a:tc>
+                  <a:txBody>
+                    <a:bodyPr/>
+                    <a:lstStyle/>
+                    <a:p>
+                      <a:r>
+                        <a:rPr lang="ru-RU" sz="1600" dirty="0"/>
+                        <a:t>Данные восстановлены из </a:t>
+                      </a:r>
+                      <a:r>
+                        <a:rPr lang="en-US" sz="1600" dirty="0"/>
+                        <a:t>AOF-</a:t>
+                      </a:r>
+                      <a:r>
+                        <a:rPr lang="ru-RU" sz="1600" dirty="0"/>
+                        <a:t>журнала</a:t>
+                      </a:r>
+                    </a:p>
+                  </a:txBody>
+                  <a:tcPr anchor="ctr"/>
+                </a:tc>
+                <a:extLst>
+                  <a:ext uri="{0D108BD9-81ED-4DB2-BD59-A6C34878D82A}">
+                    <a16:rowId xmlns:a16="http://schemas.microsoft.com/office/drawing/2014/main" val="3344646434"/>
+                  </a:ext>
+                </a:extLst>
+              </a:tr>
+              <a:tr h="0">
+                <a:tc>
+                  <a:txBody>
+                    <a:bodyPr/>
+                    <a:lstStyle/>
+                    <a:p>
+                      <a:r>
+                        <a:rPr lang="ru-RU" sz="1600"/>
+                        <a:t>Обнаружение сбоя планировщиком </a:t>
+                      </a:r>
+                      <a:r>
+                        <a:rPr lang="en-US" sz="1600"/>
+                        <a:t>HealthChecker</a:t>
+                      </a:r>
+                    </a:p>
+                  </a:txBody>
+                  <a:tcPr anchor="ctr"/>
+                </a:tc>
+                <a:tc>
+                  <a:txBody>
+                    <a:bodyPr/>
+                    <a:lstStyle/>
+                    <a:p>
+                      <a:pPr algn="ctr"/>
+                      <a:r>
+                        <a:rPr lang="ru-RU" sz="1600" dirty="0"/>
+                        <a:t>✅</a:t>
+                      </a:r>
+                    </a:p>
+                  </a:txBody>
+                  <a:tcPr anchor="ctr"/>
+                </a:tc>
+                <a:tc>
+                  <a:txBody>
+                    <a:bodyPr/>
+                    <a:lstStyle/>
+                    <a:p>
+                      <a:r>
+                        <a:rPr lang="ru-RU" sz="1600" dirty="0"/>
+                        <a:t>Статус ERROR за ≤ 30 с</a:t>
+                      </a:r>
+                    </a:p>
+                  </a:txBody>
+                  <a:tcPr anchor="ctr"/>
+                </a:tc>
+                <a:extLst>
+                  <a:ext uri="{0D108BD9-81ED-4DB2-BD59-A6C34878D82A}">
+                    <a16:rowId xmlns:a16="http://schemas.microsoft.com/office/drawing/2014/main" val="2150429329"/>
+                  </a:ext>
+                </a:extLst>
+              </a:tr>
+              <a:tr h="0">
+                <a:tc>
+                  <a:txBody>
+                    <a:bodyPr/>
+                    <a:lstStyle/>
+                    <a:p>
+                      <a:r>
+                        <a:rPr lang="ru-RU" sz="1600"/>
+                        <a:t>Автовозврат из ERROR в RUNNING</a:t>
+                      </a:r>
+                    </a:p>
+                  </a:txBody>
+                  <a:tcPr anchor="ctr"/>
+                </a:tc>
+                <a:tc>
+                  <a:txBody>
+                    <a:bodyPr/>
+                    <a:lstStyle/>
+                    <a:p>
+                      <a:pPr algn="ctr"/>
+                      <a:r>
+                        <a:rPr lang="ru-RU" sz="1600" dirty="0"/>
+                        <a:t>✅</a:t>
+                      </a:r>
+                    </a:p>
+                  </a:txBody>
+                  <a:tcPr anchor="ctr"/>
+                </a:tc>
+                <a:tc>
+                  <a:txBody>
+                    <a:bodyPr/>
+                    <a:lstStyle/>
+                    <a:p>
+                      <a:r>
+                        <a:rPr lang="ru-RU" sz="1600" dirty="0"/>
+                        <a:t>Статус RUNNING за ≤ 30 с</a:t>
+                      </a:r>
+                    </a:p>
+                  </a:txBody>
+                  <a:tcPr anchor="ctr"/>
+                </a:tc>
+                <a:extLst>
+                  <a:ext uri="{0D108BD9-81ED-4DB2-BD59-A6C34878D82A}">
+                    <a16:rowId xmlns:a16="http://schemas.microsoft.com/office/drawing/2014/main" val="3477126365"/>
+                  </a:ext>
+                </a:extLst>
+              </a:tr>
+            </a:tbl>
+          </a:graphicData>
+        </a:graphic>
+      </p:graphicFrame>
     </p:spTree>
     <p:extLst>
       <p:ext uri="{BB962C8B-B14F-4D97-AF65-F5344CB8AC3E}">
-        <p14:creationId xmlns:p14="http://schemas.microsoft.com/office/powerpoint/2010/main" val="3165164598"/>
+        <p14:creationId xmlns:p14="http://schemas.microsoft.com/office/powerpoint/2010/main" val="656337308"/>
       </p:ext>
     </p:extLst>
   </p:cSld>
@@ -5166,8 +5905,8 @@
         </p:nvSpPr>
         <p:spPr>
           <a:xfrm>
-            <a:off x="11439362" y="6207612"/>
-            <a:ext cx="635192" cy="574701"/>
+            <a:off x="11580453" y="6171414"/>
+            <a:ext cx="409963" cy="610899"/>
           </a:xfrm>
         </p:spPr>
         <p:txBody>
@@ -5184,50 +5923,7 @@
       </p:sp>
       <p:sp>
         <p:nvSpPr>
-          <p:cNvPr id="11" name="TextBox 10">
-            <a:extLst>
-              <a:ext uri="{FF2B5EF4-FFF2-40B4-BE49-F238E27FC236}">
-                <a16:creationId xmlns:a16="http://schemas.microsoft.com/office/drawing/2014/main" id="{2169E9A5-0F30-46EE-BA6A-78421B32F98B}"/>
-              </a:ext>
-            </a:extLst>
-          </p:cNvPr>
-          <p:cNvSpPr txBox="1"/>
-          <p:nvPr/>
-        </p:nvSpPr>
-        <p:spPr>
-          <a:xfrm>
-            <a:off x="457200" y="244509"/>
-            <a:ext cx="5381538" cy="584775"/>
-          </a:xfrm>
-          <a:prstGeom prst="rect">
-            <a:avLst/>
-          </a:prstGeom>
-          <a:noFill/>
-        </p:spPr>
-        <p:txBody>
-          <a:bodyPr wrap="square">
-            <a:spAutoFit/>
-          </a:bodyPr>
-          <a:lstStyle/>
-          <a:p>
-            <a:r>
-              <a:rPr lang="ru-RU" sz="3200" dirty="0">
-                <a:solidFill>
-                  <a:prstClr val="black"/>
-                </a:solidFill>
-                <a:latin typeface="Gilroy Bold" panose="00000800000000000000" pitchFamily="2" charset="-52"/>
-                <a:ea typeface="+mj-ea"/>
-                <a:cs typeface="+mj-cs"/>
-              </a:rPr>
-              <a:t>Заключение</a:t>
-            </a:r>
-            <a:endParaRPr lang="ru-RU" dirty="0"/>
-          </a:p>
-        </p:txBody>
-      </p:sp>
-      <p:sp>
-        <p:nvSpPr>
-          <p:cNvPr id="8" name="TextBox 7">
+          <p:cNvPr id="7" name="TextBox 6">
             <a:extLst>
               <a:ext uri="{FF2B5EF4-FFF2-40B4-BE49-F238E27FC236}">
                 <a16:creationId xmlns:a16="http://schemas.microsoft.com/office/drawing/2014/main" id="{D7E8C6BD-D95E-4822-B09A-435E67225EB0}"/>
@@ -5239,8 +5935,8 @@
         </p:nvSpPr>
         <p:spPr>
           <a:xfrm>
-            <a:off x="228948" y="6225368"/>
-            <a:ext cx="10916724" cy="487121"/>
+            <a:off x="339755" y="6178253"/>
+            <a:ext cx="10798742" cy="692305"/>
           </a:xfrm>
           <a:prstGeom prst="rect">
             <a:avLst/>
@@ -5271,7 +5967,7 @@
               <a:defRPr/>
             </a:pPr>
             <a:r>
-              <a:rPr kumimoji="0" lang="ru-RU" sz="1100" b="0" i="0" u="none" strike="noStrike" kern="1200" cap="none" spc="0" normalizeH="0" baseline="0" noProof="0" dirty="0">
+              <a:rPr kumimoji="0" lang="ru-RU" sz="1100" i="0" u="none" strike="noStrike" kern="1200" cap="none" spc="0" normalizeH="0" baseline="0" noProof="0" dirty="0">
                 <a:ln>
                   <a:noFill/>
                 </a:ln>
@@ -5283,7 +5979,31 @@
                 <a:uFillTx/>
                 <a:latin typeface="Gilroy Medium" panose="00000600000000000000" charset="-52"/>
               </a:rPr>
-              <a:t>ИВАНОВ ИВАН ИВАНОВИЧ,  201-321,  04.06.2024</a:t>
+              <a:t>МЕДВЕДЕВ КЛИМ НИКОЛАЕВИЧ, 221-329</a:t>
+            </a:r>
+            <a:r>
+              <a:rPr lang="ru-RU" sz="1100" dirty="0">
+                <a:solidFill>
+                  <a:prstClr val="black"/>
+                </a:solidFill>
+                <a:latin typeface="Gilroy Medium" panose="00000600000000000000" charset="-52"/>
+              </a:rPr>
+              <a:t>,</a:t>
+            </a:r>
+            <a:r>
+              <a:rPr kumimoji="0" lang="ru-RU" sz="1100" i="0" u="none" strike="noStrike" kern="1200" cap="none" spc="0" normalizeH="0" noProof="0" dirty="0">
+                <a:ln>
+                  <a:noFill/>
+                </a:ln>
+                <a:solidFill>
+                  <a:prstClr val="black"/>
+                </a:solidFill>
+                <a:effectLst/>
+                <a:uLnTx/>
+                <a:uFillTx/>
+                <a:latin typeface="Gilroy Medium" panose="00000600000000000000" charset="-52"/>
+              </a:rPr>
+              <a:t> 04.06.2026</a:t>
             </a:r>
           </a:p>
           <a:p>
@@ -5305,7 +6025,7 @@
               <a:defRPr/>
             </a:pPr>
             <a:r>
-              <a:rPr kumimoji="0" lang="ru-RU" sz="1100" b="0" i="0" u="none" strike="noStrike" kern="1200" cap="none" spc="0" normalizeH="0" baseline="0" noProof="0" dirty="0">
+              <a:rPr kumimoji="0" lang="ru-RU" sz="1100" i="0" u="none" strike="noStrike" kern="1200" cap="none" spc="0" normalizeH="0" baseline="0" noProof="0" dirty="0">
                 <a:ln>
                   <a:noFill/>
                 </a:ln>
@@ -5317,8 +6037,27 @@
                 <a:uFillTx/>
                 <a:latin typeface="Gilroy Medium" panose="00000600000000000000" charset="-52"/>
               </a:rPr>
-              <a:t>РАЗРАБОТКА ВЕБ-ПРИЛОЖЕНИЯ ДЛЯ БРОНИРОВАНИЯ ТЕННИСНЫХ КОРТОВ В СПРОТКЛУБЕ СМЭШ</a:t>
-            </a:r>
+              <a:t>РАЗРАБОТКА СИСТЕМЫ ДЛЯ ПРОКСИРОВАНИЯ И МОНИТОРИНГА ИМИТАЦИОННЫХ СЕРВИСОВ В СРЕДЕ НАГРУЗОЧНОГО ТЕСТИРОВАНИЯ</a:t>
+            </a:r>
+          </a:p>
+          <a:p>
+            <a:pPr marL="0" marR="0" lvl="0" indent="0" algn="l" defTabSz="914400" rtl="0" eaLnBrk="1" fontAlgn="auto" latinLnBrk="0" hangingPunct="1">
+              <a:lnSpc>
+                <a:spcPts val="1600"/>
+              </a:lnSpc>
+              <a:spcBef>
+                <a:spcPts val="0"/>
+              </a:spcBef>
+              <a:spcAft>
+                <a:spcPts val="0"/>
+              </a:spcAft>
+              <a:buClrTx/>
+              <a:buSzTx/>
+              <a:buFontTx/>
+              <a:buNone/>
+              <a:tabLst/>
+              <a:defRPr/>
+            </a:pPr>
             <a:endParaRPr kumimoji="0" lang="ru-RU" sz="1100" i="0" u="none" strike="noStrike" kern="1200" cap="none" spc="0" normalizeH="0" baseline="0" noProof="0" dirty="0">
               <a:ln>
                 <a:noFill/>
@@ -5334,10 +6073,438 @@
           </a:p>
         </p:txBody>
       </p:sp>
+      <p:sp>
+        <p:nvSpPr>
+          <p:cNvPr id="11" name="TextBox 10">
+            <a:extLst>
+              <a:ext uri="{FF2B5EF4-FFF2-40B4-BE49-F238E27FC236}">
+                <a16:creationId xmlns:a16="http://schemas.microsoft.com/office/drawing/2014/main" id="{2169E9A5-0F30-46EE-BA6A-78421B32F98B}"/>
+              </a:ext>
+            </a:extLst>
+          </p:cNvPr>
+          <p:cNvSpPr txBox="1"/>
+          <p:nvPr/>
+        </p:nvSpPr>
+        <p:spPr>
+          <a:xfrm>
+            <a:off x="457200" y="537255"/>
+            <a:ext cx="6645617" cy="584775"/>
+          </a:xfrm>
+          <a:prstGeom prst="rect">
+            <a:avLst/>
+          </a:prstGeom>
+          <a:noFill/>
+        </p:spPr>
+        <p:txBody>
+          <a:bodyPr wrap="square">
+            <a:spAutoFit/>
+          </a:bodyPr>
+          <a:lstStyle/>
+          <a:p>
+            <a:r>
+              <a:rPr lang="ru-RU" sz="3200">
+                <a:latin typeface="Gilroy Bold" panose="00000800000000000000" pitchFamily="2" charset="-52"/>
+                <a:ea typeface="+mj-ea"/>
+                <a:cs typeface="+mj-cs"/>
+              </a:rPr>
+              <a:t>Нагрузочное тестирование</a:t>
+            </a:r>
+            <a:endParaRPr lang="ru-RU" sz="3200" dirty="0">
+              <a:latin typeface="Gilroy Bold" panose="00000800000000000000" pitchFamily="2" charset="-52"/>
+              <a:ea typeface="+mj-ea"/>
+              <a:cs typeface="+mj-cs"/>
+            </a:endParaRPr>
+          </a:p>
+        </p:txBody>
+      </p:sp>
+      <p:sp>
+        <p:nvSpPr>
+          <p:cNvPr id="2" name="TextBox 1">
+            <a:extLst>
+              <a:ext uri="{FF2B5EF4-FFF2-40B4-BE49-F238E27FC236}">
+                <a16:creationId xmlns:a16="http://schemas.microsoft.com/office/drawing/2014/main" id="{29A6AEEB-6479-6AF6-ED4B-A834C62D6DE6}"/>
+              </a:ext>
+            </a:extLst>
+          </p:cNvPr>
+          <p:cNvSpPr txBox="1"/>
+          <p:nvPr/>
+        </p:nvSpPr>
+        <p:spPr>
+          <a:xfrm>
+            <a:off x="954880" y="1593430"/>
+            <a:ext cx="10729120" cy="781240"/>
+          </a:xfrm>
+          <a:prstGeom prst="rect">
+            <a:avLst/>
+          </a:prstGeom>
+          <a:noFill/>
+        </p:spPr>
+        <p:txBody>
+          <a:bodyPr wrap="square" rtlCol="0">
+            <a:spAutoFit/>
+          </a:bodyPr>
+          <a:lstStyle/>
+          <a:p>
+            <a:pPr>
+              <a:lnSpc>
+                <a:spcPct val="150000"/>
+              </a:lnSpc>
+            </a:pPr>
+            <a:r>
+              <a:rPr lang="ru-RU" sz="1600" dirty="0"/>
+              <a:t>Результаты нагрузочного тестирования прокси-модуля</a:t>
+            </a:r>
+          </a:p>
+          <a:p>
+            <a:pPr>
+              <a:lnSpc>
+                <a:spcPct val="150000"/>
+              </a:lnSpc>
+            </a:pPr>
+            <a:r>
+              <a:rPr lang="ru-RU" sz="1600" dirty="0"/>
+              <a:t>Инструмент: k6. Наблюдение через </a:t>
+            </a:r>
+            <a:r>
+              <a:rPr lang="ru-RU" sz="1600" dirty="0" err="1"/>
+              <a:t>эндпоинт</a:t>
+            </a:r>
+            <a:r>
+              <a:rPr lang="ru-RU" sz="1600" dirty="0"/>
+              <a:t> /</a:t>
+            </a:r>
+            <a:r>
+              <a:rPr lang="ru-RU" sz="1600" dirty="0" err="1"/>
+              <a:t>metrics</a:t>
+            </a:r>
+            <a:r>
+              <a:rPr lang="ru-RU" sz="1600" dirty="0"/>
+              <a:t> (</a:t>
+            </a:r>
+            <a:r>
+              <a:rPr lang="ru-RU" sz="1600" dirty="0" err="1"/>
+              <a:t>Prometheus</a:t>
+            </a:r>
+            <a:r>
+              <a:rPr lang="ru-RU" sz="1600" dirty="0"/>
+              <a:t>).</a:t>
+            </a:r>
+          </a:p>
+        </p:txBody>
+      </p:sp>
+      <p:graphicFrame>
+        <p:nvGraphicFramePr>
+          <p:cNvPr id="4" name="Таблица 3">
+            <a:extLst>
+              <a:ext uri="{FF2B5EF4-FFF2-40B4-BE49-F238E27FC236}">
+                <a16:creationId xmlns:a16="http://schemas.microsoft.com/office/drawing/2014/main" id="{9E7AA6F9-7395-8004-5D71-C8FCE9E11A76}"/>
+              </a:ext>
+            </a:extLst>
+          </p:cNvPr>
+          <p:cNvGraphicFramePr>
+            <a:graphicFrameLocks noGrp="1"/>
+          </p:cNvGraphicFramePr>
+          <p:nvPr>
+            <p:extLst>
+              <p:ext uri="{D42A27DB-BD31-4B8C-83A1-F6EECF244321}">
+                <p14:modId xmlns:p14="http://schemas.microsoft.com/office/powerpoint/2010/main" val="4076514608"/>
+              </p:ext>
+            </p:extLst>
+          </p:nvPr>
+        </p:nvGraphicFramePr>
+        <p:xfrm>
+          <a:off x="954880" y="2707554"/>
+          <a:ext cx="10282239" cy="2651760"/>
+        </p:xfrm>
+        <a:graphic>
+          <a:graphicData uri="http://schemas.openxmlformats.org/drawingml/2006/table">
+            <a:tbl>
+              <a:tblPr>
+                <a:tableStyleId>{616DA210-FB5B-4158-B5E0-FEB733F419BA}</a:tableStyleId>
+              </a:tblPr>
+              <a:tblGrid>
+                <a:gridCol w="3427413">
+                  <a:extLst>
+                    <a:ext uri="{9D8B030D-6E8A-4147-A177-3AD203B41FA5}">
+                      <a16:colId xmlns:a16="http://schemas.microsoft.com/office/drawing/2014/main" val="4246277828"/>
+                    </a:ext>
+                  </a:extLst>
+                </a:gridCol>
+                <a:gridCol w="3427413">
+                  <a:extLst>
+                    <a:ext uri="{9D8B030D-6E8A-4147-A177-3AD203B41FA5}">
+                      <a16:colId xmlns:a16="http://schemas.microsoft.com/office/drawing/2014/main" val="3350268425"/>
+                    </a:ext>
+                  </a:extLst>
+                </a:gridCol>
+                <a:gridCol w="3427413">
+                  <a:extLst>
+                    <a:ext uri="{9D8B030D-6E8A-4147-A177-3AD203B41FA5}">
+                      <a16:colId xmlns:a16="http://schemas.microsoft.com/office/drawing/2014/main" val="3905350028"/>
+                    </a:ext>
+                  </a:extLst>
+                </a:gridCol>
+              </a:tblGrid>
+              <a:tr h="365760">
+                <a:tc>
+                  <a:txBody>
+                    <a:bodyPr/>
+                    <a:lstStyle/>
+                    <a:p>
+                      <a:r>
+                        <a:rPr lang="ru-RU" sz="1800"/>
+                        <a:t>Сценарий</a:t>
+                      </a:r>
+                    </a:p>
+                  </a:txBody>
+                  <a:tcPr anchor="ctr"/>
+                </a:tc>
+                <a:tc>
+                  <a:txBody>
+                    <a:bodyPr/>
+                    <a:lstStyle/>
+                    <a:p>
+                      <a:r>
+                        <a:rPr lang="ru-RU" sz="1800" dirty="0"/>
+                        <a:t>Показатель</a:t>
+                      </a:r>
+                    </a:p>
+                  </a:txBody>
+                  <a:tcPr anchor="ctr"/>
+                </a:tc>
+                <a:tc>
+                  <a:txBody>
+                    <a:bodyPr/>
+                    <a:lstStyle/>
+                    <a:p>
+                      <a:r>
+                        <a:rPr lang="ru-RU" sz="1800"/>
+                        <a:t>Результат</a:t>
+                      </a:r>
+                    </a:p>
+                  </a:txBody>
+                  <a:tcPr anchor="ctr"/>
+                </a:tc>
+                <a:extLst>
+                  <a:ext uri="{0D108BD9-81ED-4DB2-BD59-A6C34878D82A}">
+                    <a16:rowId xmlns:a16="http://schemas.microsoft.com/office/drawing/2014/main" val="2363529245"/>
+                  </a:ext>
+                </a:extLst>
+              </a:tr>
+              <a:tr h="365760">
+                <a:tc>
+                  <a:txBody>
+                    <a:bodyPr/>
+                    <a:lstStyle/>
+                    <a:p>
+                      <a:r>
+                        <a:rPr lang="ru-RU" sz="1800"/>
+                        <a:t>Базовая нагрузка (10 </a:t>
+                      </a:r>
+                      <a:r>
+                        <a:rPr lang="en-US" sz="1800"/>
+                        <a:t>RPS)</a:t>
+                      </a:r>
+                    </a:p>
+                  </a:txBody>
+                  <a:tcPr anchor="ctr"/>
+                </a:tc>
+                <a:tc>
+                  <a:txBody>
+                    <a:bodyPr/>
+                    <a:lstStyle/>
+                    <a:p>
+                      <a:r>
+                        <a:rPr lang="en-US" sz="1800"/>
+                        <a:t>proxy_total_ms</a:t>
+                      </a:r>
+                    </a:p>
+                  </a:txBody>
+                  <a:tcPr anchor="ctr"/>
+                </a:tc>
+                <a:tc>
+                  <a:txBody>
+                    <a:bodyPr/>
+                    <a:lstStyle/>
+                    <a:p>
+                      <a:r>
+                        <a:rPr lang="ru-RU" sz="1800"/>
+                        <a:t>3,90 мс</a:t>
+                      </a:r>
+                    </a:p>
+                  </a:txBody>
+                  <a:tcPr anchor="ctr"/>
+                </a:tc>
+                <a:extLst>
+                  <a:ext uri="{0D108BD9-81ED-4DB2-BD59-A6C34878D82A}">
+                    <a16:rowId xmlns:a16="http://schemas.microsoft.com/office/drawing/2014/main" val="2435834927"/>
+                  </a:ext>
+                </a:extLst>
+              </a:tr>
+              <a:tr h="640080">
+                <a:tc>
+                  <a:txBody>
+                    <a:bodyPr/>
+                    <a:lstStyle/>
+                    <a:p>
+                      <a:r>
+                        <a:rPr lang="ru-RU" sz="1800"/>
+                        <a:t>Нарастающая нагрузка (500 </a:t>
+                      </a:r>
+                      <a:r>
+                        <a:rPr lang="en-US" sz="1800"/>
+                        <a:t>RPS)</a:t>
+                      </a:r>
+                    </a:p>
+                  </a:txBody>
+                  <a:tcPr anchor="ctr"/>
+                </a:tc>
+                <a:tc>
+                  <a:txBody>
+                    <a:bodyPr/>
+                    <a:lstStyle/>
+                    <a:p>
+                      <a:r>
+                        <a:rPr lang="en-US" sz="1800" dirty="0" err="1"/>
+                        <a:t>proxy_total_ms</a:t>
+                      </a:r>
+                      <a:endParaRPr lang="en-US" sz="1800" dirty="0"/>
+                    </a:p>
+                  </a:txBody>
+                  <a:tcPr anchor="ctr"/>
+                </a:tc>
+                <a:tc>
+                  <a:txBody>
+                    <a:bodyPr/>
+                    <a:lstStyle/>
+                    <a:p>
+                      <a:r>
+                        <a:rPr lang="ru-RU" sz="1800"/>
+                        <a:t>3,01 мс — линейный рост</a:t>
+                      </a:r>
+                    </a:p>
+                  </a:txBody>
+                  <a:tcPr anchor="ctr"/>
+                </a:tc>
+                <a:extLst>
+                  <a:ext uri="{0D108BD9-81ED-4DB2-BD59-A6C34878D82A}">
+                    <a16:rowId xmlns:a16="http://schemas.microsoft.com/office/drawing/2014/main" val="587857546"/>
+                  </a:ext>
+                </a:extLst>
+              </a:tr>
+              <a:tr h="640080">
+                <a:tc>
+                  <a:txBody>
+                    <a:bodyPr/>
+                    <a:lstStyle/>
+                    <a:p>
+                      <a:r>
+                        <a:rPr lang="ru-RU" sz="1800"/>
+                        <a:t>Нарастающая нагрузка (1000 </a:t>
+                      </a:r>
+                      <a:r>
+                        <a:rPr lang="en-US" sz="1800"/>
+                        <a:t>RPS)</a:t>
+                      </a:r>
+                    </a:p>
+                  </a:txBody>
+                  <a:tcPr anchor="ctr"/>
+                </a:tc>
+                <a:tc>
+                  <a:txBody>
+                    <a:bodyPr/>
+                    <a:lstStyle/>
+                    <a:p>
+                      <a:r>
+                        <a:rPr lang="en-US" sz="1800"/>
+                        <a:t>proxy_total_ms</a:t>
+                      </a:r>
+                    </a:p>
+                  </a:txBody>
+                  <a:tcPr anchor="ctr"/>
+                </a:tc>
+                <a:tc>
+                  <a:txBody>
+                    <a:bodyPr/>
+                    <a:lstStyle/>
+                    <a:p>
+                      <a:r>
+                        <a:rPr lang="ru-RU" sz="1800"/>
+                        <a:t>10,52 мс — без отказов</a:t>
+                      </a:r>
+                    </a:p>
+                  </a:txBody>
+                  <a:tcPr anchor="ctr"/>
+                </a:tc>
+                <a:extLst>
+                  <a:ext uri="{0D108BD9-81ED-4DB2-BD59-A6C34878D82A}">
+                    <a16:rowId xmlns:a16="http://schemas.microsoft.com/office/drawing/2014/main" val="3253051413"/>
+                  </a:ext>
+                </a:extLst>
+              </a:tr>
+              <a:tr h="640080">
+                <a:tc>
+                  <a:txBody>
+                    <a:bodyPr/>
+                    <a:lstStyle/>
+                    <a:p>
+                      <a:r>
+                        <a:rPr lang="en-US" sz="1800"/>
+                        <a:t>Rate Limiting (</a:t>
+                      </a:r>
+                      <a:r>
+                        <a:rPr lang="ru-RU" sz="1800"/>
+                        <a:t>лимит 250, нагрузка 500 </a:t>
+                      </a:r>
+                      <a:r>
+                        <a:rPr lang="en-US" sz="1800"/>
+                        <a:t>RPS)</a:t>
+                      </a:r>
+                    </a:p>
+                  </a:txBody>
+                  <a:tcPr anchor="ctr"/>
+                </a:tc>
+                <a:tc>
+                  <a:txBody>
+                    <a:bodyPr/>
+                    <a:lstStyle/>
+                    <a:p>
+                      <a:r>
+                        <a:rPr lang="ru-RU" sz="1800"/>
+                        <a:t>Отклонение от лимита</a:t>
+                      </a:r>
+                    </a:p>
+                  </a:txBody>
+                  <a:tcPr anchor="ctr"/>
+                </a:tc>
+                <a:tc>
+                  <a:txBody>
+                    <a:bodyPr/>
+                    <a:lstStyle/>
+                    <a:p>
+                      <a:r>
+                        <a:rPr lang="ru-RU" sz="1800" b="1" dirty="0"/>
+                        <a:t>0,13%</a:t>
+                      </a:r>
+                      <a:endParaRPr lang="ru-RU" sz="1800" dirty="0"/>
+                    </a:p>
+                  </a:txBody>
+                  <a:tcPr anchor="ctr"/>
+                </a:tc>
+                <a:extLst>
+                  <a:ext uri="{0D108BD9-81ED-4DB2-BD59-A6C34878D82A}">
+                    <a16:rowId xmlns:a16="http://schemas.microsoft.com/office/drawing/2014/main" val="3519924372"/>
+                  </a:ext>
+                </a:extLst>
+              </a:tr>
+            </a:tbl>
+          </a:graphicData>
+        </a:graphic>
+      </p:graphicFrame>
     </p:spTree>
     <p:extLst>
       <p:ext uri="{BB962C8B-B14F-4D97-AF65-F5344CB8AC3E}">
-        <p14:creationId xmlns:p14="http://schemas.microsoft.com/office/powerpoint/2010/main" val="3655211847"/>
+        <p14:creationId xmlns:p14="http://schemas.microsoft.com/office/powerpoint/2010/main" val="3449820223"/>
       </p:ext>
     </p:extLst>
   </p:cSld>
@@ -5348,6 +6515,457 @@
 </file>
 
 <file path=ppt/slides/slide13.xml><?xml version="1.0" encoding="utf-8"?>
+<p:sld xmlns:a="http://schemas.openxmlformats.org/drawingml/2006/main" xmlns:r="http://schemas.openxmlformats.org/officeDocument/2006/relationships" xmlns:p="http://schemas.openxmlformats.org/presentationml/2006/main">
+  <p:cSld>
+    <p:spTree>
+      <p:nvGrpSpPr>
+        <p:cNvPr id="1" name=""/>
+        <p:cNvGrpSpPr/>
+        <p:nvPr/>
+      </p:nvGrpSpPr>
+      <p:grpSpPr>
+        <a:xfrm>
+          <a:off x="0" y="0"/>
+          <a:ext cx="0" cy="0"/>
+          <a:chOff x="0" y="0"/>
+          <a:chExt cx="0" cy="0"/>
+        </a:xfrm>
+      </p:grpSpPr>
+      <p:cxnSp>
+        <p:nvCxnSpPr>
+          <p:cNvPr id="6" name="Прямая соединительная линия 5"/>
+          <p:cNvCxnSpPr/>
+          <p:nvPr/>
+        </p:nvCxnSpPr>
+        <p:spPr>
+          <a:xfrm>
+            <a:off x="0" y="0"/>
+            <a:ext cx="914400" cy="0"/>
+          </a:xfrm>
+          <a:prstGeom prst="line">
+            <a:avLst/>
+          </a:prstGeom>
+          <a:ln w="0" cap="flat" cmpd="sng" algn="ctr">
+            <a:solidFill>
+              <a:srgbClr val="FBFFFF"/>
+            </a:solidFill>
+            <a:prstDash val="solid"/>
+            <a:miter lim="800000"/>
+            <a:headEnd type="none" w="med" len="med"/>
+            <a:tailEnd type="none" w="med" len="med"/>
+          </a:ln>
+          <a:effectLst/>
+          <a:extLst>
+            <a:ext uri="{AF507438-7753-43E0-B8FC-AC1667EBCBE1}">
+              <a14:hiddenEffects xmlns:a14="http://schemas.microsoft.com/office/drawing/2010/main">
+                <a:effectLst>
+                  <a:outerShdw blurRad="63500" rotWithShape="0">
+                    <a:scrgbClr r="0" g="0" b="0"/>
+                  </a:outerShdw>
+                </a:effectLst>
+              </a14:hiddenEffects>
+            </a:ext>
+          </a:extLst>
+        </p:spPr>
+        <p:style>
+          <a:lnRef idx="1">
+            <a:schemeClr val="accent1"/>
+          </a:lnRef>
+          <a:fillRef idx="0">
+            <a:schemeClr val="accent1"/>
+          </a:fillRef>
+          <a:effectRef idx="0">
+            <a:schemeClr val="accent1"/>
+          </a:effectRef>
+          <a:fontRef idx="minor">
+            <a:schemeClr val="tx1"/>
+          </a:fontRef>
+        </p:style>
+      </p:cxnSp>
+      <p:sp>
+        <p:nvSpPr>
+          <p:cNvPr id="3" name="Номер слайда 2"/>
+          <p:cNvSpPr>
+            <a:spLocks noGrp="1"/>
+          </p:cNvSpPr>
+          <p:nvPr>
+            <p:ph type="sldNum" sz="quarter" idx="12"/>
+          </p:nvPr>
+        </p:nvSpPr>
+        <p:spPr>
+          <a:xfrm>
+            <a:off x="11580453" y="6171414"/>
+            <a:ext cx="409963" cy="610899"/>
+          </a:xfrm>
+        </p:spPr>
+        <p:txBody>
+          <a:bodyPr/>
+          <a:lstStyle/>
+          <a:p>
+            <a:fld id="{A01BE76D-E181-4177-862E-40D97C82BFEB}" type="slidenum">
+              <a:rPr lang="ru-RU" sz="3200" smtClean="0"/>
+              <a:t>13</a:t>
+            </a:fld>
+            <a:endParaRPr lang="ru-RU" sz="3200" dirty="0"/>
+          </a:p>
+        </p:txBody>
+      </p:sp>
+      <p:sp>
+        <p:nvSpPr>
+          <p:cNvPr id="7" name="TextBox 6">
+            <a:extLst>
+              <a:ext uri="{FF2B5EF4-FFF2-40B4-BE49-F238E27FC236}">
+                <a16:creationId xmlns:a16="http://schemas.microsoft.com/office/drawing/2014/main" id="{D7E8C6BD-D95E-4822-B09A-435E67225EB0}"/>
+              </a:ext>
+            </a:extLst>
+          </p:cNvPr>
+          <p:cNvSpPr txBox="1"/>
+          <p:nvPr/>
+        </p:nvSpPr>
+        <p:spPr>
+          <a:xfrm>
+            <a:off x="339755" y="6178253"/>
+            <a:ext cx="10798742" cy="692305"/>
+          </a:xfrm>
+          <a:prstGeom prst="rect">
+            <a:avLst/>
+          </a:prstGeom>
+          <a:noFill/>
+        </p:spPr>
+        <p:txBody>
+          <a:bodyPr wrap="square">
+            <a:spAutoFit/>
+          </a:bodyPr>
+          <a:lstStyle/>
+          <a:p>
+            <a:pPr marL="0" marR="0" lvl="0" indent="0" algn="l" defTabSz="914400" rtl="0" eaLnBrk="1" fontAlgn="auto" latinLnBrk="0" hangingPunct="1">
+              <a:lnSpc>
+                <a:spcPts val="1600"/>
+              </a:lnSpc>
+              <a:spcBef>
+                <a:spcPts val="0"/>
+              </a:spcBef>
+              <a:spcAft>
+                <a:spcPts val="0"/>
+              </a:spcAft>
+              <a:buClrTx/>
+              <a:buSzTx/>
+              <a:buFontTx/>
+              <a:buNone/>
+              <a:tabLst/>
+              <a:defRPr/>
+            </a:pPr>
+            <a:r>
+              <a:rPr kumimoji="0" lang="ru-RU" sz="1100" i="0" u="none" strike="noStrike" kern="1200" cap="none" spc="0" normalizeH="0" baseline="0" noProof="0" dirty="0">
+                <a:ln>
+                  <a:noFill/>
+                </a:ln>
+                <a:solidFill>
+                  <a:prstClr val="black"/>
+                </a:solidFill>
+                <a:effectLst/>
+                <a:uLnTx/>
+                <a:uFillTx/>
+                <a:latin typeface="Gilroy Medium" panose="00000600000000000000" charset="-52"/>
+              </a:rPr>
+              <a:t>МЕДВЕДЕВ КЛИМ НИКОЛАЕВИЧ, 221-329</a:t>
+            </a:r>
+            <a:r>
+              <a:rPr lang="ru-RU" sz="1100" dirty="0">
+                <a:solidFill>
+                  <a:prstClr val="black"/>
+                </a:solidFill>
+                <a:latin typeface="Gilroy Medium" panose="00000600000000000000" charset="-52"/>
+              </a:rPr>
+              <a:t>,</a:t>
+            </a:r>
+            <a:r>
+              <a:rPr kumimoji="0" lang="ru-RU" sz="1100" i="0" u="none" strike="noStrike" kern="1200" cap="none" spc="0" normalizeH="0" noProof="0" dirty="0">
+                <a:ln>
+                  <a:noFill/>
+                </a:ln>
+                <a:solidFill>
+                  <a:prstClr val="black"/>
+                </a:solidFill>
+                <a:effectLst/>
+                <a:uLnTx/>
+                <a:uFillTx/>
+                <a:latin typeface="Gilroy Medium" panose="00000600000000000000" charset="-52"/>
+              </a:rPr>
+              <a:t> 04.06.2026</a:t>
+            </a:r>
+          </a:p>
+          <a:p>
+            <a:pPr marL="0" marR="0" lvl="0" indent="0" algn="l" defTabSz="914400" rtl="0" eaLnBrk="1" fontAlgn="auto" latinLnBrk="0" hangingPunct="1">
+              <a:lnSpc>
+                <a:spcPts val="1600"/>
+              </a:lnSpc>
+              <a:spcBef>
+                <a:spcPts val="0"/>
+              </a:spcBef>
+              <a:spcAft>
+                <a:spcPts val="0"/>
+              </a:spcAft>
+              <a:buClrTx/>
+              <a:buSzTx/>
+              <a:buFontTx/>
+              <a:buNone/>
+              <a:tabLst/>
+              <a:defRPr/>
+            </a:pPr>
+            <a:r>
+              <a:rPr kumimoji="0" lang="ru-RU" sz="1100" i="0" u="none" strike="noStrike" kern="1200" cap="none" spc="0" normalizeH="0" baseline="0" noProof="0" dirty="0">
+                <a:ln>
+                  <a:noFill/>
+                </a:ln>
+                <a:solidFill>
+                  <a:prstClr val="black"/>
+                </a:solidFill>
+                <a:effectLst/>
+                <a:uLnTx/>
+                <a:uFillTx/>
+                <a:latin typeface="Gilroy Medium" panose="00000600000000000000" charset="-52"/>
+              </a:rPr>
+              <a:t>РАЗРАБОТКА СИСТЕМЫ ДЛЯ ПРОКСИРОВАНИЯ И МОНИТОРИНГА ИМИТАЦИОННЫХ СЕРВИСОВ В СРЕДЕ НАГРУЗОЧНОГО ТЕСТИРОВАНИЯ</a:t>
+            </a:r>
+          </a:p>
+          <a:p>
+            <a:pPr marL="0" marR="0" lvl="0" indent="0" algn="l" defTabSz="914400" rtl="0" eaLnBrk="1" fontAlgn="auto" latinLnBrk="0" hangingPunct="1">
+              <a:lnSpc>
+                <a:spcPts val="1600"/>
+              </a:lnSpc>
+              <a:spcBef>
+                <a:spcPts val="0"/>
+              </a:spcBef>
+              <a:spcAft>
+                <a:spcPts val="0"/>
+              </a:spcAft>
+              <a:buClrTx/>
+              <a:buSzTx/>
+              <a:buFontTx/>
+              <a:buNone/>
+              <a:tabLst/>
+              <a:defRPr/>
+            </a:pPr>
+            <a:endParaRPr kumimoji="0" lang="ru-RU" sz="1100" i="0" u="none" strike="noStrike" kern="1200" cap="none" spc="0" normalizeH="0" baseline="0" noProof="0" dirty="0">
+              <a:ln>
+                <a:noFill/>
+              </a:ln>
+              <a:solidFill>
+                <a:prstClr val="black"/>
+              </a:solidFill>
+              <a:effectLst/>
+              <a:uLnTx/>
+              <a:uFillTx/>
+              <a:latin typeface="Gilroy Medium" panose="00000600000000000000" charset="-52"/>
+            </a:endParaRPr>
+          </a:p>
+        </p:txBody>
+      </p:sp>
+      <p:sp>
+        <p:nvSpPr>
+          <p:cNvPr id="11" name="TextBox 10">
+            <a:extLst>
+              <a:ext uri="{FF2B5EF4-FFF2-40B4-BE49-F238E27FC236}">
+                <a16:creationId xmlns:a16="http://schemas.microsoft.com/office/drawing/2014/main" id="{2169E9A5-0F30-46EE-BA6A-78421B32F98B}"/>
+              </a:ext>
+            </a:extLst>
+          </p:cNvPr>
+          <p:cNvSpPr txBox="1"/>
+          <p:nvPr/>
+        </p:nvSpPr>
+        <p:spPr>
+          <a:xfrm>
+            <a:off x="457200" y="537255"/>
+            <a:ext cx="6645617" cy="584775"/>
+          </a:xfrm>
+          <a:prstGeom prst="rect">
+            <a:avLst/>
+          </a:prstGeom>
+          <a:noFill/>
+        </p:spPr>
+        <p:txBody>
+          <a:bodyPr wrap="square">
+            <a:spAutoFit/>
+          </a:bodyPr>
+          <a:lstStyle/>
+          <a:p>
+            <a:r>
+              <a:rPr lang="ru-RU" sz="3200" dirty="0">
+                <a:latin typeface="Gilroy Bold" panose="00000800000000000000" pitchFamily="2" charset="-52"/>
+                <a:ea typeface="+mj-ea"/>
+                <a:cs typeface="+mj-cs"/>
+              </a:rPr>
+              <a:t>Результаты работы</a:t>
+            </a:r>
+          </a:p>
+        </p:txBody>
+      </p:sp>
+      <p:sp>
+        <p:nvSpPr>
+          <p:cNvPr id="2" name="TextBox 1">
+            <a:extLst>
+              <a:ext uri="{FF2B5EF4-FFF2-40B4-BE49-F238E27FC236}">
+                <a16:creationId xmlns:a16="http://schemas.microsoft.com/office/drawing/2014/main" id="{29A6AEEB-6479-6AF6-ED4B-A834C62D6DE6}"/>
+              </a:ext>
+            </a:extLst>
+          </p:cNvPr>
+          <p:cNvSpPr txBox="1"/>
+          <p:nvPr/>
+        </p:nvSpPr>
+        <p:spPr>
+          <a:xfrm>
+            <a:off x="339755" y="1659285"/>
+            <a:ext cx="11344245" cy="3735895"/>
+          </a:xfrm>
+          <a:prstGeom prst="rect">
+            <a:avLst/>
+          </a:prstGeom>
+          <a:noFill/>
+        </p:spPr>
+        <p:txBody>
+          <a:bodyPr wrap="square" rtlCol="0">
+            <a:spAutoFit/>
+          </a:bodyPr>
+          <a:lstStyle/>
+          <a:p>
+            <a:pPr>
+              <a:lnSpc>
+                <a:spcPct val="150000"/>
+              </a:lnSpc>
+            </a:pPr>
+            <a:r>
+              <a:rPr lang="ru-RU" sz="1600" dirty="0"/>
+              <a:t>Все 6 задач выполнены в полном объёме. </a:t>
+            </a:r>
+          </a:p>
+          <a:p>
+            <a:pPr>
+              <a:lnSpc>
+                <a:spcPct val="150000"/>
+              </a:lnSpc>
+            </a:pPr>
+            <a:r>
+              <a:rPr lang="ru-RU" sz="1600" dirty="0"/>
+              <a:t>Разработан программный комплекс, не имеющий прямых аналогов среди существующих решений.</a:t>
+            </a:r>
+          </a:p>
+          <a:p>
+            <a:pPr>
+              <a:lnSpc>
+                <a:spcPct val="150000"/>
+              </a:lnSpc>
+            </a:pPr>
+            <a:r>
+              <a:rPr lang="ru-RU" sz="1600" dirty="0"/>
+              <a:t>Ключевые характеристики:</a:t>
+            </a:r>
+          </a:p>
+          <a:p>
+            <a:pPr marL="285750" indent="-285750">
+              <a:lnSpc>
+                <a:spcPct val="150000"/>
+              </a:lnSpc>
+              <a:buFont typeface="Arial" panose="020B0604020202020204" pitchFamily="34" charset="0"/>
+              <a:buChar char="•"/>
+            </a:pPr>
+            <a:r>
+              <a:rPr lang="ru-RU" sz="1600" dirty="0"/>
+              <a:t>Задержка прокси: ≤ 3,01 мс при нагрузке до 500 RPS</a:t>
+            </a:r>
+          </a:p>
+          <a:p>
+            <a:pPr marL="285750" indent="-285750">
+              <a:lnSpc>
+                <a:spcPct val="150000"/>
+              </a:lnSpc>
+              <a:buFont typeface="Arial" panose="020B0604020202020204" pitchFamily="34" charset="0"/>
+              <a:buChar char="•"/>
+            </a:pPr>
+            <a:r>
+              <a:rPr lang="ru-RU" sz="1600" dirty="0"/>
+              <a:t>Точность Rate </a:t>
+            </a:r>
+            <a:r>
+              <a:rPr lang="ru-RU" sz="1600" dirty="0" err="1"/>
+              <a:t>Limiting</a:t>
+            </a:r>
+            <a:r>
+              <a:rPr lang="ru-RU" sz="1600" dirty="0"/>
+              <a:t>: отклонение 0,13% от теоретического лимита</a:t>
+            </a:r>
+          </a:p>
+          <a:p>
+            <a:pPr marL="285750" indent="-285750">
+              <a:lnSpc>
+                <a:spcPct val="150000"/>
+              </a:lnSpc>
+              <a:buFont typeface="Arial" panose="020B0604020202020204" pitchFamily="34" charset="0"/>
+              <a:buChar char="•"/>
+            </a:pPr>
+            <a:r>
+              <a:rPr lang="ru-RU" sz="1600" dirty="0"/>
+              <a:t>Время обнаружения сбоя: ≤ 30 с</a:t>
+            </a:r>
+          </a:p>
+          <a:p>
+            <a:pPr marL="285750" indent="-285750">
+              <a:lnSpc>
+                <a:spcPct val="150000"/>
+              </a:lnSpc>
+              <a:buFont typeface="Arial" panose="020B0604020202020204" pitchFamily="34" charset="0"/>
+              <a:buChar char="•"/>
+            </a:pPr>
+            <a:r>
+              <a:rPr lang="ru-RU" sz="1600" dirty="0"/>
+              <a:t>Научная новизна: </a:t>
+            </a:r>
+            <a:r>
+              <a:rPr lang="ru-RU" sz="1600" dirty="0" err="1"/>
+              <a:t>агентно</a:t>
+            </a:r>
+            <a:r>
+              <a:rPr lang="ru-RU" sz="1600" dirty="0"/>
+              <a:t>-независимое управление распределённой средой заглушек с индивидуальным Rate </a:t>
+            </a:r>
+            <a:r>
+              <a:rPr lang="ru-RU" sz="1600" dirty="0" err="1"/>
+              <a:t>Limiting</a:t>
+            </a:r>
+            <a:r>
+              <a:rPr lang="ru-RU" sz="1600" dirty="0"/>
+              <a:t> для каждого сервиса без перезапуска</a:t>
+            </a:r>
+          </a:p>
+          <a:p>
+            <a:pPr marL="285750" indent="-285750">
+              <a:lnSpc>
+                <a:spcPct val="150000"/>
+              </a:lnSpc>
+              <a:buFont typeface="Arial" panose="020B0604020202020204" pitchFamily="34" charset="0"/>
+              <a:buChar char="•"/>
+            </a:pPr>
+            <a:r>
+              <a:rPr lang="ru-RU" sz="1600" dirty="0"/>
+              <a:t>Направления развития: динамическая маршрутизация по содержимому запроса, ролевая модель доступа, поддержка не-JVM артефактов</a:t>
+            </a:r>
+          </a:p>
+        </p:txBody>
+      </p:sp>
+    </p:spTree>
+    <p:extLst>
+      <p:ext uri="{BB962C8B-B14F-4D97-AF65-F5344CB8AC3E}">
+        <p14:creationId xmlns:p14="http://schemas.microsoft.com/office/powerpoint/2010/main" val="1950367465"/>
+      </p:ext>
+    </p:extLst>
+  </p:cSld>
+  <p:clrMapOvr>
+    <a:masterClrMapping/>
+  </p:clrMapOvr>
+</p:sld>
+</file>
+
+<file path=ppt/slides/slide14.xml><?xml version="1.0" encoding="utf-8"?>
 <p:sld xmlns:a="http://schemas.openxmlformats.org/drawingml/2006/main" xmlns:r="http://schemas.openxmlformats.org/officeDocument/2006/relationships" xmlns:p="http://schemas.openxmlformats.org/presentationml/2006/main">
   <p:cSld>
     <p:spTree>
@@ -5417,44 +7035,10 @@
       </p:cxnSp>
       <p:sp>
         <p:nvSpPr>
-          <p:cNvPr id="2" name="Заголовок 1"/>
-          <p:cNvSpPr>
-            <a:spLocks noGrp="1"/>
-          </p:cNvSpPr>
-          <p:nvPr>
-            <p:ph type="ctrTitle"/>
-          </p:nvPr>
-        </p:nvSpPr>
-        <p:spPr>
-          <a:xfrm>
-            <a:off x="5355688" y="705942"/>
-            <a:ext cx="12502191" cy="428760"/>
-          </a:xfrm>
-        </p:spPr>
-        <p:txBody>
-          <a:bodyPr>
-            <a:noAutofit/>
-          </a:bodyPr>
-          <a:lstStyle/>
-          <a:p>
-            <a:r>
-              <a:rPr lang="ru-RU" sz="2800" dirty="0"/>
-              <a:t>С п а с и б о    з а   в н и м а н </a:t>
-            </a:r>
-            <a:r>
-              <a:rPr lang="ru-RU" sz="2800"/>
-              <a:t>и е ! </a:t>
-            </a:r>
-            <a:endParaRPr lang="ru-RU" sz="2800" dirty="0"/>
-          </a:p>
-        </p:txBody>
-      </p:sp>
-      <p:sp>
-        <p:nvSpPr>
           <p:cNvPr id="6" name="TextBox 5">
             <a:extLst>
               <a:ext uri="{FF2B5EF4-FFF2-40B4-BE49-F238E27FC236}">
-                <a16:creationId xmlns:a16="http://schemas.microsoft.com/office/drawing/2014/main" id="{F6E462F7-B2A7-4E4D-8555-1647177CEEFC}"/>
+                <a16:creationId xmlns:a16="http://schemas.microsoft.com/office/drawing/2014/main" id="{48D64222-1292-4A23-A829-4D7C56BB71FE}"/>
               </a:ext>
             </a:extLst>
           </p:cNvPr>
@@ -5463,8 +7047,8 @@
         </p:nvSpPr>
         <p:spPr>
           <a:xfrm>
-            <a:off x="7087263" y="4348563"/>
-            <a:ext cx="4389538" cy="1374735"/>
+            <a:off x="4537880" y="723037"/>
+            <a:ext cx="7654119" cy="523220"/>
           </a:xfrm>
           <a:prstGeom prst="rect">
             <a:avLst/>
@@ -5477,25 +7061,9 @@
           </a:bodyPr>
           <a:lstStyle/>
           <a:p>
-            <a:pPr marL="0" marR="0" lvl="0" indent="0" algn="r" defTabSz="914400" rtl="0" eaLnBrk="1" fontAlgn="auto" latinLnBrk="0" hangingPunct="1">
-              <a:lnSpc>
-                <a:spcPts val="2000"/>
-              </a:lnSpc>
-              <a:spcBef>
-                <a:spcPts val="0"/>
-              </a:spcBef>
-              <a:spcAft>
-                <a:spcPts val="0"/>
-              </a:spcAft>
-              <a:buClrTx/>
-              <a:buSzTx/>
-              <a:buFontTx/>
-              <a:buNone/>
-              <a:tabLst/>
-              <a:defRPr/>
-            </a:pPr>
-            <a:r>
-              <a:rPr kumimoji="0" lang="ru-RU" sz="1800" b="0" i="0" u="none" strike="noStrike" kern="1200" cap="none" spc="0" normalizeH="0" baseline="0" noProof="0" dirty="0">
+            <a:pPr algn="ctr"/>
+            <a:r>
+              <a:rPr kumimoji="0" lang="ru-RU" sz="2800" b="0" i="0" u="none" strike="noStrike" kern="1200" cap="none" spc="0" normalizeH="0" baseline="0" noProof="0" dirty="0">
                 <a:ln>
                   <a:noFill/>
                 </a:ln>
@@ -5506,154 +7074,23 @@
                 <a:uLnTx/>
                 <a:uFillTx/>
                 <a:latin typeface="Gilroy Medium" panose="00000600000000000000" charset="-52"/>
-              </a:rPr>
-              <a:t>Студент: </a:t>
-            </a:r>
-          </a:p>
-          <a:p>
-            <a:pPr marL="0" marR="0" lvl="0" indent="0" algn="r" defTabSz="914400" rtl="0" eaLnBrk="1" fontAlgn="auto" latinLnBrk="0" hangingPunct="1">
-              <a:lnSpc>
-                <a:spcPts val="2000"/>
-              </a:lnSpc>
-              <a:spcBef>
-                <a:spcPts val="0"/>
-              </a:spcBef>
-              <a:spcAft>
-                <a:spcPts val="0"/>
-              </a:spcAft>
-              <a:buClrTx/>
-              <a:buSzTx/>
-              <a:buFontTx/>
-              <a:buNone/>
-              <a:tabLst/>
-              <a:defRPr/>
-            </a:pPr>
-            <a:r>
-              <a:rPr kumimoji="0" lang="ru-RU" sz="1800" b="0" i="0" u="none" strike="noStrike" kern="1200" cap="none" spc="0" normalizeH="0" baseline="0" noProof="0" dirty="0">
-                <a:ln>
-                  <a:noFill/>
-                </a:ln>
-                <a:solidFill>
-                  <a:prstClr val="black"/>
-                </a:solidFill>
-                <a:effectLst/>
-                <a:uLnTx/>
-                <a:uFillTx/>
-                <a:latin typeface="Gilroy Medium" panose="00000600000000000000" charset="-52"/>
-              </a:rPr>
-              <a:t>Иванов Иван Иванович, группа 111-111 </a:t>
-            </a:r>
-          </a:p>
-          <a:p>
-            <a:pPr marL="0" marR="0" lvl="0" indent="0" algn="r" defTabSz="914400" rtl="0" eaLnBrk="1" fontAlgn="auto" latinLnBrk="0" hangingPunct="1">
-              <a:lnSpc>
-                <a:spcPts val="2000"/>
-              </a:lnSpc>
-              <a:spcBef>
-                <a:spcPts val="0"/>
-              </a:spcBef>
-              <a:spcAft>
-                <a:spcPts val="0"/>
-              </a:spcAft>
-              <a:buClrTx/>
-              <a:buSzTx/>
-              <a:buFontTx/>
-              <a:buNone/>
-              <a:tabLst/>
-              <a:defRPr/>
-            </a:pPr>
-            <a:endParaRPr kumimoji="0" lang="ru-RU" sz="1800" b="0" i="0" u="none" strike="noStrike" kern="1200" cap="none" spc="0" normalizeH="0" baseline="0" noProof="0" dirty="0">
-              <a:ln>
-                <a:noFill/>
-              </a:ln>
-              <a:solidFill>
-                <a:prstClr val="black"/>
-              </a:solidFill>
-              <a:effectLst/>
-              <a:uLnTx/>
-              <a:uFillTx/>
+                <a:ea typeface="+mj-ea"/>
+                <a:cs typeface="+mj-cs"/>
+              </a:rPr>
+              <a:t>Спасибо за внимание!</a:t>
+            </a:r>
+            <a:endParaRPr lang="ru-RU" sz="2800" dirty="0">
               <a:latin typeface="Gilroy Medium" panose="00000600000000000000" charset="-52"/>
             </a:endParaRPr>
           </a:p>
-          <a:p>
-            <a:pPr marL="0" marR="0" lvl="0" indent="0" algn="r" defTabSz="914400" rtl="0" eaLnBrk="1" fontAlgn="auto" latinLnBrk="0" hangingPunct="1">
-              <a:lnSpc>
-                <a:spcPts val="2000"/>
-              </a:lnSpc>
-              <a:spcBef>
-                <a:spcPts val="0"/>
-              </a:spcBef>
-              <a:spcAft>
-                <a:spcPts val="0"/>
-              </a:spcAft>
-              <a:buClrTx/>
-              <a:buSzTx/>
-              <a:buFontTx/>
-              <a:buNone/>
-              <a:tabLst/>
-              <a:defRPr/>
-            </a:pPr>
-            <a:r>
-              <a:rPr kumimoji="0" lang="ru-RU" sz="1800" b="0" i="0" u="none" strike="noStrike" kern="1200" cap="none" spc="0" normalizeH="0" baseline="0" noProof="0" dirty="0">
-                <a:ln>
-                  <a:noFill/>
-                </a:ln>
-                <a:solidFill>
-                  <a:prstClr val="black"/>
-                </a:solidFill>
-                <a:effectLst/>
-                <a:uLnTx/>
-                <a:uFillTx/>
-                <a:latin typeface="Gilroy Medium" panose="00000600000000000000" charset="-52"/>
-              </a:rPr>
-              <a:t>Научный руководитель: </a:t>
-            </a:r>
-          </a:p>
-          <a:p>
-            <a:pPr marL="0" marR="0" lvl="0" indent="0" algn="r" defTabSz="914400" rtl="0" eaLnBrk="1" fontAlgn="auto" latinLnBrk="0" hangingPunct="1">
-              <a:lnSpc>
-                <a:spcPts val="2000"/>
-              </a:lnSpc>
-              <a:spcBef>
-                <a:spcPts val="0"/>
-              </a:spcBef>
-              <a:spcAft>
-                <a:spcPts val="0"/>
-              </a:spcAft>
-              <a:buClrTx/>
-              <a:buSzTx/>
-              <a:buFontTx/>
-              <a:buNone/>
-              <a:tabLst/>
-              <a:defRPr/>
-            </a:pPr>
-            <a:r>
-              <a:rPr kumimoji="0" lang="ru-RU" sz="1800" b="0" i="0" u="none" strike="noStrike" kern="1200" cap="none" spc="0" normalizeH="0" baseline="0" noProof="0" dirty="0">
-                <a:ln>
-                  <a:noFill/>
-                </a:ln>
-                <a:solidFill>
-                  <a:prstClr val="black"/>
-                </a:solidFill>
-                <a:effectLst/>
-                <a:uLnTx/>
-                <a:uFillTx/>
-                <a:latin typeface="Gilroy Medium" panose="00000600000000000000" charset="-52"/>
-              </a:rPr>
-              <a:t>Петров Петр Петрович, к.т.н.</a:t>
-            </a:r>
-            <a:endParaRPr lang="ru-RU" dirty="0">
-              <a:latin typeface="Gilroy Medium" panose="00000600000000000000" charset="-52"/>
-            </a:endParaRPr>
-          </a:p>
-        </p:txBody>
-      </p:sp>
-      <p:sp>
-        <p:nvSpPr>
-          <p:cNvPr id="7" name="TextBox 6">
+        </p:txBody>
+      </p:sp>
+      <p:sp>
+        <p:nvSpPr>
+          <p:cNvPr id="8" name="TextBox 7">
             <a:extLst>
               <a:ext uri="{FF2B5EF4-FFF2-40B4-BE49-F238E27FC236}">
-                <a16:creationId xmlns:a16="http://schemas.microsoft.com/office/drawing/2014/main" id="{3EC76724-8B7E-49E1-A5D8-0A86497396F2}"/>
+                <a16:creationId xmlns:a16="http://schemas.microsoft.com/office/drawing/2014/main" id="{69AAA36A-0422-46F0-BA3A-4B2EF754C329}"/>
               </a:ext>
             </a:extLst>
           </p:cNvPr>
@@ -5662,57 +7099,8 @@
         </p:nvSpPr>
         <p:spPr>
           <a:xfrm>
-            <a:off x="4721568" y="6454765"/>
-            <a:ext cx="2305762" cy="338554"/>
-          </a:xfrm>
-          <a:prstGeom prst="rect">
-            <a:avLst/>
-          </a:prstGeom>
-          <a:noFill/>
-        </p:spPr>
-        <p:txBody>
-          <a:bodyPr wrap="square">
-            <a:spAutoFit/>
-          </a:bodyPr>
-          <a:lstStyle/>
-          <a:p>
-            <a:r>
-              <a:rPr kumimoji="0" lang="ru-RU" sz="1600" b="0" i="0" u="none" strike="noStrike" kern="1200" cap="none" spc="0" normalizeH="0" baseline="0" noProof="0" dirty="0">
-                <a:ln>
-                  <a:noFill/>
-                </a:ln>
-                <a:solidFill>
-                  <a:prstClr val="black"/>
-                </a:solidFill>
-                <a:effectLst/>
-                <a:uLnTx/>
-                <a:uFillTx/>
-                <a:latin typeface="Gilroy Medium" panose="00000600000000000000" charset="-52"/>
-                <a:ea typeface="+mn-ea"/>
-                <a:cs typeface="+mn-cs"/>
-              </a:rPr>
-              <a:t>Москва, 4 июня 2024</a:t>
-            </a:r>
-            <a:endParaRPr lang="ru-RU" dirty="0"/>
-          </a:p>
-        </p:txBody>
-      </p:sp>
-      <p:sp>
-        <p:nvSpPr>
-          <p:cNvPr id="10" name="TextBox 9">
-            <a:extLst>
-              <a:ext uri="{FF2B5EF4-FFF2-40B4-BE49-F238E27FC236}">
-                <a16:creationId xmlns:a16="http://schemas.microsoft.com/office/drawing/2014/main" id="{58C1E841-C2B3-4680-B71A-C0E060431885}"/>
-              </a:ext>
-            </a:extLst>
-          </p:cNvPr>
-          <p:cNvSpPr txBox="1"/>
-          <p:nvPr/>
-        </p:nvSpPr>
-        <p:spPr>
-          <a:xfrm>
-            <a:off x="1434420" y="2951946"/>
-            <a:ext cx="9654877" cy="954107"/>
+            <a:off x="76899" y="2951946"/>
+            <a:ext cx="11887200" cy="1384995"/>
           </a:xfrm>
           <a:prstGeom prst="rect">
             <a:avLst/>
@@ -5757,7 +7145,7 @@
                 <a:ea typeface="+mn-ea"/>
                 <a:cs typeface="+mn-cs"/>
               </a:rPr>
-              <a:t>РАЗРАБОТКА  ВЕБ-ПРИЛОЖЕНИЯ  ДЛЯ БРОНИРОВАНИЯ  </a:t>
+              <a:t>РАЗРАБОТКА СИСТЕМЫ ДЛЯ ПРОКСИРОВАНИЯ И</a:t>
             </a:r>
           </a:p>
           <a:p>
@@ -5793,7 +7181,43 @@
                 <a:ea typeface="+mn-ea"/>
                 <a:cs typeface="+mn-cs"/>
               </a:rPr>
-              <a:t>ТЕННИСНЫХ  КОРТОВ  В СПРОТКЛУБЕ  СМЭШ </a:t>
+              <a:t>МОНИТОРИНГА ИМИТАЦИОННЫХ СЕРВИСОВ В СРЕДЕ</a:t>
+            </a:r>
+          </a:p>
+          <a:p>
+            <a:pPr marL="0" marR="0" lvl="0" indent="0" algn="ctr" defTabSz="914400" rtl="0" eaLnBrk="1" fontAlgn="auto" latinLnBrk="0" hangingPunct="1">
+              <a:lnSpc>
+                <a:spcPct val="100000"/>
+              </a:lnSpc>
+              <a:spcBef>
+                <a:spcPts val="0"/>
+              </a:spcBef>
+              <a:spcAft>
+                <a:spcPts val="0"/>
+              </a:spcAft>
+              <a:buClrTx/>
+              <a:buSzTx/>
+              <a:buFontTx/>
+              <a:buNone/>
+              <a:tabLst/>
+              <a:defRPr/>
+            </a:pPr>
+            <a:r>
+              <a:rPr kumimoji="0" lang="ru-RU" sz="2800" b="1" i="0" u="none" strike="noStrike" kern="1200" cap="none" spc="0" normalizeH="0" baseline="0" noProof="0" dirty="0">
+                <a:ln>
+                  <a:noFill/>
+                </a:ln>
+                <a:solidFill>
+                  <a:prstClr val="black"/>
+                </a:solidFill>
+                <a:effectLst/>
+                <a:uLnTx/>
+                <a:uFillTx/>
+                <a:latin typeface="Gilroy Bold" panose="00000800000000000000" charset="-52"/>
+                <a:ea typeface="+mn-ea"/>
+                <a:cs typeface="+mn-cs"/>
+              </a:rPr>
+              <a:t>НАГРУЗОЧНОГО ТЕСТИРОВАНИЯ</a:t>
             </a:r>
             <a:endParaRPr kumimoji="0" lang="ru-RU" sz="2800" b="0" i="0" u="none" strike="noStrike" kern="1200" cap="none" spc="0" normalizeH="0" baseline="0" noProof="0" dirty="0">
               <a:ln>
@@ -5812,10 +7236,222 @@
           </a:p>
         </p:txBody>
       </p:sp>
+      <p:sp>
+        <p:nvSpPr>
+          <p:cNvPr id="10" name="TextBox 9">
+            <a:extLst>
+              <a:ext uri="{FF2B5EF4-FFF2-40B4-BE49-F238E27FC236}">
+                <a16:creationId xmlns:a16="http://schemas.microsoft.com/office/drawing/2014/main" id="{4218C808-D44B-4FFB-A9B8-91FA34E1C60F}"/>
+              </a:ext>
+            </a:extLst>
+          </p:cNvPr>
+          <p:cNvSpPr txBox="1"/>
+          <p:nvPr/>
+        </p:nvSpPr>
+        <p:spPr>
+          <a:xfrm>
+            <a:off x="7373922" y="4597930"/>
+            <a:ext cx="4221759" cy="1631216"/>
+          </a:xfrm>
+          <a:prstGeom prst="rect">
+            <a:avLst/>
+          </a:prstGeom>
+          <a:noFill/>
+        </p:spPr>
+        <p:txBody>
+          <a:bodyPr wrap="square">
+            <a:spAutoFit/>
+          </a:bodyPr>
+          <a:lstStyle/>
+          <a:p>
+            <a:pPr algn="r">
+              <a:lnSpc>
+                <a:spcPts val="2000"/>
+              </a:lnSpc>
+              <a:spcBef>
+                <a:spcPts val="0"/>
+              </a:spcBef>
+            </a:pPr>
+            <a:r>
+              <a:rPr lang="ru-RU" sz="1800" dirty="0">
+                <a:latin typeface="Gilroy Medium" panose="00000600000000000000" charset="-52"/>
+              </a:rPr>
+              <a:t>Студент: </a:t>
+            </a:r>
+          </a:p>
+          <a:p>
+            <a:pPr algn="r">
+              <a:lnSpc>
+                <a:spcPts val="2000"/>
+              </a:lnSpc>
+              <a:spcBef>
+                <a:spcPts val="0"/>
+              </a:spcBef>
+            </a:pPr>
+            <a:r>
+              <a:rPr lang="ru-RU" sz="1800" dirty="0">
+                <a:latin typeface="Gilroy Medium" panose="00000600000000000000" charset="-52"/>
+              </a:rPr>
+              <a:t>Медведев Клим Николаевич, </a:t>
+            </a:r>
+          </a:p>
+          <a:p>
+            <a:pPr algn="r">
+              <a:lnSpc>
+                <a:spcPts val="2000"/>
+              </a:lnSpc>
+              <a:spcBef>
+                <a:spcPts val="0"/>
+              </a:spcBef>
+            </a:pPr>
+            <a:r>
+              <a:rPr lang="ru-RU" sz="1800" dirty="0">
+                <a:latin typeface="Gilroy Medium" panose="00000600000000000000" charset="-52"/>
+              </a:rPr>
+              <a:t>группа 221-329. </a:t>
+            </a:r>
+          </a:p>
+          <a:p>
+            <a:pPr algn="r">
+              <a:lnSpc>
+                <a:spcPts val="2000"/>
+              </a:lnSpc>
+              <a:spcBef>
+                <a:spcPts val="0"/>
+              </a:spcBef>
+            </a:pPr>
+            <a:r>
+              <a:rPr lang="ru-RU" sz="1800" dirty="0">
+                <a:latin typeface="Gilroy Medium" panose="00000600000000000000" charset="-52"/>
+              </a:rPr>
+              <a:t>Научный руководитель: </a:t>
+            </a:r>
+          </a:p>
+          <a:p>
+            <a:pPr algn="r">
+              <a:lnSpc>
+                <a:spcPts val="2000"/>
+              </a:lnSpc>
+              <a:spcBef>
+                <a:spcPts val="0"/>
+              </a:spcBef>
+            </a:pPr>
+            <a:r>
+              <a:rPr lang="ru-RU" sz="1800" dirty="0" err="1">
+                <a:latin typeface="Gilroy Medium" panose="00000600000000000000" charset="-52"/>
+              </a:rPr>
+              <a:t>Кружалов</a:t>
+            </a:r>
+            <a:r>
+              <a:rPr lang="ru-RU" sz="1800" dirty="0">
+                <a:latin typeface="Gilroy Medium" panose="00000600000000000000" charset="-52"/>
+              </a:rPr>
+              <a:t> Алексей Сергеевич,</a:t>
+            </a:r>
+          </a:p>
+          <a:p>
+            <a:pPr algn="r">
+              <a:lnSpc>
+                <a:spcPts val="2000"/>
+              </a:lnSpc>
+              <a:spcBef>
+                <a:spcPts val="0"/>
+              </a:spcBef>
+            </a:pPr>
+            <a:r>
+              <a:rPr lang="ru-RU" dirty="0">
+                <a:latin typeface="Gilroy Medium" panose="00000600000000000000" charset="-52"/>
+              </a:rPr>
+              <a:t>с</a:t>
+            </a:r>
+            <a:r>
+              <a:rPr lang="ru-RU" sz="1800" dirty="0">
+                <a:latin typeface="Gilroy Medium" panose="00000600000000000000" charset="-52"/>
+              </a:rPr>
+              <a:t>тарший преп</a:t>
+            </a:r>
+            <a:r>
+              <a:rPr lang="ru-RU" dirty="0">
+                <a:latin typeface="Gilroy Medium" panose="00000600000000000000" charset="-52"/>
+              </a:rPr>
+              <a:t>одаватель.</a:t>
+            </a:r>
+            <a:endParaRPr lang="ru-RU" sz="1800" dirty="0">
+              <a:solidFill>
+                <a:schemeClr val="tx1"/>
+              </a:solidFill>
+              <a:latin typeface="Gilroy Medium" panose="00000600000000000000" charset="-52"/>
+            </a:endParaRPr>
+          </a:p>
+        </p:txBody>
+      </p:sp>
+      <p:sp>
+        <p:nvSpPr>
+          <p:cNvPr id="12" name="TextBox 11">
+            <a:extLst>
+              <a:ext uri="{FF2B5EF4-FFF2-40B4-BE49-F238E27FC236}">
+                <a16:creationId xmlns:a16="http://schemas.microsoft.com/office/drawing/2014/main" id="{3FE4B5EE-80E5-44C9-B29C-37CD3F69DA42}"/>
+              </a:ext>
+            </a:extLst>
+          </p:cNvPr>
+          <p:cNvSpPr txBox="1"/>
+          <p:nvPr/>
+        </p:nvSpPr>
+        <p:spPr>
+          <a:xfrm>
+            <a:off x="4782071" y="6353372"/>
+            <a:ext cx="2250346" cy="338554"/>
+          </a:xfrm>
+          <a:prstGeom prst="rect">
+            <a:avLst/>
+          </a:prstGeom>
+          <a:noFill/>
+        </p:spPr>
+        <p:txBody>
+          <a:bodyPr wrap="square">
+            <a:spAutoFit/>
+          </a:bodyPr>
+          <a:lstStyle/>
+          <a:p>
+            <a:pPr marL="0" marR="0" lvl="0" indent="0" algn="l" defTabSz="914400" rtl="0" eaLnBrk="1" fontAlgn="auto" latinLnBrk="0" hangingPunct="1">
+              <a:lnSpc>
+                <a:spcPct val="100000"/>
+              </a:lnSpc>
+              <a:spcBef>
+                <a:spcPts val="0"/>
+              </a:spcBef>
+              <a:spcAft>
+                <a:spcPts val="0"/>
+              </a:spcAft>
+              <a:buClrTx/>
+              <a:buSzTx/>
+              <a:buFontTx/>
+              <a:buNone/>
+              <a:tabLst/>
+              <a:defRPr/>
+            </a:pPr>
+            <a:r>
+              <a:rPr kumimoji="0" lang="ru-RU" sz="1600" b="0" i="0" u="none" strike="noStrike" kern="1200" cap="none" spc="0" normalizeH="0" baseline="0" noProof="0" dirty="0">
+                <a:ln>
+                  <a:noFill/>
+                </a:ln>
+                <a:solidFill>
+                  <a:prstClr val="black"/>
+                </a:solidFill>
+                <a:effectLst/>
+                <a:uLnTx/>
+                <a:uFillTx/>
+                <a:latin typeface="Gilroy Medium" panose="00000600000000000000" charset="-52"/>
+              </a:rPr>
+              <a:t>Москва, 4 июня 2026</a:t>
+            </a:r>
+          </a:p>
+        </p:txBody>
+      </p:sp>
     </p:spTree>
     <p:extLst>
       <p:ext uri="{BB962C8B-B14F-4D97-AF65-F5344CB8AC3E}">
-        <p14:creationId xmlns:p14="http://schemas.microsoft.com/office/powerpoint/2010/main" val="3454142649"/>
+        <p14:creationId xmlns:p14="http://schemas.microsoft.com/office/powerpoint/2010/main" val="3176117585"/>
       </p:ext>
     </p:extLst>
   </p:cSld>
@@ -5935,8 +7571,8 @@
         </p:nvSpPr>
         <p:spPr>
           <a:xfrm>
-            <a:off x="339754" y="6232725"/>
-            <a:ext cx="8434457" cy="488275"/>
+            <a:off x="339755" y="6178253"/>
+            <a:ext cx="10798742" cy="692305"/>
           </a:xfrm>
           <a:prstGeom prst="rect">
             <a:avLst/>
@@ -5979,7 +7615,16 @@
                 <a:uFillTx/>
                 <a:latin typeface="Gilroy Medium" panose="00000600000000000000" charset="-52"/>
               </a:rPr>
-              <a:t>ИВАНОВ ИВАН ИВАНОВИЧ,</a:t>
+              <a:t>МЕДВЕДЕВ КЛИМ НИКОЛАЕВИЧ, 221-329</a:t>
+            </a:r>
+            <a:r>
+              <a:rPr lang="ru-RU" sz="1100" dirty="0">
+                <a:solidFill>
+                  <a:prstClr val="black"/>
+                </a:solidFill>
+                <a:latin typeface="Gilroy Medium" panose="00000600000000000000" charset="-52"/>
+              </a:rPr>
+              <a:t>,</a:t>
             </a:r>
             <a:r>
               <a:rPr kumimoji="0" lang="ru-RU" sz="1100" i="0" u="none" strike="noStrike" kern="1200" cap="none" spc="0" normalizeH="0" noProof="0" dirty="0">
@@ -5994,20 +7639,8 @@
                 <a:uFillTx/>
                 <a:latin typeface="Gilroy Medium" panose="00000600000000000000" charset="-52"/>
               </a:rPr>
-              <a:t>  201-321,  04.06.2024</a:t>
-            </a:r>
-            <a:endParaRPr kumimoji="0" lang="ru-RU" sz="1100" i="0" u="none" strike="noStrike" kern="1200" cap="none" spc="0" normalizeH="0" baseline="0" noProof="0" dirty="0">
-              <a:ln>
-                <a:noFill/>
-              </a:ln>
-              <a:solidFill>
-                <a:prstClr val="black"/>
-              </a:solidFill>
-              <a:effectLst/>
-              <a:uLnTx/>
-              <a:uFillTx/>
-              <a:latin typeface="Gilroy Medium" panose="00000600000000000000" charset="-52"/>
-            </a:endParaRPr>
+              <a:t> 04.06.2026</a:t>
+            </a:r>
           </a:p>
           <a:p>
             <a:pPr marL="0" marR="0" lvl="0" indent="0" algn="l" defTabSz="914400" rtl="0" eaLnBrk="1" fontAlgn="auto" latinLnBrk="0" hangingPunct="1">
@@ -6040,32 +7673,39 @@
                 <a:uFillTx/>
                 <a:latin typeface="Gilroy Medium" panose="00000600000000000000" charset="-52"/>
               </a:rPr>
-              <a:t>РАЗРАБОТКА ВЕБ-ПРИЛОЖЕНИЯ ДЛЯ БРОНИРОВАНИЯ ТЕННИСНЫХ КОРТОВ В СПРОТКЛУБЕ </a:t>
-            </a:r>
-            <a:r>
-              <a:rPr lang="ru-RU" sz="1100" dirty="0">
-                <a:solidFill>
-                  <a:prstClr val="black"/>
-                </a:solidFill>
-                <a:latin typeface="Gilroy Medium" panose="00000600000000000000" charset="-52"/>
-              </a:rPr>
-              <a:t>СМЭШ</a:t>
-            </a:r>
-            <a:r>
-              <a:rPr kumimoji="0" lang="ru-RU" sz="1100" i="0" u="none" strike="noStrike" kern="1200" cap="none" spc="0" normalizeH="0" baseline="0" noProof="0" dirty="0">
-                <a:ln>
-                  <a:noFill/>
-                </a:ln>
-                <a:solidFill>
-                  <a:prstClr val="black"/>
-                </a:solidFill>
-                <a:effectLst/>
-                <a:uLnTx/>
-                <a:uFillTx/>
-                <a:latin typeface="Gilroy Medium" panose="00000600000000000000" charset="-52"/>
-              </a:rPr>
-              <a:t>                      </a:t>
-            </a:r>
+              <a:t>РАЗРАБОТКА СИСТЕМЫ ДЛЯ ПРОКСИРОВАНИЯ И МОНИТОРИНГА ИМИТАЦИОННЫХ СЕРВИСОВ В СРЕДЕ НАГРУЗОЧНОГО ТЕСТИРОВАНИЯ</a:t>
+            </a:r>
+          </a:p>
+          <a:p>
+            <a:pPr marL="0" marR="0" lvl="0" indent="0" algn="l" defTabSz="914400" rtl="0" eaLnBrk="1" fontAlgn="auto" latinLnBrk="0" hangingPunct="1">
+              <a:lnSpc>
+                <a:spcPts val="1600"/>
+              </a:lnSpc>
+              <a:spcBef>
+                <a:spcPts val="0"/>
+              </a:spcBef>
+              <a:spcAft>
+                <a:spcPts val="0"/>
+              </a:spcAft>
+              <a:buClrTx/>
+              <a:buSzTx/>
+              <a:buFontTx/>
+              <a:buNone/>
+              <a:tabLst/>
+              <a:defRPr/>
+            </a:pPr>
+            <a:endParaRPr kumimoji="0" lang="ru-RU" sz="1100" i="0" u="none" strike="noStrike" kern="1200" cap="none" spc="0" normalizeH="0" baseline="0" noProof="0" dirty="0">
+              <a:ln>
+                <a:noFill/>
+              </a:ln>
+              <a:solidFill>
+                <a:prstClr val="black"/>
+              </a:solidFill>
+              <a:effectLst/>
+              <a:uLnTx/>
+              <a:uFillTx/>
+              <a:latin typeface="Gilroy Medium" panose="00000600000000000000" charset="-52"/>
+            </a:endParaRPr>
           </a:p>
         </p:txBody>
       </p:sp>
@@ -6083,8 +7723,8 @@
         </p:nvSpPr>
         <p:spPr>
           <a:xfrm>
-            <a:off x="339754" y="353566"/>
-            <a:ext cx="4479721" cy="584775"/>
+            <a:off x="457200" y="537255"/>
+            <a:ext cx="6645617" cy="584775"/>
           </a:xfrm>
           <a:prstGeom prst="rect">
             <a:avLst/>
@@ -6098,27 +7738,169 @@
           <a:lstStyle/>
           <a:p>
             <a:r>
-              <a:rPr kumimoji="0" lang="ru-RU" sz="3200" b="0" i="0" u="none" strike="noStrike" kern="1200" cap="none" spc="0" normalizeH="0" baseline="0" noProof="0" dirty="0">
-                <a:ln>
-                  <a:noFill/>
-                </a:ln>
-                <a:effectLst/>
-                <a:uLnTx/>
-                <a:uFillTx/>
+              <a:rPr lang="ru-RU" sz="3200" dirty="0">
                 <a:latin typeface="Gilroy Bold" panose="00000800000000000000" pitchFamily="2" charset="-52"/>
                 <a:ea typeface="+mj-ea"/>
                 <a:cs typeface="+mj-cs"/>
               </a:rPr>
-              <a:t>Актуальность работы</a:t>
-            </a:r>
-            <a:endParaRPr lang="ru-RU" dirty="0"/>
+              <a:t>Актуальность</a:t>
+            </a:r>
+          </a:p>
+        </p:txBody>
+      </p:sp>
+      <p:sp>
+        <p:nvSpPr>
+          <p:cNvPr id="2" name="TextBox 1">
+            <a:extLst>
+              <a:ext uri="{FF2B5EF4-FFF2-40B4-BE49-F238E27FC236}">
+                <a16:creationId xmlns:a16="http://schemas.microsoft.com/office/drawing/2014/main" id="{29A6AEEB-6479-6AF6-ED4B-A834C62D6DE6}"/>
+              </a:ext>
+            </a:extLst>
+          </p:cNvPr>
+          <p:cNvSpPr txBox="1"/>
+          <p:nvPr/>
+        </p:nvSpPr>
+        <p:spPr>
+          <a:xfrm>
+            <a:off x="423877" y="2115050"/>
+            <a:ext cx="11344245" cy="2997231"/>
+          </a:xfrm>
+          <a:prstGeom prst="rect">
+            <a:avLst/>
+          </a:prstGeom>
+          <a:noFill/>
+        </p:spPr>
+        <p:txBody>
+          <a:bodyPr wrap="square" rtlCol="0">
+            <a:spAutoFit/>
+          </a:bodyPr>
+          <a:lstStyle/>
+          <a:p>
+            <a:pPr>
+              <a:lnSpc>
+                <a:spcPct val="150000"/>
+              </a:lnSpc>
+            </a:pPr>
+            <a:r>
+              <a:rPr lang="ru-RU" sz="1600" dirty="0"/>
+              <a:t>При нагрузочном тестировании сложных систем требуются десятки имитационных сервисов (заглушек). Ручное управление ими — трудоёмко и ненадёжно.</a:t>
+            </a:r>
+          </a:p>
+          <a:p>
+            <a:pPr>
+              <a:lnSpc>
+                <a:spcPct val="150000"/>
+              </a:lnSpc>
+            </a:pPr>
+            <a:r>
+              <a:rPr lang="ru-RU" sz="1600" b="1" dirty="0"/>
+              <a:t>Проблемы существующих решений:</a:t>
+            </a:r>
+            <a:r>
+              <a:rPr lang="ru-RU" sz="1600" dirty="0"/>
+              <a:t> </a:t>
+            </a:r>
+          </a:p>
+          <a:p>
+            <a:pPr marL="285750" indent="-285750">
+              <a:lnSpc>
+                <a:spcPct val="150000"/>
+              </a:lnSpc>
+              <a:buFont typeface="Arial" panose="020B0604020202020204" pitchFamily="34" charset="0"/>
+              <a:buChar char="•"/>
+            </a:pPr>
+            <a:r>
+              <a:rPr lang="en-US" sz="1600" dirty="0"/>
+              <a:t>W</a:t>
+            </a:r>
+            <a:r>
+              <a:rPr lang="ru-RU" sz="1600" dirty="0" err="1"/>
+              <a:t>ireMock</a:t>
+            </a:r>
+            <a:r>
+              <a:rPr lang="ru-RU" sz="1600" dirty="0"/>
+              <a:t>, </a:t>
+            </a:r>
+            <a:r>
+              <a:rPr lang="ru-RU" sz="1600" dirty="0" err="1"/>
+              <a:t>MockServer</a:t>
+            </a:r>
+            <a:r>
+              <a:rPr lang="ru-RU" sz="1600" dirty="0"/>
+              <a:t>, </a:t>
+            </a:r>
+            <a:r>
+              <a:rPr lang="ru-RU" sz="1600" dirty="0" err="1"/>
+              <a:t>Mountebank</a:t>
+            </a:r>
+            <a:r>
+              <a:rPr lang="ru-RU" sz="1600" dirty="0"/>
+              <a:t> не управляют инфраструктурой JAR/WAR-процессов </a:t>
+            </a:r>
+          </a:p>
+          <a:p>
+            <a:pPr marL="285750" indent="-285750">
+              <a:lnSpc>
+                <a:spcPct val="150000"/>
+              </a:lnSpc>
+              <a:buFont typeface="Arial" panose="020B0604020202020204" pitchFamily="34" charset="0"/>
+              <a:buChar char="•"/>
+            </a:pPr>
+            <a:r>
+              <a:rPr lang="ru-RU" sz="1600" dirty="0"/>
+              <a:t>Apache </a:t>
+            </a:r>
+            <a:r>
+              <a:rPr lang="ru-RU" sz="1600" dirty="0" err="1"/>
+              <a:t>Tomcat</a:t>
+            </a:r>
+            <a:r>
+              <a:rPr lang="ru-RU" sz="1600" dirty="0"/>
+              <a:t> избыточен и не поддерживает динамический Rate </a:t>
+            </a:r>
+            <a:r>
+              <a:rPr lang="ru-RU" sz="1600" dirty="0" err="1"/>
+              <a:t>Limiting</a:t>
+            </a:r>
+            <a:r>
+              <a:rPr lang="ru-RU" sz="1600" dirty="0"/>
+              <a:t> </a:t>
+            </a:r>
+          </a:p>
+          <a:p>
+            <a:pPr marL="285750" indent="-285750">
+              <a:lnSpc>
+                <a:spcPct val="150000"/>
+              </a:lnSpc>
+              <a:buFont typeface="Arial" panose="020B0604020202020204" pitchFamily="34" charset="0"/>
+              <a:buChar char="•"/>
+            </a:pPr>
+            <a:r>
+              <a:rPr lang="ru-RU" sz="1600" dirty="0"/>
+              <a:t>Все зарубежные решения косвенно совместимы с ОС Astra Linux</a:t>
+            </a:r>
+          </a:p>
+          <a:p>
+            <a:pPr>
+              <a:lnSpc>
+                <a:spcPct val="150000"/>
+              </a:lnSpc>
+            </a:pPr>
+            <a:r>
+              <a:rPr lang="ru-RU" sz="1600" b="1" dirty="0"/>
+              <a:t>Вывод:</a:t>
+            </a:r>
+            <a:r>
+              <a:rPr lang="ru-RU" sz="1600" dirty="0"/>
+              <a:t> ни одно из существующих решений не закрывает задачу централизованного управления распределённой инфраструктурой заглушек в условиях импортозамещения</a:t>
+            </a:r>
           </a:p>
         </p:txBody>
       </p:sp>
     </p:spTree>
     <p:extLst>
       <p:ext uri="{BB962C8B-B14F-4D97-AF65-F5344CB8AC3E}">
-        <p14:creationId xmlns:p14="http://schemas.microsoft.com/office/powerpoint/2010/main" val="430857725"/>
+        <p14:creationId xmlns:p14="http://schemas.microsoft.com/office/powerpoint/2010/main" val="531669730"/>
       </p:ext>
     </p:extLst>
   </p:cSld>
@@ -6208,7 +7990,7 @@
         </p:nvSpPr>
         <p:spPr>
           <a:xfrm>
-            <a:off x="11516986" y="6186956"/>
+            <a:off x="11580453" y="6171414"/>
             <a:ext cx="409963" cy="610899"/>
           </a:xfrm>
         </p:spPr>
@@ -6226,77 +8008,7 @@
       </p:sp>
       <p:sp>
         <p:nvSpPr>
-          <p:cNvPr id="11" name="TextBox 10">
-            <a:extLst>
-              <a:ext uri="{FF2B5EF4-FFF2-40B4-BE49-F238E27FC236}">
-                <a16:creationId xmlns:a16="http://schemas.microsoft.com/office/drawing/2014/main" id="{2169E9A5-0F30-46EE-BA6A-78421B32F98B}"/>
-              </a:ext>
-            </a:extLst>
-          </p:cNvPr>
-          <p:cNvSpPr txBox="1"/>
-          <p:nvPr/>
-        </p:nvSpPr>
-        <p:spPr>
-          <a:xfrm>
-            <a:off x="457200" y="244509"/>
-            <a:ext cx="5381538" cy="584775"/>
-          </a:xfrm>
-          <a:prstGeom prst="rect">
-            <a:avLst/>
-          </a:prstGeom>
-          <a:noFill/>
-        </p:spPr>
-        <p:txBody>
-          <a:bodyPr wrap="square">
-            <a:spAutoFit/>
-          </a:bodyPr>
-          <a:lstStyle/>
-          <a:p>
-            <a:r>
-              <a:rPr lang="ru-RU" sz="3200" dirty="0">
-                <a:solidFill>
-                  <a:schemeClr val="bg2">
-                    <a:lumMod val="25000"/>
-                  </a:schemeClr>
-                </a:solidFill>
-                <a:latin typeface="Gilroy Bold" panose="00000800000000000000" pitchFamily="2" charset="-52"/>
-                <a:ea typeface="+mj-ea"/>
-                <a:cs typeface="+mj-cs"/>
-              </a:rPr>
-              <a:t>Цели и задачи</a:t>
-            </a:r>
-            <a:r>
-              <a:rPr kumimoji="0" lang="ru-RU" sz="3200" b="0" i="0" u="none" strike="noStrike" kern="1200" cap="none" spc="0" normalizeH="0" baseline="0" noProof="0" dirty="0">
-                <a:ln>
-                  <a:noFill/>
-                </a:ln>
-                <a:solidFill>
-                  <a:schemeClr val="bg2">
-                    <a:lumMod val="25000"/>
-                  </a:schemeClr>
-                </a:solidFill>
-                <a:effectLst/>
-                <a:uLnTx/>
-                <a:uFillTx/>
-                <a:latin typeface="Gilroy Bold" panose="00000800000000000000" pitchFamily="2" charset="-52"/>
-                <a:ea typeface="+mj-ea"/>
-                <a:cs typeface="+mj-cs"/>
-              </a:rPr>
-              <a:t> работы</a:t>
-            </a:r>
-            <a:endParaRPr lang="ru-RU" dirty="0">
-              <a:solidFill>
-                <a:schemeClr val="bg2">
-                  <a:lumMod val="25000"/>
-                </a:schemeClr>
-              </a:solidFill>
-            </a:endParaRPr>
-          </a:p>
-        </p:txBody>
-      </p:sp>
-      <p:sp>
-        <p:nvSpPr>
-          <p:cNvPr id="10" name="TextBox 9">
+          <p:cNvPr id="7" name="TextBox 6">
             <a:extLst>
               <a:ext uri="{FF2B5EF4-FFF2-40B4-BE49-F238E27FC236}">
                 <a16:creationId xmlns:a16="http://schemas.microsoft.com/office/drawing/2014/main" id="{D7E8C6BD-D95E-4822-B09A-435E67225EB0}"/>
@@ -6308,8 +8020,8 @@
         </p:nvSpPr>
         <p:spPr>
           <a:xfrm>
-            <a:off x="318230" y="6249101"/>
-            <a:ext cx="10916724" cy="486608"/>
+            <a:off x="339755" y="6178253"/>
+            <a:ext cx="10798742" cy="692305"/>
           </a:xfrm>
           <a:prstGeom prst="rect">
             <a:avLst/>
@@ -6340,7 +8052,7 @@
               <a:defRPr/>
             </a:pPr>
             <a:r>
-              <a:rPr kumimoji="0" lang="ru-RU" sz="1100" b="0" i="0" u="none" strike="noStrike" kern="1200" cap="none" spc="0" normalizeH="0" baseline="0" noProof="0" dirty="0">
+              <a:rPr kumimoji="0" lang="ru-RU" sz="1100" i="0" u="none" strike="noStrike" kern="1200" cap="none" spc="0" normalizeH="0" baseline="0" noProof="0" dirty="0">
                 <a:ln>
                   <a:noFill/>
                 </a:ln>
@@ -6352,7 +8064,31 @@
                 <a:uFillTx/>
                 <a:latin typeface="Gilroy Medium" panose="00000600000000000000" charset="-52"/>
               </a:rPr>
-              <a:t>ИВАНОВ ИВАН ИВАНОВИЧ,  201-321,  04.06.2024</a:t>
+              <a:t>МЕДВЕДЕВ КЛИМ НИКОЛАЕВИЧ, 221-329</a:t>
+            </a:r>
+            <a:r>
+              <a:rPr lang="ru-RU" sz="1100" dirty="0">
+                <a:solidFill>
+                  <a:prstClr val="black"/>
+                </a:solidFill>
+                <a:latin typeface="Gilroy Medium" panose="00000600000000000000" charset="-52"/>
+              </a:rPr>
+              <a:t>,</a:t>
+            </a:r>
+            <a:r>
+              <a:rPr kumimoji="0" lang="ru-RU" sz="1100" i="0" u="none" strike="noStrike" kern="1200" cap="none" spc="0" normalizeH="0" noProof="0" dirty="0">
+                <a:ln>
+                  <a:noFill/>
+                </a:ln>
+                <a:solidFill>
+                  <a:prstClr val="black"/>
+                </a:solidFill>
+                <a:effectLst/>
+                <a:uLnTx/>
+                <a:uFillTx/>
+                <a:latin typeface="Gilroy Medium" panose="00000600000000000000" charset="-52"/>
+              </a:rPr>
+              <a:t> 04.06.2026</a:t>
             </a:r>
           </a:p>
           <a:p>
@@ -6374,7 +8110,7 @@
               <a:defRPr/>
             </a:pPr>
             <a:r>
-              <a:rPr kumimoji="0" lang="ru-RU" sz="1100" b="0" i="0" u="none" strike="noStrike" kern="1200" cap="none" spc="0" normalizeH="0" baseline="0" noProof="0" dirty="0">
+              <a:rPr kumimoji="0" lang="ru-RU" sz="1100" i="0" u="none" strike="noStrike" kern="1200" cap="none" spc="0" normalizeH="0" baseline="0" noProof="0" dirty="0">
                 <a:ln>
                   <a:noFill/>
                 </a:ln>
@@ -6386,7 +8122,242 @@
                 <a:uFillTx/>
                 <a:latin typeface="Gilroy Medium" panose="00000600000000000000" charset="-52"/>
               </a:rPr>
-              <a:t>РАЗРАБОТКА  ВЕБ-ПРИЛОЖЕНИЯ  ДЛЯ  БРОНИРОВАНИЯ  ТЕННИСНЫХ  КОРТОВ  В  СПРОТКЛУБЕ  СМЭШ                 </a:t>
+              <a:t>РАЗРАБОТКА СИСТЕМЫ ДЛЯ ПРОКСИРОВАНИЯ И МОНИТОРИНГА ИМИТАЦИОННЫХ СЕРВИСОВ В СРЕДЕ НАГРУЗОЧНОГО ТЕСТИРОВАНИЯ</a:t>
+            </a:r>
+          </a:p>
+          <a:p>
+            <a:pPr marL="0" marR="0" lvl="0" indent="0" algn="l" defTabSz="914400" rtl="0" eaLnBrk="1" fontAlgn="auto" latinLnBrk="0" hangingPunct="1">
+              <a:lnSpc>
+                <a:spcPts val="1600"/>
+              </a:lnSpc>
+              <a:spcBef>
+                <a:spcPts val="0"/>
+              </a:spcBef>
+              <a:spcAft>
+                <a:spcPts val="0"/>
+              </a:spcAft>
+              <a:buClrTx/>
+              <a:buSzTx/>
+              <a:buFontTx/>
+              <a:buNone/>
+              <a:tabLst/>
+              <a:defRPr/>
+            </a:pPr>
+            <a:endParaRPr kumimoji="0" lang="ru-RU" sz="1100" i="0" u="none" strike="noStrike" kern="1200" cap="none" spc="0" normalizeH="0" baseline="0" noProof="0" dirty="0">
+              <a:ln>
+                <a:noFill/>
+              </a:ln>
+              <a:solidFill>
+                <a:prstClr val="black"/>
+              </a:solidFill>
+              <a:effectLst/>
+              <a:uLnTx/>
+              <a:uFillTx/>
+              <a:latin typeface="Gilroy Medium" panose="00000600000000000000" charset="-52"/>
+            </a:endParaRPr>
+          </a:p>
+        </p:txBody>
+      </p:sp>
+      <p:sp>
+        <p:nvSpPr>
+          <p:cNvPr id="11" name="TextBox 10">
+            <a:extLst>
+              <a:ext uri="{FF2B5EF4-FFF2-40B4-BE49-F238E27FC236}">
+                <a16:creationId xmlns:a16="http://schemas.microsoft.com/office/drawing/2014/main" id="{2169E9A5-0F30-46EE-BA6A-78421B32F98B}"/>
+              </a:ext>
+            </a:extLst>
+          </p:cNvPr>
+          <p:cNvSpPr txBox="1"/>
+          <p:nvPr/>
+        </p:nvSpPr>
+        <p:spPr>
+          <a:xfrm>
+            <a:off x="457200" y="537255"/>
+            <a:ext cx="6645617" cy="584775"/>
+          </a:xfrm>
+          <a:prstGeom prst="rect">
+            <a:avLst/>
+          </a:prstGeom>
+          <a:noFill/>
+        </p:spPr>
+        <p:txBody>
+          <a:bodyPr wrap="square">
+            <a:spAutoFit/>
+          </a:bodyPr>
+          <a:lstStyle/>
+          <a:p>
+            <a:r>
+              <a:rPr lang="ru-RU" sz="3200" dirty="0">
+                <a:latin typeface="Gilroy Bold" panose="00000800000000000000" pitchFamily="2" charset="-52"/>
+                <a:ea typeface="+mj-ea"/>
+                <a:cs typeface="+mj-cs"/>
+              </a:rPr>
+              <a:t>Цели и задачи</a:t>
+            </a:r>
+            <a:r>
+              <a:rPr kumimoji="0" lang="ru-RU" sz="3200" b="0" i="0" u="none" strike="noStrike" kern="1200" cap="none" spc="0" normalizeH="0" baseline="0" noProof="0" dirty="0">
+                <a:ln>
+                  <a:noFill/>
+                </a:ln>
+                <a:effectLst/>
+                <a:uLnTx/>
+                <a:uFillTx/>
+                <a:latin typeface="Gilroy Bold" panose="00000800000000000000" pitchFamily="2" charset="-52"/>
+                <a:ea typeface="+mj-ea"/>
+                <a:cs typeface="+mj-cs"/>
+              </a:rPr>
+              <a:t> работы</a:t>
+            </a:r>
+            <a:endParaRPr lang="ru-RU" sz="3200" dirty="0"/>
+          </a:p>
+        </p:txBody>
+      </p:sp>
+      <p:sp>
+        <p:nvSpPr>
+          <p:cNvPr id="2" name="TextBox 1">
+            <a:extLst>
+              <a:ext uri="{FF2B5EF4-FFF2-40B4-BE49-F238E27FC236}">
+                <a16:creationId xmlns:a16="http://schemas.microsoft.com/office/drawing/2014/main" id="{29A6AEEB-6479-6AF6-ED4B-A834C62D6DE6}"/>
+              </a:ext>
+            </a:extLst>
+          </p:cNvPr>
+          <p:cNvSpPr txBox="1"/>
+          <p:nvPr/>
+        </p:nvSpPr>
+        <p:spPr>
+          <a:xfrm>
+            <a:off x="423877" y="1745718"/>
+            <a:ext cx="11344245" cy="3366563"/>
+          </a:xfrm>
+          <a:prstGeom prst="rect">
+            <a:avLst/>
+          </a:prstGeom>
+          <a:noFill/>
+        </p:spPr>
+        <p:txBody>
+          <a:bodyPr wrap="square" rtlCol="0">
+            <a:spAutoFit/>
+          </a:bodyPr>
+          <a:lstStyle/>
+          <a:p>
+            <a:pPr>
+              <a:lnSpc>
+                <a:spcPct val="150000"/>
+              </a:lnSpc>
+            </a:pPr>
+            <a:r>
+              <a:rPr lang="ru-RU" sz="1600" b="1" dirty="0"/>
+              <a:t>Цель:</a:t>
+            </a:r>
+            <a:r>
+              <a:rPr lang="ru-RU" sz="1600" dirty="0"/>
+              <a:t> спроектировать и реализовать АИС для централизованного управления и мониторинга распределённой инфраструктуры имитационных сервисов</a:t>
+            </a:r>
+          </a:p>
+          <a:p>
+            <a:pPr>
+              <a:lnSpc>
+                <a:spcPct val="150000"/>
+              </a:lnSpc>
+            </a:pPr>
+            <a:r>
+              <a:rPr lang="ru-RU" sz="1600" b="1" dirty="0"/>
+              <a:t>Задачи:</a:t>
+            </a:r>
+            <a:endParaRPr lang="ru-RU" sz="1600" dirty="0"/>
+          </a:p>
+          <a:p>
+            <a:pPr>
+              <a:lnSpc>
+                <a:spcPct val="150000"/>
+              </a:lnSpc>
+              <a:buFont typeface="+mj-lt"/>
+              <a:buAutoNum type="arabicPeriod"/>
+            </a:pPr>
+            <a:r>
+              <a:rPr lang="ru-RU" sz="1600" dirty="0"/>
+              <a:t>Провести анализ предметной области и существующих подходов</a:t>
+            </a:r>
+          </a:p>
+          <a:p>
+            <a:pPr>
+              <a:lnSpc>
+                <a:spcPct val="150000"/>
+              </a:lnSpc>
+              <a:buFont typeface="+mj-lt"/>
+              <a:buAutoNum type="arabicPeriod"/>
+            </a:pPr>
+            <a:r>
+              <a:rPr lang="ru-RU" sz="1600" dirty="0"/>
+              <a:t>Спроектировать архитектуру программного комплекса</a:t>
+            </a:r>
+          </a:p>
+          <a:p>
+            <a:pPr>
+              <a:lnSpc>
+                <a:spcPct val="150000"/>
+              </a:lnSpc>
+              <a:buFont typeface="+mj-lt"/>
+              <a:buAutoNum type="arabicPeriod"/>
+            </a:pPr>
+            <a:r>
+              <a:rPr lang="ru-RU" sz="1600" dirty="0"/>
+              <a:t>Обосновать выбор технологического стека</a:t>
+            </a:r>
+          </a:p>
+          <a:p>
+            <a:pPr>
+              <a:lnSpc>
+                <a:spcPct val="150000"/>
+              </a:lnSpc>
+              <a:buFont typeface="+mj-lt"/>
+              <a:buAutoNum type="arabicPeriod"/>
+            </a:pPr>
+            <a:r>
+              <a:rPr lang="ru-RU" sz="1600" dirty="0"/>
+              <a:t>Разработать алгоритмы </a:t>
+            </a:r>
+            <a:r>
+              <a:rPr lang="ru-RU" sz="1600" dirty="0" err="1"/>
+              <a:t>проксирования</a:t>
+            </a:r>
+            <a:r>
+              <a:rPr lang="ru-RU" sz="1600" dirty="0"/>
+              <a:t>, Rate </a:t>
+            </a:r>
+            <a:r>
+              <a:rPr lang="ru-RU" sz="1600" dirty="0" err="1"/>
+              <a:t>Limiting</a:t>
+            </a:r>
+            <a:r>
+              <a:rPr lang="ru-RU" sz="1600" dirty="0"/>
+              <a:t> и API управления</a:t>
+            </a:r>
+          </a:p>
+          <a:p>
+            <a:pPr>
+              <a:lnSpc>
+                <a:spcPct val="150000"/>
+              </a:lnSpc>
+              <a:buFont typeface="+mj-lt"/>
+              <a:buAutoNum type="arabicPeriod"/>
+            </a:pPr>
+            <a:r>
+              <a:rPr lang="ru-RU" sz="1600" dirty="0"/>
+              <a:t>Реализовать систему хранения конфигураций и контроля состояний</a:t>
+            </a:r>
+          </a:p>
+          <a:p>
+            <a:pPr>
+              <a:lnSpc>
+                <a:spcPct val="150000"/>
+              </a:lnSpc>
+              <a:buFont typeface="+mj-lt"/>
+              <a:buAutoNum type="arabicPeriod"/>
+            </a:pPr>
+            <a:r>
+              <a:rPr lang="ru-RU" sz="1600" dirty="0"/>
+              <a:t>Провести тестирование в среде ОС Astra Linux</a:t>
             </a:r>
           </a:p>
         </p:txBody>
@@ -6394,7 +8365,7 @@
     </p:spTree>
     <p:extLst>
       <p:ext uri="{BB962C8B-B14F-4D97-AF65-F5344CB8AC3E}">
-        <p14:creationId xmlns:p14="http://schemas.microsoft.com/office/powerpoint/2010/main" val="2394729060"/>
+        <p14:creationId xmlns:p14="http://schemas.microsoft.com/office/powerpoint/2010/main" val="403781899"/>
       </p:ext>
     </p:extLst>
   </p:cSld>
@@ -6484,7 +8455,7 @@
         </p:nvSpPr>
         <p:spPr>
           <a:xfrm>
-            <a:off x="11463007" y="6134487"/>
+            <a:off x="11580453" y="6171414"/>
             <a:ext cx="409963" cy="610899"/>
           </a:xfrm>
         </p:spPr>
@@ -6502,10 +8473,10 @@
       </p:sp>
       <p:sp>
         <p:nvSpPr>
-          <p:cNvPr id="11" name="TextBox 10">
+          <p:cNvPr id="7" name="TextBox 6">
             <a:extLst>
               <a:ext uri="{FF2B5EF4-FFF2-40B4-BE49-F238E27FC236}">
-                <a16:creationId xmlns:a16="http://schemas.microsoft.com/office/drawing/2014/main" id="{2169E9A5-0F30-46EE-BA6A-78421B32F98B}"/>
+                <a16:creationId xmlns:a16="http://schemas.microsoft.com/office/drawing/2014/main" id="{D7E8C6BD-D95E-4822-B09A-435E67225EB0}"/>
               </a:ext>
             </a:extLst>
           </p:cNvPr>
@@ -6514,51 +8485,8 @@
         </p:nvSpPr>
         <p:spPr>
           <a:xfrm>
-            <a:off x="457200" y="244509"/>
-            <a:ext cx="5381538" cy="584775"/>
-          </a:xfrm>
-          <a:prstGeom prst="rect">
-            <a:avLst/>
-          </a:prstGeom>
-          <a:noFill/>
-        </p:spPr>
-        <p:txBody>
-          <a:bodyPr wrap="square">
-            <a:spAutoFit/>
-          </a:bodyPr>
-          <a:lstStyle/>
-          <a:p>
-            <a:r>
-              <a:rPr lang="ru-RU" sz="3200" dirty="0">
-                <a:solidFill>
-                  <a:prstClr val="black"/>
-                </a:solidFill>
-                <a:latin typeface="Gilroy Bold" panose="00000800000000000000" pitchFamily="2" charset="-52"/>
-                <a:ea typeface="+mj-ea"/>
-                <a:cs typeface="+mj-cs"/>
-              </a:rPr>
-              <a:t>Заголовок</a:t>
-            </a:r>
-            <a:endParaRPr lang="ru-RU" dirty="0"/>
-          </a:p>
-        </p:txBody>
-      </p:sp>
-      <p:sp>
-        <p:nvSpPr>
-          <p:cNvPr id="7" name="TextBox 6">
-            <a:extLst>
-              <a:ext uri="{FF2B5EF4-FFF2-40B4-BE49-F238E27FC236}">
-                <a16:creationId xmlns:a16="http://schemas.microsoft.com/office/drawing/2014/main" id="{1BBBE14B-182A-4966-B033-9B3029F87F3A}"/>
-              </a:ext>
-            </a:extLst>
-          </p:cNvPr>
-          <p:cNvSpPr txBox="1"/>
-          <p:nvPr/>
-        </p:nvSpPr>
-        <p:spPr>
-          <a:xfrm>
-            <a:off x="319030" y="6261920"/>
-            <a:ext cx="7633733" cy="483466"/>
+            <a:off x="339755" y="6178253"/>
+            <a:ext cx="10798742" cy="692305"/>
           </a:xfrm>
           <a:prstGeom prst="rect">
             <a:avLst/>
@@ -6589,7 +8517,7 @@
               <a:defRPr/>
             </a:pPr>
             <a:r>
-              <a:rPr kumimoji="0" lang="ru-RU" sz="1100" b="0" i="0" u="none" strike="noStrike" kern="1200" cap="none" spc="0" normalizeH="0" baseline="0" noProof="0" dirty="0">
+              <a:rPr kumimoji="0" lang="ru-RU" sz="1100" i="0" u="none" strike="noStrike" kern="1200" cap="none" spc="0" normalizeH="0" baseline="0" noProof="0" dirty="0">
                 <a:ln>
                   <a:noFill/>
                 </a:ln>
@@ -6601,7 +8529,31 @@
                 <a:uFillTx/>
                 <a:latin typeface="Gilroy Medium" panose="00000600000000000000" charset="-52"/>
               </a:rPr>
-              <a:t>ИВАНОВ ИВАН ИВАНОВИЧ,  201-321, 04.06.2024</a:t>
+              <a:t>МЕДВЕДЕВ КЛИМ НИКОЛАЕВИЧ, 221-329</a:t>
+            </a:r>
+            <a:r>
+              <a:rPr lang="ru-RU" sz="1100" dirty="0">
+                <a:solidFill>
+                  <a:prstClr val="black"/>
+                </a:solidFill>
+                <a:latin typeface="Gilroy Medium" panose="00000600000000000000" charset="-52"/>
+              </a:rPr>
+              <a:t>,</a:t>
+            </a:r>
+            <a:r>
+              <a:rPr kumimoji="0" lang="ru-RU" sz="1100" i="0" u="none" strike="noStrike" kern="1200" cap="none" spc="0" normalizeH="0" noProof="0" dirty="0">
+                <a:ln>
+                  <a:noFill/>
+                </a:ln>
+                <a:solidFill>
+                  <a:prstClr val="black"/>
+                </a:solidFill>
+                <a:effectLst/>
+                <a:uLnTx/>
+                <a:uFillTx/>
+                <a:latin typeface="Gilroy Medium" panose="00000600000000000000" charset="-52"/>
+              </a:rPr>
+              <a:t> 04.06.2026</a:t>
             </a:r>
           </a:p>
           <a:p>
@@ -6623,7 +8575,7 @@
               <a:defRPr/>
             </a:pPr>
             <a:r>
-              <a:rPr kumimoji="0" lang="ru-RU" sz="1100" b="0" i="0" u="none" strike="noStrike" kern="1200" cap="none" spc="0" normalizeH="0" baseline="0" noProof="0" dirty="0">
+              <a:rPr kumimoji="0" lang="ru-RU" sz="1100" i="0" u="none" strike="noStrike" kern="1200" cap="none" spc="0" normalizeH="0" baseline="0" noProof="0" dirty="0">
                 <a:ln>
                   <a:noFill/>
                 </a:ln>
@@ -6635,39 +8587,651 @@
                 <a:uFillTx/>
                 <a:latin typeface="Gilroy Medium" panose="00000600000000000000" charset="-52"/>
               </a:rPr>
-              <a:t>РАЗРАБОТКА  ВЕБ-ПРИЛОЖЕНИЯ  ДЛЯ  БРОНИРОВАНИЯ  ТЕННИСНЫХ  КОРТОВ  В  СПРОТКЛУБЕ  </a:t>
-            </a:r>
-            <a:r>
-              <a:rPr lang="ru-RU" sz="1100" dirty="0">
-                <a:solidFill>
-                  <a:prstClr val="black"/>
-                </a:solidFill>
-                <a:latin typeface="Gilroy Medium" panose="00000600000000000000" charset="-52"/>
-              </a:rPr>
-              <a:t>СМЭШ</a:t>
-            </a:r>
-            <a:r>
-              <a:rPr kumimoji="0" lang="ru-RU" sz="1100" b="0" i="0" u="none" strike="noStrike" kern="1200" cap="none" spc="0" normalizeH="0" baseline="0" noProof="0" dirty="0">
-                <a:ln>
-                  <a:noFill/>
-                </a:ln>
-                <a:solidFill>
-                  <a:prstClr val="black"/>
-                </a:solidFill>
-                <a:effectLst/>
-                <a:uLnTx/>
-                <a:uFillTx/>
-                <a:latin typeface="Gilroy Medium" panose="00000600000000000000" charset="-52"/>
-              </a:rPr>
-              <a:t>                 </a:t>
-            </a:r>
-          </a:p>
-        </p:txBody>
-      </p:sp>
+              <a:t>РАЗРАБОТКА СИСТЕМЫ ДЛЯ ПРОКСИРОВАНИЯ И МОНИТОРИНГА ИМИТАЦИОННЫХ СЕРВИСОВ В СРЕДЕ НАГРУЗОЧНОГО ТЕСТИРОВАНИЯ</a:t>
+            </a:r>
+          </a:p>
+          <a:p>
+            <a:pPr marL="0" marR="0" lvl="0" indent="0" algn="l" defTabSz="914400" rtl="0" eaLnBrk="1" fontAlgn="auto" latinLnBrk="0" hangingPunct="1">
+              <a:lnSpc>
+                <a:spcPts val="1600"/>
+              </a:lnSpc>
+              <a:spcBef>
+                <a:spcPts val="0"/>
+              </a:spcBef>
+              <a:spcAft>
+                <a:spcPts val="0"/>
+              </a:spcAft>
+              <a:buClrTx/>
+              <a:buSzTx/>
+              <a:buFontTx/>
+              <a:buNone/>
+              <a:tabLst/>
+              <a:defRPr/>
+            </a:pPr>
+            <a:endParaRPr kumimoji="0" lang="ru-RU" sz="1100" i="0" u="none" strike="noStrike" kern="1200" cap="none" spc="0" normalizeH="0" baseline="0" noProof="0" dirty="0">
+              <a:ln>
+                <a:noFill/>
+              </a:ln>
+              <a:solidFill>
+                <a:prstClr val="black"/>
+              </a:solidFill>
+              <a:effectLst/>
+              <a:uLnTx/>
+              <a:uFillTx/>
+              <a:latin typeface="Gilroy Medium" panose="00000600000000000000" charset="-52"/>
+            </a:endParaRPr>
+          </a:p>
+        </p:txBody>
+      </p:sp>
+      <p:sp>
+        <p:nvSpPr>
+          <p:cNvPr id="11" name="TextBox 10">
+            <a:extLst>
+              <a:ext uri="{FF2B5EF4-FFF2-40B4-BE49-F238E27FC236}">
+                <a16:creationId xmlns:a16="http://schemas.microsoft.com/office/drawing/2014/main" id="{2169E9A5-0F30-46EE-BA6A-78421B32F98B}"/>
+              </a:ext>
+            </a:extLst>
+          </p:cNvPr>
+          <p:cNvSpPr txBox="1"/>
+          <p:nvPr/>
+        </p:nvSpPr>
+        <p:spPr>
+          <a:xfrm>
+            <a:off x="457200" y="413512"/>
+            <a:ext cx="8289147" cy="584775"/>
+          </a:xfrm>
+          <a:prstGeom prst="rect">
+            <a:avLst/>
+          </a:prstGeom>
+          <a:noFill/>
+        </p:spPr>
+        <p:txBody>
+          <a:bodyPr wrap="square">
+            <a:spAutoFit/>
+          </a:bodyPr>
+          <a:lstStyle/>
+          <a:p>
+            <a:r>
+              <a:rPr lang="ru-RU" sz="3200" dirty="0">
+                <a:latin typeface="Gilroy Bold" panose="00000800000000000000" pitchFamily="2" charset="-52"/>
+                <a:ea typeface="+mj-ea"/>
+                <a:cs typeface="+mj-cs"/>
+              </a:rPr>
+              <a:t>Анализ аналогов</a:t>
+            </a:r>
+          </a:p>
+        </p:txBody>
+      </p:sp>
+      <p:sp>
+        <p:nvSpPr>
+          <p:cNvPr id="2" name="TextBox 1">
+            <a:extLst>
+              <a:ext uri="{FF2B5EF4-FFF2-40B4-BE49-F238E27FC236}">
+                <a16:creationId xmlns:a16="http://schemas.microsoft.com/office/drawing/2014/main" id="{29A6AEEB-6479-6AF6-ED4B-A834C62D6DE6}"/>
+              </a:ext>
+            </a:extLst>
+          </p:cNvPr>
+          <p:cNvSpPr txBox="1"/>
+          <p:nvPr/>
+        </p:nvSpPr>
+        <p:spPr>
+          <a:xfrm>
+            <a:off x="497130" y="1564009"/>
+            <a:ext cx="7434957" cy="369332"/>
+          </a:xfrm>
+          <a:prstGeom prst="rect">
+            <a:avLst/>
+          </a:prstGeom>
+          <a:noFill/>
+        </p:spPr>
+        <p:txBody>
+          <a:bodyPr wrap="square" rtlCol="0">
+            <a:spAutoFit/>
+          </a:bodyPr>
+          <a:lstStyle/>
+          <a:p>
+            <a:r>
+              <a:rPr lang="ru-RU" dirty="0"/>
+              <a:t>Сравнительный анализ существующих решений</a:t>
+            </a:r>
+          </a:p>
+        </p:txBody>
+      </p:sp>
+      <p:graphicFrame>
+        <p:nvGraphicFramePr>
+          <p:cNvPr id="4" name="Таблица 3">
+            <a:extLst>
+              <a:ext uri="{FF2B5EF4-FFF2-40B4-BE49-F238E27FC236}">
+                <a16:creationId xmlns:a16="http://schemas.microsoft.com/office/drawing/2014/main" id="{CB75CB1B-6AEB-C021-38CD-884737E09655}"/>
+              </a:ext>
+            </a:extLst>
+          </p:cNvPr>
+          <p:cNvGraphicFramePr>
+            <a:graphicFrameLocks noGrp="1"/>
+          </p:cNvGraphicFramePr>
+          <p:nvPr>
+            <p:extLst>
+              <p:ext uri="{D42A27DB-BD31-4B8C-83A1-F6EECF244321}">
+                <p14:modId xmlns:p14="http://schemas.microsoft.com/office/powerpoint/2010/main" val="3779053544"/>
+              </p:ext>
+            </p:extLst>
+          </p:nvPr>
+        </p:nvGraphicFramePr>
+        <p:xfrm>
+          <a:off x="497130" y="2135036"/>
+          <a:ext cx="11197740" cy="3158955"/>
+        </p:xfrm>
+        <a:graphic>
+          <a:graphicData uri="http://schemas.openxmlformats.org/drawingml/2006/table">
+            <a:tbl>
+              <a:tblPr>
+                <a:tableStyleId>{616DA210-FB5B-4158-B5E0-FEB733F419BA}</a:tableStyleId>
+              </a:tblPr>
+              <a:tblGrid>
+                <a:gridCol w="2239548">
+                  <a:extLst>
+                    <a:ext uri="{9D8B030D-6E8A-4147-A177-3AD203B41FA5}">
+                      <a16:colId xmlns:a16="http://schemas.microsoft.com/office/drawing/2014/main" val="2215622627"/>
+                    </a:ext>
+                  </a:extLst>
+                </a:gridCol>
+                <a:gridCol w="2239548">
+                  <a:extLst>
+                    <a:ext uri="{9D8B030D-6E8A-4147-A177-3AD203B41FA5}">
+                      <a16:colId xmlns:a16="http://schemas.microsoft.com/office/drawing/2014/main" val="2193038394"/>
+                    </a:ext>
+                  </a:extLst>
+                </a:gridCol>
+                <a:gridCol w="2239548">
+                  <a:extLst>
+                    <a:ext uri="{9D8B030D-6E8A-4147-A177-3AD203B41FA5}">
+                      <a16:colId xmlns:a16="http://schemas.microsoft.com/office/drawing/2014/main" val="1993197335"/>
+                    </a:ext>
+                  </a:extLst>
+                </a:gridCol>
+                <a:gridCol w="2239548">
+                  <a:extLst>
+                    <a:ext uri="{9D8B030D-6E8A-4147-A177-3AD203B41FA5}">
+                      <a16:colId xmlns:a16="http://schemas.microsoft.com/office/drawing/2014/main" val="2629393087"/>
+                    </a:ext>
+                  </a:extLst>
+                </a:gridCol>
+                <a:gridCol w="2239548">
+                  <a:extLst>
+                    <a:ext uri="{9D8B030D-6E8A-4147-A177-3AD203B41FA5}">
+                      <a16:colId xmlns:a16="http://schemas.microsoft.com/office/drawing/2014/main" val="3470350277"/>
+                    </a:ext>
+                  </a:extLst>
+                </a:gridCol>
+              </a:tblGrid>
+              <a:tr h="339555">
+                <a:tc>
+                  <a:txBody>
+                    <a:bodyPr/>
+                    <a:lstStyle/>
+                    <a:p>
+                      <a:r>
+                        <a:rPr lang="ru-RU" sz="1600"/>
+                        <a:t>Критерий</a:t>
+                      </a:r>
+                    </a:p>
+                  </a:txBody>
+                  <a:tcPr marL="76200" marR="76200" marT="38100" marB="38100" anchor="ctr"/>
+                </a:tc>
+                <a:tc>
+                  <a:txBody>
+                    <a:bodyPr/>
+                    <a:lstStyle/>
+                    <a:p>
+                      <a:r>
+                        <a:rPr lang="en-US" sz="1600"/>
+                        <a:t>WireMock</a:t>
+                      </a:r>
+                    </a:p>
+                  </a:txBody>
+                  <a:tcPr marL="76200" marR="76200" marT="38100" marB="38100" anchor="ctr"/>
+                </a:tc>
+                <a:tc>
+                  <a:txBody>
+                    <a:bodyPr/>
+                    <a:lstStyle/>
+                    <a:p>
+                      <a:r>
+                        <a:rPr lang="en-US" sz="1600" dirty="0" err="1"/>
+                        <a:t>MockServer</a:t>
+                      </a:r>
+                      <a:endParaRPr lang="en-US" sz="1600" dirty="0"/>
+                    </a:p>
+                  </a:txBody>
+                  <a:tcPr marL="76200" marR="76200" marT="38100" marB="38100" anchor="ctr"/>
+                </a:tc>
+                <a:tc>
+                  <a:txBody>
+                    <a:bodyPr/>
+                    <a:lstStyle/>
+                    <a:p>
+                      <a:r>
+                        <a:rPr lang="en-US" sz="1600"/>
+                        <a:t>Apache Tomcat</a:t>
+                      </a:r>
+                    </a:p>
+                  </a:txBody>
+                  <a:tcPr marL="76200" marR="76200" marT="38100" marB="38100" anchor="ctr"/>
+                </a:tc>
+                <a:tc>
+                  <a:txBody>
+                    <a:bodyPr/>
+                    <a:lstStyle/>
+                    <a:p>
+                      <a:r>
+                        <a:rPr lang="ru-RU" sz="1600" b="1"/>
+                        <a:t>Разраб. система</a:t>
+                      </a:r>
+                      <a:endParaRPr lang="ru-RU" sz="1600"/>
+                    </a:p>
+                  </a:txBody>
+                  <a:tcPr marL="76200" marR="76200" marT="38100" marB="38100" anchor="ctr"/>
+                </a:tc>
+                <a:extLst>
+                  <a:ext uri="{0D108BD9-81ED-4DB2-BD59-A6C34878D82A}">
+                    <a16:rowId xmlns:a16="http://schemas.microsoft.com/office/drawing/2014/main" val="1836299685"/>
+                  </a:ext>
+                </a:extLst>
+              </a:tr>
+              <a:tr h="0">
+                <a:tc>
+                  <a:txBody>
+                    <a:bodyPr/>
+                    <a:lstStyle/>
+                    <a:p>
+                      <a:r>
+                        <a:rPr lang="ru-RU" sz="1600" dirty="0"/>
+                        <a:t>Управление JAR/WAR</a:t>
+                      </a:r>
+                    </a:p>
+                  </a:txBody>
+                  <a:tcPr marL="76200" marR="76200" marT="38100" marB="38100" anchor="ctr"/>
+                </a:tc>
+                <a:tc>
+                  <a:txBody>
+                    <a:bodyPr/>
+                    <a:lstStyle/>
+                    <a:p>
+                      <a:r>
+                        <a:rPr lang="ru-RU" sz="1600"/>
+                        <a:t>Нет</a:t>
+                      </a:r>
+                    </a:p>
+                  </a:txBody>
+                  <a:tcPr marL="76200" marR="76200" marT="38100" marB="38100" anchor="ctr"/>
+                </a:tc>
+                <a:tc>
+                  <a:txBody>
+                    <a:bodyPr/>
+                    <a:lstStyle/>
+                    <a:p>
+                      <a:r>
+                        <a:rPr lang="ru-RU" sz="1600"/>
+                        <a:t>Нет</a:t>
+                      </a:r>
+                    </a:p>
+                  </a:txBody>
+                  <a:tcPr marL="76200" marR="76200" marT="38100" marB="38100" anchor="ctr"/>
+                </a:tc>
+                <a:tc>
+                  <a:txBody>
+                    <a:bodyPr/>
+                    <a:lstStyle/>
+                    <a:p>
+                      <a:r>
+                        <a:rPr lang="ru-RU" sz="1600" dirty="0"/>
+                        <a:t>Да</a:t>
+                      </a:r>
+                    </a:p>
+                  </a:txBody>
+                  <a:tcPr marL="76200" marR="76200" marT="38100" marB="38100" anchor="ctr"/>
+                </a:tc>
+                <a:tc>
+                  <a:txBody>
+                    <a:bodyPr/>
+                    <a:lstStyle/>
+                    <a:p>
+                      <a:r>
+                        <a:rPr lang="ru-RU" sz="1600" b="1" dirty="0"/>
+                        <a:t>Да</a:t>
+                      </a:r>
+                      <a:endParaRPr lang="ru-RU" sz="1600" dirty="0"/>
+                    </a:p>
+                  </a:txBody>
+                  <a:tcPr marL="76200" marR="76200" marT="38100" marB="38100" anchor="ctr"/>
+                </a:tc>
+                <a:extLst>
+                  <a:ext uri="{0D108BD9-81ED-4DB2-BD59-A6C34878D82A}">
+                    <a16:rowId xmlns:a16="http://schemas.microsoft.com/office/drawing/2014/main" val="76040357"/>
+                  </a:ext>
+                </a:extLst>
+              </a:tr>
+              <a:tr h="296462">
+                <a:tc>
+                  <a:txBody>
+                    <a:bodyPr/>
+                    <a:lstStyle/>
+                    <a:p>
+                      <a:r>
+                        <a:rPr lang="ru-RU" sz="1600" dirty="0"/>
+                        <a:t>Централизованная </a:t>
+                      </a:r>
+                      <a:r>
+                        <a:rPr lang="ru-RU" sz="1600" dirty="0" err="1"/>
+                        <a:t>оркестрация</a:t>
+                      </a:r>
+                      <a:endParaRPr lang="ru-RU" sz="1600" dirty="0"/>
+                    </a:p>
+                  </a:txBody>
+                  <a:tcPr marL="76200" marR="76200" marT="38100" marB="38100" anchor="ctr"/>
+                </a:tc>
+                <a:tc>
+                  <a:txBody>
+                    <a:bodyPr/>
+                    <a:lstStyle/>
+                    <a:p>
+                      <a:r>
+                        <a:rPr lang="ru-RU" sz="1600" dirty="0"/>
+                        <a:t>Нет</a:t>
+                      </a:r>
+                    </a:p>
+                  </a:txBody>
+                  <a:tcPr marL="76200" marR="76200" marT="38100" marB="38100" anchor="ctr"/>
+                </a:tc>
+                <a:tc>
+                  <a:txBody>
+                    <a:bodyPr/>
+                    <a:lstStyle/>
+                    <a:p>
+                      <a:r>
+                        <a:rPr lang="ru-RU" sz="1600"/>
+                        <a:t>Нет</a:t>
+                      </a:r>
+                    </a:p>
+                  </a:txBody>
+                  <a:tcPr marL="76200" marR="76200" marT="38100" marB="38100" anchor="ctr"/>
+                </a:tc>
+                <a:tc>
+                  <a:txBody>
+                    <a:bodyPr/>
+                    <a:lstStyle/>
+                    <a:p>
+                      <a:r>
+                        <a:rPr lang="ru-RU" sz="1600" dirty="0"/>
+                        <a:t>Частично</a:t>
+                      </a:r>
+                    </a:p>
+                  </a:txBody>
+                  <a:tcPr marL="76200" marR="76200" marT="38100" marB="38100" anchor="ctr"/>
+                </a:tc>
+                <a:tc>
+                  <a:txBody>
+                    <a:bodyPr/>
+                    <a:lstStyle/>
+                    <a:p>
+                      <a:r>
+                        <a:rPr lang="ru-RU" sz="1600" b="1"/>
+                        <a:t>Да</a:t>
+                      </a:r>
+                      <a:endParaRPr lang="ru-RU" sz="1600"/>
+                    </a:p>
+                  </a:txBody>
+                  <a:tcPr marL="76200" marR="76200" marT="38100" marB="38100" anchor="ctr"/>
+                </a:tc>
+                <a:extLst>
+                  <a:ext uri="{0D108BD9-81ED-4DB2-BD59-A6C34878D82A}">
+                    <a16:rowId xmlns:a16="http://schemas.microsoft.com/office/drawing/2014/main" val="2754382769"/>
+                  </a:ext>
+                </a:extLst>
+              </a:tr>
+              <a:tr h="296462">
+                <a:tc>
+                  <a:txBody>
+                    <a:bodyPr/>
+                    <a:lstStyle/>
+                    <a:p>
+                      <a:r>
+                        <a:rPr lang="ru-RU" sz="1600"/>
+                        <a:t>Динамический </a:t>
+                      </a:r>
+                      <a:r>
+                        <a:rPr lang="en-US" sz="1600"/>
+                        <a:t>Rate Limiting</a:t>
+                      </a:r>
+                    </a:p>
+                  </a:txBody>
+                  <a:tcPr marL="76200" marR="76200" marT="38100" marB="38100" anchor="ctr"/>
+                </a:tc>
+                <a:tc>
+                  <a:txBody>
+                    <a:bodyPr/>
+                    <a:lstStyle/>
+                    <a:p>
+                      <a:r>
+                        <a:rPr lang="ru-RU" sz="1600" dirty="0"/>
+                        <a:t>Нет</a:t>
+                      </a:r>
+                    </a:p>
+                  </a:txBody>
+                  <a:tcPr marL="76200" marR="76200" marT="38100" marB="38100" anchor="ctr"/>
+                </a:tc>
+                <a:tc>
+                  <a:txBody>
+                    <a:bodyPr/>
+                    <a:lstStyle/>
+                    <a:p>
+                      <a:r>
+                        <a:rPr lang="ru-RU" sz="1600"/>
+                        <a:t>Нет</a:t>
+                      </a:r>
+                    </a:p>
+                  </a:txBody>
+                  <a:tcPr marL="76200" marR="76200" marT="38100" marB="38100" anchor="ctr"/>
+                </a:tc>
+                <a:tc>
+                  <a:txBody>
+                    <a:bodyPr/>
+                    <a:lstStyle/>
+                    <a:p>
+                      <a:r>
+                        <a:rPr lang="ru-RU" sz="1600"/>
+                        <a:t>Нет</a:t>
+                      </a:r>
+                    </a:p>
+                  </a:txBody>
+                  <a:tcPr marL="76200" marR="76200" marT="38100" marB="38100" anchor="ctr"/>
+                </a:tc>
+                <a:tc>
+                  <a:txBody>
+                    <a:bodyPr/>
+                    <a:lstStyle/>
+                    <a:p>
+                      <a:r>
+                        <a:rPr lang="ru-RU" sz="1600" b="1"/>
+                        <a:t>Да</a:t>
+                      </a:r>
+                      <a:endParaRPr lang="ru-RU" sz="1600"/>
+                    </a:p>
+                  </a:txBody>
+                  <a:tcPr marL="76200" marR="76200" marT="38100" marB="38100" anchor="ctr"/>
+                </a:tc>
+                <a:extLst>
+                  <a:ext uri="{0D108BD9-81ED-4DB2-BD59-A6C34878D82A}">
+                    <a16:rowId xmlns:a16="http://schemas.microsoft.com/office/drawing/2014/main" val="2709741136"/>
+                  </a:ext>
+                </a:extLst>
+              </a:tr>
+              <a:tr h="173788">
+                <a:tc>
+                  <a:txBody>
+                    <a:bodyPr/>
+                    <a:lstStyle/>
+                    <a:p>
+                      <a:r>
+                        <a:rPr lang="ru-RU" sz="1600"/>
+                        <a:t>Потребление ресурсов</a:t>
+                      </a:r>
+                    </a:p>
+                  </a:txBody>
+                  <a:tcPr marL="76200" marR="76200" marT="38100" marB="38100" anchor="ctr"/>
+                </a:tc>
+                <a:tc>
+                  <a:txBody>
+                    <a:bodyPr/>
+                    <a:lstStyle/>
+                    <a:p>
+                      <a:r>
+                        <a:rPr lang="ru-RU" sz="1600"/>
+                        <a:t>Высокое (</a:t>
+                      </a:r>
+                      <a:r>
+                        <a:rPr lang="en-US" sz="1600"/>
+                        <a:t>JVM)</a:t>
+                      </a:r>
+                    </a:p>
+                  </a:txBody>
+                  <a:tcPr marL="76200" marR="76200" marT="38100" marB="38100" anchor="ctr"/>
+                </a:tc>
+                <a:tc>
+                  <a:txBody>
+                    <a:bodyPr/>
+                    <a:lstStyle/>
+                    <a:p>
+                      <a:r>
+                        <a:rPr lang="ru-RU" sz="1600"/>
+                        <a:t>Высокое (</a:t>
+                      </a:r>
+                      <a:r>
+                        <a:rPr lang="en-US" sz="1600"/>
+                        <a:t>JVM)</a:t>
+                      </a:r>
+                    </a:p>
+                  </a:txBody>
+                  <a:tcPr marL="76200" marR="76200" marT="38100" marB="38100" anchor="ctr"/>
+                </a:tc>
+                <a:tc>
+                  <a:txBody>
+                    <a:bodyPr/>
+                    <a:lstStyle/>
+                    <a:p>
+                      <a:r>
+                        <a:rPr lang="ru-RU" sz="1600"/>
+                        <a:t>Высокое</a:t>
+                      </a:r>
+                    </a:p>
+                  </a:txBody>
+                  <a:tcPr marL="76200" marR="76200" marT="38100" marB="38100" anchor="ctr"/>
+                </a:tc>
+                <a:tc>
+                  <a:txBody>
+                    <a:bodyPr/>
+                    <a:lstStyle/>
+                    <a:p>
+                      <a:r>
+                        <a:rPr lang="ru-RU" sz="1600" b="1"/>
+                        <a:t>Низкое</a:t>
+                      </a:r>
+                      <a:endParaRPr lang="ru-RU" sz="1600"/>
+                    </a:p>
+                  </a:txBody>
+                  <a:tcPr marL="76200" marR="76200" marT="38100" marB="38100" anchor="ctr"/>
+                </a:tc>
+                <a:extLst>
+                  <a:ext uri="{0D108BD9-81ED-4DB2-BD59-A6C34878D82A}">
+                    <a16:rowId xmlns:a16="http://schemas.microsoft.com/office/drawing/2014/main" val="1334642467"/>
+                  </a:ext>
+                </a:extLst>
+              </a:tr>
+              <a:tr h="451845">
+                <a:tc>
+                  <a:txBody>
+                    <a:bodyPr/>
+                    <a:lstStyle/>
+                    <a:p>
+                      <a:r>
+                        <a:rPr lang="ru-RU" sz="1600"/>
+                        <a:t>Совместимость с </a:t>
+                      </a:r>
+                      <a:r>
+                        <a:rPr lang="en-US" sz="1600"/>
+                        <a:t>Astra Linux</a:t>
+                      </a:r>
+                    </a:p>
+                  </a:txBody>
+                  <a:tcPr marL="76200" marR="76200" marT="38100" marB="38100" anchor="ctr"/>
+                </a:tc>
+                <a:tc>
+                  <a:txBody>
+                    <a:bodyPr/>
+                    <a:lstStyle/>
+                    <a:p>
+                      <a:r>
+                        <a:rPr lang="ru-RU" sz="1600"/>
+                        <a:t>Частично</a:t>
+                      </a:r>
+                    </a:p>
+                  </a:txBody>
+                  <a:tcPr marL="76200" marR="76200" marT="38100" marB="38100" anchor="ctr"/>
+                </a:tc>
+                <a:tc>
+                  <a:txBody>
+                    <a:bodyPr/>
+                    <a:lstStyle/>
+                    <a:p>
+                      <a:r>
+                        <a:rPr lang="ru-RU" sz="1600"/>
+                        <a:t>Частично</a:t>
+                      </a:r>
+                    </a:p>
+                  </a:txBody>
+                  <a:tcPr marL="76200" marR="76200" marT="38100" marB="38100" anchor="ctr"/>
+                </a:tc>
+                <a:tc>
+                  <a:txBody>
+                    <a:bodyPr/>
+                    <a:lstStyle/>
+                    <a:p>
+                      <a:r>
+                        <a:rPr lang="ru-RU" sz="1600"/>
+                        <a:t>Частично</a:t>
+                      </a:r>
+                    </a:p>
+                  </a:txBody>
+                  <a:tcPr marL="76200" marR="76200" marT="38100" marB="38100" anchor="ctr"/>
+                </a:tc>
+                <a:tc>
+                  <a:txBody>
+                    <a:bodyPr/>
+                    <a:lstStyle/>
+                    <a:p>
+                      <a:r>
+                        <a:rPr lang="ru-RU" sz="1600" b="1" dirty="0"/>
+                        <a:t>Да</a:t>
+                      </a:r>
+                      <a:endParaRPr lang="ru-RU" sz="1600" dirty="0"/>
+                    </a:p>
+                  </a:txBody>
+                  <a:tcPr marL="76200" marR="76200" marT="38100" marB="38100" anchor="ctr"/>
+                </a:tc>
+                <a:extLst>
+                  <a:ext uri="{0D108BD9-81ED-4DB2-BD59-A6C34878D82A}">
+                    <a16:rowId xmlns:a16="http://schemas.microsoft.com/office/drawing/2014/main" val="436006957"/>
+                  </a:ext>
+                </a:extLst>
+              </a:tr>
+            </a:tbl>
+          </a:graphicData>
+        </a:graphic>
+      </p:graphicFrame>
     </p:spTree>
     <p:extLst>
       <p:ext uri="{BB962C8B-B14F-4D97-AF65-F5344CB8AC3E}">
-        <p14:creationId xmlns:p14="http://schemas.microsoft.com/office/powerpoint/2010/main" val="3763263770"/>
+        <p14:creationId xmlns:p14="http://schemas.microsoft.com/office/powerpoint/2010/main" val="4110901708"/>
       </p:ext>
     </p:extLst>
   </p:cSld>
@@ -6757,7 +9321,7 @@
         </p:nvSpPr>
         <p:spPr>
           <a:xfrm>
-            <a:off x="11463007" y="6134487"/>
+            <a:off x="11580453" y="6171414"/>
             <a:ext cx="409963" cy="610899"/>
           </a:xfrm>
         </p:spPr>
@@ -6775,50 +9339,7 @@
       </p:sp>
       <p:sp>
         <p:nvSpPr>
-          <p:cNvPr id="11" name="TextBox 10">
-            <a:extLst>
-              <a:ext uri="{FF2B5EF4-FFF2-40B4-BE49-F238E27FC236}">
-                <a16:creationId xmlns:a16="http://schemas.microsoft.com/office/drawing/2014/main" id="{2169E9A5-0F30-46EE-BA6A-78421B32F98B}"/>
-              </a:ext>
-            </a:extLst>
-          </p:cNvPr>
-          <p:cNvSpPr txBox="1"/>
-          <p:nvPr/>
-        </p:nvSpPr>
-        <p:spPr>
-          <a:xfrm>
-            <a:off x="457200" y="244509"/>
-            <a:ext cx="5381538" cy="584775"/>
-          </a:xfrm>
-          <a:prstGeom prst="rect">
-            <a:avLst/>
-          </a:prstGeom>
-          <a:noFill/>
-        </p:spPr>
-        <p:txBody>
-          <a:bodyPr wrap="square">
-            <a:spAutoFit/>
-          </a:bodyPr>
-          <a:lstStyle/>
-          <a:p>
-            <a:r>
-              <a:rPr lang="ru-RU" sz="3200" dirty="0">
-                <a:solidFill>
-                  <a:prstClr val="black"/>
-                </a:solidFill>
-                <a:latin typeface="Gilroy Bold" panose="00000800000000000000" pitchFamily="2" charset="-52"/>
-                <a:ea typeface="+mj-ea"/>
-                <a:cs typeface="+mj-cs"/>
-              </a:rPr>
-              <a:t>Заголовок</a:t>
-            </a:r>
-            <a:endParaRPr lang="ru-RU" dirty="0"/>
-          </a:p>
-        </p:txBody>
-      </p:sp>
-      <p:sp>
-        <p:nvSpPr>
-          <p:cNvPr id="8" name="TextBox 7">
+          <p:cNvPr id="7" name="TextBox 6">
             <a:extLst>
               <a:ext uri="{FF2B5EF4-FFF2-40B4-BE49-F238E27FC236}">
                 <a16:creationId xmlns:a16="http://schemas.microsoft.com/office/drawing/2014/main" id="{D7E8C6BD-D95E-4822-B09A-435E67225EB0}"/>
@@ -6830,8 +9351,8 @@
         </p:nvSpPr>
         <p:spPr>
           <a:xfrm>
-            <a:off x="319030" y="6241022"/>
-            <a:ext cx="10916724" cy="486608"/>
+            <a:off x="339755" y="6178253"/>
+            <a:ext cx="10798742" cy="692305"/>
           </a:xfrm>
           <a:prstGeom prst="rect">
             <a:avLst/>
@@ -6862,7 +9383,7 @@
               <a:defRPr/>
             </a:pPr>
             <a:r>
-              <a:rPr kumimoji="0" lang="ru-RU" sz="1100" b="0" i="0" u="none" strike="noStrike" kern="1200" cap="none" spc="0" normalizeH="0" baseline="0" noProof="0" dirty="0">
+              <a:rPr kumimoji="0" lang="ru-RU" sz="1100" i="0" u="none" strike="noStrike" kern="1200" cap="none" spc="0" normalizeH="0" baseline="0" noProof="0" dirty="0">
                 <a:ln>
                   <a:noFill/>
                 </a:ln>
@@ -6874,7 +9395,31 @@
                 <a:uFillTx/>
                 <a:latin typeface="Gilroy Medium" panose="00000600000000000000" charset="-52"/>
               </a:rPr>
-              <a:t>ИВАНОВ ИВАН ИВАНОВИЧ,  201-321,  04.06.2024</a:t>
+              <a:t>МЕДВЕДЕВ КЛИМ НИКОЛАЕВИЧ, 221-329</a:t>
+            </a:r>
+            <a:r>
+              <a:rPr lang="ru-RU" sz="1100" dirty="0">
+                <a:solidFill>
+                  <a:prstClr val="black"/>
+                </a:solidFill>
+                <a:latin typeface="Gilroy Medium" panose="00000600000000000000" charset="-52"/>
+              </a:rPr>
+              <a:t>,</a:t>
+            </a:r>
+            <a:r>
+              <a:rPr kumimoji="0" lang="ru-RU" sz="1100" i="0" u="none" strike="noStrike" kern="1200" cap="none" spc="0" normalizeH="0" noProof="0" dirty="0">
+                <a:ln>
+                  <a:noFill/>
+                </a:ln>
+                <a:solidFill>
+                  <a:prstClr val="black"/>
+                </a:solidFill>
+                <a:effectLst/>
+                <a:uLnTx/>
+                <a:uFillTx/>
+                <a:latin typeface="Gilroy Medium" panose="00000600000000000000" charset="-52"/>
+              </a:rPr>
+              <a:t> 04.06.2026</a:t>
             </a:r>
           </a:p>
           <a:p>
@@ -6896,7 +9441,7 @@
               <a:defRPr/>
             </a:pPr>
             <a:r>
-              <a:rPr kumimoji="0" lang="ru-RU" sz="1100" b="0" i="0" u="none" strike="noStrike" kern="1200" cap="none" spc="0" normalizeH="0" baseline="0" noProof="0" dirty="0">
+              <a:rPr kumimoji="0" lang="ru-RU" sz="1100" i="0" u="none" strike="noStrike" kern="1200" cap="none" spc="0" normalizeH="0" baseline="0" noProof="0" dirty="0">
                 <a:ln>
                   <a:noFill/>
                 </a:ln>
@@ -6908,8 +9453,27 @@
                 <a:uFillTx/>
                 <a:latin typeface="Gilroy Medium" panose="00000600000000000000" charset="-52"/>
               </a:rPr>
-              <a:t> РАЗРАБОТКА ВЕБ-ПРИЛОЖЕНИЯ ДЛЯ БРОНИРОВАНИЯ ТЕННИСНЫХ КОРТОВ В СПРОТКЛУБЕ СМЭШ</a:t>
-            </a:r>
+              <a:t>РАЗРАБОТКА СИСТЕМЫ ДЛЯ ПРОКСИРОВАНИЯ И МОНИТОРИНГА ИМИТАЦИОННЫХ СЕРВИСОВ В СРЕДЕ НАГРУЗОЧНОГО ТЕСТИРОВАНИЯ</a:t>
+            </a:r>
+          </a:p>
+          <a:p>
+            <a:pPr marL="0" marR="0" lvl="0" indent="0" algn="l" defTabSz="914400" rtl="0" eaLnBrk="1" fontAlgn="auto" latinLnBrk="0" hangingPunct="1">
+              <a:lnSpc>
+                <a:spcPts val="1600"/>
+              </a:lnSpc>
+              <a:spcBef>
+                <a:spcPts val="0"/>
+              </a:spcBef>
+              <a:spcAft>
+                <a:spcPts val="0"/>
+              </a:spcAft>
+              <a:buClrTx/>
+              <a:buSzTx/>
+              <a:buFontTx/>
+              <a:buNone/>
+              <a:tabLst/>
+              <a:defRPr/>
+            </a:pPr>
             <a:endParaRPr kumimoji="0" lang="ru-RU" sz="1100" i="0" u="none" strike="noStrike" kern="1200" cap="none" spc="0" normalizeH="0" baseline="0" noProof="0" dirty="0">
               <a:ln>
                 <a:noFill/>
@@ -6925,10 +9489,171 @@
           </a:p>
         </p:txBody>
       </p:sp>
+      <p:sp>
+        <p:nvSpPr>
+          <p:cNvPr id="11" name="TextBox 10">
+            <a:extLst>
+              <a:ext uri="{FF2B5EF4-FFF2-40B4-BE49-F238E27FC236}">
+                <a16:creationId xmlns:a16="http://schemas.microsoft.com/office/drawing/2014/main" id="{2169E9A5-0F30-46EE-BA6A-78421B32F98B}"/>
+              </a:ext>
+            </a:extLst>
+          </p:cNvPr>
+          <p:cNvSpPr txBox="1"/>
+          <p:nvPr/>
+        </p:nvSpPr>
+        <p:spPr>
+          <a:xfrm>
+            <a:off x="339755" y="536629"/>
+            <a:ext cx="10282518" cy="584775"/>
+          </a:xfrm>
+          <a:prstGeom prst="rect">
+            <a:avLst/>
+          </a:prstGeom>
+          <a:noFill/>
+        </p:spPr>
+        <p:txBody>
+          <a:bodyPr wrap="square">
+            <a:spAutoFit/>
+          </a:bodyPr>
+          <a:lstStyle/>
+          <a:p>
+            <a:r>
+              <a:rPr lang="ru-RU" sz="3200" dirty="0">
+                <a:latin typeface="Gilroy Bold" panose="00000800000000000000" pitchFamily="2" charset="-52"/>
+                <a:ea typeface="+mj-ea"/>
+                <a:cs typeface="+mj-cs"/>
+              </a:rPr>
+              <a:t>Архитектура и технологический стек</a:t>
+            </a:r>
+          </a:p>
+        </p:txBody>
+      </p:sp>
+      <p:sp>
+        <p:nvSpPr>
+          <p:cNvPr id="2" name="TextBox 1">
+            <a:extLst>
+              <a:ext uri="{FF2B5EF4-FFF2-40B4-BE49-F238E27FC236}">
+                <a16:creationId xmlns:a16="http://schemas.microsoft.com/office/drawing/2014/main" id="{29A6AEEB-6479-6AF6-ED4B-A834C62D6DE6}"/>
+              </a:ext>
+            </a:extLst>
+          </p:cNvPr>
+          <p:cNvSpPr txBox="1"/>
+          <p:nvPr/>
+        </p:nvSpPr>
+        <p:spPr>
+          <a:xfrm>
+            <a:off x="339755" y="1475040"/>
+            <a:ext cx="11344245" cy="1150571"/>
+          </a:xfrm>
+          <a:prstGeom prst="rect">
+            <a:avLst/>
+          </a:prstGeom>
+          <a:noFill/>
+        </p:spPr>
+        <p:txBody>
+          <a:bodyPr wrap="square" rtlCol="0">
+            <a:spAutoFit/>
+          </a:bodyPr>
+          <a:lstStyle/>
+          <a:p>
+            <a:pPr>
+              <a:lnSpc>
+                <a:spcPct val="150000"/>
+              </a:lnSpc>
+            </a:pPr>
+            <a:r>
+              <a:rPr lang="ru-RU" sz="1600" dirty="0"/>
+              <a:t>Выбрана монолитная архитектура с выраженной внутренней модульностью. Управление удалёнными хостами — через SSH/SFTP без установки агентов.</a:t>
+            </a:r>
+          </a:p>
+          <a:p>
+            <a:pPr>
+              <a:lnSpc>
+                <a:spcPct val="150000"/>
+              </a:lnSpc>
+            </a:pPr>
+            <a:r>
+              <a:rPr lang="ru-RU" sz="1600" b="1" dirty="0"/>
+              <a:t>Технологический стек:</a:t>
+            </a:r>
+            <a:r>
+              <a:rPr lang="ru-RU" sz="1600" dirty="0"/>
+              <a:t> Python + </a:t>
+            </a:r>
+            <a:r>
+              <a:rPr lang="ru-RU" sz="1600" dirty="0" err="1"/>
+              <a:t>asyncio</a:t>
+            </a:r>
+            <a:r>
+              <a:rPr lang="ru-RU" sz="1600" dirty="0"/>
+              <a:t> / </a:t>
+            </a:r>
+            <a:r>
+              <a:rPr lang="ru-RU" sz="1600" dirty="0" err="1"/>
+              <a:t>FastAPI</a:t>
+            </a:r>
+            <a:r>
+              <a:rPr lang="ru-RU" sz="1600" dirty="0"/>
+              <a:t> + </a:t>
+            </a:r>
+            <a:r>
+              <a:rPr lang="ru-RU" sz="1600" dirty="0" err="1"/>
+              <a:t>Uvicorn</a:t>
+            </a:r>
+            <a:r>
+              <a:rPr lang="ru-RU" sz="1600" dirty="0"/>
+              <a:t> / </a:t>
+            </a:r>
+            <a:r>
+              <a:rPr lang="ru-RU" sz="1600" dirty="0" err="1"/>
+              <a:t>Redis</a:t>
+            </a:r>
+            <a:r>
+              <a:rPr lang="ru-RU" sz="1600" dirty="0"/>
+              <a:t> AOF / Astra Linux</a:t>
+            </a:r>
+          </a:p>
+        </p:txBody>
+      </p:sp>
+      <p:pic>
+        <p:nvPicPr>
+          <p:cNvPr id="8" name="Рисунок 7" descr="Изображение выглядит как текст, снимок экрана, Шрифт, диаграмма&#10;&#10;Контент, сгенерированный ИИ, может содержать ошибки.">
+            <a:extLst>
+              <a:ext uri="{FF2B5EF4-FFF2-40B4-BE49-F238E27FC236}">
+                <a16:creationId xmlns:a16="http://schemas.microsoft.com/office/drawing/2014/main" id="{891AAAA8-EB26-EB61-1803-37F426256D47}"/>
+              </a:ext>
+            </a:extLst>
+          </p:cNvPr>
+          <p:cNvPicPr>
+            <a:picLocks noChangeAspect="1"/>
+          </p:cNvPicPr>
+          <p:nvPr/>
+        </p:nvPicPr>
+        <p:blipFill>
+          <a:blip r:embed="rId3" cstate="print">
+            <a:extLst>
+              <a:ext uri="{28A0092B-C50C-407E-A947-70E740481C1C}">
+                <a14:useLocalDpi xmlns:a14="http://schemas.microsoft.com/office/drawing/2010/main" val="0"/>
+              </a:ext>
+            </a:extLst>
+          </a:blip>
+          <a:srcRect l="1826" t="2623" r="1301" b="2469"/>
+          <a:stretch/>
+        </p:blipFill>
+        <p:spPr>
+          <a:xfrm>
+            <a:off x="4135718" y="2625611"/>
+            <a:ext cx="5693932" cy="3715138"/>
+          </a:xfrm>
+          <a:prstGeom prst="rect">
+            <a:avLst/>
+          </a:prstGeom>
+        </p:spPr>
+      </p:pic>
     </p:spTree>
     <p:extLst>
       <p:ext uri="{BB962C8B-B14F-4D97-AF65-F5344CB8AC3E}">
-        <p14:creationId xmlns:p14="http://schemas.microsoft.com/office/powerpoint/2010/main" val="9086349"/>
+        <p14:creationId xmlns:p14="http://schemas.microsoft.com/office/powerpoint/2010/main" val="2239100926"/>
       </p:ext>
     </p:extLst>
   </p:cSld>
@@ -7018,7 +9743,7 @@
         </p:nvSpPr>
         <p:spPr>
           <a:xfrm>
-            <a:off x="11483431" y="6171414"/>
+            <a:off x="11580453" y="6171414"/>
             <a:ext cx="409963" cy="610899"/>
           </a:xfrm>
         </p:spPr>
@@ -7036,73 +9761,7 @@
       </p:sp>
       <p:sp>
         <p:nvSpPr>
-          <p:cNvPr id="11" name="TextBox 10">
-            <a:extLst>
-              <a:ext uri="{FF2B5EF4-FFF2-40B4-BE49-F238E27FC236}">
-                <a16:creationId xmlns:a16="http://schemas.microsoft.com/office/drawing/2014/main" id="{2169E9A5-0F30-46EE-BA6A-78421B32F98B}"/>
-              </a:ext>
-            </a:extLst>
-          </p:cNvPr>
-          <p:cNvSpPr txBox="1"/>
-          <p:nvPr/>
-        </p:nvSpPr>
-        <p:spPr>
-          <a:xfrm>
-            <a:off x="313491" y="512061"/>
-            <a:ext cx="11169940" cy="823239"/>
-          </a:xfrm>
-          <a:prstGeom prst="rect">
-            <a:avLst/>
-          </a:prstGeom>
-          <a:noFill/>
-        </p:spPr>
-        <p:txBody>
-          <a:bodyPr wrap="square">
-            <a:spAutoFit/>
-          </a:bodyPr>
-          <a:lstStyle/>
-          <a:p>
-            <a:pPr>
-              <a:lnSpc>
-                <a:spcPts val="2800"/>
-              </a:lnSpc>
-            </a:pPr>
-            <a:r>
-              <a:rPr lang="ru-RU" sz="3200" dirty="0">
-                <a:solidFill>
-                  <a:prstClr val="black"/>
-                </a:solidFill>
-                <a:latin typeface="Gilroy Bold" panose="00000800000000000000" pitchFamily="2" charset="-52"/>
-                <a:ea typeface="+mj-ea"/>
-                <a:cs typeface="+mj-cs"/>
-              </a:rPr>
-              <a:t>Программные и технические средства </a:t>
-            </a:r>
-          </a:p>
-          <a:p>
-            <a:pPr>
-              <a:lnSpc>
-                <a:spcPts val="2800"/>
-              </a:lnSpc>
-            </a:pPr>
-            <a:r>
-              <a:rPr lang="ru-RU" sz="3200" dirty="0">
-                <a:solidFill>
-                  <a:prstClr val="black"/>
-                </a:solidFill>
-                <a:latin typeface="Gilroy Bold" panose="00000800000000000000" pitchFamily="2" charset="-52"/>
-                <a:ea typeface="+mj-ea"/>
-                <a:cs typeface="+mj-cs"/>
-              </a:rPr>
-              <a:t>разработки</a:t>
-            </a:r>
-            <a:endParaRPr lang="ru-RU" dirty="0"/>
-          </a:p>
-        </p:txBody>
-      </p:sp>
-      <p:sp>
-        <p:nvSpPr>
-          <p:cNvPr id="8" name="TextBox 7">
+          <p:cNvPr id="7" name="TextBox 6">
             <a:extLst>
               <a:ext uri="{FF2B5EF4-FFF2-40B4-BE49-F238E27FC236}">
                 <a16:creationId xmlns:a16="http://schemas.microsoft.com/office/drawing/2014/main" id="{D7E8C6BD-D95E-4822-B09A-435E67225EB0}"/>
@@ -7114,8 +9773,8 @@
         </p:nvSpPr>
         <p:spPr>
           <a:xfrm>
-            <a:off x="292519" y="6236733"/>
-            <a:ext cx="10916724" cy="487121"/>
+            <a:off x="339755" y="6178253"/>
+            <a:ext cx="10798742" cy="692305"/>
           </a:xfrm>
           <a:prstGeom prst="rect">
             <a:avLst/>
@@ -7146,7 +9805,7 @@
               <a:defRPr/>
             </a:pPr>
             <a:r>
-              <a:rPr kumimoji="0" lang="ru-RU" sz="1100" b="0" i="0" u="none" strike="noStrike" kern="1200" cap="none" spc="0" normalizeH="0" baseline="0" noProof="0" dirty="0">
+              <a:rPr kumimoji="0" lang="ru-RU" sz="1100" i="0" u="none" strike="noStrike" kern="1200" cap="none" spc="0" normalizeH="0" baseline="0" noProof="0" dirty="0">
                 <a:ln>
                   <a:noFill/>
                 </a:ln>
@@ -7158,7 +9817,31 @@
                 <a:uFillTx/>
                 <a:latin typeface="Gilroy Medium" panose="00000600000000000000" charset="-52"/>
               </a:rPr>
-              <a:t>ИВАНОВ ИВАН ИВАНОВИЧ,  201-321,  04.06.2024</a:t>
+              <a:t>МЕДВЕДЕВ КЛИМ НИКОЛАЕВИЧ, 221-329</a:t>
+            </a:r>
+            <a:r>
+              <a:rPr lang="ru-RU" sz="1100" dirty="0">
+                <a:solidFill>
+                  <a:prstClr val="black"/>
+                </a:solidFill>
+                <a:latin typeface="Gilroy Medium" panose="00000600000000000000" charset="-52"/>
+              </a:rPr>
+              <a:t>,</a:t>
+            </a:r>
+            <a:r>
+              <a:rPr kumimoji="0" lang="ru-RU" sz="1100" i="0" u="none" strike="noStrike" kern="1200" cap="none" spc="0" normalizeH="0" noProof="0" dirty="0">
+                <a:ln>
+                  <a:noFill/>
+                </a:ln>
+                <a:solidFill>
+                  <a:prstClr val="black"/>
+                </a:solidFill>
+                <a:effectLst/>
+                <a:uLnTx/>
+                <a:uFillTx/>
+                <a:latin typeface="Gilroy Medium" panose="00000600000000000000" charset="-52"/>
+              </a:rPr>
+              <a:t> 04.06.2026</a:t>
             </a:r>
           </a:p>
           <a:p>
@@ -7180,7 +9863,7 @@
               <a:defRPr/>
             </a:pPr>
             <a:r>
-              <a:rPr kumimoji="0" lang="ru-RU" sz="1100" b="0" i="0" u="none" strike="noStrike" kern="1200" cap="none" spc="0" normalizeH="0" baseline="0" noProof="0" dirty="0">
+              <a:rPr kumimoji="0" lang="ru-RU" sz="1100" i="0" u="none" strike="noStrike" kern="1200" cap="none" spc="0" normalizeH="0" baseline="0" noProof="0" dirty="0">
                 <a:ln>
                   <a:noFill/>
                 </a:ln>
@@ -7192,8 +9875,27 @@
                 <a:uFillTx/>
                 <a:latin typeface="Gilroy Medium" panose="00000600000000000000" charset="-52"/>
               </a:rPr>
-              <a:t>РАЗРАБОТКА ВЕБ-ПРИЛОЖЕНИЯ ДЛЯ БРОНИРОВАНИЯ ТЕННИСНЫХ КОРТОВ В СПРОТКЛУБЕ СМЭШ</a:t>
-            </a:r>
+              <a:t>РАЗРАБОТКА СИСТЕМЫ ДЛЯ ПРОКСИРОВАНИЯ И МОНИТОРИНГА ИМИТАЦИОННЫХ СЕРВИСОВ В СРЕДЕ НАГРУЗОЧНОГО ТЕСТИРОВАНИЯ</a:t>
+            </a:r>
+          </a:p>
+          <a:p>
+            <a:pPr marL="0" marR="0" lvl="0" indent="0" algn="l" defTabSz="914400" rtl="0" eaLnBrk="1" fontAlgn="auto" latinLnBrk="0" hangingPunct="1">
+              <a:lnSpc>
+                <a:spcPts val="1600"/>
+              </a:lnSpc>
+              <a:spcBef>
+                <a:spcPts val="0"/>
+              </a:spcBef>
+              <a:spcAft>
+                <a:spcPts val="0"/>
+              </a:spcAft>
+              <a:buClrTx/>
+              <a:buSzTx/>
+              <a:buFontTx/>
+              <a:buNone/>
+              <a:tabLst/>
+              <a:defRPr/>
+            </a:pPr>
             <a:endParaRPr kumimoji="0" lang="ru-RU" sz="1100" i="0" u="none" strike="noStrike" kern="1200" cap="none" spc="0" normalizeH="0" baseline="0" noProof="0" dirty="0">
               <a:ln>
                 <a:noFill/>
@@ -7209,10 +9911,128 @@
           </a:p>
         </p:txBody>
       </p:sp>
+      <p:sp>
+        <p:nvSpPr>
+          <p:cNvPr id="11" name="TextBox 10">
+            <a:extLst>
+              <a:ext uri="{FF2B5EF4-FFF2-40B4-BE49-F238E27FC236}">
+                <a16:creationId xmlns:a16="http://schemas.microsoft.com/office/drawing/2014/main" id="{2169E9A5-0F30-46EE-BA6A-78421B32F98B}"/>
+              </a:ext>
+            </a:extLst>
+          </p:cNvPr>
+          <p:cNvSpPr txBox="1"/>
+          <p:nvPr/>
+        </p:nvSpPr>
+        <p:spPr>
+          <a:xfrm>
+            <a:off x="457200" y="537255"/>
+            <a:ext cx="9152965" cy="584775"/>
+          </a:xfrm>
+          <a:prstGeom prst="rect">
+            <a:avLst/>
+          </a:prstGeom>
+          <a:noFill/>
+        </p:spPr>
+        <p:txBody>
+          <a:bodyPr wrap="square">
+            <a:spAutoFit/>
+          </a:bodyPr>
+          <a:lstStyle/>
+          <a:p>
+            <a:r>
+              <a:rPr lang="ru-RU" sz="3200" dirty="0">
+                <a:latin typeface="Gilroy Bold" panose="00000800000000000000" pitchFamily="2" charset="-52"/>
+                <a:ea typeface="+mj-ea"/>
+                <a:cs typeface="+mj-cs"/>
+              </a:rPr>
+              <a:t>Структуры данных</a:t>
+            </a:r>
+          </a:p>
+        </p:txBody>
+      </p:sp>
+      <p:sp>
+        <p:nvSpPr>
+          <p:cNvPr id="2" name="TextBox 1">
+            <a:extLst>
+              <a:ext uri="{FF2B5EF4-FFF2-40B4-BE49-F238E27FC236}">
+                <a16:creationId xmlns:a16="http://schemas.microsoft.com/office/drawing/2014/main" id="{29A6AEEB-6479-6AF6-ED4B-A834C62D6DE6}"/>
+              </a:ext>
+            </a:extLst>
+          </p:cNvPr>
+          <p:cNvSpPr txBox="1"/>
+          <p:nvPr/>
+        </p:nvSpPr>
+        <p:spPr>
+          <a:xfrm>
+            <a:off x="339755" y="1411698"/>
+            <a:ext cx="11344245" cy="1077218"/>
+          </a:xfrm>
+          <a:prstGeom prst="rect">
+            <a:avLst/>
+          </a:prstGeom>
+          <a:noFill/>
+        </p:spPr>
+        <p:txBody>
+          <a:bodyPr wrap="square" rtlCol="0">
+            <a:spAutoFit/>
+          </a:bodyPr>
+          <a:lstStyle/>
+          <a:p>
+            <a:r>
+              <a:rPr lang="ru-RU" sz="1600" dirty="0"/>
+              <a:t>Для каждого объекта системы используется </a:t>
+            </a:r>
+            <a:r>
+              <a:rPr lang="ru-RU" sz="1600" dirty="0" err="1"/>
+              <a:t>Hash</a:t>
+            </a:r>
+            <a:r>
+              <a:rPr lang="ru-RU" sz="1600" dirty="0"/>
+              <a:t>-запись — позволяет читать конфигурацию целиком за одну операцию HGETALL и обновлять отдельные поля через HSET без перезаписи всей записи. Бинарный файл заглушки хранится только на целевом хосте — передаётся по SFTP при регистрации и немедленно удаляется с управляющего сервера.</a:t>
+            </a:r>
+          </a:p>
+        </p:txBody>
+      </p:sp>
+      <p:pic>
+        <p:nvPicPr>
+          <p:cNvPr id="8" name="Рисунок 7" descr="Изображение выглядит как текст, снимок экрана, число, программное обеспечение&#10;&#10;Контент, сгенерированный ИИ, может содержать ошибки.">
+            <a:extLst>
+              <a:ext uri="{FF2B5EF4-FFF2-40B4-BE49-F238E27FC236}">
+                <a16:creationId xmlns:a16="http://schemas.microsoft.com/office/drawing/2014/main" id="{AD97ABA3-4301-9AF9-6B01-C31A20F5D3B9}"/>
+              </a:ext>
+            </a:extLst>
+          </p:cNvPr>
+          <p:cNvPicPr>
+            <a:picLocks noChangeAspect="1"/>
+          </p:cNvPicPr>
+          <p:nvPr/>
+        </p:nvPicPr>
+        <p:blipFill>
+          <a:blip r:embed="rId3">
+            <a:extLst>
+              <a:ext uri="{28A0092B-C50C-407E-A947-70E740481C1C}">
+                <a14:useLocalDpi xmlns:a14="http://schemas.microsoft.com/office/drawing/2010/main" val="0"/>
+              </a:ext>
+            </a:extLst>
+          </a:blip>
+          <a:stretch>
+            <a:fillRect/>
+          </a:stretch>
+        </p:blipFill>
+        <p:spPr>
+          <a:xfrm>
+            <a:off x="3372660" y="2566796"/>
+            <a:ext cx="5446680" cy="3604577"/>
+          </a:xfrm>
+          <a:prstGeom prst="rect">
+            <a:avLst/>
+          </a:prstGeom>
+        </p:spPr>
+      </p:pic>
     </p:spTree>
     <p:extLst>
       <p:ext uri="{BB962C8B-B14F-4D97-AF65-F5344CB8AC3E}">
-        <p14:creationId xmlns:p14="http://schemas.microsoft.com/office/powerpoint/2010/main" val="1541201585"/>
+        <p14:creationId xmlns:p14="http://schemas.microsoft.com/office/powerpoint/2010/main" val="2292221792"/>
       </p:ext>
     </p:extLst>
   </p:cSld>
@@ -7302,7 +10122,7 @@
         </p:nvSpPr>
         <p:spPr>
           <a:xfrm>
-            <a:off x="11463007" y="6134487"/>
+            <a:off x="11580453" y="6171414"/>
             <a:ext cx="409963" cy="610899"/>
           </a:xfrm>
         </p:spPr>
@@ -7320,50 +10140,7 @@
       </p:sp>
       <p:sp>
         <p:nvSpPr>
-          <p:cNvPr id="11" name="TextBox 10">
-            <a:extLst>
-              <a:ext uri="{FF2B5EF4-FFF2-40B4-BE49-F238E27FC236}">
-                <a16:creationId xmlns:a16="http://schemas.microsoft.com/office/drawing/2014/main" id="{2169E9A5-0F30-46EE-BA6A-78421B32F98B}"/>
-              </a:ext>
-            </a:extLst>
-          </p:cNvPr>
-          <p:cNvSpPr txBox="1"/>
-          <p:nvPr/>
-        </p:nvSpPr>
-        <p:spPr>
-          <a:xfrm>
-            <a:off x="457200" y="244509"/>
-            <a:ext cx="5381538" cy="584775"/>
-          </a:xfrm>
-          <a:prstGeom prst="rect">
-            <a:avLst/>
-          </a:prstGeom>
-          <a:noFill/>
-        </p:spPr>
-        <p:txBody>
-          <a:bodyPr wrap="square">
-            <a:spAutoFit/>
-          </a:bodyPr>
-          <a:lstStyle/>
-          <a:p>
-            <a:r>
-              <a:rPr lang="ru-RU" sz="3200" dirty="0">
-                <a:solidFill>
-                  <a:prstClr val="black"/>
-                </a:solidFill>
-                <a:latin typeface="Gilroy Bold" panose="00000800000000000000" pitchFamily="2" charset="-52"/>
-                <a:ea typeface="+mj-ea"/>
-                <a:cs typeface="+mj-cs"/>
-              </a:rPr>
-              <a:t>Заголовок</a:t>
-            </a:r>
-            <a:endParaRPr lang="ru-RU" dirty="0"/>
-          </a:p>
-        </p:txBody>
-      </p:sp>
-      <p:sp>
-        <p:nvSpPr>
-          <p:cNvPr id="8" name="TextBox 7">
+          <p:cNvPr id="7" name="TextBox 6">
             <a:extLst>
               <a:ext uri="{FF2B5EF4-FFF2-40B4-BE49-F238E27FC236}">
                 <a16:creationId xmlns:a16="http://schemas.microsoft.com/office/drawing/2014/main" id="{D7E8C6BD-D95E-4822-B09A-435E67225EB0}"/>
@@ -7375,8 +10152,8 @@
         </p:nvSpPr>
         <p:spPr>
           <a:xfrm>
-            <a:off x="210669" y="6220736"/>
-            <a:ext cx="10916724" cy="486608"/>
+            <a:off x="339755" y="6178253"/>
+            <a:ext cx="10798742" cy="692305"/>
           </a:xfrm>
           <a:prstGeom prst="rect">
             <a:avLst/>
@@ -7407,7 +10184,7 @@
               <a:defRPr/>
             </a:pPr>
             <a:r>
-              <a:rPr kumimoji="0" lang="ru-RU" sz="1100" b="0" i="0" u="none" strike="noStrike" kern="1200" cap="none" spc="0" normalizeH="0" baseline="0" noProof="0" dirty="0">
+              <a:rPr kumimoji="0" lang="ru-RU" sz="1100" i="0" u="none" strike="noStrike" kern="1200" cap="none" spc="0" normalizeH="0" baseline="0" noProof="0" dirty="0">
                 <a:ln>
                   <a:noFill/>
                 </a:ln>
@@ -7419,7 +10196,31 @@
                 <a:uFillTx/>
                 <a:latin typeface="Gilroy Medium" panose="00000600000000000000" charset="-52"/>
               </a:rPr>
-              <a:t>ИВАНОВ ИВАН ИВАНОВИЧ,  201-321,  04.06.2024</a:t>
+              <a:t>МЕДВЕДЕВ КЛИМ НИКОЛАЕВИЧ, 221-329</a:t>
+            </a:r>
+            <a:r>
+              <a:rPr lang="ru-RU" sz="1100" dirty="0">
+                <a:solidFill>
+                  <a:prstClr val="black"/>
+                </a:solidFill>
+                <a:latin typeface="Gilroy Medium" panose="00000600000000000000" charset="-52"/>
+              </a:rPr>
+              <a:t>,</a:t>
+            </a:r>
+            <a:r>
+              <a:rPr kumimoji="0" lang="ru-RU" sz="1100" i="0" u="none" strike="noStrike" kern="1200" cap="none" spc="0" normalizeH="0" noProof="0" dirty="0">
+                <a:ln>
+                  <a:noFill/>
+                </a:ln>
+                <a:solidFill>
+                  <a:prstClr val="black"/>
+                </a:solidFill>
+                <a:effectLst/>
+                <a:uLnTx/>
+                <a:uFillTx/>
+                <a:latin typeface="Gilroy Medium" panose="00000600000000000000" charset="-52"/>
+              </a:rPr>
+              <a:t> 04.06.2026</a:t>
             </a:r>
           </a:p>
           <a:p>
@@ -7441,7 +10242,7 @@
               <a:defRPr/>
             </a:pPr>
             <a:r>
-              <a:rPr kumimoji="0" lang="ru-RU" sz="1100" b="0" i="0" u="none" strike="noStrike" kern="1200" cap="none" spc="0" normalizeH="0" baseline="0" noProof="0" dirty="0">
+              <a:rPr kumimoji="0" lang="ru-RU" sz="1100" i="0" u="none" strike="noStrike" kern="1200" cap="none" spc="0" normalizeH="0" baseline="0" noProof="0" dirty="0">
                 <a:ln>
                   <a:noFill/>
                 </a:ln>
@@ -7453,8 +10254,27 @@
                 <a:uFillTx/>
                 <a:latin typeface="Gilroy Medium" panose="00000600000000000000" charset="-52"/>
               </a:rPr>
-              <a:t>РАЗРАБОТКА ВЕБ-ПРИЛОЖЕНИЯ ДЛЯ БРОНИРОВАНИЯ ТЕННИСНЫХ КОРТОВ В СПРОТКЛУБЕ СМЭШ</a:t>
-            </a:r>
+              <a:t>РАЗРАБОТКА СИСТЕМЫ ДЛЯ ПРОКСИРОВАНИЯ И МОНИТОРИНГА ИМИТАЦИОННЫХ СЕРВИСОВ В СРЕДЕ НАГРУЗОЧНОГО ТЕСТИРОВАНИЯ</a:t>
+            </a:r>
+          </a:p>
+          <a:p>
+            <a:pPr marL="0" marR="0" lvl="0" indent="0" algn="l" defTabSz="914400" rtl="0" eaLnBrk="1" fontAlgn="auto" latinLnBrk="0" hangingPunct="1">
+              <a:lnSpc>
+                <a:spcPts val="1600"/>
+              </a:lnSpc>
+              <a:spcBef>
+                <a:spcPts val="0"/>
+              </a:spcBef>
+              <a:spcAft>
+                <a:spcPts val="0"/>
+              </a:spcAft>
+              <a:buClrTx/>
+              <a:buSzTx/>
+              <a:buFontTx/>
+              <a:buNone/>
+              <a:tabLst/>
+              <a:defRPr/>
+            </a:pPr>
             <a:endParaRPr kumimoji="0" lang="ru-RU" sz="1100" i="0" u="none" strike="noStrike" kern="1200" cap="none" spc="0" normalizeH="0" baseline="0" noProof="0" dirty="0">
               <a:ln>
                 <a:noFill/>
@@ -7470,10 +10290,178 @@
           </a:p>
         </p:txBody>
       </p:sp>
+      <p:sp>
+        <p:nvSpPr>
+          <p:cNvPr id="11" name="TextBox 10">
+            <a:extLst>
+              <a:ext uri="{FF2B5EF4-FFF2-40B4-BE49-F238E27FC236}">
+                <a16:creationId xmlns:a16="http://schemas.microsoft.com/office/drawing/2014/main" id="{2169E9A5-0F30-46EE-BA6A-78421B32F98B}"/>
+              </a:ext>
+            </a:extLst>
+          </p:cNvPr>
+          <p:cNvSpPr txBox="1"/>
+          <p:nvPr/>
+        </p:nvSpPr>
+        <p:spPr>
+          <a:xfrm>
+            <a:off x="457200" y="537255"/>
+            <a:ext cx="6645617" cy="584775"/>
+          </a:xfrm>
+          <a:prstGeom prst="rect">
+            <a:avLst/>
+          </a:prstGeom>
+          <a:noFill/>
+        </p:spPr>
+        <p:txBody>
+          <a:bodyPr wrap="square">
+            <a:spAutoFit/>
+          </a:bodyPr>
+          <a:lstStyle/>
+          <a:p>
+            <a:r>
+              <a:rPr lang="ru-RU" sz="3200" dirty="0">
+                <a:latin typeface="Gilroy Bold" panose="00000800000000000000" pitchFamily="2" charset="-52"/>
+                <a:ea typeface="+mj-ea"/>
+                <a:cs typeface="+mj-cs"/>
+              </a:rPr>
+              <a:t>Топология развёртывания</a:t>
+            </a:r>
+          </a:p>
+        </p:txBody>
+      </p:sp>
+      <p:sp>
+        <p:nvSpPr>
+          <p:cNvPr id="2" name="TextBox 1">
+            <a:extLst>
+              <a:ext uri="{FF2B5EF4-FFF2-40B4-BE49-F238E27FC236}">
+                <a16:creationId xmlns:a16="http://schemas.microsoft.com/office/drawing/2014/main" id="{29A6AEEB-6479-6AF6-ED4B-A834C62D6DE6}"/>
+              </a:ext>
+            </a:extLst>
+          </p:cNvPr>
+          <p:cNvSpPr txBox="1"/>
+          <p:nvPr/>
+        </p:nvSpPr>
+        <p:spPr>
+          <a:xfrm>
+            <a:off x="457199" y="1466723"/>
+            <a:ext cx="4001247" cy="3751283"/>
+          </a:xfrm>
+          <a:prstGeom prst="rect">
+            <a:avLst/>
+          </a:prstGeom>
+          <a:noFill/>
+        </p:spPr>
+        <p:txBody>
+          <a:bodyPr wrap="square" rtlCol="0">
+            <a:spAutoFit/>
+          </a:bodyPr>
+          <a:lstStyle/>
+          <a:p>
+            <a:pPr>
+              <a:lnSpc>
+                <a:spcPct val="125000"/>
+              </a:lnSpc>
+            </a:pPr>
+            <a:r>
+              <a:rPr lang="ru-RU" sz="1600" dirty="0"/>
+              <a:t>Система поддерживает два режима без изменения кодовой базы:</a:t>
+            </a:r>
+          </a:p>
+          <a:p>
+            <a:pPr marL="285750" indent="-285750">
+              <a:lnSpc>
+                <a:spcPct val="125000"/>
+              </a:lnSpc>
+              <a:buFont typeface="Arial" panose="020B0604020202020204" pitchFamily="34" charset="0"/>
+              <a:buChar char="•"/>
+            </a:pPr>
+            <a:r>
+              <a:rPr lang="ru-RU" sz="1600" b="1" dirty="0"/>
+              <a:t>Cluster Mode</a:t>
+            </a:r>
+            <a:r>
+              <a:rPr lang="ru-RU" sz="1600" dirty="0"/>
+              <a:t>: один управляющий узел координирует несколько удалённых хостов через SSH/SFTP</a:t>
+            </a:r>
+          </a:p>
+          <a:p>
+            <a:pPr marL="285750" indent="-285750">
+              <a:lnSpc>
+                <a:spcPct val="125000"/>
+              </a:lnSpc>
+              <a:buFont typeface="Arial" panose="020B0604020202020204" pitchFamily="34" charset="0"/>
+              <a:buChar char="•"/>
+            </a:pPr>
+            <a:r>
+              <a:rPr lang="ru-RU" sz="1600" b="1" dirty="0" err="1"/>
+              <a:t>Standalone</a:t>
+            </a:r>
+            <a:r>
+              <a:rPr lang="ru-RU" sz="1600" b="1" dirty="0"/>
+              <a:t> Mode</a:t>
+            </a:r>
+            <a:r>
+              <a:rPr lang="ru-RU" sz="1600" dirty="0"/>
+              <a:t>: все компоненты на одном сервере</a:t>
+            </a:r>
+            <a:br>
+              <a:rPr lang="ru-RU" sz="1600" dirty="0"/>
+            </a:br>
+            <a:r>
+              <a:rPr lang="ru-RU" sz="1600" dirty="0"/>
+              <a:t>На целевых хостах не требуется установка агентов — только SSH-сервер и </a:t>
+            </a:r>
+            <a:r>
+              <a:rPr lang="ru-RU" sz="1600" dirty="0" err="1"/>
+              <a:t>OpenJDK</a:t>
+            </a:r>
+            <a:r>
+              <a:rPr lang="ru-RU" sz="1600" dirty="0"/>
+              <a:t> 17.</a:t>
+            </a:r>
+          </a:p>
+        </p:txBody>
+      </p:sp>
+      <p:pic>
+        <p:nvPicPr>
+          <p:cNvPr id="5" name="Рисунок 4" descr="Изображение выглядит как текст, снимок экрана, Шрифт, Параллельный&#10;&#10;Контент, сгенерированный ИИ, может содержать ошибки.">
+            <a:extLst>
+              <a:ext uri="{FF2B5EF4-FFF2-40B4-BE49-F238E27FC236}">
+                <a16:creationId xmlns:a16="http://schemas.microsoft.com/office/drawing/2014/main" id="{BFF6725E-7A65-7549-CB3D-773064285119}"/>
+              </a:ext>
+            </a:extLst>
+          </p:cNvPr>
+          <p:cNvPicPr>
+            <a:picLocks noChangeAspect="1"/>
+          </p:cNvPicPr>
+          <p:nvPr/>
+        </p:nvPicPr>
+        <p:blipFill>
+          <a:blip r:embed="rId3" cstate="print">
+            <a:extLst>
+              <a:ext uri="{28A0092B-C50C-407E-A947-70E740481C1C}">
+                <a14:useLocalDpi xmlns:a14="http://schemas.microsoft.com/office/drawing/2010/main" val="0"/>
+              </a:ext>
+            </a:extLst>
+          </a:blip>
+          <a:stretch>
+            <a:fillRect/>
+          </a:stretch>
+        </p:blipFill>
+        <p:spPr>
+          <a:xfrm>
+            <a:off x="4962552" y="1527096"/>
+            <a:ext cx="6183700" cy="4246091"/>
+          </a:xfrm>
+          <a:prstGeom prst="rect">
+            <a:avLst/>
+          </a:prstGeom>
+        </p:spPr>
+      </p:pic>
     </p:spTree>
     <p:extLst>
       <p:ext uri="{BB962C8B-B14F-4D97-AF65-F5344CB8AC3E}">
-        <p14:creationId xmlns:p14="http://schemas.microsoft.com/office/powerpoint/2010/main" val="317689975"/>
+        <p14:creationId xmlns:p14="http://schemas.microsoft.com/office/powerpoint/2010/main" val="675957193"/>
       </p:ext>
     </p:extLst>
   </p:cSld>
@@ -7563,7 +10551,7 @@
         </p:nvSpPr>
         <p:spPr>
           <a:xfrm>
-            <a:off x="11463007" y="6134487"/>
+            <a:off x="11580453" y="6171414"/>
             <a:ext cx="409963" cy="610899"/>
           </a:xfrm>
         </p:spPr>
@@ -7581,50 +10569,7 @@
       </p:sp>
       <p:sp>
         <p:nvSpPr>
-          <p:cNvPr id="11" name="TextBox 10">
-            <a:extLst>
-              <a:ext uri="{FF2B5EF4-FFF2-40B4-BE49-F238E27FC236}">
-                <a16:creationId xmlns:a16="http://schemas.microsoft.com/office/drawing/2014/main" id="{2169E9A5-0F30-46EE-BA6A-78421B32F98B}"/>
-              </a:ext>
-            </a:extLst>
-          </p:cNvPr>
-          <p:cNvSpPr txBox="1"/>
-          <p:nvPr/>
-        </p:nvSpPr>
-        <p:spPr>
-          <a:xfrm>
-            <a:off x="457200" y="244509"/>
-            <a:ext cx="5381538" cy="584775"/>
-          </a:xfrm>
-          <a:prstGeom prst="rect">
-            <a:avLst/>
-          </a:prstGeom>
-          <a:noFill/>
-        </p:spPr>
-        <p:txBody>
-          <a:bodyPr wrap="square">
-            <a:spAutoFit/>
-          </a:bodyPr>
-          <a:lstStyle/>
-          <a:p>
-            <a:r>
-              <a:rPr lang="ru-RU" sz="3200" dirty="0">
-                <a:solidFill>
-                  <a:prstClr val="black"/>
-                </a:solidFill>
-                <a:latin typeface="Gilroy Bold" panose="00000800000000000000" pitchFamily="2" charset="-52"/>
-                <a:ea typeface="+mj-ea"/>
-                <a:cs typeface="+mj-cs"/>
-              </a:rPr>
-              <a:t>Заголовок</a:t>
-            </a:r>
-            <a:endParaRPr lang="ru-RU" dirty="0"/>
-          </a:p>
-        </p:txBody>
-      </p:sp>
-      <p:sp>
-        <p:nvSpPr>
-          <p:cNvPr id="8" name="TextBox 7">
+          <p:cNvPr id="7" name="TextBox 6">
             <a:extLst>
               <a:ext uri="{FF2B5EF4-FFF2-40B4-BE49-F238E27FC236}">
                 <a16:creationId xmlns:a16="http://schemas.microsoft.com/office/drawing/2014/main" id="{D7E8C6BD-D95E-4822-B09A-435E67225EB0}"/>
@@ -7636,8 +10581,8 @@
         </p:nvSpPr>
         <p:spPr>
           <a:xfrm>
-            <a:off x="206509" y="6224338"/>
-            <a:ext cx="10916724" cy="487121"/>
+            <a:off x="339755" y="6178253"/>
+            <a:ext cx="10798742" cy="692305"/>
           </a:xfrm>
           <a:prstGeom prst="rect">
             <a:avLst/>
@@ -7668,7 +10613,7 @@
               <a:defRPr/>
             </a:pPr>
             <a:r>
-              <a:rPr kumimoji="0" lang="ru-RU" sz="1100" b="0" i="0" u="none" strike="noStrike" kern="1200" cap="none" spc="0" normalizeH="0" baseline="0" noProof="0" dirty="0">
+              <a:rPr kumimoji="0" lang="ru-RU" sz="1100" i="0" u="none" strike="noStrike" kern="1200" cap="none" spc="0" normalizeH="0" baseline="0" noProof="0" dirty="0">
                 <a:ln>
                   <a:noFill/>
                 </a:ln>
@@ -7680,7 +10625,31 @@
                 <a:uFillTx/>
                 <a:latin typeface="Gilroy Medium" panose="00000600000000000000" charset="-52"/>
               </a:rPr>
-              <a:t>ИВАНОВ ИВАН ИВАНОВИЧ,  201-321,  04.06.2024</a:t>
+              <a:t>МЕДВЕДЕВ КЛИМ НИКОЛАЕВИЧ, 221-329</a:t>
+            </a:r>
+            <a:r>
+              <a:rPr lang="ru-RU" sz="1100" dirty="0">
+                <a:solidFill>
+                  <a:prstClr val="black"/>
+                </a:solidFill>
+                <a:latin typeface="Gilroy Medium" panose="00000600000000000000" charset="-52"/>
+              </a:rPr>
+              <a:t>,</a:t>
+            </a:r>
+            <a:r>
+              <a:rPr kumimoji="0" lang="ru-RU" sz="1100" i="0" u="none" strike="noStrike" kern="1200" cap="none" spc="0" normalizeH="0" noProof="0" dirty="0">
+                <a:ln>
+                  <a:noFill/>
+                </a:ln>
+                <a:solidFill>
+                  <a:prstClr val="black"/>
+                </a:solidFill>
+                <a:effectLst/>
+                <a:uLnTx/>
+                <a:uFillTx/>
+                <a:latin typeface="Gilroy Medium" panose="00000600000000000000" charset="-52"/>
+              </a:rPr>
+              <a:t> 04.06.2026</a:t>
             </a:r>
           </a:p>
           <a:p>
@@ -7702,7 +10671,7 @@
               <a:defRPr/>
             </a:pPr>
             <a:r>
-              <a:rPr kumimoji="0" lang="ru-RU" sz="1100" b="0" i="0" u="none" strike="noStrike" kern="1200" cap="none" spc="0" normalizeH="0" baseline="0" noProof="0" dirty="0">
+              <a:rPr kumimoji="0" lang="ru-RU" sz="1100" i="0" u="none" strike="noStrike" kern="1200" cap="none" spc="0" normalizeH="0" baseline="0" noProof="0" dirty="0">
                 <a:ln>
                   <a:noFill/>
                 </a:ln>
@@ -7714,8 +10683,27 @@
                 <a:uFillTx/>
                 <a:latin typeface="Gilroy Medium" panose="00000600000000000000" charset="-52"/>
               </a:rPr>
-              <a:t>РАЗРАБОТКА ВЕБ-ПРИЛОЖЕНИЯ ДЛЯ БРОНИРОВАНИЯ ТЕННИСНЫХ КОРТОВ В СПРОТКЛУБЕ СМЭШ</a:t>
-            </a:r>
+              <a:t>РАЗРАБОТКА СИСТЕМЫ ДЛЯ ПРОКСИРОВАНИЯ И МОНИТОРИНГА ИМИТАЦИОННЫХ СЕРВИСОВ В СРЕДЕ НАГРУЗОЧНОГО ТЕСТИРОВАНИЯ</a:t>
+            </a:r>
+          </a:p>
+          <a:p>
+            <a:pPr marL="0" marR="0" lvl="0" indent="0" algn="l" defTabSz="914400" rtl="0" eaLnBrk="1" fontAlgn="auto" latinLnBrk="0" hangingPunct="1">
+              <a:lnSpc>
+                <a:spcPts val="1600"/>
+              </a:lnSpc>
+              <a:spcBef>
+                <a:spcPts val="0"/>
+              </a:spcBef>
+              <a:spcAft>
+                <a:spcPts val="0"/>
+              </a:spcAft>
+              <a:buClrTx/>
+              <a:buSzTx/>
+              <a:buFontTx/>
+              <a:buNone/>
+              <a:tabLst/>
+              <a:defRPr/>
+            </a:pPr>
             <a:endParaRPr kumimoji="0" lang="ru-RU" sz="1100" i="0" u="none" strike="noStrike" kern="1200" cap="none" spc="0" normalizeH="0" baseline="0" noProof="0" dirty="0">
               <a:ln>
                 <a:noFill/>
@@ -7731,10 +10719,812 @@
           </a:p>
         </p:txBody>
       </p:sp>
+      <p:sp>
+        <p:nvSpPr>
+          <p:cNvPr id="11" name="TextBox 10">
+            <a:extLst>
+              <a:ext uri="{FF2B5EF4-FFF2-40B4-BE49-F238E27FC236}">
+                <a16:creationId xmlns:a16="http://schemas.microsoft.com/office/drawing/2014/main" id="{2169E9A5-0F30-46EE-BA6A-78421B32F98B}"/>
+              </a:ext>
+            </a:extLst>
+          </p:cNvPr>
+          <p:cNvSpPr txBox="1"/>
+          <p:nvPr/>
+        </p:nvSpPr>
+        <p:spPr>
+          <a:xfrm>
+            <a:off x="457200" y="537255"/>
+            <a:ext cx="6645617" cy="584775"/>
+          </a:xfrm>
+          <a:prstGeom prst="rect">
+            <a:avLst/>
+          </a:prstGeom>
+          <a:noFill/>
+        </p:spPr>
+        <p:txBody>
+          <a:bodyPr wrap="square">
+            <a:spAutoFit/>
+          </a:bodyPr>
+          <a:lstStyle/>
+          <a:p>
+            <a:r>
+              <a:rPr lang="ru-RU" sz="3200" dirty="0" err="1">
+                <a:latin typeface="Gilroy Bold" panose="00000800000000000000" pitchFamily="2" charset="-52"/>
+                <a:ea typeface="+mj-ea"/>
+                <a:cs typeface="+mj-cs"/>
+              </a:rPr>
+              <a:t>Проксирование</a:t>
+            </a:r>
+            <a:r>
+              <a:rPr lang="ru-RU" sz="3200" dirty="0">
+                <a:latin typeface="Gilroy Bold" panose="00000800000000000000" pitchFamily="2" charset="-52"/>
+                <a:ea typeface="+mj-ea"/>
+                <a:cs typeface="+mj-cs"/>
+              </a:rPr>
+              <a:t> и Rate </a:t>
+            </a:r>
+            <a:r>
+              <a:rPr lang="ru-RU" sz="3200" dirty="0" err="1">
+                <a:latin typeface="Gilroy Bold" panose="00000800000000000000" pitchFamily="2" charset="-52"/>
+                <a:ea typeface="+mj-ea"/>
+                <a:cs typeface="+mj-cs"/>
+              </a:rPr>
+              <a:t>Limiting</a:t>
+            </a:r>
+            <a:endParaRPr lang="ru-RU" sz="3200" dirty="0">
+              <a:latin typeface="Gilroy Bold" panose="00000800000000000000" pitchFamily="2" charset="-52"/>
+              <a:ea typeface="+mj-ea"/>
+              <a:cs typeface="+mj-cs"/>
+            </a:endParaRPr>
+          </a:p>
+        </p:txBody>
+      </p:sp>
+      <p:sp>
+        <p:nvSpPr>
+          <p:cNvPr id="2" name="TextBox 1">
+            <a:extLst>
+              <a:ext uri="{FF2B5EF4-FFF2-40B4-BE49-F238E27FC236}">
+                <a16:creationId xmlns:a16="http://schemas.microsoft.com/office/drawing/2014/main" id="{29A6AEEB-6479-6AF6-ED4B-A834C62D6DE6}"/>
+              </a:ext>
+            </a:extLst>
+          </p:cNvPr>
+          <p:cNvSpPr txBox="1"/>
+          <p:nvPr/>
+        </p:nvSpPr>
+        <p:spPr>
+          <a:xfrm>
+            <a:off x="1195294" y="1659284"/>
+            <a:ext cx="9801413" cy="781240"/>
+          </a:xfrm>
+          <a:prstGeom prst="rect">
+            <a:avLst/>
+          </a:prstGeom>
+          <a:noFill/>
+        </p:spPr>
+        <p:txBody>
+          <a:bodyPr wrap="square" rtlCol="0">
+            <a:spAutoFit/>
+          </a:bodyPr>
+          <a:lstStyle/>
+          <a:p>
+            <a:pPr>
+              <a:lnSpc>
+                <a:spcPct val="150000"/>
+              </a:lnSpc>
+            </a:pPr>
+            <a:r>
+              <a:rPr lang="ru-RU" sz="1600" dirty="0"/>
+              <a:t>Прокси-модуль прозрачно маршрутизирует запросы: сохраняет метод, заголовки и тело. </a:t>
+            </a:r>
+            <a:endParaRPr lang="en-US" sz="1600" dirty="0"/>
+          </a:p>
+          <a:p>
+            <a:pPr>
+              <a:lnSpc>
+                <a:spcPct val="150000"/>
+              </a:lnSpc>
+            </a:pPr>
+            <a:r>
+              <a:rPr lang="ru-RU" sz="1600" dirty="0"/>
+              <a:t>При превышении лимита возвращает HTTP 429, не нагружая заглушку.</a:t>
+            </a:r>
+          </a:p>
+        </p:txBody>
+      </p:sp>
+      <p:sp>
+        <p:nvSpPr>
+          <p:cNvPr id="4" name="TextBox 3">
+            <a:extLst>
+              <a:ext uri="{FF2B5EF4-FFF2-40B4-BE49-F238E27FC236}">
+                <a16:creationId xmlns:a16="http://schemas.microsoft.com/office/drawing/2014/main" id="{8CDDA008-5FC4-78D9-955B-5FE9E4E256DE}"/>
+              </a:ext>
+            </a:extLst>
+          </p:cNvPr>
+          <p:cNvSpPr txBox="1"/>
+          <p:nvPr/>
+        </p:nvSpPr>
+        <p:spPr>
+          <a:xfrm>
+            <a:off x="1195294" y="2772285"/>
+            <a:ext cx="9801412" cy="2800767"/>
+          </a:xfrm>
+          <a:prstGeom prst="rect">
+            <a:avLst/>
+          </a:prstGeom>
+          <a:noFill/>
+        </p:spPr>
+        <p:txBody>
+          <a:bodyPr wrap="square" rtlCol="0">
+            <a:spAutoFit/>
+          </a:bodyPr>
+          <a:lstStyle/>
+          <a:p>
+            <a:r>
+              <a:rPr lang="en-US" sz="1600" b="0" i="0" dirty="0">
+                <a:solidFill>
+                  <a:srgbClr val="0000FF"/>
+                </a:solidFill>
+                <a:effectLst/>
+                <a:latin typeface="Consolas" panose="020B0609020204030204" pitchFamily="49" charset="0"/>
+              </a:rPr>
+              <a:t>def</a:t>
+            </a:r>
+            <a:r>
+              <a:rPr lang="en-US" sz="1600" b="0" i="0" dirty="0">
+                <a:solidFill>
+                  <a:srgbClr val="000000"/>
+                </a:solidFill>
+                <a:effectLst/>
+                <a:latin typeface="Consolas" panose="020B0609020204030204" pitchFamily="49" charset="0"/>
+              </a:rPr>
+              <a:t> </a:t>
+            </a:r>
+            <a:r>
+              <a:rPr lang="en-US" sz="1600" b="0" i="0" dirty="0" err="1">
+                <a:solidFill>
+                  <a:srgbClr val="A31515"/>
+                </a:solidFill>
+                <a:effectLst/>
+                <a:latin typeface="Consolas" panose="020B0609020204030204" pitchFamily="49" charset="0"/>
+              </a:rPr>
+              <a:t>check_rate_limit</a:t>
+            </a:r>
+            <a:r>
+              <a:rPr lang="en-US" sz="1600" b="0" i="0" dirty="0">
+                <a:solidFill>
+                  <a:srgbClr val="000000"/>
+                </a:solidFill>
+                <a:effectLst/>
+                <a:latin typeface="Consolas" panose="020B0609020204030204" pitchFamily="49" charset="0"/>
+              </a:rPr>
+              <a:t>(filename: </a:t>
+            </a:r>
+            <a:r>
+              <a:rPr lang="en-US" sz="1600" b="0" i="0" dirty="0">
+                <a:solidFill>
+                  <a:srgbClr val="0000FF"/>
+                </a:solidFill>
+                <a:effectLst/>
+                <a:latin typeface="Consolas" panose="020B0609020204030204" pitchFamily="49" charset="0"/>
+              </a:rPr>
+              <a:t>str</a:t>
+            </a:r>
+            <a:r>
+              <a:rPr lang="en-US" sz="1600" b="0" i="0" dirty="0">
+                <a:solidFill>
+                  <a:srgbClr val="000000"/>
+                </a:solidFill>
+                <a:effectLst/>
+                <a:latin typeface="Consolas" panose="020B0609020204030204" pitchFamily="49" charset="0"/>
+              </a:rPr>
+              <a:t>, limit: </a:t>
+            </a:r>
+            <a:r>
+              <a:rPr lang="en-US" sz="1600" b="0" i="0" dirty="0">
+                <a:solidFill>
+                  <a:srgbClr val="0000FF"/>
+                </a:solidFill>
+                <a:effectLst/>
+                <a:latin typeface="Consolas" panose="020B0609020204030204" pitchFamily="49" charset="0"/>
+              </a:rPr>
+              <a:t>int</a:t>
+            </a:r>
+            <a:r>
+              <a:rPr lang="en-US" sz="1600" b="0" i="0" dirty="0">
+                <a:solidFill>
+                  <a:srgbClr val="000000"/>
+                </a:solidFill>
+                <a:effectLst/>
+                <a:latin typeface="Consolas" panose="020B0609020204030204" pitchFamily="49" charset="0"/>
+              </a:rPr>
+              <a:t>, </a:t>
+            </a:r>
+            <a:r>
+              <a:rPr lang="en-US" sz="1600" b="0" i="0" dirty="0" err="1">
+                <a:solidFill>
+                  <a:srgbClr val="000000"/>
+                </a:solidFill>
+                <a:effectLst/>
+                <a:latin typeface="Consolas" panose="020B0609020204030204" pitchFamily="49" charset="0"/>
+              </a:rPr>
+              <a:t>window_size</a:t>
+            </a:r>
+            <a:r>
+              <a:rPr lang="en-US" sz="1600" b="0" i="0" dirty="0">
+                <a:solidFill>
+                  <a:srgbClr val="000000"/>
+                </a:solidFill>
+                <a:effectLst/>
+                <a:latin typeface="Consolas" panose="020B0609020204030204" pitchFamily="49" charset="0"/>
+              </a:rPr>
+              <a:t>: </a:t>
+            </a:r>
+            <a:r>
+              <a:rPr lang="en-US" sz="1600" b="0" i="0" dirty="0">
+                <a:solidFill>
+                  <a:srgbClr val="0000FF"/>
+                </a:solidFill>
+                <a:effectLst/>
+                <a:latin typeface="Consolas" panose="020B0609020204030204" pitchFamily="49" charset="0"/>
+              </a:rPr>
+              <a:t>int</a:t>
+            </a:r>
+            <a:r>
+              <a:rPr lang="en-US" sz="1600" b="0" i="0" dirty="0">
+                <a:solidFill>
+                  <a:srgbClr val="000000"/>
+                </a:solidFill>
+                <a:effectLst/>
+                <a:latin typeface="Consolas" panose="020B0609020204030204" pitchFamily="49" charset="0"/>
+              </a:rPr>
+              <a:t> = 1) -&gt; </a:t>
+            </a:r>
+            <a:r>
+              <a:rPr lang="en-US" sz="1600" b="0" i="0" dirty="0">
+                <a:solidFill>
+                  <a:srgbClr val="0000FF"/>
+                </a:solidFill>
+                <a:effectLst/>
+                <a:latin typeface="Consolas" panose="020B0609020204030204" pitchFamily="49" charset="0"/>
+              </a:rPr>
+              <a:t>bool</a:t>
+            </a:r>
+            <a:r>
+              <a:rPr lang="en-US" sz="1600" b="0" i="0" dirty="0">
+                <a:solidFill>
+                  <a:srgbClr val="000000"/>
+                </a:solidFill>
+                <a:effectLst/>
+                <a:latin typeface="Consolas" panose="020B0609020204030204" pitchFamily="49" charset="0"/>
+              </a:rPr>
+              <a:t>: </a:t>
+            </a:r>
+          </a:p>
+          <a:p>
+            <a:r>
+              <a:rPr lang="en-US" sz="1600" b="0" i="0" dirty="0">
+                <a:solidFill>
+                  <a:srgbClr val="008000"/>
+                </a:solidFill>
+                <a:effectLst/>
+                <a:latin typeface="Consolas" panose="020B0609020204030204" pitchFamily="49" charset="0"/>
+              </a:rPr>
+              <a:t># </a:t>
+            </a:r>
+            <a:r>
+              <a:rPr lang="ru-RU" sz="1600" b="0" i="0" dirty="0">
+                <a:solidFill>
+                  <a:srgbClr val="008000"/>
+                </a:solidFill>
+                <a:effectLst/>
+                <a:latin typeface="Consolas" panose="020B0609020204030204" pitchFamily="49" charset="0"/>
+              </a:rPr>
+              <a:t>Шаг 1: вычислить метку текущего окна</a:t>
+            </a:r>
+            <a:r>
+              <a:rPr lang="ru-RU" sz="1600" b="0" i="0" dirty="0">
+                <a:solidFill>
+                  <a:srgbClr val="000000"/>
+                </a:solidFill>
+                <a:effectLst/>
+                <a:latin typeface="Consolas" panose="020B0609020204030204" pitchFamily="49" charset="0"/>
+              </a:rPr>
+              <a:t> </a:t>
+            </a:r>
+            <a:endParaRPr lang="en-US" sz="1600" b="0" i="0" dirty="0">
+              <a:solidFill>
+                <a:srgbClr val="000000"/>
+              </a:solidFill>
+              <a:effectLst/>
+              <a:latin typeface="Consolas" panose="020B0609020204030204" pitchFamily="49" charset="0"/>
+            </a:endParaRPr>
+          </a:p>
+          <a:p>
+            <a:r>
+              <a:rPr lang="en-US" sz="1600" b="0" i="0" dirty="0">
+                <a:solidFill>
+                  <a:srgbClr val="000000"/>
+                </a:solidFill>
+                <a:effectLst/>
+                <a:latin typeface="Consolas" panose="020B0609020204030204" pitchFamily="49" charset="0"/>
+              </a:rPr>
+              <a:t>window = floor(</a:t>
+            </a:r>
+            <a:r>
+              <a:rPr lang="en-US" sz="1600" b="0" i="0" dirty="0" err="1">
+                <a:solidFill>
+                  <a:srgbClr val="000000"/>
+                </a:solidFill>
+                <a:effectLst/>
+                <a:latin typeface="Consolas" panose="020B0609020204030204" pitchFamily="49" charset="0"/>
+              </a:rPr>
+              <a:t>current_unix_timestamp</a:t>
+            </a:r>
+            <a:r>
+              <a:rPr lang="en-US" sz="1600" b="0" i="0" dirty="0">
+                <a:solidFill>
+                  <a:srgbClr val="000000"/>
+                </a:solidFill>
+                <a:effectLst/>
+                <a:latin typeface="Consolas" panose="020B0609020204030204" pitchFamily="49" charset="0"/>
+              </a:rPr>
+              <a:t>() / </a:t>
+            </a:r>
+            <a:r>
+              <a:rPr lang="en-US" sz="1600" b="0" i="0" dirty="0" err="1">
+                <a:solidFill>
+                  <a:srgbClr val="000000"/>
+                </a:solidFill>
+                <a:effectLst/>
+                <a:latin typeface="Consolas" panose="020B0609020204030204" pitchFamily="49" charset="0"/>
+              </a:rPr>
+              <a:t>window_size</a:t>
+            </a:r>
+            <a:r>
+              <a:rPr lang="en-US" sz="1600" b="0" i="0" dirty="0">
+                <a:solidFill>
+                  <a:srgbClr val="000000"/>
+                </a:solidFill>
+                <a:effectLst/>
+                <a:latin typeface="Consolas" panose="020B0609020204030204" pitchFamily="49" charset="0"/>
+              </a:rPr>
+              <a:t>) </a:t>
+            </a:r>
+          </a:p>
+          <a:p>
+            <a:r>
+              <a:rPr lang="en-US" sz="1600" b="0" i="0" dirty="0">
+                <a:solidFill>
+                  <a:srgbClr val="000000"/>
+                </a:solidFill>
+                <a:effectLst/>
+                <a:latin typeface="Consolas" panose="020B0609020204030204" pitchFamily="49" charset="0"/>
+              </a:rPr>
+              <a:t>key = </a:t>
+            </a:r>
+            <a:r>
+              <a:rPr lang="en-US" sz="1600" b="0" i="0" dirty="0" err="1">
+                <a:solidFill>
+                  <a:srgbClr val="A31515"/>
+                </a:solidFill>
+                <a:effectLst/>
+                <a:latin typeface="Consolas" panose="020B0609020204030204" pitchFamily="49" charset="0"/>
+              </a:rPr>
+              <a:t>f"rate</a:t>
+            </a:r>
+            <a:r>
+              <a:rPr lang="en-US" sz="1600" b="0" i="0" dirty="0">
+                <a:solidFill>
+                  <a:srgbClr val="A31515"/>
+                </a:solidFill>
+                <a:effectLst/>
+                <a:latin typeface="Consolas" panose="020B0609020204030204" pitchFamily="49" charset="0"/>
+              </a:rPr>
+              <a:t>:{filename}:{window}"</a:t>
+            </a:r>
+            <a:r>
+              <a:rPr lang="en-US" sz="1600" b="0" i="0" dirty="0">
+                <a:solidFill>
+                  <a:srgbClr val="000000"/>
+                </a:solidFill>
+                <a:effectLst/>
+                <a:latin typeface="Consolas" panose="020B0609020204030204" pitchFamily="49" charset="0"/>
+              </a:rPr>
+              <a:t> </a:t>
+            </a:r>
+          </a:p>
+          <a:p>
+            <a:r>
+              <a:rPr lang="en-US" sz="1600" b="0" i="0" dirty="0">
+                <a:solidFill>
+                  <a:srgbClr val="008000"/>
+                </a:solidFill>
+                <a:effectLst/>
+                <a:latin typeface="Consolas" panose="020B0609020204030204" pitchFamily="49" charset="0"/>
+              </a:rPr>
+              <a:t># </a:t>
+            </a:r>
+            <a:r>
+              <a:rPr lang="ru-RU" sz="1600" b="0" i="0" dirty="0">
+                <a:solidFill>
+                  <a:srgbClr val="008000"/>
+                </a:solidFill>
+                <a:effectLst/>
+                <a:latin typeface="Consolas" panose="020B0609020204030204" pitchFamily="49" charset="0"/>
+              </a:rPr>
+              <a:t>Шаг 2: атомарный инкремент счётчика</a:t>
+            </a:r>
+            <a:r>
+              <a:rPr lang="ru-RU" sz="1600" b="0" i="0" dirty="0">
+                <a:solidFill>
+                  <a:srgbClr val="000000"/>
+                </a:solidFill>
+                <a:effectLst/>
+                <a:latin typeface="Consolas" panose="020B0609020204030204" pitchFamily="49" charset="0"/>
+              </a:rPr>
+              <a:t> </a:t>
+            </a:r>
+            <a:endParaRPr lang="en-US" sz="1600" b="0" i="0" dirty="0">
+              <a:solidFill>
+                <a:srgbClr val="000000"/>
+              </a:solidFill>
+              <a:effectLst/>
+              <a:latin typeface="Consolas" panose="020B0609020204030204" pitchFamily="49" charset="0"/>
+            </a:endParaRPr>
+          </a:p>
+          <a:p>
+            <a:r>
+              <a:rPr lang="en-US" sz="1600" b="0" i="0" dirty="0">
+                <a:solidFill>
+                  <a:srgbClr val="000000"/>
+                </a:solidFill>
+                <a:effectLst/>
+                <a:latin typeface="Consolas" panose="020B0609020204030204" pitchFamily="49" charset="0"/>
+              </a:rPr>
+              <a:t>count = INCR(key) </a:t>
+            </a:r>
+          </a:p>
+          <a:p>
+            <a:r>
+              <a:rPr lang="en-US" sz="1600" b="0" i="0" dirty="0">
+                <a:solidFill>
+                  <a:srgbClr val="008000"/>
+                </a:solidFill>
+                <a:effectLst/>
+                <a:latin typeface="Consolas" panose="020B0609020204030204" pitchFamily="49" charset="0"/>
+              </a:rPr>
+              <a:t># </a:t>
+            </a:r>
+            <a:r>
+              <a:rPr lang="ru-RU" sz="1600" b="0" i="0" dirty="0">
+                <a:solidFill>
+                  <a:srgbClr val="008000"/>
+                </a:solidFill>
+                <a:effectLst/>
+                <a:latin typeface="Consolas" panose="020B0609020204030204" pitchFamily="49" charset="0"/>
+              </a:rPr>
+              <a:t>Шаг 3: установить </a:t>
+            </a:r>
+            <a:r>
+              <a:rPr lang="en-US" sz="1600" b="0" i="0" dirty="0">
+                <a:solidFill>
+                  <a:srgbClr val="008000"/>
+                </a:solidFill>
+                <a:effectLst/>
+                <a:latin typeface="Consolas" panose="020B0609020204030204" pitchFamily="49" charset="0"/>
+              </a:rPr>
+              <a:t>TTL </a:t>
+            </a:r>
+            <a:r>
+              <a:rPr lang="ru-RU" sz="1600" b="0" i="0" dirty="0">
+                <a:solidFill>
+                  <a:srgbClr val="008000"/>
+                </a:solidFill>
+                <a:effectLst/>
+                <a:latin typeface="Consolas" panose="020B0609020204030204" pitchFamily="49" charset="0"/>
+              </a:rPr>
+              <a:t>при создании нового окна</a:t>
+            </a:r>
+            <a:r>
+              <a:rPr lang="ru-RU" sz="1600" b="0" i="0" dirty="0">
+                <a:solidFill>
+                  <a:srgbClr val="000000"/>
+                </a:solidFill>
+                <a:effectLst/>
+                <a:latin typeface="Consolas" panose="020B0609020204030204" pitchFamily="49" charset="0"/>
+              </a:rPr>
+              <a:t> </a:t>
+            </a:r>
+            <a:endParaRPr lang="en-US" sz="1600" b="0" i="0" dirty="0">
+              <a:solidFill>
+                <a:srgbClr val="000000"/>
+              </a:solidFill>
+              <a:effectLst/>
+              <a:latin typeface="Consolas" panose="020B0609020204030204" pitchFamily="49" charset="0"/>
+            </a:endParaRPr>
+          </a:p>
+          <a:p>
+            <a:r>
+              <a:rPr lang="en-US" sz="1600" b="0" i="0" dirty="0">
+                <a:solidFill>
+                  <a:srgbClr val="0000FF"/>
+                </a:solidFill>
+                <a:effectLst/>
+                <a:latin typeface="Consolas" panose="020B0609020204030204" pitchFamily="49" charset="0"/>
+              </a:rPr>
+              <a:t>if</a:t>
+            </a:r>
+            <a:r>
+              <a:rPr lang="en-US" sz="1600" b="0" i="0" dirty="0">
+                <a:solidFill>
+                  <a:srgbClr val="000000"/>
+                </a:solidFill>
+                <a:effectLst/>
+                <a:latin typeface="Consolas" panose="020B0609020204030204" pitchFamily="49" charset="0"/>
+              </a:rPr>
+              <a:t> count == 1: EXPIRE(key, </a:t>
+            </a:r>
+            <a:r>
+              <a:rPr lang="en-US" sz="1600" b="0" i="0" dirty="0" err="1">
+                <a:solidFill>
+                  <a:srgbClr val="000000"/>
+                </a:solidFill>
+                <a:effectLst/>
+                <a:latin typeface="Consolas" panose="020B0609020204030204" pitchFamily="49" charset="0"/>
+              </a:rPr>
+              <a:t>window_size</a:t>
+            </a:r>
+            <a:r>
+              <a:rPr lang="en-US" sz="1600" b="0" i="0" dirty="0">
+                <a:solidFill>
+                  <a:srgbClr val="000000"/>
+                </a:solidFill>
+                <a:effectLst/>
+                <a:latin typeface="Consolas" panose="020B0609020204030204" pitchFamily="49" charset="0"/>
+              </a:rPr>
+              <a:t> * 2) </a:t>
+            </a:r>
+            <a:r>
+              <a:rPr lang="en-US" sz="1600" b="0" i="0" dirty="0">
+                <a:solidFill>
+                  <a:srgbClr val="008000"/>
+                </a:solidFill>
+                <a:effectLst/>
+                <a:latin typeface="Consolas" panose="020B0609020204030204" pitchFamily="49" charset="0"/>
+              </a:rPr>
+              <a:t># TTL = 2 </a:t>
+            </a:r>
+            <a:r>
+              <a:rPr lang="ru-RU" sz="1600" b="0" i="0" dirty="0">
+                <a:solidFill>
+                  <a:srgbClr val="008000"/>
+                </a:solidFill>
+                <a:effectLst/>
+                <a:latin typeface="Consolas" panose="020B0609020204030204" pitchFamily="49" charset="0"/>
+              </a:rPr>
+              <a:t>окна (запас на сдвиг времени)</a:t>
+            </a:r>
+            <a:r>
+              <a:rPr lang="ru-RU" sz="1600" b="0" i="0" dirty="0">
+                <a:solidFill>
+                  <a:srgbClr val="000000"/>
+                </a:solidFill>
+                <a:effectLst/>
+                <a:latin typeface="Consolas" panose="020B0609020204030204" pitchFamily="49" charset="0"/>
+              </a:rPr>
+              <a:t> </a:t>
+            </a:r>
+            <a:endParaRPr lang="en-US" sz="1600" b="0" i="0" dirty="0">
+              <a:solidFill>
+                <a:srgbClr val="000000"/>
+              </a:solidFill>
+              <a:effectLst/>
+              <a:latin typeface="Consolas" panose="020B0609020204030204" pitchFamily="49" charset="0"/>
+            </a:endParaRPr>
+          </a:p>
+          <a:p>
+            <a:r>
+              <a:rPr lang="ru-RU" sz="1600" b="0" i="0" dirty="0">
+                <a:solidFill>
+                  <a:srgbClr val="008000"/>
+                </a:solidFill>
+                <a:effectLst/>
+                <a:latin typeface="Consolas" panose="020B0609020204030204" pitchFamily="49" charset="0"/>
+              </a:rPr>
+              <a:t># Шаг 4: проверить лимит</a:t>
+            </a:r>
+            <a:r>
+              <a:rPr lang="ru-RU" sz="1600" b="0" i="0" dirty="0">
+                <a:solidFill>
+                  <a:srgbClr val="000000"/>
+                </a:solidFill>
+                <a:effectLst/>
+                <a:latin typeface="Consolas" panose="020B0609020204030204" pitchFamily="49" charset="0"/>
+              </a:rPr>
+              <a:t> </a:t>
+            </a:r>
+            <a:endParaRPr lang="en-US" sz="1600" b="0" i="0" dirty="0">
+              <a:solidFill>
+                <a:srgbClr val="000000"/>
+              </a:solidFill>
+              <a:effectLst/>
+              <a:latin typeface="Consolas" panose="020B0609020204030204" pitchFamily="49" charset="0"/>
+            </a:endParaRPr>
+          </a:p>
+          <a:p>
+            <a:r>
+              <a:rPr lang="en-US" sz="1600" b="0" i="0" dirty="0">
+                <a:solidFill>
+                  <a:srgbClr val="0000FF"/>
+                </a:solidFill>
+                <a:effectLst/>
+                <a:latin typeface="Consolas" panose="020B0609020204030204" pitchFamily="49" charset="0"/>
+              </a:rPr>
+              <a:t>if</a:t>
+            </a:r>
+            <a:r>
+              <a:rPr lang="en-US" sz="1600" b="0" i="0" dirty="0">
+                <a:solidFill>
+                  <a:srgbClr val="000000"/>
+                </a:solidFill>
+                <a:effectLst/>
+                <a:latin typeface="Consolas" panose="020B0609020204030204" pitchFamily="49" charset="0"/>
+              </a:rPr>
+              <a:t> count &gt; limit: </a:t>
+            </a:r>
+            <a:r>
+              <a:rPr lang="en-US" sz="1600" b="0" i="0" dirty="0">
+                <a:solidFill>
+                  <a:srgbClr val="0000FF"/>
+                </a:solidFill>
+                <a:effectLst/>
+                <a:latin typeface="Consolas" panose="020B0609020204030204" pitchFamily="49" charset="0"/>
+              </a:rPr>
+              <a:t>return</a:t>
+            </a:r>
+            <a:r>
+              <a:rPr lang="en-US" sz="1600" b="0" i="0" dirty="0">
+                <a:solidFill>
+                  <a:srgbClr val="000000"/>
+                </a:solidFill>
+                <a:effectLst/>
+                <a:latin typeface="Consolas" panose="020B0609020204030204" pitchFamily="49" charset="0"/>
+              </a:rPr>
+              <a:t> </a:t>
+            </a:r>
+            <a:r>
+              <a:rPr lang="en-US" sz="1600" b="0" i="0" dirty="0">
+                <a:solidFill>
+                  <a:srgbClr val="A31515"/>
+                </a:solidFill>
+                <a:effectLst/>
+                <a:latin typeface="Consolas" panose="020B0609020204030204" pitchFamily="49" charset="0"/>
+              </a:rPr>
+              <a:t>False</a:t>
+            </a:r>
+            <a:r>
+              <a:rPr lang="en-US" sz="1600" b="0" i="0" dirty="0">
+                <a:solidFill>
+                  <a:srgbClr val="000000"/>
+                </a:solidFill>
+                <a:effectLst/>
+                <a:latin typeface="Consolas" panose="020B0609020204030204" pitchFamily="49" charset="0"/>
+              </a:rPr>
+              <a:t> </a:t>
+            </a:r>
+            <a:r>
+              <a:rPr lang="en-US" sz="1600" b="0" i="0" dirty="0">
+                <a:solidFill>
+                  <a:srgbClr val="008000"/>
+                </a:solidFill>
+                <a:effectLst/>
+                <a:latin typeface="Consolas" panose="020B0609020204030204" pitchFamily="49" charset="0"/>
+              </a:rPr>
+              <a:t># </a:t>
+            </a:r>
+            <a:r>
+              <a:rPr lang="ru-RU" sz="1600" b="0" i="0" dirty="0">
+                <a:solidFill>
+                  <a:srgbClr val="008000"/>
+                </a:solidFill>
+                <a:effectLst/>
+                <a:latin typeface="Consolas" panose="020B0609020204030204" pitchFamily="49" charset="0"/>
+              </a:rPr>
+              <a:t>запрос отклонён -&gt; </a:t>
+            </a:r>
+            <a:r>
+              <a:rPr lang="en-US" sz="1600" b="0" i="0" dirty="0">
+                <a:solidFill>
+                  <a:srgbClr val="008000"/>
+                </a:solidFill>
+                <a:effectLst/>
+                <a:latin typeface="Consolas" panose="020B0609020204030204" pitchFamily="49" charset="0"/>
+              </a:rPr>
+              <a:t>HTTP 429</a:t>
+            </a:r>
+            <a:r>
+              <a:rPr lang="en-US" sz="1600" b="0" i="0" dirty="0">
+                <a:solidFill>
+                  <a:srgbClr val="000000"/>
+                </a:solidFill>
+                <a:effectLst/>
+                <a:latin typeface="Consolas" panose="020B0609020204030204" pitchFamily="49" charset="0"/>
+              </a:rPr>
+              <a:t> </a:t>
+            </a:r>
+          </a:p>
+          <a:p>
+            <a:r>
+              <a:rPr lang="en-US" sz="1600" b="0" i="0" dirty="0">
+                <a:solidFill>
+                  <a:srgbClr val="0000FF"/>
+                </a:solidFill>
+                <a:effectLst/>
+                <a:latin typeface="Consolas" panose="020B0609020204030204" pitchFamily="49" charset="0"/>
+              </a:rPr>
+              <a:t>return</a:t>
+            </a:r>
+            <a:r>
+              <a:rPr lang="en-US" sz="1600" b="0" i="0" dirty="0">
+                <a:solidFill>
+                  <a:srgbClr val="000000"/>
+                </a:solidFill>
+                <a:effectLst/>
+                <a:latin typeface="Consolas" panose="020B0609020204030204" pitchFamily="49" charset="0"/>
+              </a:rPr>
+              <a:t> </a:t>
+            </a:r>
+            <a:r>
+              <a:rPr lang="en-US" sz="1600" b="0" i="0" dirty="0">
+                <a:solidFill>
+                  <a:srgbClr val="A31515"/>
+                </a:solidFill>
+                <a:effectLst/>
+                <a:latin typeface="Consolas" panose="020B0609020204030204" pitchFamily="49" charset="0"/>
+              </a:rPr>
+              <a:t>True</a:t>
+            </a:r>
+            <a:r>
+              <a:rPr lang="en-US" sz="1600" b="0" i="0" dirty="0">
+                <a:solidFill>
+                  <a:srgbClr val="000000"/>
+                </a:solidFill>
+                <a:effectLst/>
+                <a:latin typeface="Consolas" panose="020B0609020204030204" pitchFamily="49" charset="0"/>
+              </a:rPr>
+              <a:t> </a:t>
+            </a:r>
+            <a:r>
+              <a:rPr lang="en-US" sz="1600" b="0" i="0" dirty="0">
+                <a:solidFill>
+                  <a:srgbClr val="008000"/>
+                </a:solidFill>
+                <a:effectLst/>
+                <a:latin typeface="Consolas" panose="020B0609020204030204" pitchFamily="49" charset="0"/>
+              </a:rPr>
+              <a:t># </a:t>
+            </a:r>
+            <a:r>
+              <a:rPr lang="ru-RU" sz="1600" b="0" i="0" dirty="0">
+                <a:solidFill>
+                  <a:srgbClr val="008000"/>
+                </a:solidFill>
+                <a:effectLst/>
+                <a:latin typeface="Consolas" panose="020B0609020204030204" pitchFamily="49" charset="0"/>
+              </a:rPr>
+              <a:t>запрос разрешён</a:t>
+            </a:r>
+            <a:endParaRPr lang="ru-RU" sz="1600" b="0" dirty="0">
+              <a:effectLst/>
+              <a:latin typeface="Consolas" panose="020B0609020204030204" pitchFamily="49" charset="0"/>
+            </a:endParaRPr>
+          </a:p>
+        </p:txBody>
+      </p:sp>
     </p:spTree>
     <p:extLst>
       <p:ext uri="{BB962C8B-B14F-4D97-AF65-F5344CB8AC3E}">
-        <p14:creationId xmlns:p14="http://schemas.microsoft.com/office/powerpoint/2010/main" val="1248766432"/>
+        <p14:creationId xmlns:p14="http://schemas.microsoft.com/office/powerpoint/2010/main" val="3283393231"/>
       </p:ext>
     </p:extLst>
   </p:cSld>
@@ -7824,7 +11614,7 @@
         </p:nvSpPr>
         <p:spPr>
           <a:xfrm>
-            <a:off x="11463007" y="6134487"/>
+            <a:off x="11580453" y="6171414"/>
             <a:ext cx="409963" cy="610899"/>
           </a:xfrm>
         </p:spPr>
@@ -7842,50 +11632,7 @@
       </p:sp>
       <p:sp>
         <p:nvSpPr>
-          <p:cNvPr id="11" name="TextBox 10">
-            <a:extLst>
-              <a:ext uri="{FF2B5EF4-FFF2-40B4-BE49-F238E27FC236}">
-                <a16:creationId xmlns:a16="http://schemas.microsoft.com/office/drawing/2014/main" id="{2169E9A5-0F30-46EE-BA6A-78421B32F98B}"/>
-              </a:ext>
-            </a:extLst>
-          </p:cNvPr>
-          <p:cNvSpPr txBox="1"/>
-          <p:nvPr/>
-        </p:nvSpPr>
-        <p:spPr>
-          <a:xfrm>
-            <a:off x="457200" y="244509"/>
-            <a:ext cx="5381538" cy="584775"/>
-          </a:xfrm>
-          <a:prstGeom prst="rect">
-            <a:avLst/>
-          </a:prstGeom>
-          <a:noFill/>
-        </p:spPr>
-        <p:txBody>
-          <a:bodyPr wrap="square">
-            <a:spAutoFit/>
-          </a:bodyPr>
-          <a:lstStyle/>
-          <a:p>
-            <a:r>
-              <a:rPr lang="ru-RU" sz="3200" dirty="0">
-                <a:solidFill>
-                  <a:prstClr val="black"/>
-                </a:solidFill>
-                <a:latin typeface="Gilroy Bold" panose="00000800000000000000" pitchFamily="2" charset="-52"/>
-                <a:ea typeface="+mj-ea"/>
-                <a:cs typeface="+mj-cs"/>
-              </a:rPr>
-              <a:t>Заголовок</a:t>
-            </a:r>
-            <a:endParaRPr lang="ru-RU" dirty="0"/>
-          </a:p>
-        </p:txBody>
-      </p:sp>
-      <p:sp>
-        <p:nvSpPr>
-          <p:cNvPr id="10" name="TextBox 9">
+          <p:cNvPr id="7" name="TextBox 6">
             <a:extLst>
               <a:ext uri="{FF2B5EF4-FFF2-40B4-BE49-F238E27FC236}">
                 <a16:creationId xmlns:a16="http://schemas.microsoft.com/office/drawing/2014/main" id="{D7E8C6BD-D95E-4822-B09A-435E67225EB0}"/>
@@ -7897,8 +11644,8 @@
         </p:nvSpPr>
         <p:spPr>
           <a:xfrm>
-            <a:off x="272891" y="6173172"/>
-            <a:ext cx="10916724" cy="487121"/>
+            <a:off x="339755" y="6178253"/>
+            <a:ext cx="10798742" cy="692305"/>
           </a:xfrm>
           <a:prstGeom prst="rect">
             <a:avLst/>
@@ -7929,7 +11676,7 @@
               <a:defRPr/>
             </a:pPr>
             <a:r>
-              <a:rPr kumimoji="0" lang="ru-RU" sz="1100" b="0" i="0" u="none" strike="noStrike" kern="1200" cap="none" spc="0" normalizeH="0" baseline="0" noProof="0" dirty="0">
+              <a:rPr kumimoji="0" lang="ru-RU" sz="1100" i="0" u="none" strike="noStrike" kern="1200" cap="none" spc="0" normalizeH="0" baseline="0" noProof="0" dirty="0">
                 <a:ln>
                   <a:noFill/>
                 </a:ln>
@@ -7941,7 +11688,31 @@
                 <a:uFillTx/>
                 <a:latin typeface="Gilroy Medium" panose="00000600000000000000" charset="-52"/>
               </a:rPr>
-              <a:t>ИВАНОВ ИВАН ИВАНОВИЧ,  201-321,  04.06.2024</a:t>
+              <a:t>МЕДВЕДЕВ КЛИМ НИКОЛАЕВИЧ, 221-329</a:t>
+            </a:r>
+            <a:r>
+              <a:rPr lang="ru-RU" sz="1100" dirty="0">
+                <a:solidFill>
+                  <a:prstClr val="black"/>
+                </a:solidFill>
+                <a:latin typeface="Gilroy Medium" panose="00000600000000000000" charset="-52"/>
+              </a:rPr>
+              <a:t>,</a:t>
+            </a:r>
+            <a:r>
+              <a:rPr kumimoji="0" lang="ru-RU" sz="1100" i="0" u="none" strike="noStrike" kern="1200" cap="none" spc="0" normalizeH="0" noProof="0" dirty="0">
+                <a:ln>
+                  <a:noFill/>
+                </a:ln>
+                <a:solidFill>
+                  <a:prstClr val="black"/>
+                </a:solidFill>
+                <a:effectLst/>
+                <a:uLnTx/>
+                <a:uFillTx/>
+                <a:latin typeface="Gilroy Medium" panose="00000600000000000000" charset="-52"/>
+              </a:rPr>
+              <a:t> 04.06.2026</a:t>
             </a:r>
           </a:p>
           <a:p>
@@ -7963,7 +11734,7 @@
               <a:defRPr/>
             </a:pPr>
             <a:r>
-              <a:rPr kumimoji="0" lang="ru-RU" sz="1100" b="0" i="0" u="none" strike="noStrike" kern="1200" cap="none" spc="0" normalizeH="0" baseline="0" noProof="0" dirty="0">
+              <a:rPr kumimoji="0" lang="ru-RU" sz="1100" i="0" u="none" strike="noStrike" kern="1200" cap="none" spc="0" normalizeH="0" baseline="0" noProof="0" dirty="0">
                 <a:ln>
                   <a:noFill/>
                 </a:ln>
@@ -7975,8 +11746,27 @@
                 <a:uFillTx/>
                 <a:latin typeface="Gilroy Medium" panose="00000600000000000000" charset="-52"/>
               </a:rPr>
-              <a:t>РАЗРАБОТКА ВЕБ-ПРИЛОЖЕНИЯ ДЛЯ БРОНИРОВАНИЯ ТЕННИСНЫХ КОРТОВ В СПРОТКЛУБЕ СМЭШ</a:t>
-            </a:r>
+              <a:t>РАЗРАБОТКА СИСТЕМЫ ДЛЯ ПРОКСИРОВАНИЯ И МОНИТОРИНГА ИМИТАЦИОННЫХ СЕРВИСОВ В СРЕДЕ НАГРУЗОЧНОГО ТЕСТИРОВАНИЯ</a:t>
+            </a:r>
+          </a:p>
+          <a:p>
+            <a:pPr marL="0" marR="0" lvl="0" indent="0" algn="l" defTabSz="914400" rtl="0" eaLnBrk="1" fontAlgn="auto" latinLnBrk="0" hangingPunct="1">
+              <a:lnSpc>
+                <a:spcPts val="1600"/>
+              </a:lnSpc>
+              <a:spcBef>
+                <a:spcPts val="0"/>
+              </a:spcBef>
+              <a:spcAft>
+                <a:spcPts val="0"/>
+              </a:spcAft>
+              <a:buClrTx/>
+              <a:buSzTx/>
+              <a:buFontTx/>
+              <a:buNone/>
+              <a:tabLst/>
+              <a:defRPr/>
+            </a:pPr>
             <a:endParaRPr kumimoji="0" lang="ru-RU" sz="1100" i="0" u="none" strike="noStrike" kern="1200" cap="none" spc="0" normalizeH="0" baseline="0" noProof="0" dirty="0">
               <a:ln>
                 <a:noFill/>
@@ -7992,10 +11782,151 @@
           </a:p>
         </p:txBody>
       </p:sp>
+      <p:sp>
+        <p:nvSpPr>
+          <p:cNvPr id="11" name="TextBox 10">
+            <a:extLst>
+              <a:ext uri="{FF2B5EF4-FFF2-40B4-BE49-F238E27FC236}">
+                <a16:creationId xmlns:a16="http://schemas.microsoft.com/office/drawing/2014/main" id="{2169E9A5-0F30-46EE-BA6A-78421B32F98B}"/>
+              </a:ext>
+            </a:extLst>
+          </p:cNvPr>
+          <p:cNvSpPr txBox="1"/>
+          <p:nvPr/>
+        </p:nvSpPr>
+        <p:spPr>
+          <a:xfrm>
+            <a:off x="457200" y="537255"/>
+            <a:ext cx="6645617" cy="584775"/>
+          </a:xfrm>
+          <a:prstGeom prst="rect">
+            <a:avLst/>
+          </a:prstGeom>
+          <a:noFill/>
+        </p:spPr>
+        <p:txBody>
+          <a:bodyPr wrap="square">
+            <a:spAutoFit/>
+          </a:bodyPr>
+          <a:lstStyle/>
+          <a:p>
+            <a:r>
+              <a:rPr lang="ru-RU" sz="3200" dirty="0">
+                <a:latin typeface="Gilroy Bold" panose="00000800000000000000" pitchFamily="2" charset="-52"/>
+                <a:ea typeface="+mj-ea"/>
+                <a:cs typeface="+mj-cs"/>
+              </a:rPr>
+              <a:t>Управление жизненным циклом</a:t>
+            </a:r>
+          </a:p>
+        </p:txBody>
+      </p:sp>
+      <p:sp>
+        <p:nvSpPr>
+          <p:cNvPr id="2" name="TextBox 1">
+            <a:extLst>
+              <a:ext uri="{FF2B5EF4-FFF2-40B4-BE49-F238E27FC236}">
+                <a16:creationId xmlns:a16="http://schemas.microsoft.com/office/drawing/2014/main" id="{29A6AEEB-6479-6AF6-ED4B-A834C62D6DE6}"/>
+              </a:ext>
+            </a:extLst>
+          </p:cNvPr>
+          <p:cNvSpPr txBox="1"/>
+          <p:nvPr/>
+        </p:nvSpPr>
+        <p:spPr>
+          <a:xfrm>
+            <a:off x="1863318" y="1561052"/>
+            <a:ext cx="7751616" cy="3735895"/>
+          </a:xfrm>
+          <a:prstGeom prst="rect">
+            <a:avLst/>
+          </a:prstGeom>
+          <a:noFill/>
+        </p:spPr>
+        <p:txBody>
+          <a:bodyPr wrap="square" rtlCol="0">
+            <a:spAutoFit/>
+          </a:bodyPr>
+          <a:lstStyle/>
+          <a:p>
+            <a:pPr>
+              <a:lnSpc>
+                <a:spcPct val="150000"/>
+              </a:lnSpc>
+            </a:pPr>
+            <a:r>
+              <a:rPr lang="ru-RU" sz="1600" dirty="0"/>
+              <a:t>Запуск на удалённом хосте выполняется через SSH без установки агентов — командой </a:t>
+            </a:r>
+            <a:r>
+              <a:rPr lang="ru-RU" sz="1600" dirty="0" err="1"/>
+              <a:t>nohup</a:t>
+            </a:r>
+            <a:r>
+              <a:rPr lang="ru-RU" sz="1600" dirty="0"/>
+              <a:t>, PID возвращается в </a:t>
+            </a:r>
+            <a:r>
+              <a:rPr lang="ru-RU" sz="1600" dirty="0" err="1"/>
+              <a:t>stdout</a:t>
+            </a:r>
+            <a:r>
+              <a:rPr lang="ru-RU" sz="1600" dirty="0"/>
+              <a:t> и сохраняется в </a:t>
+            </a:r>
+            <a:r>
+              <a:rPr lang="ru-RU" sz="1600" dirty="0" err="1"/>
+              <a:t>Redis</a:t>
+            </a:r>
+            <a:r>
+              <a:rPr lang="ru-RU" sz="1600" dirty="0"/>
+              <a:t>.</a:t>
+            </a:r>
+          </a:p>
+          <a:p>
+            <a:pPr>
+              <a:lnSpc>
+                <a:spcPct val="150000"/>
+              </a:lnSpc>
+            </a:pPr>
+            <a:r>
+              <a:rPr lang="ru-RU" sz="1600" dirty="0"/>
+              <a:t>Остановка реализует двухэтапный протокол: сначала SIGTERM, затем при отсутствии реакции в течение 5 секунд — SIGKILL. Оба этапа выполняются асинхронно, не блокируя обработку других запросов.</a:t>
+            </a:r>
+          </a:p>
+          <a:p>
+            <a:pPr>
+              <a:lnSpc>
+                <a:spcPct val="150000"/>
+              </a:lnSpc>
+            </a:pPr>
+            <a:r>
+              <a:rPr lang="ru-RU" sz="1600" dirty="0"/>
+              <a:t>При перезапуске системы </a:t>
+            </a:r>
+            <a:r>
+              <a:rPr lang="ru-RU" sz="1600" dirty="0" err="1"/>
+              <a:t>restore_state</a:t>
+            </a:r>
+            <a:r>
+              <a:rPr lang="ru-RU" sz="1600" dirty="0"/>
+              <a:t> проверяет фактический PID каждой заглушки и автоматически перезапускает завершившиеся процессы с сохранёнными JVM-аргументами. </a:t>
+            </a:r>
+            <a:r>
+              <a:rPr lang="ru-RU" sz="1600" dirty="0" err="1"/>
+              <a:t>HealthChecker</a:t>
+            </a:r>
+            <a:r>
+              <a:rPr lang="ru-RU" sz="1600" dirty="0"/>
+              <a:t> обнаруживает сбой за ≤ 30 с.</a:t>
+            </a:r>
+          </a:p>
+        </p:txBody>
+      </p:sp>
     </p:spTree>
     <p:extLst>
       <p:ext uri="{BB962C8B-B14F-4D97-AF65-F5344CB8AC3E}">
-        <p14:creationId xmlns:p14="http://schemas.microsoft.com/office/powerpoint/2010/main" val="3523348574"/>
+        <p14:creationId xmlns:p14="http://schemas.microsoft.com/office/powerpoint/2010/main" val="872922167"/>
       </p:ext>
     </p:extLst>
   </p:cSld>

--- a/Thesis/docs/Презентация.pptx
+++ b/Thesis/docs/Презентация.pptx
@@ -248,7 +248,7 @@
           <a:p>
             <a:fld id="{06B9DC91-30C7-46AB-ADDB-A80A0533D77A}" type="datetimeFigureOut">
               <a:rPr lang="ru-RU" smtClean="0"/>
-              <a:t>10.05.2026</a:t>
+              <a:t>17.05.2026</a:t>
             </a:fld>
             <a:endParaRPr lang="ru-RU"/>
           </a:p>
@@ -2064,7 +2064,7 @@
           <a:p>
             <a:fld id="{D92D3C23-8038-4008-B24E-40A94D79456D}" type="datetime1">
               <a:rPr lang="ru-RU" smtClean="0"/>
-              <a:t>10.05.2026</a:t>
+              <a:t>17.05.2026</a:t>
             </a:fld>
             <a:endParaRPr lang="ru-RU"/>
           </a:p>
@@ -2512,7 +2512,7 @@
           <a:p>
             <a:fld id="{4FBADD92-CC98-4900-BE8A-2068547BBC1A}" type="datetime1">
               <a:rPr lang="ru-RU" smtClean="0"/>
-              <a:t>10.05.2026</a:t>
+              <a:t>17.05.2026</a:t>
             </a:fld>
             <a:endParaRPr lang="ru-RU"/>
           </a:p>
@@ -2830,7 +2830,7 @@
           <a:p>
             <a:fld id="{06738898-160C-4747-9301-0B5702FA49D8}" type="datetime1">
               <a:rPr lang="ru-RU" smtClean="0"/>
-              <a:t>10.05.2026</a:t>
+              <a:t>17.05.2026</a:t>
             </a:fld>
             <a:endParaRPr lang="ru-RU"/>
           </a:p>
@@ -2957,7 +2957,7 @@
           <a:p>
             <a:fld id="{F1EBB16F-DABE-4712-B47F-7722E1CB50FE}" type="datetime1">
               <a:rPr lang="ru-RU" smtClean="0"/>
-              <a:t>10.05.2026</a:t>
+              <a:t>17.05.2026</a:t>
             </a:fld>
             <a:endParaRPr lang="ru-RU" dirty="0"/>
           </a:p>
@@ -3010,7 +3010,7 @@
           <a:p>
             <a:fld id="{2CEBEA22-9938-4273-8C60-D80B349E4BA9}" type="datetime1">
               <a:rPr lang="ru-RU" smtClean="0"/>
-              <a:t>10.05.2026</a:t>
+              <a:t>17.05.2026</a:t>
             </a:fld>
             <a:endParaRPr lang="ru-RU"/>
           </a:p>
@@ -3291,7 +3291,7 @@
           <a:p>
             <a:fld id="{570D790B-F35A-4C90-BC4A-BA7F77964CA4}" type="datetime1">
               <a:rPr lang="ru-RU" smtClean="0"/>
-              <a:t>10.05.2026</a:t>
+              <a:t>17.05.2026</a:t>
             </a:fld>
             <a:endParaRPr lang="ru-RU"/>
           </a:p>
@@ -3528,7 +3528,7 @@
           <a:p>
             <a:fld id="{29AEF080-AA0F-44FA-BA62-A56D8619F7E7}" type="datetime1">
               <a:rPr lang="ru-RU" smtClean="0"/>
-              <a:t>10.05.2026</a:t>
+              <a:t>17.05.2026</a:t>
             </a:fld>
             <a:endParaRPr lang="ru-RU"/>
           </a:p>
@@ -3710,7 +3710,7 @@
           <a:p>
             <a:fld id="{83AB8CDF-4973-4195-91CA-18BA11F1D400}" type="datetime1">
               <a:rPr lang="ru-RU" smtClean="0"/>
-              <a:t>10.05.2026</a:t>
+              <a:t>17.05.2026</a:t>
             </a:fld>
             <a:endParaRPr lang="ru-RU"/>
           </a:p>
@@ -8192,7 +8192,7 @@
                 <a:ea typeface="+mj-ea"/>
                 <a:cs typeface="+mj-cs"/>
               </a:rPr>
-              <a:t>Цели и задачи</a:t>
+              <a:t>Цель и задачи</a:t>
             </a:r>
             <a:r>
               <a:rPr kumimoji="0" lang="ru-RU" sz="3200" b="0" i="0" u="none" strike="noStrike" kern="1200" cap="none" spc="0" normalizeH="0" baseline="0" noProof="0" dirty="0">
@@ -8226,8 +8226,8 @@
         </p:nvSpPr>
         <p:spPr>
           <a:xfrm>
-            <a:off x="423877" y="1745718"/>
-            <a:ext cx="11344245" cy="3366563"/>
+            <a:off x="423877" y="1446895"/>
+            <a:ext cx="11344245" cy="4105226"/>
           </a:xfrm>
           <a:prstGeom prst="rect">
             <a:avLst/>
@@ -8251,8 +8251,16 @@
             </a:r>
             <a:r>
               <a:rPr lang="ru-RU" sz="1600" dirty="0"/>
-              <a:t> спроектировать и реализовать АИС для централизованного управления и мониторинга распределённой инфраструктуры имитационных сервисов</a:t>
-            </a:r>
+              <a:t> спроектировать и разработать автоматизированную информационную систему для централизованного управления имитационными сервисами в среде нагрузочного тестирования и мониторинга их состояния.</a:t>
+            </a:r>
+          </a:p>
+          <a:p>
+            <a:pPr>
+              <a:lnSpc>
+                <a:spcPct val="150000"/>
+              </a:lnSpc>
+            </a:pPr>
+            <a:endParaRPr lang="ru-RU" sz="1600" dirty="0"/>
           </a:p>
           <a:p>
             <a:pPr>

--- a/Thesis/docs/Презентация.pptx
+++ b/Thesis/docs/Презентация.pptx
@@ -248,7 +248,7 @@
           <a:p>
             <a:fld id="{06B9DC91-30C7-46AB-ADDB-A80A0533D77A}" type="datetimeFigureOut">
               <a:rPr lang="ru-RU" smtClean="0"/>
-              <a:t>17.05.2026</a:t>
+              <a:t>19.05.2026</a:t>
             </a:fld>
             <a:endParaRPr lang="ru-RU"/>
           </a:p>
@@ -2064,7 +2064,7 @@
           <a:p>
             <a:fld id="{D92D3C23-8038-4008-B24E-40A94D79456D}" type="datetime1">
               <a:rPr lang="ru-RU" smtClean="0"/>
-              <a:t>17.05.2026</a:t>
+              <a:t>19.05.2026</a:t>
             </a:fld>
             <a:endParaRPr lang="ru-RU"/>
           </a:p>
@@ -2512,7 +2512,7 @@
           <a:p>
             <a:fld id="{4FBADD92-CC98-4900-BE8A-2068547BBC1A}" type="datetime1">
               <a:rPr lang="ru-RU" smtClean="0"/>
-              <a:t>17.05.2026</a:t>
+              <a:t>19.05.2026</a:t>
             </a:fld>
             <a:endParaRPr lang="ru-RU"/>
           </a:p>
@@ -2830,7 +2830,7 @@
           <a:p>
             <a:fld id="{06738898-160C-4747-9301-0B5702FA49D8}" type="datetime1">
               <a:rPr lang="ru-RU" smtClean="0"/>
-              <a:t>17.05.2026</a:t>
+              <a:t>19.05.2026</a:t>
             </a:fld>
             <a:endParaRPr lang="ru-RU"/>
           </a:p>
@@ -2957,7 +2957,7 @@
           <a:p>
             <a:fld id="{F1EBB16F-DABE-4712-B47F-7722E1CB50FE}" type="datetime1">
               <a:rPr lang="ru-RU" smtClean="0"/>
-              <a:t>17.05.2026</a:t>
+              <a:t>19.05.2026</a:t>
             </a:fld>
             <a:endParaRPr lang="ru-RU" dirty="0"/>
           </a:p>
@@ -3010,7 +3010,7 @@
           <a:p>
             <a:fld id="{2CEBEA22-9938-4273-8C60-D80B349E4BA9}" type="datetime1">
               <a:rPr lang="ru-RU" smtClean="0"/>
-              <a:t>17.05.2026</a:t>
+              <a:t>19.05.2026</a:t>
             </a:fld>
             <a:endParaRPr lang="ru-RU"/>
           </a:p>
@@ -3291,7 +3291,7 @@
           <a:p>
             <a:fld id="{570D790B-F35A-4C90-BC4A-BA7F77964CA4}" type="datetime1">
               <a:rPr lang="ru-RU" smtClean="0"/>
-              <a:t>17.05.2026</a:t>
+              <a:t>19.05.2026</a:t>
             </a:fld>
             <a:endParaRPr lang="ru-RU"/>
           </a:p>
@@ -3528,7 +3528,7 @@
           <a:p>
             <a:fld id="{29AEF080-AA0F-44FA-BA62-A56D8619F7E7}" type="datetime1">
               <a:rPr lang="ru-RU" smtClean="0"/>
-              <a:t>17.05.2026</a:t>
+              <a:t>19.05.2026</a:t>
             </a:fld>
             <a:endParaRPr lang="ru-RU"/>
           </a:p>
@@ -3710,7 +3710,7 @@
           <a:p>
             <a:fld id="{83AB8CDF-4973-4195-91CA-18BA11F1D400}" type="datetime1">
               <a:rPr lang="ru-RU" smtClean="0"/>
-              <a:t>17.05.2026</a:t>
+              <a:t>19.05.2026</a:t>
             </a:fld>
             <a:endParaRPr lang="ru-RU"/>
           </a:p>
@@ -4993,8 +4993,8 @@
         </p:nvSpPr>
         <p:spPr>
           <a:xfrm>
-            <a:off x="692660" y="1503233"/>
-            <a:ext cx="9814179" cy="1150571"/>
+            <a:off x="914400" y="2188286"/>
+            <a:ext cx="9814179" cy="411908"/>
           </a:xfrm>
           <a:prstGeom prst="rect">
             <a:avLst/>
@@ -5014,68 +5014,21 @@
             </a:pPr>
             <a:r>
               <a:rPr lang="ru-RU" sz="1600" dirty="0"/>
-              <a:t>Реализован на </a:t>
+              <a:t>ВСТАВИТЬ 2 ОКНА </a:t>
             </a:r>
             <a:r>
               <a:rPr lang="en-US" sz="1600" dirty="0"/>
-              <a:t>Server-Side Rendering (</a:t>
-            </a:r>
-            <a:r>
-              <a:rPr lang="en-US" sz="1600" dirty="0" err="1"/>
-              <a:t>FastAPI</a:t>
-            </a:r>
-            <a:r>
-              <a:rPr lang="en-US" sz="1600" dirty="0"/>
-              <a:t> + Jinja2) </a:t>
+              <a:t>side by side </a:t>
             </a:r>
             <a:r>
               <a:rPr lang="ru-RU" sz="1600" dirty="0"/>
-              <a:t>без внешних зависимостей. </a:t>
-            </a:r>
-            <a:endParaRPr lang="en-US" sz="1600" dirty="0"/>
-          </a:p>
-          <a:p>
-            <a:pPr>
-              <a:lnSpc>
-                <a:spcPct val="150000"/>
-              </a:lnSpc>
-            </a:pPr>
-            <a:r>
-              <a:rPr lang="ru-RU" sz="1600" dirty="0"/>
-              <a:t>Статус каждой заглушки кодируется цветом: 🟢 </a:t>
-            </a:r>
-            <a:r>
-              <a:rPr lang="en-US" sz="1600" dirty="0"/>
-              <a:t>RUNNING / </a:t>
-            </a:r>
-            <a:r>
-              <a:rPr lang="ru-RU" sz="1600" dirty="0"/>
-              <a:t>🟡 </a:t>
-            </a:r>
-            <a:r>
-              <a:rPr lang="en-US" sz="1600" dirty="0"/>
-              <a:t>STOPPED / </a:t>
-            </a:r>
-            <a:r>
-              <a:rPr lang="ru-RU" sz="1600" dirty="0"/>
-              <a:t>🔴 </a:t>
-            </a:r>
-            <a:r>
-              <a:rPr lang="en-US" sz="1600" dirty="0"/>
-              <a:t>ERROR. </a:t>
+              <a:t>регистрация заглушки и </a:t>
+            </a:r>
+            <a:r>
+              <a:rPr lang="ru-RU" sz="1600" dirty="0" err="1"/>
+              <a:t>дашборд</a:t>
             </a:r>
             <a:endParaRPr lang="ru-RU" sz="1600" dirty="0"/>
-          </a:p>
-          <a:p>
-            <a:pPr>
-              <a:lnSpc>
-                <a:spcPct val="150000"/>
-              </a:lnSpc>
-            </a:pPr>
-            <a:r>
-              <a:rPr lang="ru-RU" sz="1600" dirty="0"/>
-              <a:t>Таблица обновляется автоматически каждые 5 секунд.</a:t>
-            </a:r>
           </a:p>
         </p:txBody>
       </p:sp>
@@ -5414,41 +5367,6 @@
           </a:p>
         </p:txBody>
       </p:sp>
-      <p:sp>
-        <p:nvSpPr>
-          <p:cNvPr id="2" name="TextBox 1">
-            <a:extLst>
-              <a:ext uri="{FF2B5EF4-FFF2-40B4-BE49-F238E27FC236}">
-                <a16:creationId xmlns:a16="http://schemas.microsoft.com/office/drawing/2014/main" id="{29A6AEEB-6479-6AF6-ED4B-A834C62D6DE6}"/>
-              </a:ext>
-            </a:extLst>
-          </p:cNvPr>
-          <p:cNvSpPr txBox="1"/>
-          <p:nvPr/>
-        </p:nvSpPr>
-        <p:spPr>
-          <a:xfrm>
-            <a:off x="954880" y="1586177"/>
-            <a:ext cx="4928281" cy="338554"/>
-          </a:xfrm>
-          <a:prstGeom prst="rect">
-            <a:avLst/>
-          </a:prstGeom>
-          <a:noFill/>
-        </p:spPr>
-        <p:txBody>
-          <a:bodyPr wrap="square" rtlCol="0">
-            <a:spAutoFit/>
-          </a:bodyPr>
-          <a:lstStyle/>
-          <a:p>
-            <a:r>
-              <a:rPr lang="ru-RU" sz="1600" dirty="0"/>
-              <a:t>Результаты функционального тестирования</a:t>
-            </a:r>
-          </a:p>
-        </p:txBody>
-      </p:sp>
       <p:graphicFrame>
         <p:nvGraphicFramePr>
           <p:cNvPr id="4" name="Таблица 3">
@@ -5464,14 +5382,14 @@
           <p:nvPr>
             <p:extLst>
               <p:ext uri="{D42A27DB-BD31-4B8C-83A1-F6EECF244321}">
-                <p14:modId xmlns:p14="http://schemas.microsoft.com/office/powerpoint/2010/main" val="1403520182"/>
+                <p14:modId xmlns:p14="http://schemas.microsoft.com/office/powerpoint/2010/main" val="1516778445"/>
               </p:ext>
             </p:extLst>
           </p:nvPr>
         </p:nvGraphicFramePr>
         <p:xfrm>
-          <a:off x="954880" y="2388879"/>
-          <a:ext cx="10282239" cy="2743200"/>
+          <a:off x="914400" y="1659284"/>
+          <a:ext cx="10282239" cy="3551174"/>
         </p:xfrm>
         <a:graphic>
           <a:graphicData uri="http://schemas.openxmlformats.org/drawingml/2006/table">
@@ -5508,6 +5426,11 @@
                     <a:bodyPr/>
                     <a:lstStyle/>
                     <a:p>
+                      <a:pPr>
+                        <a:lnSpc>
+                          <a:spcPct val="150000"/>
+                        </a:lnSpc>
+                      </a:pPr>
                       <a:r>
                         <a:rPr lang="ru-RU" sz="1600"/>
                         <a:t>Сценарий</a:t>
@@ -5521,7 +5444,11 @@
                     <a:bodyPr/>
                     <a:lstStyle/>
                     <a:p>
-                      <a:pPr algn="ctr"/>
+                      <a:pPr algn="ctr">
+                        <a:lnSpc>
+                          <a:spcPct val="150000"/>
+                        </a:lnSpc>
+                      </a:pPr>
                       <a:r>
                         <a:rPr lang="ru-RU" sz="1600" dirty="0"/>
                         <a:t>Успешность</a:t>
@@ -5535,6 +5462,11 @@
                     <a:bodyPr/>
                     <a:lstStyle/>
                     <a:p>
+                      <a:pPr>
+                        <a:lnSpc>
+                          <a:spcPct val="150000"/>
+                        </a:lnSpc>
+                      </a:pPr>
                       <a:r>
                         <a:rPr lang="ru-RU" sz="1600" dirty="0"/>
                         <a:t>Результат</a:t>
@@ -5555,6 +5487,11 @@
                     <a:bodyPr/>
                     <a:lstStyle/>
                     <a:p>
+                      <a:pPr>
+                        <a:lnSpc>
+                          <a:spcPct val="150000"/>
+                        </a:lnSpc>
+                      </a:pPr>
                       <a:r>
                         <a:rPr lang="ru-RU" sz="1600"/>
                         <a:t>Перезапуск при работающих процессах</a:t>
@@ -5568,7 +5505,11 @@
                     <a:bodyPr/>
                     <a:lstStyle/>
                     <a:p>
-                      <a:pPr algn="ctr"/>
+                      <a:pPr algn="ctr">
+                        <a:lnSpc>
+                          <a:spcPct val="150000"/>
+                        </a:lnSpc>
+                      </a:pPr>
                       <a:r>
                         <a:rPr lang="ru-RU" sz="1600" dirty="0"/>
                         <a:t>✅</a:t>
@@ -5582,6 +5523,11 @@
                     <a:bodyPr/>
                     <a:lstStyle/>
                     <a:p>
+                      <a:pPr>
+                        <a:lnSpc>
+                          <a:spcPct val="150000"/>
+                        </a:lnSpc>
+                      </a:pPr>
                       <a:r>
                         <a:rPr lang="ru-RU" sz="1600" dirty="0"/>
                         <a:t>Статусы </a:t>
@@ -5610,6 +5556,11 @@
                     <a:bodyPr/>
                     <a:lstStyle/>
                     <a:p>
+                      <a:pPr>
+                        <a:lnSpc>
+                          <a:spcPct val="150000"/>
+                        </a:lnSpc>
+                      </a:pPr>
                       <a:r>
                         <a:rPr lang="ru-RU" sz="1600" dirty="0"/>
                         <a:t>Перезапуск при завершённых процессах</a:t>
@@ -5623,7 +5574,11 @@
                     <a:bodyPr/>
                     <a:lstStyle/>
                     <a:p>
-                      <a:pPr algn="ctr"/>
+                      <a:pPr algn="ctr">
+                        <a:lnSpc>
+                          <a:spcPct val="150000"/>
+                        </a:lnSpc>
+                      </a:pPr>
                       <a:r>
                         <a:rPr lang="ru-RU" sz="1600" dirty="0"/>
                         <a:t>✅</a:t>
@@ -5637,6 +5592,11 @@
                     <a:bodyPr/>
                     <a:lstStyle/>
                     <a:p>
+                      <a:pPr>
+                        <a:lnSpc>
+                          <a:spcPct val="150000"/>
+                        </a:lnSpc>
+                      </a:pPr>
                       <a:r>
                         <a:rPr lang="ru-RU" sz="1600" dirty="0"/>
                         <a:t>Автоматический перезапуск заглушек</a:t>
@@ -5657,6 +5617,11 @@
                     <a:bodyPr/>
                     <a:lstStyle/>
                     <a:p>
+                      <a:pPr>
+                        <a:lnSpc>
+                          <a:spcPct val="150000"/>
+                        </a:lnSpc>
+                      </a:pPr>
                       <a:r>
                         <a:rPr lang="ru-RU" sz="1600" dirty="0"/>
                         <a:t>Восстановление после аварии </a:t>
@@ -5674,7 +5639,11 @@
                     <a:bodyPr/>
                     <a:lstStyle/>
                     <a:p>
-                      <a:pPr algn="ctr"/>
+                      <a:pPr algn="ctr">
+                        <a:lnSpc>
+                          <a:spcPct val="150000"/>
+                        </a:lnSpc>
+                      </a:pPr>
                       <a:r>
                         <a:rPr lang="ru-RU" sz="1600" dirty="0"/>
                         <a:t>✅</a:t>
@@ -5688,6 +5657,11 @@
                     <a:bodyPr/>
                     <a:lstStyle/>
                     <a:p>
+                      <a:pPr>
+                        <a:lnSpc>
+                          <a:spcPct val="150000"/>
+                        </a:lnSpc>
+                      </a:pPr>
                       <a:r>
                         <a:rPr lang="ru-RU" sz="1600" dirty="0"/>
                         <a:t>Данные восстановлены из </a:t>
@@ -5716,14 +5690,20 @@
                     <a:bodyPr/>
                     <a:lstStyle/>
                     <a:p>
+                      <a:pPr>
+                        <a:lnSpc>
+                          <a:spcPct val="150000"/>
+                        </a:lnSpc>
+                      </a:pPr>
                       <a:r>
-                        <a:rPr lang="ru-RU" sz="1600"/>
+                        <a:rPr lang="ru-RU" sz="1600" dirty="0"/>
                         <a:t>Обнаружение сбоя планировщиком </a:t>
                       </a:r>
                       <a:r>
-                        <a:rPr lang="en-US" sz="1600"/>
+                        <a:rPr lang="en-US" sz="1600" dirty="0" err="1"/>
                         <a:t>HealthChecker</a:t>
                       </a:r>
+                      <a:endParaRPr lang="en-US" sz="1600" dirty="0"/>
                     </a:p>
                   </a:txBody>
                   <a:tcPr anchor="ctr"/>
@@ -5733,7 +5713,11 @@
                     <a:bodyPr/>
                     <a:lstStyle/>
                     <a:p>
-                      <a:pPr algn="ctr"/>
+                      <a:pPr algn="ctr">
+                        <a:lnSpc>
+                          <a:spcPct val="150000"/>
+                        </a:lnSpc>
+                      </a:pPr>
                       <a:r>
                         <a:rPr lang="ru-RU" sz="1600" dirty="0"/>
                         <a:t>✅</a:t>
@@ -5747,6 +5731,11 @@
                     <a:bodyPr/>
                     <a:lstStyle/>
                     <a:p>
+                      <a:pPr>
+                        <a:lnSpc>
+                          <a:spcPct val="150000"/>
+                        </a:lnSpc>
+                      </a:pPr>
                       <a:r>
                         <a:rPr lang="ru-RU" sz="1600" dirty="0"/>
                         <a:t>Статус ERROR за ≤ 30 с</a:t>
@@ -5767,9 +5756,18 @@
                     <a:bodyPr/>
                     <a:lstStyle/>
                     <a:p>
+                      <a:pPr>
+                        <a:lnSpc>
+                          <a:spcPct val="150000"/>
+                        </a:lnSpc>
+                      </a:pPr>
                       <a:r>
-                        <a:rPr lang="ru-RU" sz="1600"/>
-                        <a:t>Автовозврат из ERROR в RUNNING</a:t>
+                        <a:rPr lang="ru-RU" sz="1600" dirty="0" err="1"/>
+                        <a:t>Автовозврат</a:t>
+                      </a:r>
+                      <a:r>
+                        <a:rPr lang="ru-RU" sz="1600" dirty="0"/>
+                        <a:t> из ERROR в RUNNING</a:t>
                       </a:r>
                     </a:p>
                   </a:txBody>
@@ -5780,7 +5778,11 @@
                     <a:bodyPr/>
                     <a:lstStyle/>
                     <a:p>
-                      <a:pPr algn="ctr"/>
+                      <a:pPr algn="ctr">
+                        <a:lnSpc>
+                          <a:spcPct val="150000"/>
+                        </a:lnSpc>
+                      </a:pPr>
                       <a:r>
                         <a:rPr lang="ru-RU" sz="1600" dirty="0"/>
                         <a:t>✅</a:t>
@@ -5794,6 +5796,11 @@
                     <a:bodyPr/>
                     <a:lstStyle/>
                     <a:p>
+                      <a:pPr>
+                        <a:lnSpc>
+                          <a:spcPct val="150000"/>
+                        </a:lnSpc>
+                      </a:pPr>
                       <a:r>
                         <a:rPr lang="ru-RU" sz="1600" dirty="0"/>
                         <a:t>Статус RUNNING за ≤ 30 с</a:t>
@@ -6132,7 +6139,7 @@
         <p:spPr>
           <a:xfrm>
             <a:off x="954880" y="1593430"/>
-            <a:ext cx="10729120" cy="781240"/>
+            <a:ext cx="10729120" cy="411908"/>
           </a:xfrm>
           <a:prstGeom prst="rect">
             <a:avLst/>
@@ -6144,17 +6151,6 @@
             <a:spAutoFit/>
           </a:bodyPr>
           <a:lstStyle/>
-          <a:p>
-            <a:pPr>
-              <a:lnSpc>
-                <a:spcPct val="150000"/>
-              </a:lnSpc>
-            </a:pPr>
-            <a:r>
-              <a:rPr lang="ru-RU" sz="1600" dirty="0"/>
-              <a:t>Результаты нагрузочного тестирования прокси-модуля</a:t>
-            </a:r>
-          </a:p>
           <a:p>
             <a:pPr>
               <a:lnSpc>
@@ -6207,14 +6203,14 @@
           <p:nvPr>
             <p:extLst>
               <p:ext uri="{D42A27DB-BD31-4B8C-83A1-F6EECF244321}">
-                <p14:modId xmlns:p14="http://schemas.microsoft.com/office/powerpoint/2010/main" val="4076514608"/>
+                <p14:modId xmlns:p14="http://schemas.microsoft.com/office/powerpoint/2010/main" val="2652577363"/>
               </p:ext>
             </p:extLst>
           </p:nvPr>
         </p:nvGraphicFramePr>
         <p:xfrm>
-          <a:off x="954880" y="2707554"/>
-          <a:ext cx="10282239" cy="2651760"/>
+          <a:off x="954880" y="2352603"/>
+          <a:ext cx="10282239" cy="3471545"/>
         </p:xfrm>
         <a:graphic>
           <a:graphicData uri="http://schemas.openxmlformats.org/drawingml/2006/table">
@@ -6251,6 +6247,11 @@
                     <a:bodyPr/>
                     <a:lstStyle/>
                     <a:p>
+                      <a:pPr>
+                        <a:lnSpc>
+                          <a:spcPct val="150000"/>
+                        </a:lnSpc>
+                      </a:pPr>
                       <a:r>
                         <a:rPr lang="ru-RU" sz="1800"/>
                         <a:t>Сценарий</a:t>
@@ -6264,6 +6265,11 @@
                     <a:bodyPr/>
                     <a:lstStyle/>
                     <a:p>
+                      <a:pPr>
+                        <a:lnSpc>
+                          <a:spcPct val="150000"/>
+                        </a:lnSpc>
+                      </a:pPr>
                       <a:r>
                         <a:rPr lang="ru-RU" sz="1800" dirty="0"/>
                         <a:t>Показатель</a:t>
@@ -6277,6 +6283,11 @@
                     <a:bodyPr/>
                     <a:lstStyle/>
                     <a:p>
+                      <a:pPr>
+                        <a:lnSpc>
+                          <a:spcPct val="150000"/>
+                        </a:lnSpc>
+                      </a:pPr>
                       <a:r>
                         <a:rPr lang="ru-RU" sz="1800"/>
                         <a:t>Результат</a:t>
@@ -6297,6 +6308,11 @@
                     <a:bodyPr/>
                     <a:lstStyle/>
                     <a:p>
+                      <a:pPr>
+                        <a:lnSpc>
+                          <a:spcPct val="150000"/>
+                        </a:lnSpc>
+                      </a:pPr>
                       <a:r>
                         <a:rPr lang="ru-RU" sz="1800"/>
                         <a:t>Базовая нагрузка (10 </a:t>
@@ -6314,6 +6330,11 @@
                     <a:bodyPr/>
                     <a:lstStyle/>
                     <a:p>
+                      <a:pPr>
+                        <a:lnSpc>
+                          <a:spcPct val="150000"/>
+                        </a:lnSpc>
+                      </a:pPr>
                       <a:r>
                         <a:rPr lang="en-US" sz="1800"/>
                         <a:t>proxy_total_ms</a:t>
@@ -6327,6 +6348,11 @@
                     <a:bodyPr/>
                     <a:lstStyle/>
                     <a:p>
+                      <a:pPr>
+                        <a:lnSpc>
+                          <a:spcPct val="150000"/>
+                        </a:lnSpc>
+                      </a:pPr>
                       <a:r>
                         <a:rPr lang="ru-RU" sz="1800"/>
                         <a:t>3,90 мс</a:t>
@@ -6347,6 +6373,11 @@
                     <a:bodyPr/>
                     <a:lstStyle/>
                     <a:p>
+                      <a:pPr>
+                        <a:lnSpc>
+                          <a:spcPct val="150000"/>
+                        </a:lnSpc>
+                      </a:pPr>
                       <a:r>
                         <a:rPr lang="ru-RU" sz="1800"/>
                         <a:t>Нарастающая нагрузка (500 </a:t>
@@ -6364,6 +6395,11 @@
                     <a:bodyPr/>
                     <a:lstStyle/>
                     <a:p>
+                      <a:pPr>
+                        <a:lnSpc>
+                          <a:spcPct val="150000"/>
+                        </a:lnSpc>
+                      </a:pPr>
                       <a:r>
                         <a:rPr lang="en-US" sz="1800" dirty="0" err="1"/>
                         <a:t>proxy_total_ms</a:t>
@@ -6378,6 +6414,11 @@
                     <a:bodyPr/>
                     <a:lstStyle/>
                     <a:p>
+                      <a:pPr>
+                        <a:lnSpc>
+                          <a:spcPct val="150000"/>
+                        </a:lnSpc>
+                      </a:pPr>
                       <a:r>
                         <a:rPr lang="ru-RU" sz="1800"/>
                         <a:t>3,01 мс — линейный рост</a:t>
@@ -6398,6 +6439,11 @@
                     <a:bodyPr/>
                     <a:lstStyle/>
                     <a:p>
+                      <a:pPr>
+                        <a:lnSpc>
+                          <a:spcPct val="150000"/>
+                        </a:lnSpc>
+                      </a:pPr>
                       <a:r>
                         <a:rPr lang="ru-RU" sz="1800"/>
                         <a:t>Нарастающая нагрузка (1000 </a:t>
@@ -6415,6 +6461,11 @@
                     <a:bodyPr/>
                     <a:lstStyle/>
                     <a:p>
+                      <a:pPr>
+                        <a:lnSpc>
+                          <a:spcPct val="150000"/>
+                        </a:lnSpc>
+                      </a:pPr>
                       <a:r>
                         <a:rPr lang="en-US" sz="1800"/>
                         <a:t>proxy_total_ms</a:t>
@@ -6428,6 +6479,11 @@
                     <a:bodyPr/>
                     <a:lstStyle/>
                     <a:p>
+                      <a:pPr>
+                        <a:lnSpc>
+                          <a:spcPct val="150000"/>
+                        </a:lnSpc>
+                      </a:pPr>
                       <a:r>
                         <a:rPr lang="ru-RU" sz="1800"/>
                         <a:t>10,52 мс — без отказов</a:t>
@@ -6448,6 +6504,11 @@
                     <a:bodyPr/>
                     <a:lstStyle/>
                     <a:p>
+                      <a:pPr>
+                        <a:lnSpc>
+                          <a:spcPct val="150000"/>
+                        </a:lnSpc>
+                      </a:pPr>
                       <a:r>
                         <a:rPr lang="en-US" sz="1800"/>
                         <a:t>Rate Limiting (</a:t>
@@ -6469,6 +6530,11 @@
                     <a:bodyPr/>
                     <a:lstStyle/>
                     <a:p>
+                      <a:pPr>
+                        <a:lnSpc>
+                          <a:spcPct val="150000"/>
+                        </a:lnSpc>
+                      </a:pPr>
                       <a:r>
                         <a:rPr lang="ru-RU" sz="1800"/>
                         <a:t>Отклонение от лимита</a:t>
@@ -6482,6 +6548,11 @@
                     <a:bodyPr/>
                     <a:lstStyle/>
                     <a:p>
+                      <a:pPr>
+                        <a:lnSpc>
+                          <a:spcPct val="150000"/>
+                        </a:lnSpc>
+                      </a:pPr>
                       <a:r>
                         <a:rPr lang="ru-RU" sz="1800" b="1" dirty="0"/>
                         <a:t>0,13%</a:t>
@@ -6501,6 +6572,42 @@
           </a:graphicData>
         </a:graphic>
       </p:graphicFrame>
+      <p:pic>
+        <p:nvPicPr>
+          <p:cNvPr id="8" name="Рисунок 7" descr="Изображение выглядит как текст, снимок экрана&#10;&#10;Контент, сгенерированный ИИ, может содержать ошибки.">
+            <a:extLst>
+              <a:ext uri="{FF2B5EF4-FFF2-40B4-BE49-F238E27FC236}">
+                <a16:creationId xmlns:a16="http://schemas.microsoft.com/office/drawing/2014/main" id="{733C3D98-9C16-2BDC-A231-29FF155FAE3E}"/>
+              </a:ext>
+            </a:extLst>
+          </p:cNvPr>
+          <p:cNvPicPr>
+            <a:picLocks noChangeAspect="1"/>
+          </p:cNvPicPr>
+          <p:nvPr/>
+        </p:nvPicPr>
+        <p:blipFill>
+          <a:blip r:embed="rId3">
+            <a:extLst>
+              <a:ext uri="{28A0092B-C50C-407E-A947-70E740481C1C}">
+                <a14:useLocalDpi xmlns:a14="http://schemas.microsoft.com/office/drawing/2010/main" val="0"/>
+              </a:ext>
+            </a:extLst>
+          </a:blip>
+          <a:stretch>
+            <a:fillRect/>
+          </a:stretch>
+        </p:blipFill>
+        <p:spPr>
+          <a:xfrm>
+            <a:off x="4840808" y="923116"/>
+            <a:ext cx="7149608" cy="3385390"/>
+          </a:xfrm>
+          <a:prstGeom prst="rect">
+            <a:avLst/>
+          </a:prstGeom>
+        </p:spPr>
+      </p:pic>
     </p:spTree>
     <p:extLst>
       <p:ext uri="{BB962C8B-B14F-4D97-AF65-F5344CB8AC3E}">
@@ -6816,7 +6923,7 @@
         <p:spPr>
           <a:xfrm>
             <a:off x="339755" y="1659285"/>
-            <a:ext cx="11344245" cy="3735895"/>
+            <a:ext cx="11344245" cy="4105226"/>
           </a:xfrm>
           <a:prstGeom prst="rect">
             <a:avLst/>
@@ -6934,7 +7041,7 @@
             </a:r>
             <a:r>
               <a:rPr lang="ru-RU" sz="1600" dirty="0"/>
-              <a:t> для каждого сервиса без перезапуска</a:t>
+              <a:t> для каждого сервиса без перезапуска *ПРИДУМАТЬ КАК ПЕРЕФРАЗИРОВАТЬ НЕЗАМЕТНО*</a:t>
             </a:r>
           </a:p>
           <a:p>
@@ -7892,7 +7999,7 @@
             </a:r>
             <a:r>
               <a:rPr lang="ru-RU" sz="1600" dirty="0"/>
-              <a:t> ни одно из существующих решений не закрывает задачу централизованного управления распределённой инфраструктурой заглушек в условиях импортозамещения</a:t>
+              <a:t> ни одно из существующих решений не решает задачу централизованного управления распределённой инфраструктурой заглушек в условиях импортозамещения</a:t>
             </a:r>
           </a:p>
         </p:txBody>
@@ -8226,8 +8333,8 @@
         </p:nvSpPr>
         <p:spPr>
           <a:xfrm>
-            <a:off x="423877" y="1446895"/>
-            <a:ext cx="11344245" cy="4105226"/>
+            <a:off x="423877" y="1339916"/>
+            <a:ext cx="11344245" cy="4606774"/>
           </a:xfrm>
           <a:prstGeom prst="rect">
             <a:avLst/>
@@ -8246,11 +8353,11 @@
               </a:lnSpc>
             </a:pPr>
             <a:r>
-              <a:rPr lang="ru-RU" sz="1600" b="1" dirty="0"/>
+              <a:rPr lang="ru-RU" b="1" dirty="0"/>
               <a:t>Цель:</a:t>
             </a:r>
             <a:r>
-              <a:rPr lang="ru-RU" sz="1600" dirty="0"/>
+              <a:rPr lang="ru-RU" dirty="0"/>
               <a:t> спроектировать и разработать автоматизированную информационную систему для централизованного управления имитационными сервисами в среде нагрузочного тестирования и мониторинга их состояния.</a:t>
             </a:r>
           </a:p>
@@ -8260,7 +8367,7 @@
                 <a:spcPct val="150000"/>
               </a:lnSpc>
             </a:pPr>
-            <a:endParaRPr lang="ru-RU" sz="1600" dirty="0"/>
+            <a:endParaRPr lang="ru-RU" dirty="0"/>
           </a:p>
           <a:p>
             <a:pPr>
@@ -8269,10 +8376,10 @@
               </a:lnSpc>
             </a:pPr>
             <a:r>
-              <a:rPr lang="ru-RU" sz="1600" b="1" dirty="0"/>
+              <a:rPr lang="ru-RU" b="1" dirty="0"/>
               <a:t>Задачи:</a:t>
             </a:r>
-            <a:endParaRPr lang="ru-RU" sz="1600" dirty="0"/>
+            <a:endParaRPr lang="ru-RU" dirty="0"/>
           </a:p>
           <a:p>
             <a:pPr>
@@ -8283,7 +8390,7 @@
               <a:buAutoNum type="arabicPeriod"/>
             </a:pPr>
             <a:r>
-              <a:rPr lang="ru-RU" sz="1600" dirty="0"/>
+              <a:rPr lang="ru-RU" dirty="0"/>
               <a:t>Провести анализ предметной области и существующих подходов</a:t>
             </a:r>
           </a:p>
@@ -8296,7 +8403,7 @@
               <a:buAutoNum type="arabicPeriod"/>
             </a:pPr>
             <a:r>
-              <a:rPr lang="ru-RU" sz="1600" dirty="0"/>
+              <a:rPr lang="ru-RU" dirty="0"/>
               <a:t>Спроектировать архитектуру программного комплекса</a:t>
             </a:r>
           </a:p>
@@ -8309,7 +8416,7 @@
               <a:buAutoNum type="arabicPeriod"/>
             </a:pPr>
             <a:r>
-              <a:rPr lang="ru-RU" sz="1600" dirty="0"/>
+              <a:rPr lang="ru-RU" dirty="0"/>
               <a:t>Обосновать выбор технологического стека</a:t>
             </a:r>
           </a:p>
@@ -8322,23 +8429,23 @@
               <a:buAutoNum type="arabicPeriod"/>
             </a:pPr>
             <a:r>
-              <a:rPr lang="ru-RU" sz="1600" dirty="0"/>
+              <a:rPr lang="ru-RU" dirty="0"/>
               <a:t>Разработать алгоритмы </a:t>
             </a:r>
             <a:r>
-              <a:rPr lang="ru-RU" sz="1600" dirty="0" err="1"/>
+              <a:rPr lang="ru-RU" dirty="0" err="1"/>
               <a:t>проксирования</a:t>
             </a:r>
             <a:r>
-              <a:rPr lang="ru-RU" sz="1600" dirty="0"/>
+              <a:rPr lang="ru-RU" dirty="0"/>
               <a:t>, Rate </a:t>
             </a:r>
             <a:r>
-              <a:rPr lang="ru-RU" sz="1600" dirty="0" err="1"/>
+              <a:rPr lang="ru-RU" dirty="0" err="1"/>
               <a:t>Limiting</a:t>
             </a:r>
             <a:r>
-              <a:rPr lang="ru-RU" sz="1600" dirty="0"/>
+              <a:rPr lang="ru-RU" dirty="0"/>
               <a:t> и API управления</a:t>
             </a:r>
           </a:p>
@@ -8351,7 +8458,7 @@
               <a:buAutoNum type="arabicPeriod"/>
             </a:pPr>
             <a:r>
-              <a:rPr lang="ru-RU" sz="1600" dirty="0"/>
+              <a:rPr lang="ru-RU" dirty="0"/>
               <a:t>Реализовать систему хранения конфигураций и контроля состояний</a:t>
             </a:r>
           </a:p>
@@ -8364,7 +8471,7 @@
               <a:buAutoNum type="arabicPeriod"/>
             </a:pPr>
             <a:r>
-              <a:rPr lang="ru-RU" sz="1600" dirty="0"/>
+              <a:rPr lang="ru-RU" dirty="0"/>
               <a:t>Провести тестирование в среде ОС Astra Linux</a:t>
             </a:r>
           </a:p>
@@ -9536,93 +9643,6 @@
           </a:p>
         </p:txBody>
       </p:sp>
-      <p:sp>
-        <p:nvSpPr>
-          <p:cNvPr id="2" name="TextBox 1">
-            <a:extLst>
-              <a:ext uri="{FF2B5EF4-FFF2-40B4-BE49-F238E27FC236}">
-                <a16:creationId xmlns:a16="http://schemas.microsoft.com/office/drawing/2014/main" id="{29A6AEEB-6479-6AF6-ED4B-A834C62D6DE6}"/>
-              </a:ext>
-            </a:extLst>
-          </p:cNvPr>
-          <p:cNvSpPr txBox="1"/>
-          <p:nvPr/>
-        </p:nvSpPr>
-        <p:spPr>
-          <a:xfrm>
-            <a:off x="339755" y="1475040"/>
-            <a:ext cx="11344245" cy="1150571"/>
-          </a:xfrm>
-          <a:prstGeom prst="rect">
-            <a:avLst/>
-          </a:prstGeom>
-          <a:noFill/>
-        </p:spPr>
-        <p:txBody>
-          <a:bodyPr wrap="square" rtlCol="0">
-            <a:spAutoFit/>
-          </a:bodyPr>
-          <a:lstStyle/>
-          <a:p>
-            <a:pPr>
-              <a:lnSpc>
-                <a:spcPct val="150000"/>
-              </a:lnSpc>
-            </a:pPr>
-            <a:r>
-              <a:rPr lang="ru-RU" sz="1600" dirty="0"/>
-              <a:t>Выбрана монолитная архитектура с выраженной внутренней модульностью. Управление удалёнными хостами — через SSH/SFTP без установки агентов.</a:t>
-            </a:r>
-          </a:p>
-          <a:p>
-            <a:pPr>
-              <a:lnSpc>
-                <a:spcPct val="150000"/>
-              </a:lnSpc>
-            </a:pPr>
-            <a:r>
-              <a:rPr lang="ru-RU" sz="1600" b="1" dirty="0"/>
-              <a:t>Технологический стек:</a:t>
-            </a:r>
-            <a:r>
-              <a:rPr lang="ru-RU" sz="1600" dirty="0"/>
-              <a:t> Python + </a:t>
-            </a:r>
-            <a:r>
-              <a:rPr lang="ru-RU" sz="1600" dirty="0" err="1"/>
-              <a:t>asyncio</a:t>
-            </a:r>
-            <a:r>
-              <a:rPr lang="ru-RU" sz="1600" dirty="0"/>
-              <a:t> / </a:t>
-            </a:r>
-            <a:r>
-              <a:rPr lang="ru-RU" sz="1600" dirty="0" err="1"/>
-              <a:t>FastAPI</a:t>
-            </a:r>
-            <a:r>
-              <a:rPr lang="ru-RU" sz="1600" dirty="0"/>
-              <a:t> + </a:t>
-            </a:r>
-            <a:r>
-              <a:rPr lang="ru-RU" sz="1600" dirty="0" err="1"/>
-              <a:t>Uvicorn</a:t>
-            </a:r>
-            <a:r>
-              <a:rPr lang="ru-RU" sz="1600" dirty="0"/>
-              <a:t> / </a:t>
-            </a:r>
-            <a:r>
-              <a:rPr lang="ru-RU" sz="1600" dirty="0" err="1"/>
-              <a:t>Redis</a:t>
-            </a:r>
-            <a:r>
-              <a:rPr lang="ru-RU" sz="1600" dirty="0"/>
-              <a:t> AOF / Astra Linux</a:t>
-            </a:r>
-          </a:p>
-        </p:txBody>
-      </p:sp>
       <p:pic>
         <p:nvPicPr>
           <p:cNvPr id="8" name="Рисунок 7" descr="Изображение выглядит как текст, снимок экрана, Шрифт, диаграмма&#10;&#10;Контент, сгенерированный ИИ, может содержать ошибки.">
@@ -9650,14 +9670,49 @@
         </p:blipFill>
         <p:spPr>
           <a:xfrm>
-            <a:off x="4135718" y="2625611"/>
-            <a:ext cx="5693932" cy="3715138"/>
+            <a:off x="493057" y="1121404"/>
+            <a:ext cx="7712635" cy="5032288"/>
           </a:xfrm>
           <a:prstGeom prst="rect">
             <a:avLst/>
           </a:prstGeom>
         </p:spPr>
       </p:pic>
+      <p:sp>
+        <p:nvSpPr>
+          <p:cNvPr id="4" name="TextBox 3">
+            <a:extLst>
+              <a:ext uri="{FF2B5EF4-FFF2-40B4-BE49-F238E27FC236}">
+                <a16:creationId xmlns:a16="http://schemas.microsoft.com/office/drawing/2014/main" id="{E968D3A5-7045-133E-337A-A3F693A49331}"/>
+              </a:ext>
+            </a:extLst>
+          </p:cNvPr>
+          <p:cNvSpPr txBox="1"/>
+          <p:nvPr/>
+        </p:nvSpPr>
+        <p:spPr>
+          <a:xfrm>
+            <a:off x="8731624" y="1470212"/>
+            <a:ext cx="2647576" cy="369332"/>
+          </a:xfrm>
+          <a:prstGeom prst="rect">
+            <a:avLst/>
+          </a:prstGeom>
+          <a:noFill/>
+        </p:spPr>
+        <p:txBody>
+          <a:bodyPr wrap="square" rtlCol="0">
+            <a:spAutoFit/>
+          </a:bodyPr>
+          <a:lstStyle/>
+          <a:p>
+            <a:r>
+              <a:rPr lang="ru-RU" dirty="0"/>
+              <a:t>СТЕК КАРТИНКИ</a:t>
+            </a:r>
+          </a:p>
+        </p:txBody>
+      </p:sp>
     </p:spTree>
     <p:extLst>
       <p:ext uri="{BB962C8B-B14F-4D97-AF65-F5344CB8AC3E}">
@@ -9972,8 +10027,8 @@
         </p:nvSpPr>
         <p:spPr>
           <a:xfrm>
-            <a:off x="339755" y="1411698"/>
-            <a:ext cx="11344245" cy="1077218"/>
+            <a:off x="339755" y="1531226"/>
+            <a:ext cx="3443351" cy="584775"/>
           </a:xfrm>
           <a:prstGeom prst="rect">
             <a:avLst/>
@@ -9988,15 +10043,7 @@
           <a:p>
             <a:r>
               <a:rPr lang="ru-RU" sz="1600" dirty="0"/>
-              <a:t>Для каждого объекта системы используется </a:t>
-            </a:r>
-            <a:r>
-              <a:rPr lang="ru-RU" sz="1600" dirty="0" err="1"/>
-              <a:t>Hash</a:t>
-            </a:r>
-            <a:r>
-              <a:rPr lang="ru-RU" sz="1600" dirty="0"/>
-              <a:t>-запись — позволяет читать конфигурацию целиком за одну операцию HGETALL и обновлять отдельные поля через HSET без перезаписи всей записи. Бинарный файл заглушки хранится только на целевом хосте — передаётся по SFTP при регистрации и немедленно удаляется с управляющего сервера.</a:t>
+              <a:t>СПИСОК СУЩНОСТЕЙ НА РУССКОМ</a:t>
             </a:r>
           </a:p>
         </p:txBody>
@@ -10029,8 +10076,8 @@
         </p:blipFill>
         <p:spPr>
           <a:xfrm>
-            <a:off x="3372660" y="2566796"/>
-            <a:ext cx="5446680" cy="3604577"/>
+            <a:off x="4129725" y="1247410"/>
+            <a:ext cx="7450728" cy="4930843"/>
           </a:xfrm>
           <a:prstGeom prst="rect">
             <a:avLst/>
@@ -10458,8 +10505,8 @@
         </p:blipFill>
         <p:spPr>
           <a:xfrm>
-            <a:off x="4962552" y="1527096"/>
-            <a:ext cx="6183700" cy="4246091"/>
+            <a:off x="4503137" y="1212568"/>
+            <a:ext cx="7231664" cy="4965685"/>
           </a:xfrm>
           <a:prstGeom prst="rect">
             <a:avLst/>
@@ -10789,58 +10836,6 @@
       </p:sp>
       <p:sp>
         <p:nvSpPr>
-          <p:cNvPr id="2" name="TextBox 1">
-            <a:extLst>
-              <a:ext uri="{FF2B5EF4-FFF2-40B4-BE49-F238E27FC236}">
-                <a16:creationId xmlns:a16="http://schemas.microsoft.com/office/drawing/2014/main" id="{29A6AEEB-6479-6AF6-ED4B-A834C62D6DE6}"/>
-              </a:ext>
-            </a:extLst>
-          </p:cNvPr>
-          <p:cNvSpPr txBox="1"/>
-          <p:nvPr/>
-        </p:nvSpPr>
-        <p:spPr>
-          <a:xfrm>
-            <a:off x="1195294" y="1659284"/>
-            <a:ext cx="9801413" cy="781240"/>
-          </a:xfrm>
-          <a:prstGeom prst="rect">
-            <a:avLst/>
-          </a:prstGeom>
-          <a:noFill/>
-        </p:spPr>
-        <p:txBody>
-          <a:bodyPr wrap="square" rtlCol="0">
-            <a:spAutoFit/>
-          </a:bodyPr>
-          <a:lstStyle/>
-          <a:p>
-            <a:pPr>
-              <a:lnSpc>
-                <a:spcPct val="150000"/>
-              </a:lnSpc>
-            </a:pPr>
-            <a:r>
-              <a:rPr lang="ru-RU" sz="1600" dirty="0"/>
-              <a:t>Прокси-модуль прозрачно маршрутизирует запросы: сохраняет метод, заголовки и тело. </a:t>
-            </a:r>
-            <a:endParaRPr lang="en-US" sz="1600" dirty="0"/>
-          </a:p>
-          <a:p>
-            <a:pPr>
-              <a:lnSpc>
-                <a:spcPct val="150000"/>
-              </a:lnSpc>
-            </a:pPr>
-            <a:r>
-              <a:rPr lang="ru-RU" sz="1600" dirty="0"/>
-              <a:t>При превышении лимита возвращает HTTP 429, не нагружая заглушку.</a:t>
-            </a:r>
-          </a:p>
-        </p:txBody>
-      </p:sp>
-      <p:sp>
-        <p:nvSpPr>
           <p:cNvPr id="4" name="TextBox 3">
             <a:extLst>
               <a:ext uri="{FF2B5EF4-FFF2-40B4-BE49-F238E27FC236}">
@@ -10854,7 +10849,7 @@
         <p:spPr>
           <a:xfrm>
             <a:off x="1195294" y="2772285"/>
-            <a:ext cx="9801412" cy="2800767"/>
+            <a:ext cx="9801412" cy="338554"/>
           </a:xfrm>
           <a:prstGeom prst="rect">
             <a:avLst/>
@@ -10868,659 +10863,32 @@
           <a:lstStyle/>
           <a:p>
             <a:r>
-              <a:rPr lang="en-US" sz="1600" b="0" i="0" dirty="0">
-                <a:solidFill>
-                  <a:srgbClr val="0000FF"/>
-                </a:solidFill>
+              <a:rPr lang="ru-RU" sz="1600" b="0" dirty="0">
                 <a:effectLst/>
                 <a:latin typeface="Consolas" panose="020B0609020204030204" pitchFamily="49" charset="0"/>
               </a:rPr>
-              <a:t>def</a:t>
-            </a:r>
-            <a:r>
-              <a:rPr lang="en-US" sz="1600" b="0" i="0" dirty="0">
-                <a:solidFill>
-                  <a:srgbClr val="000000"/>
-                </a:solidFill>
+              <a:t>ВСТАВИТЬ </a:t>
+            </a:r>
+            <a:r>
+              <a:rPr lang="ru-RU" sz="1600" b="0" dirty="0" err="1">
+                <a:effectLst/>
+                <a:latin typeface="Consolas" panose="020B0609020204030204" pitchFamily="49" charset="0"/>
+              </a:rPr>
+              <a:t>БЛОК-схему</a:t>
+            </a:r>
+            <a:r>
+              <a:rPr lang="ru-RU" sz="1600" b="0" dirty="0">
                 <a:effectLst/>
                 <a:latin typeface="Consolas" panose="020B0609020204030204" pitchFamily="49" charset="0"/>
               </a:rPr>
               <a:t> </a:t>
             </a:r>
             <a:r>
-              <a:rPr lang="en-US" sz="1600" b="0" i="0" dirty="0" err="1">
-                <a:solidFill>
-                  <a:srgbClr val="A31515"/>
-                </a:solidFill>
+              <a:rPr lang="ru-RU" sz="1600" b="0" dirty="0" err="1">
                 <a:effectLst/>
                 <a:latin typeface="Consolas" panose="020B0609020204030204" pitchFamily="49" charset="0"/>
               </a:rPr>
-              <a:t>check_rate_limit</a:t>
-            </a:r>
-            <a:r>
-              <a:rPr lang="en-US" sz="1600" b="0" i="0" dirty="0">
-                <a:solidFill>
-                  <a:srgbClr val="000000"/>
-                </a:solidFill>
-                <a:effectLst/>
-                <a:latin typeface="Consolas" panose="020B0609020204030204" pitchFamily="49" charset="0"/>
-              </a:rPr>
-              <a:t>(filename: </a:t>
-            </a:r>
-            <a:r>
-              <a:rPr lang="en-US" sz="1600" b="0" i="0" dirty="0">
-                <a:solidFill>
-                  <a:srgbClr val="0000FF"/>
-                </a:solidFill>
-                <a:effectLst/>
-                <a:latin typeface="Consolas" panose="020B0609020204030204" pitchFamily="49" charset="0"/>
-              </a:rPr>
-              <a:t>str</a:t>
-            </a:r>
-            <a:r>
-              <a:rPr lang="en-US" sz="1600" b="0" i="0" dirty="0">
-                <a:solidFill>
-                  <a:srgbClr val="000000"/>
-                </a:solidFill>
-                <a:effectLst/>
-                <a:latin typeface="Consolas" panose="020B0609020204030204" pitchFamily="49" charset="0"/>
-              </a:rPr>
-              <a:t>, limit: </a:t>
-            </a:r>
-            <a:r>
-              <a:rPr lang="en-US" sz="1600" b="0" i="0" dirty="0">
-                <a:solidFill>
-                  <a:srgbClr val="0000FF"/>
-                </a:solidFill>
-                <a:effectLst/>
-                <a:latin typeface="Consolas" panose="020B0609020204030204" pitchFamily="49" charset="0"/>
-              </a:rPr>
-              <a:t>int</a:t>
-            </a:r>
-            <a:r>
-              <a:rPr lang="en-US" sz="1600" b="0" i="0" dirty="0">
-                <a:solidFill>
-                  <a:srgbClr val="000000"/>
-                </a:solidFill>
-                <a:effectLst/>
-                <a:latin typeface="Consolas" panose="020B0609020204030204" pitchFamily="49" charset="0"/>
-              </a:rPr>
-              <a:t>, </a:t>
-            </a:r>
-            <a:r>
-              <a:rPr lang="en-US" sz="1600" b="0" i="0" dirty="0" err="1">
-                <a:solidFill>
-                  <a:srgbClr val="000000"/>
-                </a:solidFill>
-                <a:effectLst/>
-                <a:latin typeface="Consolas" panose="020B0609020204030204" pitchFamily="49" charset="0"/>
-              </a:rPr>
-              <a:t>window_size</a:t>
-            </a:r>
-            <a:r>
-              <a:rPr lang="en-US" sz="1600" b="0" i="0" dirty="0">
-                <a:solidFill>
-                  <a:srgbClr val="000000"/>
-                </a:solidFill>
-                <a:effectLst/>
-                <a:latin typeface="Consolas" panose="020B0609020204030204" pitchFamily="49" charset="0"/>
-              </a:rPr>
-              <a:t>: </a:t>
-            </a:r>
-            <a:r>
-              <a:rPr lang="en-US" sz="1600" b="0" i="0" dirty="0">
-                <a:solidFill>
-                  <a:srgbClr val="0000FF"/>
-                </a:solidFill>
-                <a:effectLst/>
-                <a:latin typeface="Consolas" panose="020B0609020204030204" pitchFamily="49" charset="0"/>
-              </a:rPr>
-              <a:t>int</a:t>
-            </a:r>
-            <a:r>
-              <a:rPr lang="en-US" sz="1600" b="0" i="0" dirty="0">
-                <a:solidFill>
-                  <a:srgbClr val="000000"/>
-                </a:solidFill>
-                <a:effectLst/>
-                <a:latin typeface="Consolas" panose="020B0609020204030204" pitchFamily="49" charset="0"/>
-              </a:rPr>
-              <a:t> = 1) -&gt; </a:t>
-            </a:r>
-            <a:r>
-              <a:rPr lang="en-US" sz="1600" b="0" i="0" dirty="0">
-                <a:solidFill>
-                  <a:srgbClr val="0000FF"/>
-                </a:solidFill>
-                <a:effectLst/>
-                <a:latin typeface="Consolas" panose="020B0609020204030204" pitchFamily="49" charset="0"/>
-              </a:rPr>
-              <a:t>bool</a:t>
-            </a:r>
-            <a:r>
-              <a:rPr lang="en-US" sz="1600" b="0" i="0" dirty="0">
-                <a:solidFill>
-                  <a:srgbClr val="000000"/>
-                </a:solidFill>
-                <a:effectLst/>
-                <a:latin typeface="Consolas" panose="020B0609020204030204" pitchFamily="49" charset="0"/>
-              </a:rPr>
-              <a:t>: </a:t>
-            </a:r>
-          </a:p>
-          <a:p>
-            <a:r>
-              <a:rPr lang="en-US" sz="1600" b="0" i="0" dirty="0">
-                <a:solidFill>
-                  <a:srgbClr val="008000"/>
-                </a:solidFill>
-                <a:effectLst/>
-                <a:latin typeface="Consolas" panose="020B0609020204030204" pitchFamily="49" charset="0"/>
-              </a:rPr>
-              <a:t># </a:t>
-            </a:r>
-            <a:r>
-              <a:rPr lang="ru-RU" sz="1600" b="0" i="0" dirty="0">
-                <a:solidFill>
-                  <a:srgbClr val="008000"/>
-                </a:solidFill>
-                <a:effectLst/>
-                <a:latin typeface="Consolas" panose="020B0609020204030204" pitchFamily="49" charset="0"/>
-              </a:rPr>
-              <a:t>Шаг 1: вычислить метку текущего окна</a:t>
-            </a:r>
-            <a:r>
-              <a:rPr lang="ru-RU" sz="1600" b="0" i="0" dirty="0">
-                <a:solidFill>
-                  <a:srgbClr val="000000"/>
-                </a:solidFill>
-                <a:effectLst/>
-                <a:latin typeface="Consolas" panose="020B0609020204030204" pitchFamily="49" charset="0"/>
-              </a:rPr>
-              <a:t> </a:t>
-            </a:r>
-            <a:endParaRPr lang="en-US" sz="1600" b="0" i="0" dirty="0">
-              <a:solidFill>
-                <a:srgbClr val="000000"/>
-              </a:solidFill>
-              <a:effectLst/>
-              <a:latin typeface="Consolas" panose="020B0609020204030204" pitchFamily="49" charset="0"/>
-            </a:endParaRPr>
-          </a:p>
-          <a:p>
-            <a:r>
-              <a:rPr lang="en-US" sz="1600" b="0" i="0" dirty="0">
-                <a:solidFill>
-                  <a:srgbClr val="000000"/>
-                </a:solidFill>
-                <a:effectLst/>
-                <a:latin typeface="Consolas" panose="020B0609020204030204" pitchFamily="49" charset="0"/>
-              </a:rPr>
-              <a:t>window = floor(</a:t>
-            </a:r>
-            <a:r>
-              <a:rPr lang="en-US" sz="1600" b="0" i="0" dirty="0" err="1">
-                <a:solidFill>
-                  <a:srgbClr val="000000"/>
-                </a:solidFill>
-                <a:effectLst/>
-                <a:latin typeface="Consolas" panose="020B0609020204030204" pitchFamily="49" charset="0"/>
-              </a:rPr>
-              <a:t>current_unix_timestamp</a:t>
-            </a:r>
-            <a:r>
-              <a:rPr lang="en-US" sz="1600" b="0" i="0" dirty="0">
-                <a:solidFill>
-                  <a:srgbClr val="000000"/>
-                </a:solidFill>
-                <a:effectLst/>
-                <a:latin typeface="Consolas" panose="020B0609020204030204" pitchFamily="49" charset="0"/>
-              </a:rPr>
-              <a:t>() / </a:t>
-            </a:r>
-            <a:r>
-              <a:rPr lang="en-US" sz="1600" b="0" i="0" dirty="0" err="1">
-                <a:solidFill>
-                  <a:srgbClr val="000000"/>
-                </a:solidFill>
-                <a:effectLst/>
-                <a:latin typeface="Consolas" panose="020B0609020204030204" pitchFamily="49" charset="0"/>
-              </a:rPr>
-              <a:t>window_size</a:t>
-            </a:r>
-            <a:r>
-              <a:rPr lang="en-US" sz="1600" b="0" i="0" dirty="0">
-                <a:solidFill>
-                  <a:srgbClr val="000000"/>
-                </a:solidFill>
-                <a:effectLst/>
-                <a:latin typeface="Consolas" panose="020B0609020204030204" pitchFamily="49" charset="0"/>
-              </a:rPr>
-              <a:t>) </a:t>
-            </a:r>
-          </a:p>
-          <a:p>
-            <a:r>
-              <a:rPr lang="en-US" sz="1600" b="0" i="0" dirty="0">
-                <a:solidFill>
-                  <a:srgbClr val="000000"/>
-                </a:solidFill>
-                <a:effectLst/>
-                <a:latin typeface="Consolas" panose="020B0609020204030204" pitchFamily="49" charset="0"/>
-              </a:rPr>
-              <a:t>key = </a:t>
-            </a:r>
-            <a:r>
-              <a:rPr lang="en-US" sz="1600" b="0" i="0" dirty="0" err="1">
-                <a:solidFill>
-                  <a:srgbClr val="A31515"/>
-                </a:solidFill>
-                <a:effectLst/>
-                <a:latin typeface="Consolas" panose="020B0609020204030204" pitchFamily="49" charset="0"/>
-              </a:rPr>
-              <a:t>f"rate</a:t>
-            </a:r>
-            <a:r>
-              <a:rPr lang="en-US" sz="1600" b="0" i="0" dirty="0">
-                <a:solidFill>
-                  <a:srgbClr val="A31515"/>
-                </a:solidFill>
-                <a:effectLst/>
-                <a:latin typeface="Consolas" panose="020B0609020204030204" pitchFamily="49" charset="0"/>
-              </a:rPr>
-              <a:t>:{filename}:{window}"</a:t>
-            </a:r>
-            <a:r>
-              <a:rPr lang="en-US" sz="1600" b="0" i="0" dirty="0">
-                <a:solidFill>
-                  <a:srgbClr val="000000"/>
-                </a:solidFill>
-                <a:effectLst/>
-                <a:latin typeface="Consolas" panose="020B0609020204030204" pitchFamily="49" charset="0"/>
-              </a:rPr>
-              <a:t> </a:t>
-            </a:r>
-          </a:p>
-          <a:p>
-            <a:r>
-              <a:rPr lang="en-US" sz="1600" b="0" i="0" dirty="0">
-                <a:solidFill>
-                  <a:srgbClr val="008000"/>
-                </a:solidFill>
-                <a:effectLst/>
-                <a:latin typeface="Consolas" panose="020B0609020204030204" pitchFamily="49" charset="0"/>
-              </a:rPr>
-              <a:t># </a:t>
-            </a:r>
-            <a:r>
-              <a:rPr lang="ru-RU" sz="1600" b="0" i="0" dirty="0">
-                <a:solidFill>
-                  <a:srgbClr val="008000"/>
-                </a:solidFill>
-                <a:effectLst/>
-                <a:latin typeface="Consolas" panose="020B0609020204030204" pitchFamily="49" charset="0"/>
-              </a:rPr>
-              <a:t>Шаг 2: атомарный инкремент счётчика</a:t>
-            </a:r>
-            <a:r>
-              <a:rPr lang="ru-RU" sz="1600" b="0" i="0" dirty="0">
-                <a:solidFill>
-                  <a:srgbClr val="000000"/>
-                </a:solidFill>
-                <a:effectLst/>
-                <a:latin typeface="Consolas" panose="020B0609020204030204" pitchFamily="49" charset="0"/>
-              </a:rPr>
-              <a:t> </a:t>
-            </a:r>
-            <a:endParaRPr lang="en-US" sz="1600" b="0" i="0" dirty="0">
-              <a:solidFill>
-                <a:srgbClr val="000000"/>
-              </a:solidFill>
-              <a:effectLst/>
-              <a:latin typeface="Consolas" panose="020B0609020204030204" pitchFamily="49" charset="0"/>
-            </a:endParaRPr>
-          </a:p>
-          <a:p>
-            <a:r>
-              <a:rPr lang="en-US" sz="1600" b="0" i="0" dirty="0">
-                <a:solidFill>
-                  <a:srgbClr val="000000"/>
-                </a:solidFill>
-                <a:effectLst/>
-                <a:latin typeface="Consolas" panose="020B0609020204030204" pitchFamily="49" charset="0"/>
-              </a:rPr>
-              <a:t>count = INCR(key) </a:t>
-            </a:r>
-          </a:p>
-          <a:p>
-            <a:r>
-              <a:rPr lang="en-US" sz="1600" b="0" i="0" dirty="0">
-                <a:solidFill>
-                  <a:srgbClr val="008000"/>
-                </a:solidFill>
-                <a:effectLst/>
-                <a:latin typeface="Consolas" panose="020B0609020204030204" pitchFamily="49" charset="0"/>
-              </a:rPr>
-              <a:t># </a:t>
-            </a:r>
-            <a:r>
-              <a:rPr lang="ru-RU" sz="1600" b="0" i="0" dirty="0">
-                <a:solidFill>
-                  <a:srgbClr val="008000"/>
-                </a:solidFill>
-                <a:effectLst/>
-                <a:latin typeface="Consolas" panose="020B0609020204030204" pitchFamily="49" charset="0"/>
-              </a:rPr>
-              <a:t>Шаг 3: установить </a:t>
-            </a:r>
-            <a:r>
-              <a:rPr lang="en-US" sz="1600" b="0" i="0" dirty="0">
-                <a:solidFill>
-                  <a:srgbClr val="008000"/>
-                </a:solidFill>
-                <a:effectLst/>
-                <a:latin typeface="Consolas" panose="020B0609020204030204" pitchFamily="49" charset="0"/>
-              </a:rPr>
-              <a:t>TTL </a:t>
-            </a:r>
-            <a:r>
-              <a:rPr lang="ru-RU" sz="1600" b="0" i="0" dirty="0">
-                <a:solidFill>
-                  <a:srgbClr val="008000"/>
-                </a:solidFill>
-                <a:effectLst/>
-                <a:latin typeface="Consolas" panose="020B0609020204030204" pitchFamily="49" charset="0"/>
-              </a:rPr>
-              <a:t>при создании нового окна</a:t>
-            </a:r>
-            <a:r>
-              <a:rPr lang="ru-RU" sz="1600" b="0" i="0" dirty="0">
-                <a:solidFill>
-                  <a:srgbClr val="000000"/>
-                </a:solidFill>
-                <a:effectLst/>
-                <a:latin typeface="Consolas" panose="020B0609020204030204" pitchFamily="49" charset="0"/>
-              </a:rPr>
-              <a:t> </a:t>
-            </a:r>
-            <a:endParaRPr lang="en-US" sz="1600" b="0" i="0" dirty="0">
-              <a:solidFill>
-                <a:srgbClr val="000000"/>
-              </a:solidFill>
-              <a:effectLst/>
-              <a:latin typeface="Consolas" panose="020B0609020204030204" pitchFamily="49" charset="0"/>
-            </a:endParaRPr>
-          </a:p>
-          <a:p>
-            <a:r>
-              <a:rPr lang="en-US" sz="1600" b="0" i="0" dirty="0">
-                <a:solidFill>
-                  <a:srgbClr val="0000FF"/>
-                </a:solidFill>
-                <a:effectLst/>
-                <a:latin typeface="Consolas" panose="020B0609020204030204" pitchFamily="49" charset="0"/>
-              </a:rPr>
-              <a:t>if</a:t>
-            </a:r>
-            <a:r>
-              <a:rPr lang="en-US" sz="1600" b="0" i="0" dirty="0">
-                <a:solidFill>
-                  <a:srgbClr val="000000"/>
-                </a:solidFill>
-                <a:effectLst/>
-                <a:latin typeface="Consolas" panose="020B0609020204030204" pitchFamily="49" charset="0"/>
-              </a:rPr>
-              <a:t> count == 1: EXPIRE(key, </a:t>
-            </a:r>
-            <a:r>
-              <a:rPr lang="en-US" sz="1600" b="0" i="0" dirty="0" err="1">
-                <a:solidFill>
-                  <a:srgbClr val="000000"/>
-                </a:solidFill>
-                <a:effectLst/>
-                <a:latin typeface="Consolas" panose="020B0609020204030204" pitchFamily="49" charset="0"/>
-              </a:rPr>
-              <a:t>window_size</a:t>
-            </a:r>
-            <a:r>
-              <a:rPr lang="en-US" sz="1600" b="0" i="0" dirty="0">
-                <a:solidFill>
-                  <a:srgbClr val="000000"/>
-                </a:solidFill>
-                <a:effectLst/>
-                <a:latin typeface="Consolas" panose="020B0609020204030204" pitchFamily="49" charset="0"/>
-              </a:rPr>
-              <a:t> * 2) </a:t>
-            </a:r>
-            <a:r>
-              <a:rPr lang="en-US" sz="1600" b="0" i="0" dirty="0">
-                <a:solidFill>
-                  <a:srgbClr val="008000"/>
-                </a:solidFill>
-                <a:effectLst/>
-                <a:latin typeface="Consolas" panose="020B0609020204030204" pitchFamily="49" charset="0"/>
-              </a:rPr>
-              <a:t># TTL = 2 </a:t>
-            </a:r>
-            <a:r>
-              <a:rPr lang="ru-RU" sz="1600" b="0" i="0" dirty="0">
-                <a:solidFill>
-                  <a:srgbClr val="008000"/>
-                </a:solidFill>
-                <a:effectLst/>
-                <a:latin typeface="Consolas" panose="020B0609020204030204" pitchFamily="49" charset="0"/>
-              </a:rPr>
-              <a:t>окна (запас на сдвиг времени)</a:t>
-            </a:r>
-            <a:r>
-              <a:rPr lang="ru-RU" sz="1600" b="0" i="0" dirty="0">
-                <a:solidFill>
-                  <a:srgbClr val="000000"/>
-                </a:solidFill>
-                <a:effectLst/>
-                <a:latin typeface="Consolas" panose="020B0609020204030204" pitchFamily="49" charset="0"/>
-              </a:rPr>
-              <a:t> </a:t>
-            </a:r>
-            <a:endParaRPr lang="en-US" sz="1600" b="0" i="0" dirty="0">
-              <a:solidFill>
-                <a:srgbClr val="000000"/>
-              </a:solidFill>
-              <a:effectLst/>
-              <a:latin typeface="Consolas" panose="020B0609020204030204" pitchFamily="49" charset="0"/>
-            </a:endParaRPr>
-          </a:p>
-          <a:p>
-            <a:r>
-              <a:rPr lang="ru-RU" sz="1600" b="0" i="0" dirty="0">
-                <a:solidFill>
-                  <a:srgbClr val="008000"/>
-                </a:solidFill>
-                <a:effectLst/>
-                <a:latin typeface="Consolas" panose="020B0609020204030204" pitchFamily="49" charset="0"/>
-              </a:rPr>
-              <a:t># Шаг 4: проверить лимит</a:t>
-            </a:r>
-            <a:r>
-              <a:rPr lang="ru-RU" sz="1600" b="0" i="0" dirty="0">
-                <a:solidFill>
-                  <a:srgbClr val="000000"/>
-                </a:solidFill>
-                <a:effectLst/>
-                <a:latin typeface="Consolas" panose="020B0609020204030204" pitchFamily="49" charset="0"/>
-              </a:rPr>
-              <a:t> </a:t>
-            </a:r>
-            <a:endParaRPr lang="en-US" sz="1600" b="0" i="0" dirty="0">
-              <a:solidFill>
-                <a:srgbClr val="000000"/>
-              </a:solidFill>
-              <a:effectLst/>
-              <a:latin typeface="Consolas" panose="020B0609020204030204" pitchFamily="49" charset="0"/>
-            </a:endParaRPr>
-          </a:p>
-          <a:p>
-            <a:r>
-              <a:rPr lang="en-US" sz="1600" b="0" i="0" dirty="0">
-                <a:solidFill>
-                  <a:srgbClr val="0000FF"/>
-                </a:solidFill>
-                <a:effectLst/>
-                <a:latin typeface="Consolas" panose="020B0609020204030204" pitchFamily="49" charset="0"/>
-              </a:rPr>
-              <a:t>if</a:t>
-            </a:r>
-            <a:r>
-              <a:rPr lang="en-US" sz="1600" b="0" i="0" dirty="0">
-                <a:solidFill>
-                  <a:srgbClr val="000000"/>
-                </a:solidFill>
-                <a:effectLst/>
-                <a:latin typeface="Consolas" panose="020B0609020204030204" pitchFamily="49" charset="0"/>
-              </a:rPr>
-              <a:t> count &gt; limit: </a:t>
-            </a:r>
-            <a:r>
-              <a:rPr lang="en-US" sz="1600" b="0" i="0" dirty="0">
-                <a:solidFill>
-                  <a:srgbClr val="0000FF"/>
-                </a:solidFill>
-                <a:effectLst/>
-                <a:latin typeface="Consolas" panose="020B0609020204030204" pitchFamily="49" charset="0"/>
-              </a:rPr>
-              <a:t>return</a:t>
-            </a:r>
-            <a:r>
-              <a:rPr lang="en-US" sz="1600" b="0" i="0" dirty="0">
-                <a:solidFill>
-                  <a:srgbClr val="000000"/>
-                </a:solidFill>
-                <a:effectLst/>
-                <a:latin typeface="Consolas" panose="020B0609020204030204" pitchFamily="49" charset="0"/>
-              </a:rPr>
-              <a:t> </a:t>
-            </a:r>
-            <a:r>
-              <a:rPr lang="en-US" sz="1600" b="0" i="0" dirty="0">
-                <a:solidFill>
-                  <a:srgbClr val="A31515"/>
-                </a:solidFill>
-                <a:effectLst/>
-                <a:latin typeface="Consolas" panose="020B0609020204030204" pitchFamily="49" charset="0"/>
-              </a:rPr>
-              <a:t>False</a:t>
-            </a:r>
-            <a:r>
-              <a:rPr lang="en-US" sz="1600" b="0" i="0" dirty="0">
-                <a:solidFill>
-                  <a:srgbClr val="000000"/>
-                </a:solidFill>
-                <a:effectLst/>
-                <a:latin typeface="Consolas" panose="020B0609020204030204" pitchFamily="49" charset="0"/>
-              </a:rPr>
-              <a:t> </a:t>
-            </a:r>
-            <a:r>
-              <a:rPr lang="en-US" sz="1600" b="0" i="0" dirty="0">
-                <a:solidFill>
-                  <a:srgbClr val="008000"/>
-                </a:solidFill>
-                <a:effectLst/>
-                <a:latin typeface="Consolas" panose="020B0609020204030204" pitchFamily="49" charset="0"/>
-              </a:rPr>
-              <a:t># </a:t>
-            </a:r>
-            <a:r>
-              <a:rPr lang="ru-RU" sz="1600" b="0" i="0" dirty="0">
-                <a:solidFill>
-                  <a:srgbClr val="008000"/>
-                </a:solidFill>
-                <a:effectLst/>
-                <a:latin typeface="Consolas" panose="020B0609020204030204" pitchFamily="49" charset="0"/>
-              </a:rPr>
-              <a:t>запрос отклонён -&gt; </a:t>
-            </a:r>
-            <a:r>
-              <a:rPr lang="en-US" sz="1600" b="0" i="0" dirty="0">
-                <a:solidFill>
-                  <a:srgbClr val="008000"/>
-                </a:solidFill>
-                <a:effectLst/>
-                <a:latin typeface="Consolas" panose="020B0609020204030204" pitchFamily="49" charset="0"/>
-              </a:rPr>
-              <a:t>HTTP 429</a:t>
-            </a:r>
-            <a:r>
-              <a:rPr lang="en-US" sz="1600" b="0" i="0" dirty="0">
-                <a:solidFill>
-                  <a:srgbClr val="000000"/>
-                </a:solidFill>
-                <a:effectLst/>
-                <a:latin typeface="Consolas" panose="020B0609020204030204" pitchFamily="49" charset="0"/>
-              </a:rPr>
-              <a:t> </a:t>
-            </a:r>
-          </a:p>
-          <a:p>
-            <a:r>
-              <a:rPr lang="en-US" sz="1600" b="0" i="0" dirty="0">
-                <a:solidFill>
-                  <a:srgbClr val="0000FF"/>
-                </a:solidFill>
-                <a:effectLst/>
-                <a:latin typeface="Consolas" panose="020B0609020204030204" pitchFamily="49" charset="0"/>
-              </a:rPr>
-              <a:t>return</a:t>
-            </a:r>
-            <a:r>
-              <a:rPr lang="en-US" sz="1600" b="0" i="0" dirty="0">
-                <a:solidFill>
-                  <a:srgbClr val="000000"/>
-                </a:solidFill>
-                <a:effectLst/>
-                <a:latin typeface="Consolas" panose="020B0609020204030204" pitchFamily="49" charset="0"/>
-              </a:rPr>
-              <a:t> </a:t>
-            </a:r>
-            <a:r>
-              <a:rPr lang="en-US" sz="1600" b="0" i="0" dirty="0">
-                <a:solidFill>
-                  <a:srgbClr val="A31515"/>
-                </a:solidFill>
-                <a:effectLst/>
-                <a:latin typeface="Consolas" panose="020B0609020204030204" pitchFamily="49" charset="0"/>
-              </a:rPr>
-              <a:t>True</a:t>
-            </a:r>
-            <a:r>
-              <a:rPr lang="en-US" sz="1600" b="0" i="0" dirty="0">
-                <a:solidFill>
-                  <a:srgbClr val="000000"/>
-                </a:solidFill>
-                <a:effectLst/>
-                <a:latin typeface="Consolas" panose="020B0609020204030204" pitchFamily="49" charset="0"/>
-              </a:rPr>
-              <a:t> </a:t>
-            </a:r>
-            <a:r>
-              <a:rPr lang="en-US" sz="1600" b="0" i="0" dirty="0">
-                <a:solidFill>
-                  <a:srgbClr val="008000"/>
-                </a:solidFill>
-                <a:effectLst/>
-                <a:latin typeface="Consolas" panose="020B0609020204030204" pitchFamily="49" charset="0"/>
-              </a:rPr>
-              <a:t># </a:t>
-            </a:r>
-            <a:r>
-              <a:rPr lang="ru-RU" sz="1600" b="0" i="0" dirty="0">
-                <a:solidFill>
-                  <a:srgbClr val="008000"/>
-                </a:solidFill>
-                <a:effectLst/>
-                <a:latin typeface="Consolas" panose="020B0609020204030204" pitchFamily="49" charset="0"/>
-              </a:rPr>
-              <a:t>запрос разрешён</a:t>
+              <a:t>рейтлимит</a:t>
             </a:r>
             <a:endParaRPr lang="ru-RU" sz="1600" b="0" dirty="0">
               <a:effectLst/>
@@ -11529,6 +10897,42 @@
           </a:p>
         </p:txBody>
       </p:sp>
+      <p:pic>
+        <p:nvPicPr>
+          <p:cNvPr id="8" name="Рисунок 7" descr="Изображение выглядит как текст, снимок экрана, диаграмма, График&#10;&#10;Контент, сгенерированный ИИ, может содержать ошибки.">
+            <a:extLst>
+              <a:ext uri="{FF2B5EF4-FFF2-40B4-BE49-F238E27FC236}">
+                <a16:creationId xmlns:a16="http://schemas.microsoft.com/office/drawing/2014/main" id="{4CE38F7F-E48C-9123-6382-1AB58F7F6DCE}"/>
+              </a:ext>
+            </a:extLst>
+          </p:cNvPr>
+          <p:cNvPicPr>
+            <a:picLocks noChangeAspect="1"/>
+          </p:cNvPicPr>
+          <p:nvPr/>
+        </p:nvPicPr>
+        <p:blipFill>
+          <a:blip r:embed="rId3" cstate="print">
+            <a:extLst>
+              <a:ext uri="{28A0092B-C50C-407E-A947-70E740481C1C}">
+                <a14:useLocalDpi xmlns:a14="http://schemas.microsoft.com/office/drawing/2010/main" val="0"/>
+              </a:ext>
+            </a:extLst>
+          </a:blip>
+          <a:stretch>
+            <a:fillRect/>
+          </a:stretch>
+        </p:blipFill>
+        <p:spPr>
+          <a:xfrm>
+            <a:off x="7841694" y="3110839"/>
+            <a:ext cx="4020574" cy="2177471"/>
+          </a:xfrm>
+          <a:prstGeom prst="rect">
+            <a:avLst/>
+          </a:prstGeom>
+        </p:spPr>
+      </p:pic>
     </p:spTree>
     <p:extLst>
       <p:ext uri="{BB962C8B-B14F-4D97-AF65-F5344CB8AC3E}">
@@ -11843,8 +11247,8 @@
         </p:nvSpPr>
         <p:spPr>
           <a:xfrm>
-            <a:off x="1863318" y="1561052"/>
-            <a:ext cx="7751616" cy="3735895"/>
+            <a:off x="1594377" y="3429000"/>
+            <a:ext cx="7751616" cy="411908"/>
           </a:xfrm>
           <a:prstGeom prst="rect">
             <a:avLst/>
@@ -11864,69 +11268,7 @@
             </a:pPr>
             <a:r>
               <a:rPr lang="ru-RU" sz="1600" dirty="0"/>
-              <a:t>Запуск на удалённом хосте выполняется через SSH без установки агентов — командой </a:t>
-            </a:r>
-            <a:r>
-              <a:rPr lang="ru-RU" sz="1600" dirty="0" err="1"/>
-              <a:t>nohup</a:t>
-            </a:r>
-            <a:r>
-              <a:rPr lang="ru-RU" sz="1600" dirty="0"/>
-              <a:t>, PID возвращается в </a:t>
-            </a:r>
-            <a:r>
-              <a:rPr lang="ru-RU" sz="1600" dirty="0" err="1"/>
-              <a:t>stdout</a:t>
-            </a:r>
-            <a:r>
-              <a:rPr lang="ru-RU" sz="1600" dirty="0"/>
-              <a:t> и сохраняется в </a:t>
-            </a:r>
-            <a:r>
-              <a:rPr lang="ru-RU" sz="1600" dirty="0" err="1"/>
-              <a:t>Redis</a:t>
-            </a:r>
-            <a:r>
-              <a:rPr lang="ru-RU" sz="1600" dirty="0"/>
-              <a:t>.</a:t>
-            </a:r>
-          </a:p>
-          <a:p>
-            <a:pPr>
-              <a:lnSpc>
-                <a:spcPct val="150000"/>
-              </a:lnSpc>
-            </a:pPr>
-            <a:r>
-              <a:rPr lang="ru-RU" sz="1600" dirty="0"/>
-              <a:t>Остановка реализует двухэтапный протокол: сначала SIGTERM, затем при отсутствии реакции в течение 5 секунд — SIGKILL. Оба этапа выполняются асинхронно, не блокируя обработку других запросов.</a:t>
-            </a:r>
-          </a:p>
-          <a:p>
-            <a:pPr>
-              <a:lnSpc>
-                <a:spcPct val="150000"/>
-              </a:lnSpc>
-            </a:pPr>
-            <a:r>
-              <a:rPr lang="ru-RU" sz="1600" dirty="0"/>
-              <a:t>При перезапуске системы </a:t>
-            </a:r>
-            <a:r>
-              <a:rPr lang="ru-RU" sz="1600" dirty="0" err="1"/>
-              <a:t>restore_state</a:t>
-            </a:r>
-            <a:r>
-              <a:rPr lang="ru-RU" sz="1600" dirty="0"/>
-              <a:t> проверяет фактический PID каждой заглушки и автоматически перезапускает завершившиеся процессы с сохранёнными JVM-аргументами. </a:t>
-            </a:r>
-            <a:r>
-              <a:rPr lang="ru-RU" sz="1600" dirty="0" err="1"/>
-              <a:t>HealthChecker</a:t>
-            </a:r>
-            <a:r>
-              <a:rPr lang="ru-RU" sz="1600" dirty="0"/>
-              <a:t> обнаруживает сбой за ≤ 30 с.</a:t>
+              <a:t>СДЕЛАТЬ ДИАГРАММЫ ЖИЗНЕННОГО ЦИКЛА</a:t>
             </a:r>
           </a:p>
         </p:txBody>

--- a/Thesis/docs/Презентация.pptx
+++ b/Thesis/docs/Презентация.pptx
@@ -27,7 +27,7 @@
   <p:notesSz cx="6858000" cy="9144000"/>
   <p:embeddedFontLst>
     <p:embeddedFont>
-      <p:font typeface="Consolas" panose="020B0609020204030204" pitchFamily="49" charset="0"/>
+      <p:font typeface="Aptos Narrow" panose="020B0004020202020204" pitchFamily="34" charset="0"/>
       <p:regular r:id="rId17"/>
       <p:bold r:id="rId18"/>
       <p:italic r:id="rId19"/>
@@ -248,7 +248,7 @@
           <a:p>
             <a:fld id="{06B9DC91-30C7-46AB-ADDB-A80A0533D77A}" type="datetimeFigureOut">
               <a:rPr lang="ru-RU" smtClean="0"/>
-              <a:t>19.05.2026</a:t>
+              <a:t>22.05.2026</a:t>
             </a:fld>
             <a:endParaRPr lang="ru-RU"/>
           </a:p>
@@ -2064,7 +2064,7 @@
           <a:p>
             <a:fld id="{D92D3C23-8038-4008-B24E-40A94D79456D}" type="datetime1">
               <a:rPr lang="ru-RU" smtClean="0"/>
-              <a:t>19.05.2026</a:t>
+              <a:t>22.05.2026</a:t>
             </a:fld>
             <a:endParaRPr lang="ru-RU"/>
           </a:p>
@@ -2512,7 +2512,7 @@
           <a:p>
             <a:fld id="{4FBADD92-CC98-4900-BE8A-2068547BBC1A}" type="datetime1">
               <a:rPr lang="ru-RU" smtClean="0"/>
-              <a:t>19.05.2026</a:t>
+              <a:t>22.05.2026</a:t>
             </a:fld>
             <a:endParaRPr lang="ru-RU"/>
           </a:p>
@@ -2830,7 +2830,7 @@
           <a:p>
             <a:fld id="{06738898-160C-4747-9301-0B5702FA49D8}" type="datetime1">
               <a:rPr lang="ru-RU" smtClean="0"/>
-              <a:t>19.05.2026</a:t>
+              <a:t>22.05.2026</a:t>
             </a:fld>
             <a:endParaRPr lang="ru-RU"/>
           </a:p>
@@ -2957,7 +2957,7 @@
           <a:p>
             <a:fld id="{F1EBB16F-DABE-4712-B47F-7722E1CB50FE}" type="datetime1">
               <a:rPr lang="ru-RU" smtClean="0"/>
-              <a:t>19.05.2026</a:t>
+              <a:t>22.05.2026</a:t>
             </a:fld>
             <a:endParaRPr lang="ru-RU" dirty="0"/>
           </a:p>
@@ -3010,7 +3010,7 @@
           <a:p>
             <a:fld id="{2CEBEA22-9938-4273-8C60-D80B349E4BA9}" type="datetime1">
               <a:rPr lang="ru-RU" smtClean="0"/>
-              <a:t>19.05.2026</a:t>
+              <a:t>22.05.2026</a:t>
             </a:fld>
             <a:endParaRPr lang="ru-RU"/>
           </a:p>
@@ -3291,7 +3291,7 @@
           <a:p>
             <a:fld id="{570D790B-F35A-4C90-BC4A-BA7F77964CA4}" type="datetime1">
               <a:rPr lang="ru-RU" smtClean="0"/>
-              <a:t>19.05.2026</a:t>
+              <a:t>22.05.2026</a:t>
             </a:fld>
             <a:endParaRPr lang="ru-RU"/>
           </a:p>
@@ -3528,7 +3528,7 @@
           <a:p>
             <a:fld id="{29AEF080-AA0F-44FA-BA62-A56D8619F7E7}" type="datetime1">
               <a:rPr lang="ru-RU" smtClean="0"/>
-              <a:t>19.05.2026</a:t>
+              <a:t>22.05.2026</a:t>
             </a:fld>
             <a:endParaRPr lang="ru-RU"/>
           </a:p>
@@ -3710,7 +3710,7 @@
           <a:p>
             <a:fld id="{83AB8CDF-4973-4195-91CA-18BA11F1D400}" type="datetime1">
               <a:rPr lang="ru-RU" smtClean="0"/>
-              <a:t>19.05.2026</a:t>
+              <a:t>22.05.2026</a:t>
             </a:fld>
             <a:endParaRPr lang="ru-RU"/>
           </a:p>
@@ -4772,8 +4772,8 @@
         </p:nvSpPr>
         <p:spPr>
           <a:xfrm>
-            <a:off x="11580453" y="6171414"/>
-            <a:ext cx="409963" cy="610899"/>
+            <a:off x="11319435" y="6171414"/>
+            <a:ext cx="670981" cy="610899"/>
           </a:xfrm>
         </p:spPr>
         <p:txBody>
@@ -4979,65 +4979,12 @@
           </a:p>
         </p:txBody>
       </p:sp>
-      <p:sp>
-        <p:nvSpPr>
-          <p:cNvPr id="2" name="TextBox 1">
+      <p:pic>
+        <p:nvPicPr>
+          <p:cNvPr id="8" name="Рисунок 7" descr="Изображение выглядит как снимок экрана, текст, программное обеспечение, Мультимедийное программное обеспечение&#10;&#10;Контент, сгенерированный ИИ, может содержать ошибки.">
             <a:extLst>
               <a:ext uri="{FF2B5EF4-FFF2-40B4-BE49-F238E27FC236}">
-                <a16:creationId xmlns:a16="http://schemas.microsoft.com/office/drawing/2014/main" id="{29A6AEEB-6479-6AF6-ED4B-A834C62D6DE6}"/>
-              </a:ext>
-            </a:extLst>
-          </p:cNvPr>
-          <p:cNvSpPr txBox="1"/>
-          <p:nvPr/>
-        </p:nvSpPr>
-        <p:spPr>
-          <a:xfrm>
-            <a:off x="914400" y="2188286"/>
-            <a:ext cx="9814179" cy="411908"/>
-          </a:xfrm>
-          <a:prstGeom prst="rect">
-            <a:avLst/>
-          </a:prstGeom>
-          <a:noFill/>
-        </p:spPr>
-        <p:txBody>
-          <a:bodyPr wrap="square" rtlCol="0">
-            <a:spAutoFit/>
-          </a:bodyPr>
-          <a:lstStyle/>
-          <a:p>
-            <a:pPr>
-              <a:lnSpc>
-                <a:spcPct val="150000"/>
-              </a:lnSpc>
-            </a:pPr>
-            <a:r>
-              <a:rPr lang="ru-RU" sz="1600" dirty="0"/>
-              <a:t>ВСТАВИТЬ 2 ОКНА </a:t>
-            </a:r>
-            <a:r>
-              <a:rPr lang="en-US" sz="1600" dirty="0"/>
-              <a:t>side by side </a:t>
-            </a:r>
-            <a:r>
-              <a:rPr lang="ru-RU" sz="1600" dirty="0"/>
-              <a:t>регистрация заглушки и </a:t>
-            </a:r>
-            <a:r>
-              <a:rPr lang="ru-RU" sz="1600" dirty="0" err="1"/>
-              <a:t>дашборд</a:t>
-            </a:r>
-            <a:endParaRPr lang="ru-RU" sz="1600" dirty="0"/>
-          </a:p>
-        </p:txBody>
-      </p:sp>
-      <p:pic>
-        <p:nvPicPr>
-          <p:cNvPr id="5" name="Рисунок 4" descr="Изображение выглядит как снимок экрана, текст, программное обеспечение, Мультимедийное программное обеспечение&#10;&#10;Контент, сгенерированный ИИ, может содержать ошибки.">
-            <a:extLst>
-              <a:ext uri="{FF2B5EF4-FFF2-40B4-BE49-F238E27FC236}">
-                <a16:creationId xmlns:a16="http://schemas.microsoft.com/office/drawing/2014/main" id="{CC78FB8E-26D2-3DBB-7B5D-C2506D87FF53}"/>
+                <a16:creationId xmlns:a16="http://schemas.microsoft.com/office/drawing/2014/main" id="{AE465F4B-2EBA-AED5-FE23-0B266018607F}"/>
               </a:ext>
             </a:extLst>
           </p:cNvPr>
@@ -5054,13 +5001,48 @@
               </a:ext>
             </a:extLst>
           </a:blip>
-          <a:srcRect b="49894"/>
+          <a:srcRect l="37745" t="16332" r="37598" b="16380"/>
           <a:stretch/>
         </p:blipFill>
         <p:spPr>
           <a:xfrm>
-            <a:off x="692660" y="3035007"/>
-            <a:ext cx="10806680" cy="2708433"/>
+            <a:off x="585694" y="1122029"/>
+            <a:ext cx="3663577" cy="4989165"/>
+          </a:xfrm>
+          <a:prstGeom prst="rect">
+            <a:avLst/>
+          </a:prstGeom>
+        </p:spPr>
+      </p:pic>
+      <p:pic>
+        <p:nvPicPr>
+          <p:cNvPr id="10" name="Рисунок 9" descr="Изображение выглядит как текст, снимок экрана, программное обеспечение, Мультимедийное программное обеспечение&#10;&#10;Контент, сгенерированный ИИ, может содержать ошибки.">
+            <a:extLst>
+              <a:ext uri="{FF2B5EF4-FFF2-40B4-BE49-F238E27FC236}">
+                <a16:creationId xmlns:a16="http://schemas.microsoft.com/office/drawing/2014/main" id="{5217A559-9D78-C0DC-05A9-C855890DBD9C}"/>
+              </a:ext>
+            </a:extLst>
+          </p:cNvPr>
+          <p:cNvPicPr>
+            <a:picLocks noChangeAspect="1"/>
+          </p:cNvPicPr>
+          <p:nvPr/>
+        </p:nvPicPr>
+        <p:blipFill>
+          <a:blip r:embed="rId4">
+            <a:extLst>
+              <a:ext uri="{28A0092B-C50C-407E-A947-70E740481C1C}">
+                <a14:useLocalDpi xmlns:a14="http://schemas.microsoft.com/office/drawing/2010/main" val="0"/>
+              </a:ext>
+            </a:extLst>
+          </a:blip>
+          <a:srcRect b="9841"/>
+          <a:stretch/>
+        </p:blipFill>
+        <p:spPr>
+          <a:xfrm>
+            <a:off x="4521355" y="1290990"/>
+            <a:ext cx="7264079" cy="4651242"/>
           </a:xfrm>
           <a:prstGeom prst="rect">
             <a:avLst/>
@@ -5160,8 +5142,8 @@
         </p:nvSpPr>
         <p:spPr>
           <a:xfrm>
-            <a:off x="11580453" y="6171414"/>
-            <a:ext cx="409963" cy="610899"/>
+            <a:off x="11444941" y="6171414"/>
+            <a:ext cx="545475" cy="610899"/>
           </a:xfrm>
         </p:spPr>
         <p:txBody>
@@ -5382,7 +5364,7 @@
           <p:nvPr>
             <p:extLst>
               <p:ext uri="{D42A27DB-BD31-4B8C-83A1-F6EECF244321}">
-                <p14:modId xmlns:p14="http://schemas.microsoft.com/office/powerpoint/2010/main" val="1516778445"/>
+                <p14:modId xmlns:p14="http://schemas.microsoft.com/office/powerpoint/2010/main" val="1809137228"/>
               </p:ext>
             </p:extLst>
           </p:nvPr>
@@ -5432,7 +5414,7 @@
                         </a:lnSpc>
                       </a:pPr>
                       <a:r>
-                        <a:rPr lang="ru-RU" sz="1600"/>
+                        <a:rPr lang="ru-RU" sz="1600" dirty="0"/>
                         <a:t>Сценарий</a:t>
                       </a:r>
                     </a:p>
@@ -5599,7 +5581,15 @@
                       </a:pPr>
                       <a:r>
                         <a:rPr lang="ru-RU" sz="1600" dirty="0"/>
-                        <a:t>Автоматический перезапуск заглушек</a:t>
+                        <a:t>Автоматический перезапуск </a:t>
+                      </a:r>
+                      <a:r>
+                        <a:rPr lang="en-US" sz="1600" dirty="0"/>
+                        <a:t>mock</a:t>
+                      </a:r>
+                      <a:r>
+                        <a:rPr lang="ru-RU" sz="1600" dirty="0"/>
+                        <a:t>-сервисов</a:t>
                       </a:r>
                     </a:p>
                   </a:txBody>
@@ -5912,8 +5902,8 @@
         </p:nvSpPr>
         <p:spPr>
           <a:xfrm>
-            <a:off x="11580453" y="6171414"/>
-            <a:ext cx="409963" cy="610899"/>
+            <a:off x="11397129" y="6171414"/>
+            <a:ext cx="593287" cy="610899"/>
           </a:xfrm>
         </p:spPr>
         <p:txBody>
@@ -6138,7 +6128,7 @@
         </p:nvSpPr>
         <p:spPr>
           <a:xfrm>
-            <a:off x="954880" y="1593430"/>
+            <a:off x="409377" y="1079764"/>
             <a:ext cx="10729120" cy="411908"/>
           </a:xfrm>
           <a:prstGeom prst="rect">
@@ -6203,14 +6193,14 @@
           <p:nvPr>
             <p:extLst>
               <p:ext uri="{D42A27DB-BD31-4B8C-83A1-F6EECF244321}">
-                <p14:modId xmlns:p14="http://schemas.microsoft.com/office/powerpoint/2010/main" val="2652577363"/>
+                <p14:modId xmlns:p14="http://schemas.microsoft.com/office/powerpoint/2010/main" val="4170751237"/>
               </p:ext>
             </p:extLst>
           </p:nvPr>
         </p:nvGraphicFramePr>
         <p:xfrm>
-          <a:off x="954880" y="2352603"/>
-          <a:ext cx="10282239" cy="3471545"/>
+          <a:off x="271929" y="2583462"/>
+          <a:ext cx="4897718" cy="2103120"/>
         </p:xfrm>
         <a:graphic>
           <a:graphicData uri="http://schemas.openxmlformats.org/drawingml/2006/table">
@@ -6219,21 +6209,21 @@
                 <a:tableStyleId>{616DA210-FB5B-4158-B5E0-FEB733F419BA}</a:tableStyleId>
               </a:tblPr>
               <a:tblGrid>
-                <a:gridCol w="3427413">
+                <a:gridCol w="2068604">
                   <a:extLst>
                     <a:ext uri="{9D8B030D-6E8A-4147-A177-3AD203B41FA5}">
                       <a16:colId xmlns:a16="http://schemas.microsoft.com/office/drawing/2014/main" val="4246277828"/>
                     </a:ext>
                   </a:extLst>
                 </a:gridCol>
-                <a:gridCol w="3427413">
+                <a:gridCol w="1399013">
                   <a:extLst>
                     <a:ext uri="{9D8B030D-6E8A-4147-A177-3AD203B41FA5}">
                       <a16:colId xmlns:a16="http://schemas.microsoft.com/office/drawing/2014/main" val="3350268425"/>
                     </a:ext>
                   </a:extLst>
                 </a:gridCol>
-                <a:gridCol w="3427413">
+                <a:gridCol w="1430101">
                   <a:extLst>
                     <a:ext uri="{9D8B030D-6E8A-4147-A177-3AD203B41FA5}">
                       <a16:colId xmlns:a16="http://schemas.microsoft.com/office/drawing/2014/main" val="3905350028"/>
@@ -6241,7 +6231,7 @@
                   </a:extLst>
                 </a:gridCol>
               </a:tblGrid>
-              <a:tr h="365760">
+              <a:tr h="147487">
                 <a:tc>
                   <a:txBody>
                     <a:bodyPr/>
@@ -6249,11 +6239,11 @@
                     <a:p>
                       <a:pPr>
                         <a:lnSpc>
-                          <a:spcPct val="150000"/>
+                          <a:spcPct val="100000"/>
                         </a:lnSpc>
                       </a:pPr>
                       <a:r>
-                        <a:rPr lang="ru-RU" sz="1800"/>
+                        <a:rPr lang="ru-RU" sz="1200" dirty="0"/>
                         <a:t>Сценарий</a:t>
                       </a:r>
                     </a:p>
@@ -6267,11 +6257,11 @@
                     <a:p>
                       <a:pPr>
                         <a:lnSpc>
-                          <a:spcPct val="150000"/>
+                          <a:spcPct val="100000"/>
                         </a:lnSpc>
                       </a:pPr>
                       <a:r>
-                        <a:rPr lang="ru-RU" sz="1800" dirty="0"/>
+                        <a:rPr lang="ru-RU" sz="1200" dirty="0"/>
                         <a:t>Показатель</a:t>
                       </a:r>
                     </a:p>
@@ -6285,11 +6275,11 @@
                     <a:p>
                       <a:pPr>
                         <a:lnSpc>
-                          <a:spcPct val="150000"/>
+                          <a:spcPct val="100000"/>
                         </a:lnSpc>
                       </a:pPr>
                       <a:r>
-                        <a:rPr lang="ru-RU" sz="1800"/>
+                        <a:rPr lang="ru-RU" sz="1200"/>
                         <a:t>Результат</a:t>
                       </a:r>
                     </a:p>
@@ -6302,7 +6292,7 @@
                   </a:ext>
                 </a:extLst>
               </a:tr>
-              <a:tr h="365760">
+              <a:tr h="307256">
                 <a:tc>
                   <a:txBody>
                     <a:bodyPr/>
@@ -6310,15 +6300,22 @@
                     <a:p>
                       <a:pPr>
                         <a:lnSpc>
-                          <a:spcPct val="150000"/>
+                          <a:spcPct val="100000"/>
                         </a:lnSpc>
                       </a:pPr>
                       <a:r>
-                        <a:rPr lang="ru-RU" sz="1800"/>
-                        <a:t>Базовая нагрузка (10 </a:t>
+                        <a:rPr lang="ru-RU" sz="1200" dirty="0"/>
+                        <a:t>Базовая нагрузка </a:t>
+                      </a:r>
+                      <a:br>
+                        <a:rPr lang="en-US" sz="1200" dirty="0"/>
+                      </a:br>
+                      <a:r>
+                        <a:rPr lang="ru-RU" sz="1200" dirty="0"/>
+                        <a:t>(10 </a:t>
                       </a:r>
                       <a:r>
-                        <a:rPr lang="en-US" sz="1800"/>
+                        <a:rPr lang="en-US" sz="1200" dirty="0"/>
                         <a:t>RPS)</a:t>
                       </a:r>
                     </a:p>
@@ -6332,13 +6329,14 @@
                     <a:p>
                       <a:pPr>
                         <a:lnSpc>
-                          <a:spcPct val="150000"/>
+                          <a:spcPct val="100000"/>
                         </a:lnSpc>
                       </a:pPr>
                       <a:r>
-                        <a:rPr lang="en-US" sz="1800"/>
+                        <a:rPr lang="en-US" sz="1200" dirty="0" err="1"/>
                         <a:t>proxy_total_ms</a:t>
                       </a:r>
+                      <a:endParaRPr lang="en-US" sz="1200" dirty="0"/>
                     </a:p>
                   </a:txBody>
                   <a:tcPr anchor="ctr"/>
@@ -6350,11 +6348,11 @@
                     <a:p>
                       <a:pPr>
                         <a:lnSpc>
-                          <a:spcPct val="150000"/>
+                          <a:spcPct val="100000"/>
                         </a:lnSpc>
                       </a:pPr>
                       <a:r>
-                        <a:rPr lang="ru-RU" sz="1800"/>
+                        <a:rPr lang="ru-RU" sz="1200" dirty="0"/>
                         <a:t>3,90 мс</a:t>
                       </a:r>
                     </a:p>
@@ -6367,7 +6365,7 @@
                   </a:ext>
                 </a:extLst>
               </a:tr>
-              <a:tr h="640080">
+              <a:tr h="379551">
                 <a:tc>
                   <a:txBody>
                     <a:bodyPr/>
@@ -6375,15 +6373,15 @@
                     <a:p>
                       <a:pPr>
                         <a:lnSpc>
-                          <a:spcPct val="150000"/>
+                          <a:spcPct val="100000"/>
                         </a:lnSpc>
                       </a:pPr>
                       <a:r>
-                        <a:rPr lang="ru-RU" sz="1800"/>
+                        <a:rPr lang="ru-RU" sz="1200" dirty="0"/>
                         <a:t>Нарастающая нагрузка (500 </a:t>
                       </a:r>
                       <a:r>
-                        <a:rPr lang="en-US" sz="1800"/>
+                        <a:rPr lang="en-US" sz="1200" dirty="0"/>
                         <a:t>RPS)</a:t>
                       </a:r>
                     </a:p>
@@ -6397,14 +6395,14 @@
                     <a:p>
                       <a:pPr>
                         <a:lnSpc>
-                          <a:spcPct val="150000"/>
+                          <a:spcPct val="100000"/>
                         </a:lnSpc>
                       </a:pPr>
                       <a:r>
-                        <a:rPr lang="en-US" sz="1800" dirty="0" err="1"/>
+                        <a:rPr lang="en-US" sz="1200" dirty="0" err="1"/>
                         <a:t>proxy_total_ms</a:t>
                       </a:r>
-                      <a:endParaRPr lang="en-US" sz="1800" dirty="0"/>
+                      <a:endParaRPr lang="en-US" sz="1200" dirty="0"/>
                     </a:p>
                   </a:txBody>
                   <a:tcPr anchor="ctr"/>
@@ -6416,11 +6414,11 @@
                     <a:p>
                       <a:pPr>
                         <a:lnSpc>
-                          <a:spcPct val="150000"/>
+                          <a:spcPct val="100000"/>
                         </a:lnSpc>
                       </a:pPr>
                       <a:r>
-                        <a:rPr lang="ru-RU" sz="1800"/>
+                        <a:rPr lang="ru-RU" sz="1200"/>
                         <a:t>3,01 мс — линейный рост</a:t>
                       </a:r>
                     </a:p>
@@ -6433,7 +6431,7 @@
                   </a:ext>
                 </a:extLst>
               </a:tr>
-              <a:tr h="640080">
+              <a:tr h="379551">
                 <a:tc>
                   <a:txBody>
                     <a:bodyPr/>
@@ -6441,15 +6439,15 @@
                     <a:p>
                       <a:pPr>
                         <a:lnSpc>
-                          <a:spcPct val="150000"/>
+                          <a:spcPct val="100000"/>
                         </a:lnSpc>
                       </a:pPr>
                       <a:r>
-                        <a:rPr lang="ru-RU" sz="1800"/>
+                        <a:rPr lang="ru-RU" sz="1200"/>
                         <a:t>Нарастающая нагрузка (1000 </a:t>
                       </a:r>
                       <a:r>
-                        <a:rPr lang="en-US" sz="1800"/>
+                        <a:rPr lang="en-US" sz="1200"/>
                         <a:t>RPS)</a:t>
                       </a:r>
                     </a:p>
@@ -6463,13 +6461,14 @@
                     <a:p>
                       <a:pPr>
                         <a:lnSpc>
-                          <a:spcPct val="150000"/>
+                          <a:spcPct val="100000"/>
                         </a:lnSpc>
                       </a:pPr>
                       <a:r>
-                        <a:rPr lang="en-US" sz="1800"/>
+                        <a:rPr lang="en-US" sz="1200" dirty="0" err="1"/>
                         <a:t>proxy_total_ms</a:t>
                       </a:r>
+                      <a:endParaRPr lang="en-US" sz="1200" dirty="0"/>
                     </a:p>
                   </a:txBody>
                   <a:tcPr anchor="ctr"/>
@@ -6481,11 +6480,11 @@
                     <a:p>
                       <a:pPr>
                         <a:lnSpc>
-                          <a:spcPct val="150000"/>
+                          <a:spcPct val="100000"/>
                         </a:lnSpc>
                       </a:pPr>
                       <a:r>
-                        <a:rPr lang="ru-RU" sz="1800"/>
+                        <a:rPr lang="ru-RU" sz="1200" dirty="0"/>
                         <a:t>10,52 мс — без отказов</a:t>
                       </a:r>
                     </a:p>
@@ -6498,7 +6497,7 @@
                   </a:ext>
                 </a:extLst>
               </a:tr>
-              <a:tr h="640080">
+              <a:tr h="379551">
                 <a:tc>
                   <a:txBody>
                     <a:bodyPr/>
@@ -6506,19 +6505,19 @@
                     <a:p>
                       <a:pPr>
                         <a:lnSpc>
-                          <a:spcPct val="150000"/>
+                          <a:spcPct val="100000"/>
                         </a:lnSpc>
                       </a:pPr>
                       <a:r>
-                        <a:rPr lang="en-US" sz="1800"/>
+                        <a:rPr lang="en-US" sz="1200"/>
                         <a:t>Rate Limiting (</a:t>
                       </a:r>
                       <a:r>
-                        <a:rPr lang="ru-RU" sz="1800"/>
+                        <a:rPr lang="ru-RU" sz="1200"/>
                         <a:t>лимит 250, нагрузка 500 </a:t>
                       </a:r>
                       <a:r>
-                        <a:rPr lang="en-US" sz="1800"/>
+                        <a:rPr lang="en-US" sz="1200"/>
                         <a:t>RPS)</a:t>
                       </a:r>
                     </a:p>
@@ -6532,11 +6531,11 @@
                     <a:p>
                       <a:pPr>
                         <a:lnSpc>
-                          <a:spcPct val="150000"/>
+                          <a:spcPct val="100000"/>
                         </a:lnSpc>
                       </a:pPr>
                       <a:r>
-                        <a:rPr lang="ru-RU" sz="1800"/>
+                        <a:rPr lang="ru-RU" sz="1200"/>
                         <a:t>Отклонение от лимита</a:t>
                       </a:r>
                     </a:p>
@@ -6550,14 +6549,14 @@
                     <a:p>
                       <a:pPr>
                         <a:lnSpc>
-                          <a:spcPct val="150000"/>
+                          <a:spcPct val="100000"/>
                         </a:lnSpc>
                       </a:pPr>
                       <a:r>
-                        <a:rPr lang="ru-RU" sz="1800" b="1" dirty="0"/>
+                        <a:rPr lang="ru-RU" sz="1200" b="1" dirty="0"/>
                         <a:t>0,13%</a:t>
                       </a:r>
-                      <a:endParaRPr lang="ru-RU" sz="1800" dirty="0"/>
+                      <a:endParaRPr lang="ru-RU" sz="1200" dirty="0"/>
                     </a:p>
                   </a:txBody>
                   <a:tcPr anchor="ctr"/>
@@ -6574,10 +6573,10 @@
       </p:graphicFrame>
       <p:pic>
         <p:nvPicPr>
-          <p:cNvPr id="8" name="Рисунок 7" descr="Изображение выглядит как текст, снимок экрана&#10;&#10;Контент, сгенерированный ИИ, может содержать ошибки.">
+          <p:cNvPr id="9" name="Рисунок 8">
             <a:extLst>
               <a:ext uri="{FF2B5EF4-FFF2-40B4-BE49-F238E27FC236}">
-                <a16:creationId xmlns:a16="http://schemas.microsoft.com/office/drawing/2014/main" id="{733C3D98-9C16-2BDC-A231-29FF155FAE3E}"/>
+                <a16:creationId xmlns:a16="http://schemas.microsoft.com/office/drawing/2014/main" id="{94DAF39F-C49B-1916-F851-A0E5D7632959}"/>
               </a:ext>
             </a:extLst>
           </p:cNvPr>
@@ -6587,21 +6586,15 @@
           <p:nvPr/>
         </p:nvPicPr>
         <p:blipFill>
-          <a:blip r:embed="rId3">
-            <a:extLst>
-              <a:ext uri="{28A0092B-C50C-407E-A947-70E740481C1C}">
-                <a14:useLocalDpi xmlns:a14="http://schemas.microsoft.com/office/drawing/2010/main" val="0"/>
-              </a:ext>
-            </a:extLst>
-          </a:blip>
+          <a:blip r:embed="rId3"/>
           <a:stretch>
             <a:fillRect/>
           </a:stretch>
         </p:blipFill>
         <p:spPr>
           <a:xfrm>
-            <a:off x="4840808" y="923116"/>
-            <a:ext cx="7149608" cy="3385390"/>
+            <a:off x="5618222" y="1702623"/>
+            <a:ext cx="6207157" cy="3861469"/>
           </a:xfrm>
           <a:prstGeom prst="rect">
             <a:avLst/>
@@ -6701,8 +6694,8 @@
         </p:nvSpPr>
         <p:spPr>
           <a:xfrm>
-            <a:off x="11580453" y="6171414"/>
-            <a:ext cx="409963" cy="610899"/>
+            <a:off x="11397129" y="6171414"/>
+            <a:ext cx="593287" cy="610899"/>
           </a:xfrm>
         </p:spPr>
         <p:txBody>
@@ -6922,8 +6915,8 @@
         </p:nvSpPr>
         <p:spPr>
           <a:xfrm>
-            <a:off x="339755" y="1659285"/>
-            <a:ext cx="11344245" cy="4105226"/>
+            <a:off x="349527" y="1659284"/>
+            <a:ext cx="11344245" cy="3775777"/>
           </a:xfrm>
           <a:prstGeom prst="rect">
             <a:avLst/>
@@ -6942,7 +6935,7 @@
               </a:lnSpc>
             </a:pPr>
             <a:r>
-              <a:rPr lang="ru-RU" sz="1600" dirty="0"/>
+              <a:rPr lang="ru-RU" dirty="0"/>
               <a:t>Все 6 задач выполнены в полном объёме. </a:t>
             </a:r>
           </a:p>
@@ -6953,7 +6946,7 @@
               </a:lnSpc>
             </a:pPr>
             <a:r>
-              <a:rPr lang="ru-RU" sz="1600" dirty="0"/>
+              <a:rPr lang="ru-RU" dirty="0"/>
               <a:t>Разработан программный комплекс, не имеющий прямых аналогов среди существующих решений.</a:t>
             </a:r>
           </a:p>
@@ -6964,7 +6957,7 @@
               </a:lnSpc>
             </a:pPr>
             <a:r>
-              <a:rPr lang="ru-RU" sz="1600" dirty="0"/>
+              <a:rPr lang="ru-RU" dirty="0"/>
               <a:t>Ключевые характеристики:</a:t>
             </a:r>
           </a:p>
@@ -6977,7 +6970,7 @@
               <a:buChar char="•"/>
             </a:pPr>
             <a:r>
-              <a:rPr lang="ru-RU" sz="1600" dirty="0"/>
+              <a:rPr lang="ru-RU" dirty="0"/>
               <a:t>Задержка прокси: ≤ 3,01 мс при нагрузке до 500 RPS</a:t>
             </a:r>
           </a:p>
@@ -6990,15 +6983,15 @@
               <a:buChar char="•"/>
             </a:pPr>
             <a:r>
-              <a:rPr lang="ru-RU" sz="1600" dirty="0"/>
+              <a:rPr lang="ru-RU" dirty="0"/>
               <a:t>Точность Rate </a:t>
             </a:r>
             <a:r>
-              <a:rPr lang="ru-RU" sz="1600" dirty="0" err="1"/>
+              <a:rPr lang="ru-RU" dirty="0" err="1"/>
               <a:t>Limiting</a:t>
             </a:r>
             <a:r>
-              <a:rPr lang="ru-RU" sz="1600" dirty="0"/>
+              <a:rPr lang="ru-RU" dirty="0"/>
               <a:t>: отклонение 0,13% от теоретического лимита</a:t>
             </a:r>
           </a:p>
@@ -7011,7 +7004,7 @@
               <a:buChar char="•"/>
             </a:pPr>
             <a:r>
-              <a:rPr lang="ru-RU" sz="1600" dirty="0"/>
+              <a:rPr lang="ru-RU" dirty="0"/>
               <a:t>Время обнаружения сбоя: ≤ 30 с</a:t>
             </a:r>
           </a:p>
@@ -7024,36 +7017,7 @@
               <a:buChar char="•"/>
             </a:pPr>
             <a:r>
-              <a:rPr lang="ru-RU" sz="1600" dirty="0"/>
-              <a:t>Научная новизна: </a:t>
-            </a:r>
-            <a:r>
-              <a:rPr lang="ru-RU" sz="1600" dirty="0" err="1"/>
-              <a:t>агентно</a:t>
-            </a:r>
-            <a:r>
-              <a:rPr lang="ru-RU" sz="1600" dirty="0"/>
-              <a:t>-независимое управление распределённой средой заглушек с индивидуальным Rate </a:t>
-            </a:r>
-            <a:r>
-              <a:rPr lang="ru-RU" sz="1600" dirty="0" err="1"/>
-              <a:t>Limiting</a:t>
-            </a:r>
-            <a:r>
-              <a:rPr lang="ru-RU" sz="1600" dirty="0"/>
-              <a:t> для каждого сервиса без перезапуска *ПРИДУМАТЬ КАК ПЕРЕФРАЗИРОВАТЬ НЕЗАМЕТНО*</a:t>
-            </a:r>
-          </a:p>
-          <a:p>
-            <a:pPr marL="285750" indent="-285750">
-              <a:lnSpc>
-                <a:spcPct val="150000"/>
-              </a:lnSpc>
-              <a:buFont typeface="Arial" panose="020B0604020202020204" pitchFamily="34" charset="0"/>
-              <a:buChar char="•"/>
-            </a:pPr>
-            <a:r>
-              <a:rPr lang="ru-RU" sz="1600" dirty="0"/>
+              <a:rPr lang="ru-RU" dirty="0"/>
               <a:t>Направления развития: динамическая маршрутизация по содержимому запроса, ролевая модель доступа, поддержка не-JVM артефактов</a:t>
             </a:r>
           </a:p>
@@ -7999,7 +7963,15 @@
             </a:r>
             <a:r>
               <a:rPr lang="ru-RU" sz="1600" dirty="0"/>
-              <a:t> ни одно из существующих решений не решает задачу централизованного управления распределённой инфраструктурой заглушек в условиях импортозамещения</a:t>
+              <a:t> ни одно из существующих решений не решает задачу централизованного управления распределённой инфраструктурой </a:t>
+            </a:r>
+            <a:r>
+              <a:rPr lang="en-US" sz="1600" dirty="0"/>
+              <a:t>mock</a:t>
+            </a:r>
+            <a:r>
+              <a:rPr lang="ru-RU" sz="1600" dirty="0"/>
+              <a:t>-сервисов в условиях импортозамещения</a:t>
             </a:r>
           </a:p>
         </p:txBody>
@@ -9678,41 +9650,288 @@
           </a:prstGeom>
         </p:spPr>
       </p:pic>
-      <p:sp>
-        <p:nvSpPr>
-          <p:cNvPr id="4" name="TextBox 3">
+      <p:pic>
+        <p:nvPicPr>
+          <p:cNvPr id="1026" name="Picture 2">
             <a:extLst>
               <a:ext uri="{FF2B5EF4-FFF2-40B4-BE49-F238E27FC236}">
-                <a16:creationId xmlns:a16="http://schemas.microsoft.com/office/drawing/2014/main" id="{E968D3A5-7045-133E-337A-A3F693A49331}"/>
+                <a16:creationId xmlns:a16="http://schemas.microsoft.com/office/drawing/2014/main" id="{02183D14-AFAE-7A8F-C3EA-489652D8C50E}"/>
               </a:ext>
             </a:extLst>
           </p:cNvPr>
-          <p:cNvSpPr txBox="1"/>
+          <p:cNvPicPr>
+            <a:picLocks noChangeAspect="1" noChangeArrowheads="1"/>
+          </p:cNvPicPr>
           <p:nvPr/>
-        </p:nvSpPr>
-        <p:spPr>
+        </p:nvPicPr>
+        <p:blipFill>
+          <a:blip r:embed="rId4" cstate="print">
+            <a:extLst>
+              <a:ext uri="{28A0092B-C50C-407E-A947-70E740481C1C}">
+                <a14:useLocalDpi xmlns:a14="http://schemas.microsoft.com/office/drawing/2010/main" val="0"/>
+              </a:ext>
+            </a:extLst>
+          </a:blip>
+          <a:srcRect/>
+          <a:stretch>
+            <a:fillRect/>
+          </a:stretch>
+        </p:blipFill>
+        <p:spPr bwMode="auto">
           <a:xfrm>
-            <a:off x="8731624" y="1470212"/>
-            <a:ext cx="2647576" cy="369332"/>
+            <a:off x="8700848" y="1544028"/>
+            <a:ext cx="941542" cy="941542"/>
           </a:xfrm>
           <a:prstGeom prst="rect">
             <a:avLst/>
           </a:prstGeom>
           <a:noFill/>
+          <a:extLst>
+            <a:ext uri="{909E8E84-426E-40DD-AFC4-6F175D3DCCD1}">
+              <a14:hiddenFill xmlns:a14="http://schemas.microsoft.com/office/drawing/2010/main">
+                <a:solidFill>
+                  <a:srgbClr val="FFFFFF"/>
+                </a:solidFill>
+              </a14:hiddenFill>
+            </a:ext>
+          </a:extLst>
         </p:spPr>
-        <p:txBody>
-          <a:bodyPr wrap="square" rtlCol="0">
-            <a:spAutoFit/>
-          </a:bodyPr>
-          <a:lstStyle/>
-          <a:p>
-            <a:r>
-              <a:rPr lang="ru-RU" dirty="0"/>
-              <a:t>СТЕК КАРТИНКИ</a:t>
-            </a:r>
-          </a:p>
-        </p:txBody>
-      </p:sp>
+      </p:pic>
+      <p:pic>
+        <p:nvPicPr>
+          <p:cNvPr id="1034" name="Picture 10" descr="Redis SVG and transparent PNG icons | TechIcons">
+            <a:extLst>
+              <a:ext uri="{FF2B5EF4-FFF2-40B4-BE49-F238E27FC236}">
+                <a16:creationId xmlns:a16="http://schemas.microsoft.com/office/drawing/2014/main" id="{AB39A782-0B95-12FE-464E-021B27DCE46B}"/>
+              </a:ext>
+            </a:extLst>
+          </p:cNvPr>
+          <p:cNvPicPr>
+            <a:picLocks noChangeAspect="1" noChangeArrowheads="1"/>
+          </p:cNvPicPr>
+          <p:nvPr/>
+        </p:nvPicPr>
+        <p:blipFill>
+          <a:blip r:embed="rId5">
+            <a:extLst>
+              <a:ext uri="{28A0092B-C50C-407E-A947-70E740481C1C}">
+                <a14:useLocalDpi xmlns:a14="http://schemas.microsoft.com/office/drawing/2010/main" val="0"/>
+              </a:ext>
+            </a:extLst>
+          </a:blip>
+          <a:srcRect/>
+          <a:stretch>
+            <a:fillRect/>
+          </a:stretch>
+        </p:blipFill>
+        <p:spPr bwMode="auto">
+          <a:xfrm>
+            <a:off x="10325634" y="1856558"/>
+            <a:ext cx="1125127" cy="1125127"/>
+          </a:xfrm>
+          <a:prstGeom prst="rect">
+            <a:avLst/>
+          </a:prstGeom>
+          <a:noFill/>
+          <a:extLst>
+            <a:ext uri="{909E8E84-426E-40DD-AFC4-6F175D3DCCD1}">
+              <a14:hiddenFill xmlns:a14="http://schemas.microsoft.com/office/drawing/2010/main">
+                <a:solidFill>
+                  <a:srgbClr val="FFFFFF"/>
+                </a:solidFill>
+              </a14:hiddenFill>
+            </a:ext>
+          </a:extLst>
+        </p:spPr>
+      </p:pic>
+      <p:pic>
+        <p:nvPicPr>
+          <p:cNvPr id="1036" name="Picture 12" descr="FastAPI — UberLab 7 documentation">
+            <a:extLst>
+              <a:ext uri="{FF2B5EF4-FFF2-40B4-BE49-F238E27FC236}">
+                <a16:creationId xmlns:a16="http://schemas.microsoft.com/office/drawing/2014/main" id="{3FBB3363-EB8D-ACF5-A5D1-FAC152C14A7D}"/>
+              </a:ext>
+            </a:extLst>
+          </p:cNvPr>
+          <p:cNvPicPr>
+            <a:picLocks noChangeAspect="1" noChangeArrowheads="1"/>
+          </p:cNvPicPr>
+          <p:nvPr/>
+        </p:nvPicPr>
+        <p:blipFill>
+          <a:blip r:embed="rId6" cstate="print">
+            <a:extLst>
+              <a:ext uri="{28A0092B-C50C-407E-A947-70E740481C1C}">
+                <a14:useLocalDpi xmlns:a14="http://schemas.microsoft.com/office/drawing/2010/main" val="0"/>
+              </a:ext>
+            </a:extLst>
+          </a:blip>
+          <a:srcRect/>
+          <a:stretch>
+            <a:fillRect/>
+          </a:stretch>
+        </p:blipFill>
+        <p:spPr bwMode="auto">
+          <a:xfrm>
+            <a:off x="9546557" y="5263113"/>
+            <a:ext cx="2367897" cy="854110"/>
+          </a:xfrm>
+          <a:prstGeom prst="rect">
+            <a:avLst/>
+          </a:prstGeom>
+          <a:noFill/>
+          <a:extLst>
+            <a:ext uri="{909E8E84-426E-40DD-AFC4-6F175D3DCCD1}">
+              <a14:hiddenFill xmlns:a14="http://schemas.microsoft.com/office/drawing/2010/main">
+                <a:solidFill>
+                  <a:srgbClr val="FFFFFF"/>
+                </a:solidFill>
+              </a14:hiddenFill>
+            </a:ext>
+          </a:extLst>
+        </p:spPr>
+      </p:pic>
+      <p:pic>
+        <p:nvPicPr>
+          <p:cNvPr id="1038" name="Picture 14" descr="HTML - Wikipedia">
+            <a:extLst>
+              <a:ext uri="{FF2B5EF4-FFF2-40B4-BE49-F238E27FC236}">
+                <a16:creationId xmlns:a16="http://schemas.microsoft.com/office/drawing/2014/main" id="{9C3207DC-53C6-F54E-9B33-231CAE29C740}"/>
+              </a:ext>
+            </a:extLst>
+          </p:cNvPr>
+          <p:cNvPicPr>
+            <a:picLocks noChangeAspect="1" noChangeArrowheads="1"/>
+          </p:cNvPicPr>
+          <p:nvPr/>
+        </p:nvPicPr>
+        <p:blipFill>
+          <a:blip r:embed="rId7">
+            <a:extLst>
+              <a:ext uri="{28A0092B-C50C-407E-A947-70E740481C1C}">
+                <a14:useLocalDpi xmlns:a14="http://schemas.microsoft.com/office/drawing/2010/main" val="0"/>
+              </a:ext>
+            </a:extLst>
+          </a:blip>
+          <a:srcRect/>
+          <a:stretch>
+            <a:fillRect/>
+          </a:stretch>
+        </p:blipFill>
+        <p:spPr bwMode="auto">
+          <a:xfrm>
+            <a:off x="9065311" y="3290777"/>
+            <a:ext cx="962492" cy="962492"/>
+          </a:xfrm>
+          <a:prstGeom prst="rect">
+            <a:avLst/>
+          </a:prstGeom>
+          <a:noFill/>
+          <a:extLst>
+            <a:ext uri="{909E8E84-426E-40DD-AFC4-6F175D3DCCD1}">
+              <a14:hiddenFill xmlns:a14="http://schemas.microsoft.com/office/drawing/2010/main">
+                <a:solidFill>
+                  <a:srgbClr val="FFFFFF"/>
+                </a:solidFill>
+              </a14:hiddenFill>
+            </a:ext>
+          </a:extLst>
+        </p:spPr>
+      </p:pic>
+      <p:pic>
+        <p:nvPicPr>
+          <p:cNvPr id="1040" name="Picture 16" descr="Jinja2 - secure and fast Python template engine — Quintagroup">
+            <a:extLst>
+              <a:ext uri="{FF2B5EF4-FFF2-40B4-BE49-F238E27FC236}">
+                <a16:creationId xmlns:a16="http://schemas.microsoft.com/office/drawing/2014/main" id="{399D4E95-BAC4-0255-C7C9-E090FD491C94}"/>
+              </a:ext>
+            </a:extLst>
+          </p:cNvPr>
+          <p:cNvPicPr>
+            <a:picLocks noChangeAspect="1" noChangeArrowheads="1"/>
+          </p:cNvPicPr>
+          <p:nvPr/>
+        </p:nvPicPr>
+        <p:blipFill>
+          <a:blip r:embed="rId8">
+            <a:extLst>
+              <a:ext uri="{28A0092B-C50C-407E-A947-70E740481C1C}">
+                <a14:useLocalDpi xmlns:a14="http://schemas.microsoft.com/office/drawing/2010/main" val="0"/>
+              </a:ext>
+            </a:extLst>
+          </a:blip>
+          <a:srcRect/>
+          <a:stretch>
+            <a:fillRect/>
+          </a:stretch>
+        </p:blipFill>
+        <p:spPr bwMode="auto">
+          <a:xfrm>
+            <a:off x="10425434" y="3876316"/>
+            <a:ext cx="1273509" cy="1273509"/>
+          </a:xfrm>
+          <a:prstGeom prst="rect">
+            <a:avLst/>
+          </a:prstGeom>
+          <a:noFill/>
+          <a:extLst>
+            <a:ext uri="{909E8E84-426E-40DD-AFC4-6F175D3DCCD1}">
+              <a14:hiddenFill xmlns:a14="http://schemas.microsoft.com/office/drawing/2010/main">
+                <a:solidFill>
+                  <a:srgbClr val="FFFFFF"/>
+                </a:solidFill>
+              </a14:hiddenFill>
+            </a:ext>
+          </a:extLst>
+        </p:spPr>
+      </p:pic>
+      <p:pic>
+        <p:nvPicPr>
+          <p:cNvPr id="1042" name="Picture 18" descr="Российская операционная система Astra Linux, официальная русская ОС">
+            <a:extLst>
+              <a:ext uri="{FF2B5EF4-FFF2-40B4-BE49-F238E27FC236}">
+                <a16:creationId xmlns:a16="http://schemas.microsoft.com/office/drawing/2014/main" id="{FB2D7E23-B26E-5CC3-9B08-340F09D23F18}"/>
+              </a:ext>
+            </a:extLst>
+          </p:cNvPr>
+          <p:cNvPicPr>
+            <a:picLocks noChangeAspect="1" noChangeArrowheads="1"/>
+          </p:cNvPicPr>
+          <p:nvPr/>
+        </p:nvPicPr>
+        <p:blipFill>
+          <a:blip r:embed="rId9">
+            <a:extLst>
+              <a:ext uri="{28A0092B-C50C-407E-A947-70E740481C1C}">
+                <a14:useLocalDpi xmlns:a14="http://schemas.microsoft.com/office/drawing/2010/main" val="0"/>
+              </a:ext>
+            </a:extLst>
+          </a:blip>
+          <a:srcRect/>
+          <a:stretch>
+            <a:fillRect/>
+          </a:stretch>
+        </p:blipFill>
+        <p:spPr bwMode="auto">
+          <a:xfrm>
+            <a:off x="6690016" y="4952797"/>
+            <a:ext cx="2575647" cy="974570"/>
+          </a:xfrm>
+          <a:prstGeom prst="rect">
+            <a:avLst/>
+          </a:prstGeom>
+          <a:noFill/>
+          <a:extLst>
+            <a:ext uri="{909E8E84-426E-40DD-AFC4-6F175D3DCCD1}">
+              <a14:hiddenFill xmlns:a14="http://schemas.microsoft.com/office/drawing/2010/main">
+                <a:solidFill>
+                  <a:srgbClr val="FFFFFF"/>
+                </a:solidFill>
+              </a14:hiddenFill>
+            </a:ext>
+          </a:extLst>
+        </p:spPr>
+      </p:pic>
     </p:spTree>
     <p:extLst>
       <p:ext uri="{BB962C8B-B14F-4D97-AF65-F5344CB8AC3E}">
@@ -10013,41 +10232,6 @@
           </a:p>
         </p:txBody>
       </p:sp>
-      <p:sp>
-        <p:nvSpPr>
-          <p:cNvPr id="2" name="TextBox 1">
-            <a:extLst>
-              <a:ext uri="{FF2B5EF4-FFF2-40B4-BE49-F238E27FC236}">
-                <a16:creationId xmlns:a16="http://schemas.microsoft.com/office/drawing/2014/main" id="{29A6AEEB-6479-6AF6-ED4B-A834C62D6DE6}"/>
-              </a:ext>
-            </a:extLst>
-          </p:cNvPr>
-          <p:cNvSpPr txBox="1"/>
-          <p:nvPr/>
-        </p:nvSpPr>
-        <p:spPr>
-          <a:xfrm>
-            <a:off x="339755" y="1531226"/>
-            <a:ext cx="3443351" cy="584775"/>
-          </a:xfrm>
-          <a:prstGeom prst="rect">
-            <a:avLst/>
-          </a:prstGeom>
-          <a:noFill/>
-        </p:spPr>
-        <p:txBody>
-          <a:bodyPr wrap="square" rtlCol="0">
-            <a:spAutoFit/>
-          </a:bodyPr>
-          <a:lstStyle/>
-          <a:p>
-            <a:r>
-              <a:rPr lang="ru-RU" sz="1600" dirty="0"/>
-              <a:t>СПИСОК СУЩНОСТЕЙ НА РУССКОМ</a:t>
-            </a:r>
-          </a:p>
-        </p:txBody>
-      </p:sp>
       <p:pic>
         <p:nvPicPr>
           <p:cNvPr id="8" name="Рисунок 7" descr="Изображение выглядит как текст, снимок экрана, число, программное обеспечение&#10;&#10;Контент, сгенерированный ИИ, может содержать ошибки.">
@@ -10076,14 +10260,785 @@
         </p:blipFill>
         <p:spPr>
           <a:xfrm>
-            <a:off x="4129725" y="1247410"/>
-            <a:ext cx="7450728" cy="4930843"/>
+            <a:off x="4817035" y="1247410"/>
+            <a:ext cx="6763418" cy="4930843"/>
           </a:xfrm>
           <a:prstGeom prst="rect">
             <a:avLst/>
           </a:prstGeom>
         </p:spPr>
       </p:pic>
+      <p:graphicFrame>
+        <p:nvGraphicFramePr>
+          <p:cNvPr id="16" name="Таблица 15">
+            <a:extLst>
+              <a:ext uri="{FF2B5EF4-FFF2-40B4-BE49-F238E27FC236}">
+                <a16:creationId xmlns:a16="http://schemas.microsoft.com/office/drawing/2014/main" id="{76625936-398F-5383-1D69-99BCCFC1F94D}"/>
+              </a:ext>
+            </a:extLst>
+          </p:cNvPr>
+          <p:cNvGraphicFramePr>
+            <a:graphicFrameLocks noGrp="1"/>
+          </p:cNvGraphicFramePr>
+          <p:nvPr>
+            <p:extLst>
+              <p:ext uri="{D42A27DB-BD31-4B8C-83A1-F6EECF244321}">
+                <p14:modId xmlns:p14="http://schemas.microsoft.com/office/powerpoint/2010/main" val="3020898435"/>
+              </p:ext>
+            </p:extLst>
+          </p:nvPr>
+        </p:nvGraphicFramePr>
+        <p:xfrm>
+          <a:off x="209176" y="1247410"/>
+          <a:ext cx="4542117" cy="4848589"/>
+        </p:xfrm>
+        <a:graphic>
+          <a:graphicData uri="http://schemas.openxmlformats.org/drawingml/2006/table">
+            <a:tbl>
+              <a:tblPr>
+                <a:tableStyleId>{5940675A-B579-460E-94D1-54222C63F5DA}</a:tableStyleId>
+              </a:tblPr>
+              <a:tblGrid>
+                <a:gridCol w="2233930">
+                  <a:extLst>
+                    <a:ext uri="{9D8B030D-6E8A-4147-A177-3AD203B41FA5}">
+                      <a16:colId xmlns:a16="http://schemas.microsoft.com/office/drawing/2014/main" val="3718854607"/>
+                    </a:ext>
+                  </a:extLst>
+                </a:gridCol>
+                <a:gridCol w="794148">
+                  <a:extLst>
+                    <a:ext uri="{9D8B030D-6E8A-4147-A177-3AD203B41FA5}">
+                      <a16:colId xmlns:a16="http://schemas.microsoft.com/office/drawing/2014/main" val="122733606"/>
+                    </a:ext>
+                  </a:extLst>
+                </a:gridCol>
+                <a:gridCol w="1514039">
+                  <a:extLst>
+                    <a:ext uri="{9D8B030D-6E8A-4147-A177-3AD203B41FA5}">
+                      <a16:colId xmlns:a16="http://schemas.microsoft.com/office/drawing/2014/main" val="4218300197"/>
+                    </a:ext>
+                  </a:extLst>
+                </a:gridCol>
+              </a:tblGrid>
+              <a:tr h="258953">
+                <a:tc>
+                  <a:txBody>
+                    <a:bodyPr/>
+                    <a:lstStyle/>
+                    <a:p>
+                      <a:pPr algn="ctr" fontAlgn="b"/>
+                      <a:r>
+                        <a:rPr lang="ru-RU" sz="1400" u="none" strike="noStrike" dirty="0">
+                          <a:effectLst/>
+                        </a:rPr>
+                        <a:t>Ключ</a:t>
+                      </a:r>
+                      <a:endParaRPr lang="ru-RU" sz="1400" b="0" i="0" u="none" strike="noStrike" dirty="0">
+                        <a:solidFill>
+                          <a:srgbClr val="000000"/>
+                        </a:solidFill>
+                        <a:effectLst/>
+                        <a:latin typeface="Aptos Narrow" panose="020B0004020202020204" pitchFamily="34" charset="0"/>
+                      </a:endParaRPr>
+                    </a:p>
+                  </a:txBody>
+                  <a:tcPr marL="5396" marR="5396" marT="5396" marB="0" anchor="b"/>
+                </a:tc>
+                <a:tc>
+                  <a:txBody>
+                    <a:bodyPr/>
+                    <a:lstStyle/>
+                    <a:p>
+                      <a:pPr algn="ctr" fontAlgn="b"/>
+                      <a:r>
+                        <a:rPr lang="ru-RU" sz="1400" u="none" strike="noStrike" dirty="0">
+                          <a:effectLst/>
+                        </a:rPr>
+                        <a:t>Тип</a:t>
+                      </a:r>
+                      <a:endParaRPr lang="ru-RU" sz="1400" b="0" i="0" u="none" strike="noStrike" dirty="0">
+                        <a:solidFill>
+                          <a:srgbClr val="000000"/>
+                        </a:solidFill>
+                        <a:effectLst/>
+                        <a:latin typeface="Aptos Narrow" panose="020B0004020202020204" pitchFamily="34" charset="0"/>
+                      </a:endParaRPr>
+                    </a:p>
+                  </a:txBody>
+                  <a:tcPr marL="5396" marR="5396" marT="5396" marB="0" anchor="b"/>
+                </a:tc>
+                <a:tc>
+                  <a:txBody>
+                    <a:bodyPr/>
+                    <a:lstStyle/>
+                    <a:p>
+                      <a:pPr algn="ctr" fontAlgn="b"/>
+                      <a:r>
+                        <a:rPr lang="ru-RU" sz="1400" u="none" strike="noStrike" dirty="0">
+                          <a:effectLst/>
+                        </a:rPr>
+                        <a:t>Назначение</a:t>
+                      </a:r>
+                      <a:endParaRPr lang="ru-RU" sz="1400" b="0" i="0" u="none" strike="noStrike" dirty="0">
+                        <a:solidFill>
+                          <a:srgbClr val="000000"/>
+                        </a:solidFill>
+                        <a:effectLst/>
+                        <a:latin typeface="Aptos Narrow" panose="020B0004020202020204" pitchFamily="34" charset="0"/>
+                      </a:endParaRPr>
+                    </a:p>
+                  </a:txBody>
+                  <a:tcPr marL="5396" marR="5396" marT="5396" marB="0" anchor="b"/>
+                </a:tc>
+                <a:extLst>
+                  <a:ext uri="{0D108BD9-81ED-4DB2-BD59-A6C34878D82A}">
+                    <a16:rowId xmlns:a16="http://schemas.microsoft.com/office/drawing/2014/main" val="4213735483"/>
+                  </a:ext>
+                </a:extLst>
+              </a:tr>
+              <a:tr h="636654">
+                <a:tc>
+                  <a:txBody>
+                    <a:bodyPr/>
+                    <a:lstStyle/>
+                    <a:p>
+                      <a:pPr algn="ctr" fontAlgn="b"/>
+                      <a:r>
+                        <a:rPr lang="en-US" sz="1200" u="none" strike="noStrike" dirty="0">
+                          <a:effectLst/>
+                        </a:rPr>
+                        <a:t>mocks:{filename}</a:t>
+                      </a:r>
+                      <a:endParaRPr lang="en-US" sz="1200" b="0" i="0" u="none" strike="noStrike" dirty="0">
+                        <a:solidFill>
+                          <a:srgbClr val="000000"/>
+                        </a:solidFill>
+                        <a:effectLst/>
+                        <a:latin typeface="Aptos Narrow" panose="020B0004020202020204" pitchFamily="34" charset="0"/>
+                      </a:endParaRPr>
+                    </a:p>
+                  </a:txBody>
+                  <a:tcPr marL="5396" marR="5396" marT="5396" marB="0" anchor="b"/>
+                </a:tc>
+                <a:tc>
+                  <a:txBody>
+                    <a:bodyPr/>
+                    <a:lstStyle/>
+                    <a:p>
+                      <a:pPr algn="ctr" fontAlgn="b"/>
+                      <a:r>
+                        <a:rPr lang="en-US" sz="1200" u="none" strike="noStrike">
+                          <a:effectLst/>
+                        </a:rPr>
+                        <a:t>Hash</a:t>
+                      </a:r>
+                      <a:endParaRPr lang="en-US" sz="1200" b="0" i="0" u="none" strike="noStrike">
+                        <a:solidFill>
+                          <a:srgbClr val="000000"/>
+                        </a:solidFill>
+                        <a:effectLst/>
+                        <a:latin typeface="Aptos Narrow" panose="020B0004020202020204" pitchFamily="34" charset="0"/>
+                      </a:endParaRPr>
+                    </a:p>
+                  </a:txBody>
+                  <a:tcPr marL="5396" marR="5396" marT="5396" marB="0" anchor="b"/>
+                </a:tc>
+                <a:tc>
+                  <a:txBody>
+                    <a:bodyPr/>
+                    <a:lstStyle/>
+                    <a:p>
+                      <a:pPr algn="ctr" fontAlgn="b"/>
+                      <a:r>
+                        <a:rPr lang="ru-RU" sz="1200" u="none" strike="noStrike">
+                          <a:effectLst/>
+                        </a:rPr>
+                        <a:t>Конфигурация и состояние заглушки</a:t>
+                      </a:r>
+                      <a:endParaRPr lang="ru-RU" sz="1200" b="0" i="0" u="none" strike="noStrike">
+                        <a:solidFill>
+                          <a:srgbClr val="000000"/>
+                        </a:solidFill>
+                        <a:effectLst/>
+                        <a:latin typeface="Aptos Narrow" panose="020B0004020202020204" pitchFamily="34" charset="0"/>
+                      </a:endParaRPr>
+                    </a:p>
+                  </a:txBody>
+                  <a:tcPr marL="5396" marR="5396" marT="5396" marB="0" anchor="b"/>
+                </a:tc>
+                <a:extLst>
+                  <a:ext uri="{0D108BD9-81ED-4DB2-BD59-A6C34878D82A}">
+                    <a16:rowId xmlns:a16="http://schemas.microsoft.com/office/drawing/2014/main" val="583053325"/>
+                  </a:ext>
+                </a:extLst>
+              </a:tr>
+              <a:tr h="636654">
+                <a:tc>
+                  <a:txBody>
+                    <a:bodyPr/>
+                    <a:lstStyle/>
+                    <a:p>
+                      <a:pPr algn="ctr" fontAlgn="b"/>
+                      <a:r>
+                        <a:rPr lang="en-US" sz="1200" u="none" strike="noStrike">
+                          <a:effectLst/>
+                        </a:rPr>
+                        <a:t>mocks:registry</a:t>
+                      </a:r>
+                      <a:endParaRPr lang="en-US" sz="1200" b="0" i="0" u="none" strike="noStrike">
+                        <a:solidFill>
+                          <a:srgbClr val="000000"/>
+                        </a:solidFill>
+                        <a:effectLst/>
+                        <a:latin typeface="Aptos Narrow" panose="020B0004020202020204" pitchFamily="34" charset="0"/>
+                      </a:endParaRPr>
+                    </a:p>
+                  </a:txBody>
+                  <a:tcPr marL="5396" marR="5396" marT="5396" marB="0" anchor="b"/>
+                </a:tc>
+                <a:tc>
+                  <a:txBody>
+                    <a:bodyPr/>
+                    <a:lstStyle/>
+                    <a:p>
+                      <a:pPr algn="ctr" fontAlgn="b"/>
+                      <a:r>
+                        <a:rPr lang="en-US" sz="1200" u="none" strike="noStrike">
+                          <a:effectLst/>
+                        </a:rPr>
+                        <a:t>Set</a:t>
+                      </a:r>
+                      <a:endParaRPr lang="en-US" sz="1200" b="0" i="0" u="none" strike="noStrike">
+                        <a:solidFill>
+                          <a:srgbClr val="000000"/>
+                        </a:solidFill>
+                        <a:effectLst/>
+                        <a:latin typeface="Aptos Narrow" panose="020B0004020202020204" pitchFamily="34" charset="0"/>
+                      </a:endParaRPr>
+                    </a:p>
+                  </a:txBody>
+                  <a:tcPr marL="5396" marR="5396" marT="5396" marB="0" anchor="b"/>
+                </a:tc>
+                <a:tc>
+                  <a:txBody>
+                    <a:bodyPr/>
+                    <a:lstStyle/>
+                    <a:p>
+                      <a:pPr algn="ctr" fontAlgn="b"/>
+                      <a:r>
+                        <a:rPr lang="ru-RU" sz="1200" u="none" strike="noStrike">
+                          <a:effectLst/>
+                        </a:rPr>
+                        <a:t>Множество имён файлов всех заглушек</a:t>
+                      </a:r>
+                      <a:endParaRPr lang="ru-RU" sz="1200" b="0" i="0" u="none" strike="noStrike">
+                        <a:solidFill>
+                          <a:srgbClr val="000000"/>
+                        </a:solidFill>
+                        <a:effectLst/>
+                        <a:latin typeface="Aptos Narrow" panose="020B0004020202020204" pitchFamily="34" charset="0"/>
+                      </a:endParaRPr>
+                    </a:p>
+                  </a:txBody>
+                  <a:tcPr marL="5396" marR="5396" marT="5396" marB="0" anchor="b"/>
+                </a:tc>
+                <a:extLst>
+                  <a:ext uri="{0D108BD9-81ED-4DB2-BD59-A6C34878D82A}">
+                    <a16:rowId xmlns:a16="http://schemas.microsoft.com/office/drawing/2014/main" val="686743543"/>
+                  </a:ext>
+                </a:extLst>
+              </a:tr>
+              <a:tr h="510755">
+                <a:tc>
+                  <a:txBody>
+                    <a:bodyPr/>
+                    <a:lstStyle/>
+                    <a:p>
+                      <a:pPr algn="ctr" fontAlgn="b"/>
+                      <a:r>
+                        <a:rPr lang="en-US" sz="1200" u="none" strike="noStrike">
+                          <a:effectLst/>
+                        </a:rPr>
+                        <a:t>hosts:{hostname}</a:t>
+                      </a:r>
+                      <a:endParaRPr lang="en-US" sz="1200" b="0" i="0" u="none" strike="noStrike">
+                        <a:solidFill>
+                          <a:srgbClr val="000000"/>
+                        </a:solidFill>
+                        <a:effectLst/>
+                        <a:latin typeface="Aptos Narrow" panose="020B0004020202020204" pitchFamily="34" charset="0"/>
+                      </a:endParaRPr>
+                    </a:p>
+                  </a:txBody>
+                  <a:tcPr marL="5396" marR="5396" marT="5396" marB="0" anchor="b"/>
+                </a:tc>
+                <a:tc>
+                  <a:txBody>
+                    <a:bodyPr/>
+                    <a:lstStyle/>
+                    <a:p>
+                      <a:pPr algn="ctr" fontAlgn="b"/>
+                      <a:r>
+                        <a:rPr lang="en-US" sz="1200" u="none" strike="noStrike" dirty="0">
+                          <a:effectLst/>
+                        </a:rPr>
+                        <a:t>Hash</a:t>
+                      </a:r>
+                      <a:endParaRPr lang="en-US" sz="1200" b="0" i="0" u="none" strike="noStrike" dirty="0">
+                        <a:solidFill>
+                          <a:srgbClr val="000000"/>
+                        </a:solidFill>
+                        <a:effectLst/>
+                        <a:latin typeface="Aptos Narrow" panose="020B0004020202020204" pitchFamily="34" charset="0"/>
+                      </a:endParaRPr>
+                    </a:p>
+                  </a:txBody>
+                  <a:tcPr marL="5396" marR="5396" marT="5396" marB="0" anchor="b"/>
+                </a:tc>
+                <a:tc>
+                  <a:txBody>
+                    <a:bodyPr/>
+                    <a:lstStyle/>
+                    <a:p>
+                      <a:pPr algn="ctr" fontAlgn="b"/>
+                      <a:r>
+                        <a:rPr lang="ru-RU" sz="1200" u="none" strike="noStrike">
+                          <a:effectLst/>
+                        </a:rPr>
+                        <a:t>Конфигурация целевого хоста</a:t>
+                      </a:r>
+                      <a:endParaRPr lang="ru-RU" sz="1200" b="0" i="0" u="none" strike="noStrike">
+                        <a:solidFill>
+                          <a:srgbClr val="000000"/>
+                        </a:solidFill>
+                        <a:effectLst/>
+                        <a:latin typeface="Aptos Narrow" panose="020B0004020202020204" pitchFamily="34" charset="0"/>
+                      </a:endParaRPr>
+                    </a:p>
+                  </a:txBody>
+                  <a:tcPr marL="5396" marR="5396" marT="5396" marB="0" anchor="b"/>
+                </a:tc>
+                <a:extLst>
+                  <a:ext uri="{0D108BD9-81ED-4DB2-BD59-A6C34878D82A}">
+                    <a16:rowId xmlns:a16="http://schemas.microsoft.com/office/drawing/2014/main" val="1324895230"/>
+                  </a:ext>
+                </a:extLst>
+              </a:tr>
+              <a:tr h="636654">
+                <a:tc>
+                  <a:txBody>
+                    <a:bodyPr/>
+                    <a:lstStyle/>
+                    <a:p>
+                      <a:pPr algn="ctr" fontAlgn="b"/>
+                      <a:r>
+                        <a:rPr lang="en-US" sz="1200" u="none" strike="noStrike">
+                          <a:effectLst/>
+                        </a:rPr>
+                        <a:t>hosts:registry</a:t>
+                      </a:r>
+                      <a:endParaRPr lang="en-US" sz="1200" b="0" i="0" u="none" strike="noStrike">
+                        <a:solidFill>
+                          <a:srgbClr val="000000"/>
+                        </a:solidFill>
+                        <a:effectLst/>
+                        <a:latin typeface="Aptos Narrow" panose="020B0004020202020204" pitchFamily="34" charset="0"/>
+                      </a:endParaRPr>
+                    </a:p>
+                  </a:txBody>
+                  <a:tcPr marL="5396" marR="5396" marT="5396" marB="0" anchor="b"/>
+                </a:tc>
+                <a:tc>
+                  <a:txBody>
+                    <a:bodyPr/>
+                    <a:lstStyle/>
+                    <a:p>
+                      <a:pPr algn="ctr" fontAlgn="b"/>
+                      <a:r>
+                        <a:rPr lang="en-US" sz="1200" u="none" strike="noStrike" dirty="0">
+                          <a:effectLst/>
+                        </a:rPr>
+                        <a:t>Set</a:t>
+                      </a:r>
+                      <a:endParaRPr lang="en-US" sz="1200" b="0" i="0" u="none" strike="noStrike" dirty="0">
+                        <a:solidFill>
+                          <a:srgbClr val="000000"/>
+                        </a:solidFill>
+                        <a:effectLst/>
+                        <a:latin typeface="Aptos Narrow" panose="020B0004020202020204" pitchFamily="34" charset="0"/>
+                      </a:endParaRPr>
+                    </a:p>
+                  </a:txBody>
+                  <a:tcPr marL="5396" marR="5396" marT="5396" marB="0" anchor="b"/>
+                </a:tc>
+                <a:tc>
+                  <a:txBody>
+                    <a:bodyPr/>
+                    <a:lstStyle/>
+                    <a:p>
+                      <a:pPr algn="ctr" fontAlgn="b"/>
+                      <a:r>
+                        <a:rPr lang="ru-RU" sz="1200" u="none" strike="noStrike" dirty="0">
+                          <a:effectLst/>
+                        </a:rPr>
+                        <a:t>Множество </a:t>
+                      </a:r>
+                      <a:r>
+                        <a:rPr lang="en-US" sz="1200" u="none" strike="noStrike" dirty="0">
+                          <a:effectLst/>
+                        </a:rPr>
+                        <a:t>hostname </a:t>
+                      </a:r>
+                      <a:r>
+                        <a:rPr lang="ru-RU" sz="1200" u="none" strike="noStrike" dirty="0">
+                          <a:effectLst/>
+                        </a:rPr>
+                        <a:t>всех хостов</a:t>
+                      </a:r>
+                      <a:endParaRPr lang="ru-RU" sz="1200" b="0" i="0" u="none" strike="noStrike" dirty="0">
+                        <a:solidFill>
+                          <a:srgbClr val="000000"/>
+                        </a:solidFill>
+                        <a:effectLst/>
+                        <a:latin typeface="Aptos Narrow" panose="020B0004020202020204" pitchFamily="34" charset="0"/>
+                      </a:endParaRPr>
+                    </a:p>
+                  </a:txBody>
+                  <a:tcPr marL="5396" marR="5396" marT="5396" marB="0" anchor="b"/>
+                </a:tc>
+                <a:extLst>
+                  <a:ext uri="{0D108BD9-81ED-4DB2-BD59-A6C34878D82A}">
+                    <a16:rowId xmlns:a16="http://schemas.microsoft.com/office/drawing/2014/main" val="3031967908"/>
+                  </a:ext>
+                </a:extLst>
+              </a:tr>
+              <a:tr h="384854">
+                <a:tc>
+                  <a:txBody>
+                    <a:bodyPr/>
+                    <a:lstStyle/>
+                    <a:p>
+                      <a:pPr algn="ctr" fontAlgn="b"/>
+                      <a:r>
+                        <a:rPr lang="en-US" sz="1200" u="none" strike="noStrike">
+                          <a:effectLst/>
+                        </a:rPr>
+                        <a:t>accounts:{uuid}</a:t>
+                      </a:r>
+                      <a:endParaRPr lang="en-US" sz="1200" b="0" i="0" u="none" strike="noStrike">
+                        <a:solidFill>
+                          <a:srgbClr val="000000"/>
+                        </a:solidFill>
+                        <a:effectLst/>
+                        <a:latin typeface="Aptos Narrow" panose="020B0004020202020204" pitchFamily="34" charset="0"/>
+                      </a:endParaRPr>
+                    </a:p>
+                  </a:txBody>
+                  <a:tcPr marL="5396" marR="5396" marT="5396" marB="0" anchor="b"/>
+                </a:tc>
+                <a:tc>
+                  <a:txBody>
+                    <a:bodyPr/>
+                    <a:lstStyle/>
+                    <a:p>
+                      <a:pPr algn="ctr" fontAlgn="b"/>
+                      <a:r>
+                        <a:rPr lang="en-US" sz="1200" u="none" strike="noStrike">
+                          <a:effectLst/>
+                        </a:rPr>
+                        <a:t>Hash</a:t>
+                      </a:r>
+                      <a:endParaRPr lang="en-US" sz="1200" b="0" i="0" u="none" strike="noStrike">
+                        <a:solidFill>
+                          <a:srgbClr val="000000"/>
+                        </a:solidFill>
+                        <a:effectLst/>
+                        <a:latin typeface="Aptos Narrow" panose="020B0004020202020204" pitchFamily="34" charset="0"/>
+                      </a:endParaRPr>
+                    </a:p>
+                  </a:txBody>
+                  <a:tcPr marL="5396" marR="5396" marT="5396" marB="0" anchor="b"/>
+                </a:tc>
+                <a:tc>
+                  <a:txBody>
+                    <a:bodyPr/>
+                    <a:lstStyle/>
+                    <a:p>
+                      <a:pPr algn="ctr" fontAlgn="b"/>
+                      <a:r>
+                        <a:rPr lang="ru-RU" sz="1200" u="none" strike="noStrike">
+                          <a:effectLst/>
+                        </a:rPr>
+                        <a:t>Учётная запись </a:t>
+                      </a:r>
+                      <a:r>
+                        <a:rPr lang="en-US" sz="1200" u="none" strike="noStrike">
+                          <a:effectLst/>
+                        </a:rPr>
+                        <a:t>SSH</a:t>
+                      </a:r>
+                      <a:endParaRPr lang="en-US" sz="1200" b="0" i="0" u="none" strike="noStrike">
+                        <a:solidFill>
+                          <a:srgbClr val="000000"/>
+                        </a:solidFill>
+                        <a:effectLst/>
+                        <a:latin typeface="Aptos Narrow" panose="020B0004020202020204" pitchFamily="34" charset="0"/>
+                      </a:endParaRPr>
+                    </a:p>
+                  </a:txBody>
+                  <a:tcPr marL="5396" marR="5396" marT="5396" marB="0" anchor="b"/>
+                </a:tc>
+                <a:extLst>
+                  <a:ext uri="{0D108BD9-81ED-4DB2-BD59-A6C34878D82A}">
+                    <a16:rowId xmlns:a16="http://schemas.microsoft.com/office/drawing/2014/main" val="4046145835"/>
+                  </a:ext>
+                </a:extLst>
+              </a:tr>
+              <a:tr h="510755">
+                <a:tc>
+                  <a:txBody>
+                    <a:bodyPr/>
+                    <a:lstStyle/>
+                    <a:p>
+                      <a:pPr algn="ctr" fontAlgn="b"/>
+                      <a:r>
+                        <a:rPr lang="en-US" sz="1200" u="none" strike="noStrike" dirty="0" err="1">
+                          <a:effectLst/>
+                        </a:rPr>
+                        <a:t>accounts:registry</a:t>
+                      </a:r>
+                      <a:endParaRPr lang="en-US" sz="1200" b="0" i="0" u="none" strike="noStrike" dirty="0">
+                        <a:solidFill>
+                          <a:srgbClr val="000000"/>
+                        </a:solidFill>
+                        <a:effectLst/>
+                        <a:latin typeface="Aptos Narrow" panose="020B0004020202020204" pitchFamily="34" charset="0"/>
+                      </a:endParaRPr>
+                    </a:p>
+                  </a:txBody>
+                  <a:tcPr marL="5396" marR="5396" marT="5396" marB="0" anchor="b"/>
+                </a:tc>
+                <a:tc>
+                  <a:txBody>
+                    <a:bodyPr/>
+                    <a:lstStyle/>
+                    <a:p>
+                      <a:pPr algn="ctr" fontAlgn="b"/>
+                      <a:r>
+                        <a:rPr lang="en-US" sz="1200" u="none" strike="noStrike">
+                          <a:effectLst/>
+                        </a:rPr>
+                        <a:t>Set</a:t>
+                      </a:r>
+                      <a:endParaRPr lang="en-US" sz="1200" b="0" i="0" u="none" strike="noStrike">
+                        <a:solidFill>
+                          <a:srgbClr val="000000"/>
+                        </a:solidFill>
+                        <a:effectLst/>
+                        <a:latin typeface="Aptos Narrow" panose="020B0004020202020204" pitchFamily="34" charset="0"/>
+                      </a:endParaRPr>
+                    </a:p>
+                  </a:txBody>
+                  <a:tcPr marL="5396" marR="5396" marT="5396" marB="0" anchor="b"/>
+                </a:tc>
+                <a:tc>
+                  <a:txBody>
+                    <a:bodyPr/>
+                    <a:lstStyle/>
+                    <a:p>
+                      <a:pPr algn="ctr" fontAlgn="b"/>
+                      <a:r>
+                        <a:rPr lang="ru-RU" sz="1200" u="none" strike="noStrike">
+                          <a:effectLst/>
+                        </a:rPr>
+                        <a:t>Множество </a:t>
+                      </a:r>
+                      <a:r>
+                        <a:rPr lang="en-US" sz="1200" u="none" strike="noStrike">
+                          <a:effectLst/>
+                        </a:rPr>
+                        <a:t>UUID </a:t>
+                      </a:r>
+                      <a:r>
+                        <a:rPr lang="ru-RU" sz="1200" u="none" strike="noStrike">
+                          <a:effectLst/>
+                        </a:rPr>
+                        <a:t>учётных записей</a:t>
+                      </a:r>
+                      <a:endParaRPr lang="ru-RU" sz="1200" b="0" i="0" u="none" strike="noStrike">
+                        <a:solidFill>
+                          <a:srgbClr val="000000"/>
+                        </a:solidFill>
+                        <a:effectLst/>
+                        <a:latin typeface="Aptos Narrow" panose="020B0004020202020204" pitchFamily="34" charset="0"/>
+                      </a:endParaRPr>
+                    </a:p>
+                  </a:txBody>
+                  <a:tcPr marL="5396" marR="5396" marT="5396" marB="0" anchor="b"/>
+                </a:tc>
+                <a:extLst>
+                  <a:ext uri="{0D108BD9-81ED-4DB2-BD59-A6C34878D82A}">
+                    <a16:rowId xmlns:a16="http://schemas.microsoft.com/office/drawing/2014/main" val="1077430999"/>
+                  </a:ext>
+                </a:extLst>
+              </a:tr>
+              <a:tr h="510755">
+                <a:tc>
+                  <a:txBody>
+                    <a:bodyPr/>
+                    <a:lstStyle/>
+                    <a:p>
+                      <a:pPr algn="ctr" fontAlgn="b"/>
+                      <a:r>
+                        <a:rPr lang="en-US" sz="1200" u="none" strike="noStrike">
+                          <a:effectLst/>
+                        </a:rPr>
+                        <a:t>rate:{filename}:{window}</a:t>
+                      </a:r>
+                      <a:endParaRPr lang="en-US" sz="1200" b="0" i="0" u="none" strike="noStrike">
+                        <a:solidFill>
+                          <a:srgbClr val="000000"/>
+                        </a:solidFill>
+                        <a:effectLst/>
+                        <a:latin typeface="Aptos Narrow" panose="020B0004020202020204" pitchFamily="34" charset="0"/>
+                      </a:endParaRPr>
+                    </a:p>
+                  </a:txBody>
+                  <a:tcPr marL="5396" marR="5396" marT="5396" marB="0" anchor="b"/>
+                </a:tc>
+                <a:tc>
+                  <a:txBody>
+                    <a:bodyPr/>
+                    <a:lstStyle/>
+                    <a:p>
+                      <a:pPr algn="ctr" fontAlgn="b"/>
+                      <a:r>
+                        <a:rPr lang="en-US" sz="1200" u="none" strike="noStrike">
+                          <a:effectLst/>
+                        </a:rPr>
+                        <a:t>String</a:t>
+                      </a:r>
+                      <a:endParaRPr lang="en-US" sz="1200" b="0" i="0" u="none" strike="noStrike">
+                        <a:solidFill>
+                          <a:srgbClr val="000000"/>
+                        </a:solidFill>
+                        <a:effectLst/>
+                        <a:latin typeface="Aptos Narrow" panose="020B0004020202020204" pitchFamily="34" charset="0"/>
+                      </a:endParaRPr>
+                    </a:p>
+                  </a:txBody>
+                  <a:tcPr marL="5396" marR="5396" marT="5396" marB="0" anchor="b"/>
+                </a:tc>
+                <a:tc>
+                  <a:txBody>
+                    <a:bodyPr/>
+                    <a:lstStyle/>
+                    <a:p>
+                      <a:pPr algn="ctr" fontAlgn="b"/>
+                      <a:r>
+                        <a:rPr lang="en-US" sz="1200" u="none" strike="noStrike">
+                          <a:effectLst/>
+                        </a:rPr>
+                        <a:t>Счётчик Rate Limiter (с TTL)</a:t>
+                      </a:r>
+                      <a:endParaRPr lang="en-US" sz="1200" b="0" i="0" u="none" strike="noStrike">
+                        <a:solidFill>
+                          <a:srgbClr val="000000"/>
+                        </a:solidFill>
+                        <a:effectLst/>
+                        <a:latin typeface="Aptos Narrow" panose="020B0004020202020204" pitchFamily="34" charset="0"/>
+                      </a:endParaRPr>
+                    </a:p>
+                  </a:txBody>
+                  <a:tcPr marL="5396" marR="5396" marT="5396" marB="0" anchor="b"/>
+                </a:tc>
+                <a:extLst>
+                  <a:ext uri="{0D108BD9-81ED-4DB2-BD59-A6C34878D82A}">
+                    <a16:rowId xmlns:a16="http://schemas.microsoft.com/office/drawing/2014/main" val="2962347782"/>
+                  </a:ext>
+                </a:extLst>
+              </a:tr>
+              <a:tr h="762555">
+                <a:tc>
+                  <a:txBody>
+                    <a:bodyPr/>
+                    <a:lstStyle/>
+                    <a:p>
+                      <a:pPr algn="ctr" fontAlgn="b"/>
+                      <a:r>
+                        <a:rPr lang="en-US" sz="1200" u="none" strike="noStrike">
+                          <a:effectLst/>
+                        </a:rPr>
+                        <a:t>settings:global</a:t>
+                      </a:r>
+                      <a:endParaRPr lang="en-US" sz="1200" b="0" i="0" u="none" strike="noStrike">
+                        <a:solidFill>
+                          <a:srgbClr val="000000"/>
+                        </a:solidFill>
+                        <a:effectLst/>
+                        <a:latin typeface="Aptos Narrow" panose="020B0004020202020204" pitchFamily="34" charset="0"/>
+                      </a:endParaRPr>
+                    </a:p>
+                  </a:txBody>
+                  <a:tcPr marL="5396" marR="5396" marT="5396" marB="0" anchor="b"/>
+                </a:tc>
+                <a:tc>
+                  <a:txBody>
+                    <a:bodyPr/>
+                    <a:lstStyle/>
+                    <a:p>
+                      <a:pPr algn="ctr" fontAlgn="b"/>
+                      <a:r>
+                        <a:rPr lang="en-US" sz="1200" u="none" strike="noStrike">
+                          <a:effectLst/>
+                        </a:rPr>
+                        <a:t>Hash</a:t>
+                      </a:r>
+                      <a:endParaRPr lang="en-US" sz="1200" b="0" i="0" u="none" strike="noStrike">
+                        <a:solidFill>
+                          <a:srgbClr val="000000"/>
+                        </a:solidFill>
+                        <a:effectLst/>
+                        <a:latin typeface="Aptos Narrow" panose="020B0004020202020204" pitchFamily="34" charset="0"/>
+                      </a:endParaRPr>
+                    </a:p>
+                  </a:txBody>
+                  <a:tcPr marL="5396" marR="5396" marT="5396" marB="0" anchor="b"/>
+                </a:tc>
+                <a:tc>
+                  <a:txBody>
+                    <a:bodyPr/>
+                    <a:lstStyle/>
+                    <a:p>
+                      <a:pPr algn="ctr" fontAlgn="b"/>
+                      <a:r>
+                        <a:rPr lang="ru-RU" sz="1200" u="none" strike="noStrike" dirty="0">
+                          <a:effectLst/>
+                        </a:rPr>
+                        <a:t>Глобальные параметры приложения</a:t>
+                      </a:r>
+                      <a:endParaRPr lang="ru-RU" sz="1200" b="0" i="0" u="none" strike="noStrike" dirty="0">
+                        <a:solidFill>
+                          <a:srgbClr val="000000"/>
+                        </a:solidFill>
+                        <a:effectLst/>
+                        <a:latin typeface="Aptos Narrow" panose="020B0004020202020204" pitchFamily="34" charset="0"/>
+                      </a:endParaRPr>
+                    </a:p>
+                  </a:txBody>
+                  <a:tcPr marL="5396" marR="5396" marT="5396" marB="0" anchor="b"/>
+                </a:tc>
+                <a:extLst>
+                  <a:ext uri="{0D108BD9-81ED-4DB2-BD59-A6C34878D82A}">
+                    <a16:rowId xmlns:a16="http://schemas.microsoft.com/office/drawing/2014/main" val="4032181480"/>
+                  </a:ext>
+                </a:extLst>
+              </a:tr>
+            </a:tbl>
+          </a:graphicData>
+        </a:graphic>
+      </p:graphicFrame>
     </p:spTree>
     <p:extLst>
       <p:ext uri="{BB962C8B-B14F-4D97-AF65-F5344CB8AC3E}">
@@ -10834,69 +11789,6 @@
           </a:p>
         </p:txBody>
       </p:sp>
-      <p:sp>
-        <p:nvSpPr>
-          <p:cNvPr id="4" name="TextBox 3">
-            <a:extLst>
-              <a:ext uri="{FF2B5EF4-FFF2-40B4-BE49-F238E27FC236}">
-                <a16:creationId xmlns:a16="http://schemas.microsoft.com/office/drawing/2014/main" id="{8CDDA008-5FC4-78D9-955B-5FE9E4E256DE}"/>
-              </a:ext>
-            </a:extLst>
-          </p:cNvPr>
-          <p:cNvSpPr txBox="1"/>
-          <p:nvPr/>
-        </p:nvSpPr>
-        <p:spPr>
-          <a:xfrm>
-            <a:off x="1195294" y="2772285"/>
-            <a:ext cx="9801412" cy="338554"/>
-          </a:xfrm>
-          <a:prstGeom prst="rect">
-            <a:avLst/>
-          </a:prstGeom>
-          <a:noFill/>
-        </p:spPr>
-        <p:txBody>
-          <a:bodyPr wrap="square" rtlCol="0">
-            <a:spAutoFit/>
-          </a:bodyPr>
-          <a:lstStyle/>
-          <a:p>
-            <a:r>
-              <a:rPr lang="ru-RU" sz="1600" b="0" dirty="0">
-                <a:effectLst/>
-                <a:latin typeface="Consolas" panose="020B0609020204030204" pitchFamily="49" charset="0"/>
-              </a:rPr>
-              <a:t>ВСТАВИТЬ </a:t>
-            </a:r>
-            <a:r>
-              <a:rPr lang="ru-RU" sz="1600" b="0" dirty="0" err="1">
-                <a:effectLst/>
-                <a:latin typeface="Consolas" panose="020B0609020204030204" pitchFamily="49" charset="0"/>
-              </a:rPr>
-              <a:t>БЛОК-схему</a:t>
-            </a:r>
-            <a:r>
-              <a:rPr lang="ru-RU" sz="1600" b="0" dirty="0">
-                <a:effectLst/>
-                <a:latin typeface="Consolas" panose="020B0609020204030204" pitchFamily="49" charset="0"/>
-              </a:rPr>
-              <a:t> </a:t>
-            </a:r>
-            <a:r>
-              <a:rPr lang="ru-RU" sz="1600" b="0" dirty="0" err="1">
-                <a:effectLst/>
-                <a:latin typeface="Consolas" panose="020B0609020204030204" pitchFamily="49" charset="0"/>
-              </a:rPr>
-              <a:t>рейтлимит</a:t>
-            </a:r>
-            <a:endParaRPr lang="ru-RU" sz="1600" b="0" dirty="0">
-              <a:effectLst/>
-              <a:latin typeface="Consolas" panose="020B0609020204030204" pitchFamily="49" charset="0"/>
-            </a:endParaRPr>
-          </a:p>
-        </p:txBody>
-      </p:sp>
       <p:pic>
         <p:nvPicPr>
           <p:cNvPr id="8" name="Рисунок 7" descr="Изображение выглядит как текст, снимок экрана, диаграмма, График&#10;&#10;Контент, сгенерированный ИИ, может содержать ошибки.">
@@ -10919,14 +11811,49 @@
               </a:ext>
             </a:extLst>
           </a:blip>
+          <a:srcRect t="8564" r="23981" b="4588"/>
+          <a:stretch/>
+        </p:blipFill>
+        <p:spPr>
+          <a:xfrm>
+            <a:off x="1162424" y="2045369"/>
+            <a:ext cx="4933576" cy="3052560"/>
+          </a:xfrm>
+          <a:prstGeom prst="rect">
+            <a:avLst/>
+          </a:prstGeom>
+        </p:spPr>
+      </p:pic>
+      <p:pic>
+        <p:nvPicPr>
+          <p:cNvPr id="10" name="Рисунок 9" descr="Изображение выглядит как текст, снимок экрана, Шрифт, дизайн&#10;&#10;Контент, сгенерированный ИИ, может содержать ошибки.">
+            <a:extLst>
+              <a:ext uri="{FF2B5EF4-FFF2-40B4-BE49-F238E27FC236}">
+                <a16:creationId xmlns:a16="http://schemas.microsoft.com/office/drawing/2014/main" id="{ED5AC783-F67F-FDD4-576E-ACC0063AD052}"/>
+              </a:ext>
+            </a:extLst>
+          </p:cNvPr>
+          <p:cNvPicPr>
+            <a:picLocks noChangeAspect="1"/>
+          </p:cNvPicPr>
+          <p:nvPr/>
+        </p:nvPicPr>
+        <p:blipFill>
+          <a:blip r:embed="rId4">
+            <a:extLst>
+              <a:ext uri="{28A0092B-C50C-407E-A947-70E740481C1C}">
+                <a14:useLocalDpi xmlns:a14="http://schemas.microsoft.com/office/drawing/2010/main" val="0"/>
+              </a:ext>
+            </a:extLst>
+          </a:blip>
           <a:stretch>
             <a:fillRect/>
           </a:stretch>
         </p:blipFill>
         <p:spPr>
           <a:xfrm>
-            <a:off x="7841694" y="3110839"/>
-            <a:ext cx="4020574" cy="2177471"/>
+            <a:off x="6998144" y="1024064"/>
+            <a:ext cx="3815968" cy="5296681"/>
           </a:xfrm>
           <a:prstGeom prst="rect">
             <a:avLst/>
@@ -11233,46 +12160,41 @@
           </a:p>
         </p:txBody>
       </p:sp>
-      <p:sp>
-        <p:nvSpPr>
-          <p:cNvPr id="2" name="TextBox 1">
+      <p:pic>
+        <p:nvPicPr>
+          <p:cNvPr id="16" name="Рисунок 15" descr="Изображение выглядит как текст, диаграмма, снимок экрана, Параллельный&#10;&#10;Контент, сгенерированный ИИ, может содержать ошибки.">
             <a:extLst>
               <a:ext uri="{FF2B5EF4-FFF2-40B4-BE49-F238E27FC236}">
-                <a16:creationId xmlns:a16="http://schemas.microsoft.com/office/drawing/2014/main" id="{29A6AEEB-6479-6AF6-ED4B-A834C62D6DE6}"/>
+                <a16:creationId xmlns:a16="http://schemas.microsoft.com/office/drawing/2014/main" id="{4E3491A9-48E7-593B-2B39-4313488462AB}"/>
               </a:ext>
             </a:extLst>
           </p:cNvPr>
-          <p:cNvSpPr txBox="1"/>
+          <p:cNvPicPr>
+            <a:picLocks noChangeAspect="1"/>
+          </p:cNvPicPr>
           <p:nvPr/>
-        </p:nvSpPr>
+        </p:nvPicPr>
+        <p:blipFill>
+          <a:blip r:embed="rId3">
+            <a:extLst>
+              <a:ext uri="{28A0092B-C50C-407E-A947-70E740481C1C}">
+                <a14:useLocalDpi xmlns:a14="http://schemas.microsoft.com/office/drawing/2010/main" val="0"/>
+              </a:ext>
+            </a:extLst>
+          </a:blip>
+          <a:srcRect t="3809"/>
+          <a:stretch/>
+        </p:blipFill>
         <p:spPr>
           <a:xfrm>
-            <a:off x="1594377" y="3429000"/>
-            <a:ext cx="7751616" cy="411908"/>
+            <a:off x="193420" y="1343223"/>
+            <a:ext cx="11091411" cy="4613836"/>
           </a:xfrm>
           <a:prstGeom prst="rect">
             <a:avLst/>
           </a:prstGeom>
-          <a:noFill/>
         </p:spPr>
-        <p:txBody>
-          <a:bodyPr wrap="square" rtlCol="0">
-            <a:spAutoFit/>
-          </a:bodyPr>
-          <a:lstStyle/>
-          <a:p>
-            <a:pPr>
-              <a:lnSpc>
-                <a:spcPct val="150000"/>
-              </a:lnSpc>
-            </a:pPr>
-            <a:r>
-              <a:rPr lang="ru-RU" sz="1600" dirty="0"/>
-              <a:t>СДЕЛАТЬ ДИАГРАММЫ ЖИЗНЕННОГО ЦИКЛА</a:t>
-            </a:r>
-          </a:p>
-        </p:txBody>
-      </p:sp>
+      </p:pic>
     </p:spTree>
     <p:extLst>
       <p:ext uri="{BB962C8B-B14F-4D97-AF65-F5344CB8AC3E}">

--- a/Thesis/docs/Презентация.pptx
+++ b/Thesis/docs/Презентация.pptx
@@ -34,11 +34,11 @@
       <p:boldItalic r:id="rId20"/>
     </p:embeddedFont>
     <p:embeddedFont>
-      <p:font typeface="Gilroy Bold" panose="00000800000000000000" pitchFamily="50" charset="-52"/>
+      <p:font typeface="Gilroy Bold" panose="00000800000000000000" charset="-52"/>
       <p:bold r:id="rId21"/>
     </p:embeddedFont>
     <p:embeddedFont>
-      <p:font typeface="Gilroy Medium" panose="00000600000000000000" pitchFamily="50" charset="-52"/>
+      <p:font typeface="Gilroy Medium" panose="00000600000000000000" charset="-52"/>
       <p:regular r:id="rId22"/>
     </p:embeddedFont>
     <p:embeddedFont>
@@ -248,7 +248,7 @@
           <a:p>
             <a:fld id="{06B9DC91-30C7-46AB-ADDB-A80A0533D77A}" type="datetimeFigureOut">
               <a:rPr lang="ru-RU" smtClean="0"/>
-              <a:t>22.05.2026</a:t>
+              <a:t>24.05.2026</a:t>
             </a:fld>
             <a:endParaRPr lang="ru-RU"/>
           </a:p>
@@ -2064,7 +2064,7 @@
           <a:p>
             <a:fld id="{D92D3C23-8038-4008-B24E-40A94D79456D}" type="datetime1">
               <a:rPr lang="ru-RU" smtClean="0"/>
-              <a:t>22.05.2026</a:t>
+              <a:t>24.05.2026</a:t>
             </a:fld>
             <a:endParaRPr lang="ru-RU"/>
           </a:p>
@@ -2512,7 +2512,7 @@
           <a:p>
             <a:fld id="{4FBADD92-CC98-4900-BE8A-2068547BBC1A}" type="datetime1">
               <a:rPr lang="ru-RU" smtClean="0"/>
-              <a:t>22.05.2026</a:t>
+              <a:t>24.05.2026</a:t>
             </a:fld>
             <a:endParaRPr lang="ru-RU"/>
           </a:p>
@@ -2830,7 +2830,7 @@
           <a:p>
             <a:fld id="{06738898-160C-4747-9301-0B5702FA49D8}" type="datetime1">
               <a:rPr lang="ru-RU" smtClean="0"/>
-              <a:t>22.05.2026</a:t>
+              <a:t>24.05.2026</a:t>
             </a:fld>
             <a:endParaRPr lang="ru-RU"/>
           </a:p>
@@ -2957,7 +2957,7 @@
           <a:p>
             <a:fld id="{F1EBB16F-DABE-4712-B47F-7722E1CB50FE}" type="datetime1">
               <a:rPr lang="ru-RU" smtClean="0"/>
-              <a:t>22.05.2026</a:t>
+              <a:t>24.05.2026</a:t>
             </a:fld>
             <a:endParaRPr lang="ru-RU" dirty="0"/>
           </a:p>
@@ -3010,7 +3010,7 @@
           <a:p>
             <a:fld id="{2CEBEA22-9938-4273-8C60-D80B349E4BA9}" type="datetime1">
               <a:rPr lang="ru-RU" smtClean="0"/>
-              <a:t>22.05.2026</a:t>
+              <a:t>24.05.2026</a:t>
             </a:fld>
             <a:endParaRPr lang="ru-RU"/>
           </a:p>
@@ -3291,7 +3291,7 @@
           <a:p>
             <a:fld id="{570D790B-F35A-4C90-BC4A-BA7F77964CA4}" type="datetime1">
               <a:rPr lang="ru-RU" smtClean="0"/>
-              <a:t>22.05.2026</a:t>
+              <a:t>24.05.2026</a:t>
             </a:fld>
             <a:endParaRPr lang="ru-RU"/>
           </a:p>
@@ -3528,7 +3528,7 @@
           <a:p>
             <a:fld id="{29AEF080-AA0F-44FA-BA62-A56D8619F7E7}" type="datetime1">
               <a:rPr lang="ru-RU" smtClean="0"/>
-              <a:t>22.05.2026</a:t>
+              <a:t>24.05.2026</a:t>
             </a:fld>
             <a:endParaRPr lang="ru-RU"/>
           </a:p>
@@ -3710,7 +3710,7 @@
           <a:p>
             <a:fld id="{83AB8CDF-4973-4195-91CA-18BA11F1D400}" type="datetime1">
               <a:rPr lang="ru-RU" smtClean="0"/>
-              <a:t>22.05.2026</a:t>
+              <a:t>24.05.2026</a:t>
             </a:fld>
             <a:endParaRPr lang="ru-RU"/>
           </a:p>
@@ -10260,8 +10260,8 @@
         </p:blipFill>
         <p:spPr>
           <a:xfrm>
-            <a:off x="4817035" y="1247410"/>
-            <a:ext cx="6763418" cy="4930843"/>
+            <a:off x="5739126" y="1534238"/>
+            <a:ext cx="6198469" cy="4518969"/>
           </a:xfrm>
           <a:prstGeom prst="rect">
             <a:avLst/>
@@ -10283,37 +10283,37 @@
           <p:nvPr>
             <p:extLst>
               <p:ext uri="{D42A27DB-BD31-4B8C-83A1-F6EECF244321}">
-                <p14:modId xmlns:p14="http://schemas.microsoft.com/office/powerpoint/2010/main" val="3020898435"/>
+                <p14:modId xmlns:p14="http://schemas.microsoft.com/office/powerpoint/2010/main" val="551077903"/>
               </p:ext>
             </p:extLst>
           </p:nvPr>
         </p:nvGraphicFramePr>
         <p:xfrm>
-          <a:off x="209176" y="1247410"/>
-          <a:ext cx="4542117" cy="4848589"/>
+          <a:off x="201584" y="1071868"/>
+          <a:ext cx="5331708" cy="4894436"/>
         </p:xfrm>
         <a:graphic>
           <a:graphicData uri="http://schemas.openxmlformats.org/drawingml/2006/table">
             <a:tbl>
-              <a:tblPr>
+              <a:tblPr firstRow="1">
                 <a:tableStyleId>{5940675A-B579-460E-94D1-54222C63F5DA}</a:tableStyleId>
               </a:tblPr>
               <a:tblGrid>
-                <a:gridCol w="2233930">
+                <a:gridCol w="2275893">
                   <a:extLst>
                     <a:ext uri="{9D8B030D-6E8A-4147-A177-3AD203B41FA5}">
                       <a16:colId xmlns:a16="http://schemas.microsoft.com/office/drawing/2014/main" val="3718854607"/>
                     </a:ext>
                   </a:extLst>
                 </a:gridCol>
-                <a:gridCol w="794148">
+                <a:gridCol w="711200">
                   <a:extLst>
                     <a:ext uri="{9D8B030D-6E8A-4147-A177-3AD203B41FA5}">
                       <a16:colId xmlns:a16="http://schemas.microsoft.com/office/drawing/2014/main" val="122733606"/>
                     </a:ext>
                   </a:extLst>
                 </a:gridCol>
-                <a:gridCol w="1514039">
+                <a:gridCol w="2344615">
                   <a:extLst>
                     <a:ext uri="{9D8B030D-6E8A-4147-A177-3AD203B41FA5}">
                       <a16:colId xmlns:a16="http://schemas.microsoft.com/office/drawing/2014/main" val="4218300197"/>
@@ -10343,7 +10343,17 @@
                       </a:endParaRPr>
                     </a:p>
                   </a:txBody>
-                  <a:tcPr marL="5396" marR="5396" marT="5396" marB="0" anchor="b"/>
+                  <a:tcPr anchor="ctr">
+                    <a:lnB w="12700" cap="flat" cmpd="sng" algn="ctr">
+                      <a:solidFill>
+                        <a:schemeClr val="tx1"/>
+                      </a:solidFill>
+                      <a:prstDash val="solid"/>
+                      <a:round/>
+                      <a:headEnd type="none" w="med" len="med"/>
+                      <a:tailEnd type="none" w="med" len="med"/>
+                    </a:lnB>
+                  </a:tcPr>
                 </a:tc>
                 <a:tc>
                   <a:txBody>
@@ -10366,7 +10376,17 @@
                       </a:endParaRPr>
                     </a:p>
                   </a:txBody>
-                  <a:tcPr marL="5396" marR="5396" marT="5396" marB="0" anchor="b"/>
+                  <a:tcPr anchor="ctr">
+                    <a:lnB w="12700" cap="flat" cmpd="sng" algn="ctr">
+                      <a:solidFill>
+                        <a:schemeClr val="tx1"/>
+                      </a:solidFill>
+                      <a:prstDash val="solid"/>
+                      <a:round/>
+                      <a:headEnd type="none" w="med" len="med"/>
+                      <a:tailEnd type="none" w="med" len="med"/>
+                    </a:lnB>
+                  </a:tcPr>
                 </a:tc>
                 <a:tc>
                   <a:txBody>
@@ -10389,7 +10409,17 @@
                       </a:endParaRPr>
                     </a:p>
                   </a:txBody>
-                  <a:tcPr marL="5396" marR="5396" marT="5396" marB="0" anchor="b"/>
+                  <a:tcPr anchor="ctr">
+                    <a:lnB w="12700" cap="flat" cmpd="sng" algn="ctr">
+                      <a:solidFill>
+                        <a:schemeClr val="tx1"/>
+                      </a:solidFill>
+                      <a:prstDash val="solid"/>
+                      <a:round/>
+                      <a:headEnd type="none" w="med" len="med"/>
+                      <a:tailEnd type="none" w="med" len="med"/>
+                    </a:lnB>
+                  </a:tcPr>
                 </a:tc>
                 <a:extLst>
                   <a:ext uri="{0D108BD9-81ED-4DB2-BD59-A6C34878D82A}">
@@ -10403,7 +10433,7 @@
                     <a:bodyPr/>
                     <a:lstStyle/>
                     <a:p>
-                      <a:pPr algn="ctr" fontAlgn="b"/>
+                      <a:pPr algn="l" fontAlgn="b"/>
                       <a:r>
                         <a:rPr lang="en-US" sz="1200" u="none" strike="noStrike" dirty="0">
                           <a:effectLst/>
@@ -10419,14 +10449,59 @@
                       </a:endParaRPr>
                     </a:p>
                   </a:txBody>
-                  <a:tcPr marL="5396" marR="5396" marT="5396" marB="0" anchor="b"/>
+                  <a:tcPr anchor="ctr">
+                    <a:lnL w="12700" cap="flat" cmpd="sng" algn="ctr">
+                      <a:solidFill>
+                        <a:schemeClr val="tx1"/>
+                      </a:solidFill>
+                      <a:prstDash val="solid"/>
+                      <a:round/>
+                      <a:headEnd type="none" w="med" len="med"/>
+                      <a:tailEnd type="none" w="med" len="med"/>
+                    </a:lnL>
+                    <a:lnR w="12700" cap="flat" cmpd="sng" algn="ctr">
+                      <a:solidFill>
+                        <a:schemeClr val="tx1"/>
+                      </a:solidFill>
+                      <a:prstDash val="solid"/>
+                      <a:round/>
+                      <a:headEnd type="none" w="med" len="med"/>
+                      <a:tailEnd type="none" w="med" len="med"/>
+                    </a:lnR>
+                    <a:lnT w="12700" cap="flat" cmpd="sng" algn="ctr">
+                      <a:solidFill>
+                        <a:schemeClr val="tx1"/>
+                      </a:solidFill>
+                      <a:prstDash val="solid"/>
+                      <a:round/>
+                      <a:headEnd type="none" w="med" len="med"/>
+                      <a:tailEnd type="none" w="med" len="med"/>
+                    </a:lnT>
+                    <a:lnB w="12700" cap="flat" cmpd="sng" algn="ctr">
+                      <a:solidFill>
+                        <a:schemeClr val="tx1"/>
+                      </a:solidFill>
+                      <a:prstDash val="solid"/>
+                      <a:round/>
+                      <a:headEnd type="none" w="med" len="med"/>
+                      <a:tailEnd type="none" w="med" len="med"/>
+                    </a:lnB>
+                    <a:lnTlToBr w="12700" cmpd="sng">
+                      <a:noFill/>
+                      <a:prstDash val="solid"/>
+                    </a:lnTlToBr>
+                    <a:lnBlToTr w="12700" cmpd="sng">
+                      <a:noFill/>
+                      <a:prstDash val="solid"/>
+                    </a:lnBlToTr>
+                  </a:tcPr>
                 </a:tc>
                 <a:tc>
                   <a:txBody>
                     <a:bodyPr/>
                     <a:lstStyle/>
                     <a:p>
-                      <a:pPr algn="ctr" fontAlgn="b"/>
+                      <a:pPr algn="l" fontAlgn="b"/>
                       <a:r>
                         <a:rPr lang="en-US" sz="1200" u="none" strike="noStrike">
                           <a:effectLst/>
@@ -10442,14 +10517,59 @@
                       </a:endParaRPr>
                     </a:p>
                   </a:txBody>
-                  <a:tcPr marL="5396" marR="5396" marT="5396" marB="0" anchor="b"/>
+                  <a:tcPr anchor="ctr">
+                    <a:lnL w="12700" cap="flat" cmpd="sng" algn="ctr">
+                      <a:solidFill>
+                        <a:schemeClr val="tx1"/>
+                      </a:solidFill>
+                      <a:prstDash val="solid"/>
+                      <a:round/>
+                      <a:headEnd type="none" w="med" len="med"/>
+                      <a:tailEnd type="none" w="med" len="med"/>
+                    </a:lnL>
+                    <a:lnR w="12700" cap="flat" cmpd="sng" algn="ctr">
+                      <a:solidFill>
+                        <a:schemeClr val="tx1"/>
+                      </a:solidFill>
+                      <a:prstDash val="solid"/>
+                      <a:round/>
+                      <a:headEnd type="none" w="med" len="med"/>
+                      <a:tailEnd type="none" w="med" len="med"/>
+                    </a:lnR>
+                    <a:lnT w="12700" cap="flat" cmpd="sng" algn="ctr">
+                      <a:solidFill>
+                        <a:schemeClr val="tx1"/>
+                      </a:solidFill>
+                      <a:prstDash val="solid"/>
+                      <a:round/>
+                      <a:headEnd type="none" w="med" len="med"/>
+                      <a:tailEnd type="none" w="med" len="med"/>
+                    </a:lnT>
+                    <a:lnB w="12700" cap="flat" cmpd="sng" algn="ctr">
+                      <a:solidFill>
+                        <a:schemeClr val="tx1"/>
+                      </a:solidFill>
+                      <a:prstDash val="solid"/>
+                      <a:round/>
+                      <a:headEnd type="none" w="med" len="med"/>
+                      <a:tailEnd type="none" w="med" len="med"/>
+                    </a:lnB>
+                    <a:lnTlToBr w="12700" cmpd="sng">
+                      <a:noFill/>
+                      <a:prstDash val="solid"/>
+                    </a:lnTlToBr>
+                    <a:lnBlToTr w="12700" cmpd="sng">
+                      <a:noFill/>
+                      <a:prstDash val="solid"/>
+                    </a:lnBlToTr>
+                  </a:tcPr>
                 </a:tc>
                 <a:tc>
                   <a:txBody>
                     <a:bodyPr/>
                     <a:lstStyle/>
                     <a:p>
-                      <a:pPr algn="ctr" fontAlgn="b"/>
+                      <a:pPr algn="l" fontAlgn="b"/>
                       <a:r>
                         <a:rPr lang="ru-RU" sz="1200" u="none" strike="noStrike">
                           <a:effectLst/>
@@ -10465,7 +10585,52 @@
                       </a:endParaRPr>
                     </a:p>
                   </a:txBody>
-                  <a:tcPr marL="5396" marR="5396" marT="5396" marB="0" anchor="b"/>
+                  <a:tcPr anchor="ctr">
+                    <a:lnL w="12700" cap="flat" cmpd="sng" algn="ctr">
+                      <a:solidFill>
+                        <a:schemeClr val="tx1"/>
+                      </a:solidFill>
+                      <a:prstDash val="solid"/>
+                      <a:round/>
+                      <a:headEnd type="none" w="med" len="med"/>
+                      <a:tailEnd type="none" w="med" len="med"/>
+                    </a:lnL>
+                    <a:lnR w="12700" cap="flat" cmpd="sng" algn="ctr">
+                      <a:solidFill>
+                        <a:schemeClr val="tx1"/>
+                      </a:solidFill>
+                      <a:prstDash val="solid"/>
+                      <a:round/>
+                      <a:headEnd type="none" w="med" len="med"/>
+                      <a:tailEnd type="none" w="med" len="med"/>
+                    </a:lnR>
+                    <a:lnT w="12700" cap="flat" cmpd="sng" algn="ctr">
+                      <a:solidFill>
+                        <a:schemeClr val="tx1"/>
+                      </a:solidFill>
+                      <a:prstDash val="solid"/>
+                      <a:round/>
+                      <a:headEnd type="none" w="med" len="med"/>
+                      <a:tailEnd type="none" w="med" len="med"/>
+                    </a:lnT>
+                    <a:lnB w="12700" cap="flat" cmpd="sng" algn="ctr">
+                      <a:solidFill>
+                        <a:schemeClr val="tx1"/>
+                      </a:solidFill>
+                      <a:prstDash val="solid"/>
+                      <a:round/>
+                      <a:headEnd type="none" w="med" len="med"/>
+                      <a:tailEnd type="none" w="med" len="med"/>
+                    </a:lnB>
+                    <a:lnTlToBr w="12700" cmpd="sng">
+                      <a:noFill/>
+                      <a:prstDash val="solid"/>
+                    </a:lnTlToBr>
+                    <a:lnBlToTr w="12700" cmpd="sng">
+                      <a:noFill/>
+                      <a:prstDash val="solid"/>
+                    </a:lnBlToTr>
+                  </a:tcPr>
                 </a:tc>
                 <a:extLst>
                   <a:ext uri="{0D108BD9-81ED-4DB2-BD59-A6C34878D82A}">
@@ -10479,7 +10644,7 @@
                     <a:bodyPr/>
                     <a:lstStyle/>
                     <a:p>
-                      <a:pPr algn="ctr" fontAlgn="b"/>
+                      <a:pPr algn="l" fontAlgn="b"/>
                       <a:r>
                         <a:rPr lang="en-US" sz="1200" u="none" strike="noStrike">
                           <a:effectLst/>
@@ -10495,21 +10660,66 @@
                       </a:endParaRPr>
                     </a:p>
                   </a:txBody>
-                  <a:tcPr marL="5396" marR="5396" marT="5396" marB="0" anchor="b"/>
+                  <a:tcPr anchor="ctr">
+                    <a:lnL w="12700" cap="flat" cmpd="sng" algn="ctr">
+                      <a:solidFill>
+                        <a:schemeClr val="tx1"/>
+                      </a:solidFill>
+                      <a:prstDash val="solid"/>
+                      <a:round/>
+                      <a:headEnd type="none" w="med" len="med"/>
+                      <a:tailEnd type="none" w="med" len="med"/>
+                    </a:lnL>
+                    <a:lnR w="12700" cap="flat" cmpd="sng" algn="ctr">
+                      <a:solidFill>
+                        <a:schemeClr val="tx1"/>
+                      </a:solidFill>
+                      <a:prstDash val="solid"/>
+                      <a:round/>
+                      <a:headEnd type="none" w="med" len="med"/>
+                      <a:tailEnd type="none" w="med" len="med"/>
+                    </a:lnR>
+                    <a:lnT w="12700" cap="flat" cmpd="sng" algn="ctr">
+                      <a:solidFill>
+                        <a:schemeClr val="tx1"/>
+                      </a:solidFill>
+                      <a:prstDash val="solid"/>
+                      <a:round/>
+                      <a:headEnd type="none" w="med" len="med"/>
+                      <a:tailEnd type="none" w="med" len="med"/>
+                    </a:lnT>
+                    <a:lnB w="12700" cap="flat" cmpd="sng" algn="ctr">
+                      <a:solidFill>
+                        <a:schemeClr val="tx1"/>
+                      </a:solidFill>
+                      <a:prstDash val="solid"/>
+                      <a:round/>
+                      <a:headEnd type="none" w="med" len="med"/>
+                      <a:tailEnd type="none" w="med" len="med"/>
+                    </a:lnB>
+                    <a:lnTlToBr w="12700" cmpd="sng">
+                      <a:noFill/>
+                      <a:prstDash val="solid"/>
+                    </a:lnTlToBr>
+                    <a:lnBlToTr w="12700" cmpd="sng">
+                      <a:noFill/>
+                      <a:prstDash val="solid"/>
+                    </a:lnBlToTr>
+                  </a:tcPr>
                 </a:tc>
                 <a:tc>
                   <a:txBody>
                     <a:bodyPr/>
                     <a:lstStyle/>
                     <a:p>
-                      <a:pPr algn="ctr" fontAlgn="b"/>
+                      <a:pPr algn="l" fontAlgn="b"/>
                       <a:r>
-                        <a:rPr lang="en-US" sz="1200" u="none" strike="noStrike">
+                        <a:rPr lang="en-US" sz="1200" u="none" strike="noStrike" dirty="0">
                           <a:effectLst/>
                         </a:rPr>
                         <a:t>Set</a:t>
                       </a:r>
-                      <a:endParaRPr lang="en-US" sz="1200" b="0" i="0" u="none" strike="noStrike">
+                      <a:endParaRPr lang="en-US" sz="1200" b="0" i="0" u="none" strike="noStrike" dirty="0">
                         <a:solidFill>
                           <a:srgbClr val="000000"/>
                         </a:solidFill>
@@ -10518,14 +10728,59 @@
                       </a:endParaRPr>
                     </a:p>
                   </a:txBody>
-                  <a:tcPr marL="5396" marR="5396" marT="5396" marB="0" anchor="b"/>
+                  <a:tcPr anchor="ctr">
+                    <a:lnL w="12700" cap="flat" cmpd="sng" algn="ctr">
+                      <a:solidFill>
+                        <a:schemeClr val="tx1"/>
+                      </a:solidFill>
+                      <a:prstDash val="solid"/>
+                      <a:round/>
+                      <a:headEnd type="none" w="med" len="med"/>
+                      <a:tailEnd type="none" w="med" len="med"/>
+                    </a:lnL>
+                    <a:lnR w="12700" cap="flat" cmpd="sng" algn="ctr">
+                      <a:solidFill>
+                        <a:schemeClr val="tx1"/>
+                      </a:solidFill>
+                      <a:prstDash val="solid"/>
+                      <a:round/>
+                      <a:headEnd type="none" w="med" len="med"/>
+                      <a:tailEnd type="none" w="med" len="med"/>
+                    </a:lnR>
+                    <a:lnT w="12700" cap="flat" cmpd="sng" algn="ctr">
+                      <a:solidFill>
+                        <a:schemeClr val="tx1"/>
+                      </a:solidFill>
+                      <a:prstDash val="solid"/>
+                      <a:round/>
+                      <a:headEnd type="none" w="med" len="med"/>
+                      <a:tailEnd type="none" w="med" len="med"/>
+                    </a:lnT>
+                    <a:lnB w="12700" cap="flat" cmpd="sng" algn="ctr">
+                      <a:solidFill>
+                        <a:schemeClr val="tx1"/>
+                      </a:solidFill>
+                      <a:prstDash val="solid"/>
+                      <a:round/>
+                      <a:headEnd type="none" w="med" len="med"/>
+                      <a:tailEnd type="none" w="med" len="med"/>
+                    </a:lnB>
+                    <a:lnTlToBr w="12700" cmpd="sng">
+                      <a:noFill/>
+                      <a:prstDash val="solid"/>
+                    </a:lnTlToBr>
+                    <a:lnBlToTr w="12700" cmpd="sng">
+                      <a:noFill/>
+                      <a:prstDash val="solid"/>
+                    </a:lnBlToTr>
+                  </a:tcPr>
                 </a:tc>
                 <a:tc>
                   <a:txBody>
                     <a:bodyPr/>
                     <a:lstStyle/>
                     <a:p>
-                      <a:pPr algn="ctr" fontAlgn="b"/>
+                      <a:pPr algn="l" fontAlgn="b"/>
                       <a:r>
                         <a:rPr lang="ru-RU" sz="1200" u="none" strike="noStrike">
                           <a:effectLst/>
@@ -10541,7 +10796,52 @@
                       </a:endParaRPr>
                     </a:p>
                   </a:txBody>
-                  <a:tcPr marL="5396" marR="5396" marT="5396" marB="0" anchor="b"/>
+                  <a:tcPr anchor="ctr">
+                    <a:lnL w="12700" cap="flat" cmpd="sng" algn="ctr">
+                      <a:solidFill>
+                        <a:schemeClr val="tx1"/>
+                      </a:solidFill>
+                      <a:prstDash val="solid"/>
+                      <a:round/>
+                      <a:headEnd type="none" w="med" len="med"/>
+                      <a:tailEnd type="none" w="med" len="med"/>
+                    </a:lnL>
+                    <a:lnR w="12700" cap="flat" cmpd="sng" algn="ctr">
+                      <a:solidFill>
+                        <a:schemeClr val="tx1"/>
+                      </a:solidFill>
+                      <a:prstDash val="solid"/>
+                      <a:round/>
+                      <a:headEnd type="none" w="med" len="med"/>
+                      <a:tailEnd type="none" w="med" len="med"/>
+                    </a:lnR>
+                    <a:lnT w="12700" cap="flat" cmpd="sng" algn="ctr">
+                      <a:solidFill>
+                        <a:schemeClr val="tx1"/>
+                      </a:solidFill>
+                      <a:prstDash val="solid"/>
+                      <a:round/>
+                      <a:headEnd type="none" w="med" len="med"/>
+                      <a:tailEnd type="none" w="med" len="med"/>
+                    </a:lnT>
+                    <a:lnB w="12700" cap="flat" cmpd="sng" algn="ctr">
+                      <a:solidFill>
+                        <a:schemeClr val="tx1"/>
+                      </a:solidFill>
+                      <a:prstDash val="solid"/>
+                      <a:round/>
+                      <a:headEnd type="none" w="med" len="med"/>
+                      <a:tailEnd type="none" w="med" len="med"/>
+                    </a:lnB>
+                    <a:lnTlToBr w="12700" cmpd="sng">
+                      <a:noFill/>
+                      <a:prstDash val="solid"/>
+                    </a:lnTlToBr>
+                    <a:lnBlToTr w="12700" cmpd="sng">
+                      <a:noFill/>
+                      <a:prstDash val="solid"/>
+                    </a:lnBlToTr>
+                  </a:tcPr>
                 </a:tc>
                 <a:extLst>
                   <a:ext uri="{0D108BD9-81ED-4DB2-BD59-A6C34878D82A}">
@@ -10555,7 +10855,7 @@
                     <a:bodyPr/>
                     <a:lstStyle/>
                     <a:p>
-                      <a:pPr algn="ctr" fontAlgn="b"/>
+                      <a:pPr algn="l" fontAlgn="b"/>
                       <a:r>
                         <a:rPr lang="en-US" sz="1200" u="none" strike="noStrike">
                           <a:effectLst/>
@@ -10571,14 +10871,59 @@
                       </a:endParaRPr>
                     </a:p>
                   </a:txBody>
-                  <a:tcPr marL="5396" marR="5396" marT="5396" marB="0" anchor="b"/>
+                  <a:tcPr anchor="ctr">
+                    <a:lnL w="12700" cap="flat" cmpd="sng" algn="ctr">
+                      <a:solidFill>
+                        <a:schemeClr val="tx1"/>
+                      </a:solidFill>
+                      <a:prstDash val="solid"/>
+                      <a:round/>
+                      <a:headEnd type="none" w="med" len="med"/>
+                      <a:tailEnd type="none" w="med" len="med"/>
+                    </a:lnL>
+                    <a:lnR w="12700" cap="flat" cmpd="sng" algn="ctr">
+                      <a:solidFill>
+                        <a:schemeClr val="tx1"/>
+                      </a:solidFill>
+                      <a:prstDash val="solid"/>
+                      <a:round/>
+                      <a:headEnd type="none" w="med" len="med"/>
+                      <a:tailEnd type="none" w="med" len="med"/>
+                    </a:lnR>
+                    <a:lnT w="12700" cap="flat" cmpd="sng" algn="ctr">
+                      <a:solidFill>
+                        <a:schemeClr val="tx1"/>
+                      </a:solidFill>
+                      <a:prstDash val="solid"/>
+                      <a:round/>
+                      <a:headEnd type="none" w="med" len="med"/>
+                      <a:tailEnd type="none" w="med" len="med"/>
+                    </a:lnT>
+                    <a:lnB w="12700" cap="flat" cmpd="sng" algn="ctr">
+                      <a:solidFill>
+                        <a:schemeClr val="tx1"/>
+                      </a:solidFill>
+                      <a:prstDash val="solid"/>
+                      <a:round/>
+                      <a:headEnd type="none" w="med" len="med"/>
+                      <a:tailEnd type="none" w="med" len="med"/>
+                    </a:lnB>
+                    <a:lnTlToBr w="12700" cmpd="sng">
+                      <a:noFill/>
+                      <a:prstDash val="solid"/>
+                    </a:lnTlToBr>
+                    <a:lnBlToTr w="12700" cmpd="sng">
+                      <a:noFill/>
+                      <a:prstDash val="solid"/>
+                    </a:lnBlToTr>
+                  </a:tcPr>
                 </a:tc>
                 <a:tc>
                   <a:txBody>
                     <a:bodyPr/>
                     <a:lstStyle/>
                     <a:p>
-                      <a:pPr algn="ctr" fontAlgn="b"/>
+                      <a:pPr algn="l" fontAlgn="b"/>
                       <a:r>
                         <a:rPr lang="en-US" sz="1200" u="none" strike="noStrike" dirty="0">
                           <a:effectLst/>
@@ -10594,14 +10939,59 @@
                       </a:endParaRPr>
                     </a:p>
                   </a:txBody>
-                  <a:tcPr marL="5396" marR="5396" marT="5396" marB="0" anchor="b"/>
+                  <a:tcPr anchor="ctr">
+                    <a:lnL w="12700" cap="flat" cmpd="sng" algn="ctr">
+                      <a:solidFill>
+                        <a:schemeClr val="tx1"/>
+                      </a:solidFill>
+                      <a:prstDash val="solid"/>
+                      <a:round/>
+                      <a:headEnd type="none" w="med" len="med"/>
+                      <a:tailEnd type="none" w="med" len="med"/>
+                    </a:lnL>
+                    <a:lnR w="12700" cap="flat" cmpd="sng" algn="ctr">
+                      <a:solidFill>
+                        <a:schemeClr val="tx1"/>
+                      </a:solidFill>
+                      <a:prstDash val="solid"/>
+                      <a:round/>
+                      <a:headEnd type="none" w="med" len="med"/>
+                      <a:tailEnd type="none" w="med" len="med"/>
+                    </a:lnR>
+                    <a:lnT w="12700" cap="flat" cmpd="sng" algn="ctr">
+                      <a:solidFill>
+                        <a:schemeClr val="tx1"/>
+                      </a:solidFill>
+                      <a:prstDash val="solid"/>
+                      <a:round/>
+                      <a:headEnd type="none" w="med" len="med"/>
+                      <a:tailEnd type="none" w="med" len="med"/>
+                    </a:lnT>
+                    <a:lnB w="12700" cap="flat" cmpd="sng" algn="ctr">
+                      <a:solidFill>
+                        <a:schemeClr val="tx1"/>
+                      </a:solidFill>
+                      <a:prstDash val="solid"/>
+                      <a:round/>
+                      <a:headEnd type="none" w="med" len="med"/>
+                      <a:tailEnd type="none" w="med" len="med"/>
+                    </a:lnB>
+                    <a:lnTlToBr w="12700" cmpd="sng">
+                      <a:noFill/>
+                      <a:prstDash val="solid"/>
+                    </a:lnTlToBr>
+                    <a:lnBlToTr w="12700" cmpd="sng">
+                      <a:noFill/>
+                      <a:prstDash val="solid"/>
+                    </a:lnBlToTr>
+                  </a:tcPr>
                 </a:tc>
                 <a:tc>
                   <a:txBody>
                     <a:bodyPr/>
                     <a:lstStyle/>
                     <a:p>
-                      <a:pPr algn="ctr" fontAlgn="b"/>
+                      <a:pPr algn="l" fontAlgn="b"/>
                       <a:r>
                         <a:rPr lang="ru-RU" sz="1200" u="none" strike="noStrike">
                           <a:effectLst/>
@@ -10617,7 +11007,52 @@
                       </a:endParaRPr>
                     </a:p>
                   </a:txBody>
-                  <a:tcPr marL="5396" marR="5396" marT="5396" marB="0" anchor="b"/>
+                  <a:tcPr anchor="ctr">
+                    <a:lnL w="12700" cap="flat" cmpd="sng" algn="ctr">
+                      <a:solidFill>
+                        <a:schemeClr val="tx1"/>
+                      </a:solidFill>
+                      <a:prstDash val="solid"/>
+                      <a:round/>
+                      <a:headEnd type="none" w="med" len="med"/>
+                      <a:tailEnd type="none" w="med" len="med"/>
+                    </a:lnL>
+                    <a:lnR w="12700" cap="flat" cmpd="sng" algn="ctr">
+                      <a:solidFill>
+                        <a:schemeClr val="tx1"/>
+                      </a:solidFill>
+                      <a:prstDash val="solid"/>
+                      <a:round/>
+                      <a:headEnd type="none" w="med" len="med"/>
+                      <a:tailEnd type="none" w="med" len="med"/>
+                    </a:lnR>
+                    <a:lnT w="12700" cap="flat" cmpd="sng" algn="ctr">
+                      <a:solidFill>
+                        <a:schemeClr val="tx1"/>
+                      </a:solidFill>
+                      <a:prstDash val="solid"/>
+                      <a:round/>
+                      <a:headEnd type="none" w="med" len="med"/>
+                      <a:tailEnd type="none" w="med" len="med"/>
+                    </a:lnT>
+                    <a:lnB w="12700" cap="flat" cmpd="sng" algn="ctr">
+                      <a:solidFill>
+                        <a:schemeClr val="tx1"/>
+                      </a:solidFill>
+                      <a:prstDash val="solid"/>
+                      <a:round/>
+                      <a:headEnd type="none" w="med" len="med"/>
+                      <a:tailEnd type="none" w="med" len="med"/>
+                    </a:lnB>
+                    <a:lnTlToBr w="12700" cmpd="sng">
+                      <a:noFill/>
+                      <a:prstDash val="solid"/>
+                    </a:lnTlToBr>
+                    <a:lnBlToTr w="12700" cmpd="sng">
+                      <a:noFill/>
+                      <a:prstDash val="solid"/>
+                    </a:lnBlToTr>
+                  </a:tcPr>
                 </a:tc>
                 <a:extLst>
                   <a:ext uri="{0D108BD9-81ED-4DB2-BD59-A6C34878D82A}">
@@ -10631,7 +11066,7 @@
                     <a:bodyPr/>
                     <a:lstStyle/>
                     <a:p>
-                      <a:pPr algn="ctr" fontAlgn="b"/>
+                      <a:pPr algn="l" fontAlgn="b"/>
                       <a:r>
                         <a:rPr lang="en-US" sz="1200" u="none" strike="noStrike">
                           <a:effectLst/>
@@ -10647,14 +11082,59 @@
                       </a:endParaRPr>
                     </a:p>
                   </a:txBody>
-                  <a:tcPr marL="5396" marR="5396" marT="5396" marB="0" anchor="b"/>
+                  <a:tcPr anchor="ctr">
+                    <a:lnL w="12700" cap="flat" cmpd="sng" algn="ctr">
+                      <a:solidFill>
+                        <a:schemeClr val="tx1"/>
+                      </a:solidFill>
+                      <a:prstDash val="solid"/>
+                      <a:round/>
+                      <a:headEnd type="none" w="med" len="med"/>
+                      <a:tailEnd type="none" w="med" len="med"/>
+                    </a:lnL>
+                    <a:lnR w="12700" cap="flat" cmpd="sng" algn="ctr">
+                      <a:solidFill>
+                        <a:schemeClr val="tx1"/>
+                      </a:solidFill>
+                      <a:prstDash val="solid"/>
+                      <a:round/>
+                      <a:headEnd type="none" w="med" len="med"/>
+                      <a:tailEnd type="none" w="med" len="med"/>
+                    </a:lnR>
+                    <a:lnT w="12700" cap="flat" cmpd="sng" algn="ctr">
+                      <a:solidFill>
+                        <a:schemeClr val="tx1"/>
+                      </a:solidFill>
+                      <a:prstDash val="solid"/>
+                      <a:round/>
+                      <a:headEnd type="none" w="med" len="med"/>
+                      <a:tailEnd type="none" w="med" len="med"/>
+                    </a:lnT>
+                    <a:lnB w="12700" cap="flat" cmpd="sng" algn="ctr">
+                      <a:solidFill>
+                        <a:schemeClr val="tx1"/>
+                      </a:solidFill>
+                      <a:prstDash val="solid"/>
+                      <a:round/>
+                      <a:headEnd type="none" w="med" len="med"/>
+                      <a:tailEnd type="none" w="med" len="med"/>
+                    </a:lnB>
+                    <a:lnTlToBr w="12700" cmpd="sng">
+                      <a:noFill/>
+                      <a:prstDash val="solid"/>
+                    </a:lnTlToBr>
+                    <a:lnBlToTr w="12700" cmpd="sng">
+                      <a:noFill/>
+                      <a:prstDash val="solid"/>
+                    </a:lnBlToTr>
+                  </a:tcPr>
                 </a:tc>
                 <a:tc>
                   <a:txBody>
                     <a:bodyPr/>
                     <a:lstStyle/>
                     <a:p>
-                      <a:pPr algn="ctr" fontAlgn="b"/>
+                      <a:pPr algn="l" fontAlgn="b"/>
                       <a:r>
                         <a:rPr lang="en-US" sz="1200" u="none" strike="noStrike" dirty="0">
                           <a:effectLst/>
@@ -10670,14 +11150,59 @@
                       </a:endParaRPr>
                     </a:p>
                   </a:txBody>
-                  <a:tcPr marL="5396" marR="5396" marT="5396" marB="0" anchor="b"/>
+                  <a:tcPr anchor="ctr">
+                    <a:lnL w="12700" cap="flat" cmpd="sng" algn="ctr">
+                      <a:solidFill>
+                        <a:schemeClr val="tx1"/>
+                      </a:solidFill>
+                      <a:prstDash val="solid"/>
+                      <a:round/>
+                      <a:headEnd type="none" w="med" len="med"/>
+                      <a:tailEnd type="none" w="med" len="med"/>
+                    </a:lnL>
+                    <a:lnR w="12700" cap="flat" cmpd="sng" algn="ctr">
+                      <a:solidFill>
+                        <a:schemeClr val="tx1"/>
+                      </a:solidFill>
+                      <a:prstDash val="solid"/>
+                      <a:round/>
+                      <a:headEnd type="none" w="med" len="med"/>
+                      <a:tailEnd type="none" w="med" len="med"/>
+                    </a:lnR>
+                    <a:lnT w="12700" cap="flat" cmpd="sng" algn="ctr">
+                      <a:solidFill>
+                        <a:schemeClr val="tx1"/>
+                      </a:solidFill>
+                      <a:prstDash val="solid"/>
+                      <a:round/>
+                      <a:headEnd type="none" w="med" len="med"/>
+                      <a:tailEnd type="none" w="med" len="med"/>
+                    </a:lnT>
+                    <a:lnB w="12700" cap="flat" cmpd="sng" algn="ctr">
+                      <a:solidFill>
+                        <a:schemeClr val="tx1"/>
+                      </a:solidFill>
+                      <a:prstDash val="solid"/>
+                      <a:round/>
+                      <a:headEnd type="none" w="med" len="med"/>
+                      <a:tailEnd type="none" w="med" len="med"/>
+                    </a:lnB>
+                    <a:lnTlToBr w="12700" cmpd="sng">
+                      <a:noFill/>
+                      <a:prstDash val="solid"/>
+                    </a:lnTlToBr>
+                    <a:lnBlToTr w="12700" cmpd="sng">
+                      <a:noFill/>
+                      <a:prstDash val="solid"/>
+                    </a:lnBlToTr>
+                  </a:tcPr>
                 </a:tc>
                 <a:tc>
                   <a:txBody>
                     <a:bodyPr/>
                     <a:lstStyle/>
                     <a:p>
-                      <a:pPr algn="ctr" fontAlgn="b"/>
+                      <a:pPr algn="l" fontAlgn="b"/>
                       <a:r>
                         <a:rPr lang="ru-RU" sz="1200" u="none" strike="noStrike" dirty="0">
                           <a:effectLst/>
@@ -10705,7 +11230,52 @@
                       </a:endParaRPr>
                     </a:p>
                   </a:txBody>
-                  <a:tcPr marL="5396" marR="5396" marT="5396" marB="0" anchor="b"/>
+                  <a:tcPr anchor="ctr">
+                    <a:lnL w="12700" cap="flat" cmpd="sng" algn="ctr">
+                      <a:solidFill>
+                        <a:schemeClr val="tx1"/>
+                      </a:solidFill>
+                      <a:prstDash val="solid"/>
+                      <a:round/>
+                      <a:headEnd type="none" w="med" len="med"/>
+                      <a:tailEnd type="none" w="med" len="med"/>
+                    </a:lnL>
+                    <a:lnR w="12700" cap="flat" cmpd="sng" algn="ctr">
+                      <a:solidFill>
+                        <a:schemeClr val="tx1"/>
+                      </a:solidFill>
+                      <a:prstDash val="solid"/>
+                      <a:round/>
+                      <a:headEnd type="none" w="med" len="med"/>
+                      <a:tailEnd type="none" w="med" len="med"/>
+                    </a:lnR>
+                    <a:lnT w="12700" cap="flat" cmpd="sng" algn="ctr">
+                      <a:solidFill>
+                        <a:schemeClr val="tx1"/>
+                      </a:solidFill>
+                      <a:prstDash val="solid"/>
+                      <a:round/>
+                      <a:headEnd type="none" w="med" len="med"/>
+                      <a:tailEnd type="none" w="med" len="med"/>
+                    </a:lnT>
+                    <a:lnB w="12700" cap="flat" cmpd="sng" algn="ctr">
+                      <a:solidFill>
+                        <a:schemeClr val="tx1"/>
+                      </a:solidFill>
+                      <a:prstDash val="solid"/>
+                      <a:round/>
+                      <a:headEnd type="none" w="med" len="med"/>
+                      <a:tailEnd type="none" w="med" len="med"/>
+                    </a:lnB>
+                    <a:lnTlToBr w="12700" cmpd="sng">
+                      <a:noFill/>
+                      <a:prstDash val="solid"/>
+                    </a:lnTlToBr>
+                    <a:lnBlToTr w="12700" cmpd="sng">
+                      <a:noFill/>
+                      <a:prstDash val="solid"/>
+                    </a:lnBlToTr>
+                  </a:tcPr>
                 </a:tc>
                 <a:extLst>
                   <a:ext uri="{0D108BD9-81ED-4DB2-BD59-A6C34878D82A}">
@@ -10719,7 +11289,7 @@
                     <a:bodyPr/>
                     <a:lstStyle/>
                     <a:p>
-                      <a:pPr algn="ctr" fontAlgn="b"/>
+                      <a:pPr algn="l" fontAlgn="b"/>
                       <a:r>
                         <a:rPr lang="en-US" sz="1200" u="none" strike="noStrike">
                           <a:effectLst/>
@@ -10735,14 +11305,59 @@
                       </a:endParaRPr>
                     </a:p>
                   </a:txBody>
-                  <a:tcPr marL="5396" marR="5396" marT="5396" marB="0" anchor="b"/>
+                  <a:tcPr anchor="ctr">
+                    <a:lnL w="12700" cap="flat" cmpd="sng" algn="ctr">
+                      <a:solidFill>
+                        <a:schemeClr val="tx1"/>
+                      </a:solidFill>
+                      <a:prstDash val="solid"/>
+                      <a:round/>
+                      <a:headEnd type="none" w="med" len="med"/>
+                      <a:tailEnd type="none" w="med" len="med"/>
+                    </a:lnL>
+                    <a:lnR w="12700" cap="flat" cmpd="sng" algn="ctr">
+                      <a:solidFill>
+                        <a:schemeClr val="tx1"/>
+                      </a:solidFill>
+                      <a:prstDash val="solid"/>
+                      <a:round/>
+                      <a:headEnd type="none" w="med" len="med"/>
+                      <a:tailEnd type="none" w="med" len="med"/>
+                    </a:lnR>
+                    <a:lnT w="12700" cap="flat" cmpd="sng" algn="ctr">
+                      <a:solidFill>
+                        <a:schemeClr val="tx1"/>
+                      </a:solidFill>
+                      <a:prstDash val="solid"/>
+                      <a:round/>
+                      <a:headEnd type="none" w="med" len="med"/>
+                      <a:tailEnd type="none" w="med" len="med"/>
+                    </a:lnT>
+                    <a:lnB w="12700" cap="flat" cmpd="sng" algn="ctr">
+                      <a:solidFill>
+                        <a:schemeClr val="tx1"/>
+                      </a:solidFill>
+                      <a:prstDash val="solid"/>
+                      <a:round/>
+                      <a:headEnd type="none" w="med" len="med"/>
+                      <a:tailEnd type="none" w="med" len="med"/>
+                    </a:lnB>
+                    <a:lnTlToBr w="12700" cmpd="sng">
+                      <a:noFill/>
+                      <a:prstDash val="solid"/>
+                    </a:lnTlToBr>
+                    <a:lnBlToTr w="12700" cmpd="sng">
+                      <a:noFill/>
+                      <a:prstDash val="solid"/>
+                    </a:lnBlToTr>
+                  </a:tcPr>
                 </a:tc>
                 <a:tc>
                   <a:txBody>
                     <a:bodyPr/>
                     <a:lstStyle/>
                     <a:p>
-                      <a:pPr algn="ctr" fontAlgn="b"/>
+                      <a:pPr algn="l" fontAlgn="b"/>
                       <a:r>
                         <a:rPr lang="en-US" sz="1200" u="none" strike="noStrike">
                           <a:effectLst/>
@@ -10758,27 +11373,72 @@
                       </a:endParaRPr>
                     </a:p>
                   </a:txBody>
-                  <a:tcPr marL="5396" marR="5396" marT="5396" marB="0" anchor="b"/>
+                  <a:tcPr anchor="ctr">
+                    <a:lnL w="12700" cap="flat" cmpd="sng" algn="ctr">
+                      <a:solidFill>
+                        <a:schemeClr val="tx1"/>
+                      </a:solidFill>
+                      <a:prstDash val="solid"/>
+                      <a:round/>
+                      <a:headEnd type="none" w="med" len="med"/>
+                      <a:tailEnd type="none" w="med" len="med"/>
+                    </a:lnL>
+                    <a:lnR w="12700" cap="flat" cmpd="sng" algn="ctr">
+                      <a:solidFill>
+                        <a:schemeClr val="tx1"/>
+                      </a:solidFill>
+                      <a:prstDash val="solid"/>
+                      <a:round/>
+                      <a:headEnd type="none" w="med" len="med"/>
+                      <a:tailEnd type="none" w="med" len="med"/>
+                    </a:lnR>
+                    <a:lnT w="12700" cap="flat" cmpd="sng" algn="ctr">
+                      <a:solidFill>
+                        <a:schemeClr val="tx1"/>
+                      </a:solidFill>
+                      <a:prstDash val="solid"/>
+                      <a:round/>
+                      <a:headEnd type="none" w="med" len="med"/>
+                      <a:tailEnd type="none" w="med" len="med"/>
+                    </a:lnT>
+                    <a:lnB w="12700" cap="flat" cmpd="sng" algn="ctr">
+                      <a:solidFill>
+                        <a:schemeClr val="tx1"/>
+                      </a:solidFill>
+                      <a:prstDash val="solid"/>
+                      <a:round/>
+                      <a:headEnd type="none" w="med" len="med"/>
+                      <a:tailEnd type="none" w="med" len="med"/>
+                    </a:lnB>
+                    <a:lnTlToBr w="12700" cmpd="sng">
+                      <a:noFill/>
+                      <a:prstDash val="solid"/>
+                    </a:lnTlToBr>
+                    <a:lnBlToTr w="12700" cmpd="sng">
+                      <a:noFill/>
+                      <a:prstDash val="solid"/>
+                    </a:lnBlToTr>
+                  </a:tcPr>
                 </a:tc>
                 <a:tc>
                   <a:txBody>
                     <a:bodyPr/>
                     <a:lstStyle/>
                     <a:p>
-                      <a:pPr algn="ctr" fontAlgn="b"/>
+                      <a:pPr algn="l" fontAlgn="b"/>
                       <a:r>
-                        <a:rPr lang="ru-RU" sz="1200" u="none" strike="noStrike">
+                        <a:rPr lang="ru-RU" sz="1200" u="none" strike="noStrike" dirty="0">
                           <a:effectLst/>
                         </a:rPr>
                         <a:t>Учётная запись </a:t>
                       </a:r>
                       <a:r>
-                        <a:rPr lang="en-US" sz="1200" u="none" strike="noStrike">
+                        <a:rPr lang="en-US" sz="1200" u="none" strike="noStrike" dirty="0">
                           <a:effectLst/>
                         </a:rPr>
                         <a:t>SSH</a:t>
                       </a:r>
-                      <a:endParaRPr lang="en-US" sz="1200" b="0" i="0" u="none" strike="noStrike">
+                      <a:endParaRPr lang="en-US" sz="1200" b="0" i="0" u="none" strike="noStrike" dirty="0">
                         <a:solidFill>
                           <a:srgbClr val="000000"/>
                         </a:solidFill>
@@ -10787,7 +11447,52 @@
                       </a:endParaRPr>
                     </a:p>
                   </a:txBody>
-                  <a:tcPr marL="5396" marR="5396" marT="5396" marB="0" anchor="b"/>
+                  <a:tcPr anchor="ctr">
+                    <a:lnL w="12700" cap="flat" cmpd="sng" algn="ctr">
+                      <a:solidFill>
+                        <a:schemeClr val="tx1"/>
+                      </a:solidFill>
+                      <a:prstDash val="solid"/>
+                      <a:round/>
+                      <a:headEnd type="none" w="med" len="med"/>
+                      <a:tailEnd type="none" w="med" len="med"/>
+                    </a:lnL>
+                    <a:lnR w="12700" cap="flat" cmpd="sng" algn="ctr">
+                      <a:solidFill>
+                        <a:schemeClr val="tx1"/>
+                      </a:solidFill>
+                      <a:prstDash val="solid"/>
+                      <a:round/>
+                      <a:headEnd type="none" w="med" len="med"/>
+                      <a:tailEnd type="none" w="med" len="med"/>
+                    </a:lnR>
+                    <a:lnT w="12700" cap="flat" cmpd="sng" algn="ctr">
+                      <a:solidFill>
+                        <a:schemeClr val="tx1"/>
+                      </a:solidFill>
+                      <a:prstDash val="solid"/>
+                      <a:round/>
+                      <a:headEnd type="none" w="med" len="med"/>
+                      <a:tailEnd type="none" w="med" len="med"/>
+                    </a:lnT>
+                    <a:lnB w="12700" cap="flat" cmpd="sng" algn="ctr">
+                      <a:solidFill>
+                        <a:schemeClr val="tx1"/>
+                      </a:solidFill>
+                      <a:prstDash val="solid"/>
+                      <a:round/>
+                      <a:headEnd type="none" w="med" len="med"/>
+                      <a:tailEnd type="none" w="med" len="med"/>
+                    </a:lnB>
+                    <a:lnTlToBr w="12700" cmpd="sng">
+                      <a:noFill/>
+                      <a:prstDash val="solid"/>
+                    </a:lnTlToBr>
+                    <a:lnBlToTr w="12700" cmpd="sng">
+                      <a:noFill/>
+                      <a:prstDash val="solid"/>
+                    </a:lnBlToTr>
+                  </a:tcPr>
                 </a:tc>
                 <a:extLst>
                   <a:ext uri="{0D108BD9-81ED-4DB2-BD59-A6C34878D82A}">
@@ -10801,7 +11506,7 @@
                     <a:bodyPr/>
                     <a:lstStyle/>
                     <a:p>
-                      <a:pPr algn="ctr" fontAlgn="b"/>
+                      <a:pPr algn="l" fontAlgn="b"/>
                       <a:r>
                         <a:rPr lang="en-US" sz="1200" u="none" strike="noStrike" dirty="0" err="1">
                           <a:effectLst/>
@@ -10817,21 +11522,66 @@
                       </a:endParaRPr>
                     </a:p>
                   </a:txBody>
-                  <a:tcPr marL="5396" marR="5396" marT="5396" marB="0" anchor="b"/>
+                  <a:tcPr anchor="ctr">
+                    <a:lnL w="12700" cap="flat" cmpd="sng" algn="ctr">
+                      <a:solidFill>
+                        <a:schemeClr val="tx1"/>
+                      </a:solidFill>
+                      <a:prstDash val="solid"/>
+                      <a:round/>
+                      <a:headEnd type="none" w="med" len="med"/>
+                      <a:tailEnd type="none" w="med" len="med"/>
+                    </a:lnL>
+                    <a:lnR w="12700" cap="flat" cmpd="sng" algn="ctr">
+                      <a:solidFill>
+                        <a:schemeClr val="tx1"/>
+                      </a:solidFill>
+                      <a:prstDash val="solid"/>
+                      <a:round/>
+                      <a:headEnd type="none" w="med" len="med"/>
+                      <a:tailEnd type="none" w="med" len="med"/>
+                    </a:lnR>
+                    <a:lnT w="12700" cap="flat" cmpd="sng" algn="ctr">
+                      <a:solidFill>
+                        <a:schemeClr val="tx1"/>
+                      </a:solidFill>
+                      <a:prstDash val="solid"/>
+                      <a:round/>
+                      <a:headEnd type="none" w="med" len="med"/>
+                      <a:tailEnd type="none" w="med" len="med"/>
+                    </a:lnT>
+                    <a:lnB w="12700" cap="flat" cmpd="sng" algn="ctr">
+                      <a:solidFill>
+                        <a:schemeClr val="tx1"/>
+                      </a:solidFill>
+                      <a:prstDash val="solid"/>
+                      <a:round/>
+                      <a:headEnd type="none" w="med" len="med"/>
+                      <a:tailEnd type="none" w="med" len="med"/>
+                    </a:lnB>
+                    <a:lnTlToBr w="12700" cmpd="sng">
+                      <a:noFill/>
+                      <a:prstDash val="solid"/>
+                    </a:lnTlToBr>
+                    <a:lnBlToTr w="12700" cmpd="sng">
+                      <a:noFill/>
+                      <a:prstDash val="solid"/>
+                    </a:lnBlToTr>
+                  </a:tcPr>
                 </a:tc>
                 <a:tc>
                   <a:txBody>
                     <a:bodyPr/>
                     <a:lstStyle/>
                     <a:p>
-                      <a:pPr algn="ctr" fontAlgn="b"/>
+                      <a:pPr algn="l" fontAlgn="b"/>
                       <a:r>
-                        <a:rPr lang="en-US" sz="1200" u="none" strike="noStrike">
+                        <a:rPr lang="en-US" sz="1200" u="none" strike="noStrike" dirty="0">
                           <a:effectLst/>
                         </a:rPr>
                         <a:t>Set</a:t>
                       </a:r>
-                      <a:endParaRPr lang="en-US" sz="1200" b="0" i="0" u="none" strike="noStrike">
+                      <a:endParaRPr lang="en-US" sz="1200" b="0" i="0" u="none" strike="noStrike" dirty="0">
                         <a:solidFill>
                           <a:srgbClr val="000000"/>
                         </a:solidFill>
@@ -10840,33 +11590,78 @@
                       </a:endParaRPr>
                     </a:p>
                   </a:txBody>
-                  <a:tcPr marL="5396" marR="5396" marT="5396" marB="0" anchor="b"/>
+                  <a:tcPr anchor="ctr">
+                    <a:lnL w="12700" cap="flat" cmpd="sng" algn="ctr">
+                      <a:solidFill>
+                        <a:schemeClr val="tx1"/>
+                      </a:solidFill>
+                      <a:prstDash val="solid"/>
+                      <a:round/>
+                      <a:headEnd type="none" w="med" len="med"/>
+                      <a:tailEnd type="none" w="med" len="med"/>
+                    </a:lnL>
+                    <a:lnR w="12700" cap="flat" cmpd="sng" algn="ctr">
+                      <a:solidFill>
+                        <a:schemeClr val="tx1"/>
+                      </a:solidFill>
+                      <a:prstDash val="solid"/>
+                      <a:round/>
+                      <a:headEnd type="none" w="med" len="med"/>
+                      <a:tailEnd type="none" w="med" len="med"/>
+                    </a:lnR>
+                    <a:lnT w="12700" cap="flat" cmpd="sng" algn="ctr">
+                      <a:solidFill>
+                        <a:schemeClr val="tx1"/>
+                      </a:solidFill>
+                      <a:prstDash val="solid"/>
+                      <a:round/>
+                      <a:headEnd type="none" w="med" len="med"/>
+                      <a:tailEnd type="none" w="med" len="med"/>
+                    </a:lnT>
+                    <a:lnB w="12700" cap="flat" cmpd="sng" algn="ctr">
+                      <a:solidFill>
+                        <a:schemeClr val="tx1"/>
+                      </a:solidFill>
+                      <a:prstDash val="solid"/>
+                      <a:round/>
+                      <a:headEnd type="none" w="med" len="med"/>
+                      <a:tailEnd type="none" w="med" len="med"/>
+                    </a:lnB>
+                    <a:lnTlToBr w="12700" cmpd="sng">
+                      <a:noFill/>
+                      <a:prstDash val="solid"/>
+                    </a:lnTlToBr>
+                    <a:lnBlToTr w="12700" cmpd="sng">
+                      <a:noFill/>
+                      <a:prstDash val="solid"/>
+                    </a:lnBlToTr>
+                  </a:tcPr>
                 </a:tc>
                 <a:tc>
                   <a:txBody>
                     <a:bodyPr/>
                     <a:lstStyle/>
                     <a:p>
-                      <a:pPr algn="ctr" fontAlgn="b"/>
+                      <a:pPr algn="l" fontAlgn="b"/>
                       <a:r>
-                        <a:rPr lang="ru-RU" sz="1200" u="none" strike="noStrike">
+                        <a:rPr lang="ru-RU" sz="1200" u="none" strike="noStrike" dirty="0">
                           <a:effectLst/>
                         </a:rPr>
                         <a:t>Множество </a:t>
                       </a:r>
                       <a:r>
-                        <a:rPr lang="en-US" sz="1200" u="none" strike="noStrike">
+                        <a:rPr lang="en-US" sz="1200" u="none" strike="noStrike" dirty="0">
                           <a:effectLst/>
                         </a:rPr>
                         <a:t>UUID </a:t>
                       </a:r>
                       <a:r>
-                        <a:rPr lang="ru-RU" sz="1200" u="none" strike="noStrike">
+                        <a:rPr lang="ru-RU" sz="1200" u="none" strike="noStrike" dirty="0">
                           <a:effectLst/>
                         </a:rPr>
                         <a:t>учётных записей</a:t>
                       </a:r>
-                      <a:endParaRPr lang="ru-RU" sz="1200" b="0" i="0" u="none" strike="noStrike">
+                      <a:endParaRPr lang="ru-RU" sz="1200" b="0" i="0" u="none" strike="noStrike" dirty="0">
                         <a:solidFill>
                           <a:srgbClr val="000000"/>
                         </a:solidFill>
@@ -10875,7 +11670,52 @@
                       </a:endParaRPr>
                     </a:p>
                   </a:txBody>
-                  <a:tcPr marL="5396" marR="5396" marT="5396" marB="0" anchor="b"/>
+                  <a:tcPr anchor="ctr">
+                    <a:lnL w="12700" cap="flat" cmpd="sng" algn="ctr">
+                      <a:solidFill>
+                        <a:schemeClr val="tx1"/>
+                      </a:solidFill>
+                      <a:prstDash val="solid"/>
+                      <a:round/>
+                      <a:headEnd type="none" w="med" len="med"/>
+                      <a:tailEnd type="none" w="med" len="med"/>
+                    </a:lnL>
+                    <a:lnR w="12700" cap="flat" cmpd="sng" algn="ctr">
+                      <a:solidFill>
+                        <a:schemeClr val="tx1"/>
+                      </a:solidFill>
+                      <a:prstDash val="solid"/>
+                      <a:round/>
+                      <a:headEnd type="none" w="med" len="med"/>
+                      <a:tailEnd type="none" w="med" len="med"/>
+                    </a:lnR>
+                    <a:lnT w="12700" cap="flat" cmpd="sng" algn="ctr">
+                      <a:solidFill>
+                        <a:schemeClr val="tx1"/>
+                      </a:solidFill>
+                      <a:prstDash val="solid"/>
+                      <a:round/>
+                      <a:headEnd type="none" w="med" len="med"/>
+                      <a:tailEnd type="none" w="med" len="med"/>
+                    </a:lnT>
+                    <a:lnB w="12700" cap="flat" cmpd="sng" algn="ctr">
+                      <a:solidFill>
+                        <a:schemeClr val="tx1"/>
+                      </a:solidFill>
+                      <a:prstDash val="solid"/>
+                      <a:round/>
+                      <a:headEnd type="none" w="med" len="med"/>
+                      <a:tailEnd type="none" w="med" len="med"/>
+                    </a:lnB>
+                    <a:lnTlToBr w="12700" cmpd="sng">
+                      <a:noFill/>
+                      <a:prstDash val="solid"/>
+                    </a:lnTlToBr>
+                    <a:lnBlToTr w="12700" cmpd="sng">
+                      <a:noFill/>
+                      <a:prstDash val="solid"/>
+                    </a:lnBlToTr>
+                  </a:tcPr>
                 </a:tc>
                 <a:extLst>
                   <a:ext uri="{0D108BD9-81ED-4DB2-BD59-A6C34878D82A}">
@@ -10889,7 +11729,7 @@
                     <a:bodyPr/>
                     <a:lstStyle/>
                     <a:p>
-                      <a:pPr algn="ctr" fontAlgn="b"/>
+                      <a:pPr algn="l" fontAlgn="b"/>
                       <a:r>
                         <a:rPr lang="en-US" sz="1200" u="none" strike="noStrike">
                           <a:effectLst/>
@@ -10905,21 +11745,66 @@
                       </a:endParaRPr>
                     </a:p>
                   </a:txBody>
-                  <a:tcPr marL="5396" marR="5396" marT="5396" marB="0" anchor="b"/>
+                  <a:tcPr anchor="ctr">
+                    <a:lnL w="12700" cap="flat" cmpd="sng" algn="ctr">
+                      <a:solidFill>
+                        <a:schemeClr val="tx1"/>
+                      </a:solidFill>
+                      <a:prstDash val="solid"/>
+                      <a:round/>
+                      <a:headEnd type="none" w="med" len="med"/>
+                      <a:tailEnd type="none" w="med" len="med"/>
+                    </a:lnL>
+                    <a:lnR w="12700" cap="flat" cmpd="sng" algn="ctr">
+                      <a:solidFill>
+                        <a:schemeClr val="tx1"/>
+                      </a:solidFill>
+                      <a:prstDash val="solid"/>
+                      <a:round/>
+                      <a:headEnd type="none" w="med" len="med"/>
+                      <a:tailEnd type="none" w="med" len="med"/>
+                    </a:lnR>
+                    <a:lnT w="12700" cap="flat" cmpd="sng" algn="ctr">
+                      <a:solidFill>
+                        <a:schemeClr val="tx1"/>
+                      </a:solidFill>
+                      <a:prstDash val="solid"/>
+                      <a:round/>
+                      <a:headEnd type="none" w="med" len="med"/>
+                      <a:tailEnd type="none" w="med" len="med"/>
+                    </a:lnT>
+                    <a:lnB w="12700" cap="flat" cmpd="sng" algn="ctr">
+                      <a:solidFill>
+                        <a:schemeClr val="tx1"/>
+                      </a:solidFill>
+                      <a:prstDash val="solid"/>
+                      <a:round/>
+                      <a:headEnd type="none" w="med" len="med"/>
+                      <a:tailEnd type="none" w="med" len="med"/>
+                    </a:lnB>
+                    <a:lnTlToBr w="12700" cmpd="sng">
+                      <a:noFill/>
+                      <a:prstDash val="solid"/>
+                    </a:lnTlToBr>
+                    <a:lnBlToTr w="12700" cmpd="sng">
+                      <a:noFill/>
+                      <a:prstDash val="solid"/>
+                    </a:lnBlToTr>
+                  </a:tcPr>
                 </a:tc>
                 <a:tc>
                   <a:txBody>
                     <a:bodyPr/>
                     <a:lstStyle/>
                     <a:p>
-                      <a:pPr algn="ctr" fontAlgn="b"/>
+                      <a:pPr algn="l" fontAlgn="b"/>
                       <a:r>
-                        <a:rPr lang="en-US" sz="1200" u="none" strike="noStrike">
+                        <a:rPr lang="en-US" sz="1200" u="none" strike="noStrike" dirty="0">
                           <a:effectLst/>
                         </a:rPr>
                         <a:t>String</a:t>
                       </a:r>
-                      <a:endParaRPr lang="en-US" sz="1200" b="0" i="0" u="none" strike="noStrike">
+                      <a:endParaRPr lang="en-US" sz="1200" b="0" i="0" u="none" strike="noStrike" dirty="0">
                         <a:solidFill>
                           <a:srgbClr val="000000"/>
                         </a:solidFill>
@@ -10928,21 +11813,72 @@
                       </a:endParaRPr>
                     </a:p>
                   </a:txBody>
-                  <a:tcPr marL="5396" marR="5396" marT="5396" marB="0" anchor="b"/>
+                  <a:tcPr anchor="ctr">
+                    <a:lnL w="12700" cap="flat" cmpd="sng" algn="ctr">
+                      <a:solidFill>
+                        <a:schemeClr val="tx1"/>
+                      </a:solidFill>
+                      <a:prstDash val="solid"/>
+                      <a:round/>
+                      <a:headEnd type="none" w="med" len="med"/>
+                      <a:tailEnd type="none" w="med" len="med"/>
+                    </a:lnL>
+                    <a:lnR w="12700" cap="flat" cmpd="sng" algn="ctr">
+                      <a:solidFill>
+                        <a:schemeClr val="tx1"/>
+                      </a:solidFill>
+                      <a:prstDash val="solid"/>
+                      <a:round/>
+                      <a:headEnd type="none" w="med" len="med"/>
+                      <a:tailEnd type="none" w="med" len="med"/>
+                    </a:lnR>
+                    <a:lnT w="12700" cap="flat" cmpd="sng" algn="ctr">
+                      <a:solidFill>
+                        <a:schemeClr val="tx1"/>
+                      </a:solidFill>
+                      <a:prstDash val="solid"/>
+                      <a:round/>
+                      <a:headEnd type="none" w="med" len="med"/>
+                      <a:tailEnd type="none" w="med" len="med"/>
+                    </a:lnT>
+                    <a:lnB w="12700" cap="flat" cmpd="sng" algn="ctr">
+                      <a:solidFill>
+                        <a:schemeClr val="tx1"/>
+                      </a:solidFill>
+                      <a:prstDash val="solid"/>
+                      <a:round/>
+                      <a:headEnd type="none" w="med" len="med"/>
+                      <a:tailEnd type="none" w="med" len="med"/>
+                    </a:lnB>
+                    <a:lnTlToBr w="12700" cmpd="sng">
+                      <a:noFill/>
+                      <a:prstDash val="solid"/>
+                    </a:lnTlToBr>
+                    <a:lnBlToTr w="12700" cmpd="sng">
+                      <a:noFill/>
+                      <a:prstDash val="solid"/>
+                    </a:lnBlToTr>
+                  </a:tcPr>
                 </a:tc>
                 <a:tc>
                   <a:txBody>
                     <a:bodyPr/>
                     <a:lstStyle/>
                     <a:p>
-                      <a:pPr algn="ctr" fontAlgn="b"/>
+                      <a:pPr algn="l" fontAlgn="b"/>
                       <a:r>
-                        <a:rPr lang="en-US" sz="1200" u="none" strike="noStrike">
+                        <a:rPr lang="en-US" sz="1200" u="none" strike="noStrike" dirty="0" err="1">
                           <a:effectLst/>
                         </a:rPr>
-                        <a:t>Счётчик Rate Limiter (с TTL)</a:t>
+                        <a:t>Счётчик</a:t>
                       </a:r>
-                      <a:endParaRPr lang="en-US" sz="1200" b="0" i="0" u="none" strike="noStrike">
+                      <a:r>
+                        <a:rPr lang="en-US" sz="1200" u="none" strike="noStrike" dirty="0">
+                          <a:effectLst/>
+                        </a:rPr>
+                        <a:t> Rate Limiter (с TTL)</a:t>
+                      </a:r>
+                      <a:endParaRPr lang="en-US" sz="1200" b="0" i="0" u="none" strike="noStrike" dirty="0">
                         <a:solidFill>
                           <a:srgbClr val="000000"/>
                         </a:solidFill>
@@ -10951,7 +11887,52 @@
                       </a:endParaRPr>
                     </a:p>
                   </a:txBody>
-                  <a:tcPr marL="5396" marR="5396" marT="5396" marB="0" anchor="b"/>
+                  <a:tcPr anchor="ctr">
+                    <a:lnL w="12700" cap="flat" cmpd="sng" algn="ctr">
+                      <a:solidFill>
+                        <a:schemeClr val="tx1"/>
+                      </a:solidFill>
+                      <a:prstDash val="solid"/>
+                      <a:round/>
+                      <a:headEnd type="none" w="med" len="med"/>
+                      <a:tailEnd type="none" w="med" len="med"/>
+                    </a:lnL>
+                    <a:lnR w="12700" cap="flat" cmpd="sng" algn="ctr">
+                      <a:solidFill>
+                        <a:schemeClr val="tx1"/>
+                      </a:solidFill>
+                      <a:prstDash val="solid"/>
+                      <a:round/>
+                      <a:headEnd type="none" w="med" len="med"/>
+                      <a:tailEnd type="none" w="med" len="med"/>
+                    </a:lnR>
+                    <a:lnT w="12700" cap="flat" cmpd="sng" algn="ctr">
+                      <a:solidFill>
+                        <a:schemeClr val="tx1"/>
+                      </a:solidFill>
+                      <a:prstDash val="solid"/>
+                      <a:round/>
+                      <a:headEnd type="none" w="med" len="med"/>
+                      <a:tailEnd type="none" w="med" len="med"/>
+                    </a:lnT>
+                    <a:lnB w="12700" cap="flat" cmpd="sng" algn="ctr">
+                      <a:solidFill>
+                        <a:schemeClr val="tx1"/>
+                      </a:solidFill>
+                      <a:prstDash val="solid"/>
+                      <a:round/>
+                      <a:headEnd type="none" w="med" len="med"/>
+                      <a:tailEnd type="none" w="med" len="med"/>
+                    </a:lnB>
+                    <a:lnTlToBr w="12700" cmpd="sng">
+                      <a:noFill/>
+                      <a:prstDash val="solid"/>
+                    </a:lnTlToBr>
+                    <a:lnBlToTr w="12700" cmpd="sng">
+                      <a:noFill/>
+                      <a:prstDash val="solid"/>
+                    </a:lnBlToTr>
+                  </a:tcPr>
                 </a:tc>
                 <a:extLst>
                   <a:ext uri="{0D108BD9-81ED-4DB2-BD59-A6C34878D82A}">
@@ -10965,7 +11946,7 @@
                     <a:bodyPr/>
                     <a:lstStyle/>
                     <a:p>
-                      <a:pPr algn="ctr" fontAlgn="b"/>
+                      <a:pPr algn="l" fontAlgn="b"/>
                       <a:r>
                         <a:rPr lang="en-US" sz="1200" u="none" strike="noStrike">
                           <a:effectLst/>
@@ -10981,14 +11962,59 @@
                       </a:endParaRPr>
                     </a:p>
                   </a:txBody>
-                  <a:tcPr marL="5396" marR="5396" marT="5396" marB="0" anchor="b"/>
+                  <a:tcPr anchor="ctr">
+                    <a:lnL w="12700" cap="flat" cmpd="sng" algn="ctr">
+                      <a:solidFill>
+                        <a:schemeClr val="tx1"/>
+                      </a:solidFill>
+                      <a:prstDash val="solid"/>
+                      <a:round/>
+                      <a:headEnd type="none" w="med" len="med"/>
+                      <a:tailEnd type="none" w="med" len="med"/>
+                    </a:lnL>
+                    <a:lnR w="12700" cap="flat" cmpd="sng" algn="ctr">
+                      <a:solidFill>
+                        <a:schemeClr val="tx1"/>
+                      </a:solidFill>
+                      <a:prstDash val="solid"/>
+                      <a:round/>
+                      <a:headEnd type="none" w="med" len="med"/>
+                      <a:tailEnd type="none" w="med" len="med"/>
+                    </a:lnR>
+                    <a:lnT w="12700" cap="flat" cmpd="sng" algn="ctr">
+                      <a:solidFill>
+                        <a:schemeClr val="tx1"/>
+                      </a:solidFill>
+                      <a:prstDash val="solid"/>
+                      <a:round/>
+                      <a:headEnd type="none" w="med" len="med"/>
+                      <a:tailEnd type="none" w="med" len="med"/>
+                    </a:lnT>
+                    <a:lnB w="12700" cap="flat" cmpd="sng" algn="ctr">
+                      <a:solidFill>
+                        <a:schemeClr val="tx1"/>
+                      </a:solidFill>
+                      <a:prstDash val="solid"/>
+                      <a:round/>
+                      <a:headEnd type="none" w="med" len="med"/>
+                      <a:tailEnd type="none" w="med" len="med"/>
+                    </a:lnB>
+                    <a:lnTlToBr w="12700" cmpd="sng">
+                      <a:noFill/>
+                      <a:prstDash val="solid"/>
+                    </a:lnTlToBr>
+                    <a:lnBlToTr w="12700" cmpd="sng">
+                      <a:noFill/>
+                      <a:prstDash val="solid"/>
+                    </a:lnBlToTr>
+                  </a:tcPr>
                 </a:tc>
                 <a:tc>
                   <a:txBody>
                     <a:bodyPr/>
                     <a:lstStyle/>
                     <a:p>
-                      <a:pPr algn="ctr" fontAlgn="b"/>
+                      <a:pPr algn="l" fontAlgn="b"/>
                       <a:r>
                         <a:rPr lang="en-US" sz="1200" u="none" strike="noStrike">
                           <a:effectLst/>
@@ -11004,14 +12030,59 @@
                       </a:endParaRPr>
                     </a:p>
                   </a:txBody>
-                  <a:tcPr marL="5396" marR="5396" marT="5396" marB="0" anchor="b"/>
+                  <a:tcPr anchor="ctr">
+                    <a:lnL w="12700" cap="flat" cmpd="sng" algn="ctr">
+                      <a:solidFill>
+                        <a:schemeClr val="tx1"/>
+                      </a:solidFill>
+                      <a:prstDash val="solid"/>
+                      <a:round/>
+                      <a:headEnd type="none" w="med" len="med"/>
+                      <a:tailEnd type="none" w="med" len="med"/>
+                    </a:lnL>
+                    <a:lnR w="12700" cap="flat" cmpd="sng" algn="ctr">
+                      <a:solidFill>
+                        <a:schemeClr val="tx1"/>
+                      </a:solidFill>
+                      <a:prstDash val="solid"/>
+                      <a:round/>
+                      <a:headEnd type="none" w="med" len="med"/>
+                      <a:tailEnd type="none" w="med" len="med"/>
+                    </a:lnR>
+                    <a:lnT w="12700" cap="flat" cmpd="sng" algn="ctr">
+                      <a:solidFill>
+                        <a:schemeClr val="tx1"/>
+                      </a:solidFill>
+                      <a:prstDash val="solid"/>
+                      <a:round/>
+                      <a:headEnd type="none" w="med" len="med"/>
+                      <a:tailEnd type="none" w="med" len="med"/>
+                    </a:lnT>
+                    <a:lnB w="12700" cap="flat" cmpd="sng" algn="ctr">
+                      <a:solidFill>
+                        <a:schemeClr val="tx1"/>
+                      </a:solidFill>
+                      <a:prstDash val="solid"/>
+                      <a:round/>
+                      <a:headEnd type="none" w="med" len="med"/>
+                      <a:tailEnd type="none" w="med" len="med"/>
+                    </a:lnB>
+                    <a:lnTlToBr w="12700" cmpd="sng">
+                      <a:noFill/>
+                      <a:prstDash val="solid"/>
+                    </a:lnTlToBr>
+                    <a:lnBlToTr w="12700" cmpd="sng">
+                      <a:noFill/>
+                      <a:prstDash val="solid"/>
+                    </a:lnBlToTr>
+                  </a:tcPr>
                 </a:tc>
                 <a:tc>
                   <a:txBody>
                     <a:bodyPr/>
                     <a:lstStyle/>
                     <a:p>
-                      <a:pPr algn="ctr" fontAlgn="b"/>
+                      <a:pPr algn="l" fontAlgn="b"/>
                       <a:r>
                         <a:rPr lang="ru-RU" sz="1200" u="none" strike="noStrike" dirty="0">
                           <a:effectLst/>
@@ -11027,7 +12098,52 @@
                       </a:endParaRPr>
                     </a:p>
                   </a:txBody>
-                  <a:tcPr marL="5396" marR="5396" marT="5396" marB="0" anchor="b"/>
+                  <a:tcPr anchor="ctr">
+                    <a:lnL w="12700" cap="flat" cmpd="sng" algn="ctr">
+                      <a:solidFill>
+                        <a:schemeClr val="tx1"/>
+                      </a:solidFill>
+                      <a:prstDash val="solid"/>
+                      <a:round/>
+                      <a:headEnd type="none" w="med" len="med"/>
+                      <a:tailEnd type="none" w="med" len="med"/>
+                    </a:lnL>
+                    <a:lnR w="12700" cap="flat" cmpd="sng" algn="ctr">
+                      <a:solidFill>
+                        <a:schemeClr val="tx1"/>
+                      </a:solidFill>
+                      <a:prstDash val="solid"/>
+                      <a:round/>
+                      <a:headEnd type="none" w="med" len="med"/>
+                      <a:tailEnd type="none" w="med" len="med"/>
+                    </a:lnR>
+                    <a:lnT w="12700" cap="flat" cmpd="sng" algn="ctr">
+                      <a:solidFill>
+                        <a:schemeClr val="tx1"/>
+                      </a:solidFill>
+                      <a:prstDash val="solid"/>
+                      <a:round/>
+                      <a:headEnd type="none" w="med" len="med"/>
+                      <a:tailEnd type="none" w="med" len="med"/>
+                    </a:lnT>
+                    <a:lnB w="12700" cap="flat" cmpd="sng" algn="ctr">
+                      <a:solidFill>
+                        <a:schemeClr val="tx1"/>
+                      </a:solidFill>
+                      <a:prstDash val="solid"/>
+                      <a:round/>
+                      <a:headEnd type="none" w="med" len="med"/>
+                      <a:tailEnd type="none" w="med" len="med"/>
+                    </a:lnB>
+                    <a:lnTlToBr w="12700" cmpd="sng">
+                      <a:noFill/>
+                      <a:prstDash val="solid"/>
+                    </a:lnTlToBr>
+                    <a:lnBlToTr w="12700" cmpd="sng">
+                      <a:noFill/>
+                      <a:prstDash val="solid"/>
+                    </a:lnBlToTr>
+                  </a:tcPr>
                 </a:tc>
                 <a:extLst>
                   <a:ext uri="{0D108BD9-81ED-4DB2-BD59-A6C34878D82A}">

--- a/Thesis/docs/Презентация.pptx
+++ b/Thesis/docs/Презентация.pptx
@@ -34,11 +34,11 @@
       <p:boldItalic r:id="rId20"/>
     </p:embeddedFont>
     <p:embeddedFont>
-      <p:font typeface="Gilroy Bold" panose="00000800000000000000" charset="-52"/>
+      <p:font typeface="Gilroy Bold" panose="00000800000000000000" pitchFamily="50" charset="-52"/>
       <p:bold r:id="rId21"/>
     </p:embeddedFont>
     <p:embeddedFont>
-      <p:font typeface="Gilroy Medium" panose="00000600000000000000" charset="-52"/>
+      <p:font typeface="Gilroy Medium" panose="00000600000000000000" pitchFamily="50" charset="-52"/>
       <p:regular r:id="rId22"/>
     </p:embeddedFont>
     <p:embeddedFont>
@@ -248,7 +248,7 @@
           <a:p>
             <a:fld id="{06B9DC91-30C7-46AB-ADDB-A80A0533D77A}" type="datetimeFigureOut">
               <a:rPr lang="ru-RU" smtClean="0"/>
-              <a:t>24.05.2026</a:t>
+              <a:t>29.05.2026</a:t>
             </a:fld>
             <a:endParaRPr lang="ru-RU"/>
           </a:p>
@@ -2064,7 +2064,7 @@
           <a:p>
             <a:fld id="{D92D3C23-8038-4008-B24E-40A94D79456D}" type="datetime1">
               <a:rPr lang="ru-RU" smtClean="0"/>
-              <a:t>24.05.2026</a:t>
+              <a:t>29.05.2026</a:t>
             </a:fld>
             <a:endParaRPr lang="ru-RU"/>
           </a:p>
@@ -2512,7 +2512,7 @@
           <a:p>
             <a:fld id="{4FBADD92-CC98-4900-BE8A-2068547BBC1A}" type="datetime1">
               <a:rPr lang="ru-RU" smtClean="0"/>
-              <a:t>24.05.2026</a:t>
+              <a:t>29.05.2026</a:t>
             </a:fld>
             <a:endParaRPr lang="ru-RU"/>
           </a:p>
@@ -2830,7 +2830,7 @@
           <a:p>
             <a:fld id="{06738898-160C-4747-9301-0B5702FA49D8}" type="datetime1">
               <a:rPr lang="ru-RU" smtClean="0"/>
-              <a:t>24.05.2026</a:t>
+              <a:t>29.05.2026</a:t>
             </a:fld>
             <a:endParaRPr lang="ru-RU"/>
           </a:p>
@@ -2957,7 +2957,7 @@
           <a:p>
             <a:fld id="{F1EBB16F-DABE-4712-B47F-7722E1CB50FE}" type="datetime1">
               <a:rPr lang="ru-RU" smtClean="0"/>
-              <a:t>24.05.2026</a:t>
+              <a:t>29.05.2026</a:t>
             </a:fld>
             <a:endParaRPr lang="ru-RU" dirty="0"/>
           </a:p>
@@ -3010,7 +3010,7 @@
           <a:p>
             <a:fld id="{2CEBEA22-9938-4273-8C60-D80B349E4BA9}" type="datetime1">
               <a:rPr lang="ru-RU" smtClean="0"/>
-              <a:t>24.05.2026</a:t>
+              <a:t>29.05.2026</a:t>
             </a:fld>
             <a:endParaRPr lang="ru-RU"/>
           </a:p>
@@ -3291,7 +3291,7 @@
           <a:p>
             <a:fld id="{570D790B-F35A-4C90-BC4A-BA7F77964CA4}" type="datetime1">
               <a:rPr lang="ru-RU" smtClean="0"/>
-              <a:t>24.05.2026</a:t>
+              <a:t>29.05.2026</a:t>
             </a:fld>
             <a:endParaRPr lang="ru-RU"/>
           </a:p>
@@ -3528,7 +3528,7 @@
           <a:p>
             <a:fld id="{29AEF080-AA0F-44FA-BA62-A56D8619F7E7}" type="datetime1">
               <a:rPr lang="ru-RU" smtClean="0"/>
-              <a:t>24.05.2026</a:t>
+              <a:t>29.05.2026</a:t>
             </a:fld>
             <a:endParaRPr lang="ru-RU"/>
           </a:p>
@@ -3710,7 +3710,7 @@
           <a:p>
             <a:fld id="{83AB8CDF-4973-4195-91CA-18BA11F1D400}" type="datetime1">
               <a:rPr lang="ru-RU" smtClean="0"/>
-              <a:t>24.05.2026</a:t>
+              <a:t>29.05.2026</a:t>
             </a:fld>
             <a:endParaRPr lang="ru-RU"/>
           </a:p>
@@ -4981,10 +4981,10 @@
       </p:sp>
       <p:pic>
         <p:nvPicPr>
-          <p:cNvPr id="8" name="Рисунок 7" descr="Изображение выглядит как снимок экрана, текст, программное обеспечение, Мультимедийное программное обеспечение&#10;&#10;Контент, сгенерированный ИИ, может содержать ошибки.">
+          <p:cNvPr id="4" name="Рисунок 3">
             <a:extLst>
               <a:ext uri="{FF2B5EF4-FFF2-40B4-BE49-F238E27FC236}">
-                <a16:creationId xmlns:a16="http://schemas.microsoft.com/office/drawing/2014/main" id="{AE465F4B-2EBA-AED5-FE23-0B266018607F}"/>
+                <a16:creationId xmlns:a16="http://schemas.microsoft.com/office/drawing/2014/main" id="{85CA95D3-A3D5-12BC-47DC-7F8B40BF8471}"/>
               </a:ext>
             </a:extLst>
           </p:cNvPr>
@@ -4994,20 +4994,15 @@
           <p:nvPr/>
         </p:nvPicPr>
         <p:blipFill>
-          <a:blip r:embed="rId3">
-            <a:extLst>
-              <a:ext uri="{28A0092B-C50C-407E-A947-70E740481C1C}">
-                <a14:useLocalDpi xmlns:a14="http://schemas.microsoft.com/office/drawing/2010/main" val="0"/>
-              </a:ext>
-            </a:extLst>
-          </a:blip>
-          <a:srcRect l="37745" t="16332" r="37598" b="16380"/>
-          <a:stretch/>
+          <a:blip r:embed="rId3"/>
+          <a:stretch>
+            <a:fillRect/>
+          </a:stretch>
         </p:blipFill>
         <p:spPr>
           <a:xfrm>
-            <a:off x="585694" y="1122029"/>
-            <a:ext cx="3663577" cy="4989165"/>
+            <a:off x="4665443" y="1384300"/>
+            <a:ext cx="7324973" cy="4725554"/>
           </a:xfrm>
           <a:prstGeom prst="rect">
             <a:avLst/>
@@ -5016,10 +5011,10 @@
       </p:pic>
       <p:pic>
         <p:nvPicPr>
-          <p:cNvPr id="10" name="Рисунок 9" descr="Изображение выглядит как текст, снимок экрана, программное обеспечение, Мультимедийное программное обеспечение&#10;&#10;Контент, сгенерированный ИИ, может содержать ошибки.">
+          <p:cNvPr id="9" name="Рисунок 8">
             <a:extLst>
               <a:ext uri="{FF2B5EF4-FFF2-40B4-BE49-F238E27FC236}">
-                <a16:creationId xmlns:a16="http://schemas.microsoft.com/office/drawing/2014/main" id="{5217A559-9D78-C0DC-05A9-C855890DBD9C}"/>
+                <a16:creationId xmlns:a16="http://schemas.microsoft.com/office/drawing/2014/main" id="{BB23D4B4-8109-651F-C3BF-646169597ED2}"/>
               </a:ext>
             </a:extLst>
           </p:cNvPr>
@@ -5029,20 +5024,15 @@
           <p:nvPr/>
         </p:nvPicPr>
         <p:blipFill>
-          <a:blip r:embed="rId4">
-            <a:extLst>
-              <a:ext uri="{28A0092B-C50C-407E-A947-70E740481C1C}">
-                <a14:useLocalDpi xmlns:a14="http://schemas.microsoft.com/office/drawing/2010/main" val="0"/>
-              </a:ext>
-            </a:extLst>
-          </a:blip>
-          <a:srcRect b="9841"/>
-          <a:stretch/>
+          <a:blip r:embed="rId4"/>
+          <a:stretch>
+            <a:fillRect/>
+          </a:stretch>
         </p:blipFill>
         <p:spPr>
           <a:xfrm>
-            <a:off x="4521355" y="1290990"/>
-            <a:ext cx="7264079" cy="4651242"/>
+            <a:off x="705958" y="1384300"/>
+            <a:ext cx="3478692" cy="4725554"/>
           </a:xfrm>
           <a:prstGeom prst="rect">
             <a:avLst/>
@@ -6573,10 +6563,10 @@
       </p:graphicFrame>
       <p:pic>
         <p:nvPicPr>
-          <p:cNvPr id="9" name="Рисунок 8">
+          <p:cNvPr id="8" name="Рисунок 7" descr="Изображение выглядит как текст, снимок экрана, График, число&#10;&#10;Контент, сгенерированный ИИ, может содержать ошибки.">
             <a:extLst>
               <a:ext uri="{FF2B5EF4-FFF2-40B4-BE49-F238E27FC236}">
-                <a16:creationId xmlns:a16="http://schemas.microsoft.com/office/drawing/2014/main" id="{94DAF39F-C49B-1916-F851-A0E5D7632959}"/>
+                <a16:creationId xmlns:a16="http://schemas.microsoft.com/office/drawing/2014/main" id="{8BC9D771-3416-C5EC-0613-B2FF6FA0D629}"/>
               </a:ext>
             </a:extLst>
           </p:cNvPr>
@@ -6586,21 +6576,115 @@
           <p:nvPr/>
         </p:nvPicPr>
         <p:blipFill>
-          <a:blip r:embed="rId3"/>
-          <a:stretch>
-            <a:fillRect/>
-          </a:stretch>
+          <a:blip r:embed="rId3">
+            <a:extLst>
+              <a:ext uri="{28A0092B-C50C-407E-A947-70E740481C1C}">
+                <a14:useLocalDpi xmlns:a14="http://schemas.microsoft.com/office/drawing/2010/main" val="0"/>
+              </a:ext>
+            </a:extLst>
+          </a:blip>
+          <a:srcRect l="150" t="953" b="715"/>
+          <a:stretch/>
         </p:blipFill>
         <p:spPr>
           <a:xfrm>
-            <a:off x="5618222" y="1702623"/>
-            <a:ext cx="6207157" cy="3861469"/>
+            <a:off x="5446283" y="1660838"/>
+            <a:ext cx="6406674" cy="3904144"/>
           </a:xfrm>
           <a:prstGeom prst="rect">
             <a:avLst/>
           </a:prstGeom>
         </p:spPr>
       </p:pic>
+      <p:sp>
+        <p:nvSpPr>
+          <p:cNvPr id="12" name="Прямоугольник 11">
+            <a:extLst>
+              <a:ext uri="{FF2B5EF4-FFF2-40B4-BE49-F238E27FC236}">
+                <a16:creationId xmlns:a16="http://schemas.microsoft.com/office/drawing/2014/main" id="{6644B028-7817-16DE-B4B7-8B80FDB41158}"/>
+              </a:ext>
+            </a:extLst>
+          </p:cNvPr>
+          <p:cNvSpPr/>
+          <p:nvPr/>
+        </p:nvSpPr>
+        <p:spPr>
+          <a:xfrm>
+            <a:off x="5378824" y="1659286"/>
+            <a:ext cx="155388" cy="3904144"/>
+          </a:xfrm>
+          <a:prstGeom prst="rect">
+            <a:avLst/>
+          </a:prstGeom>
+          <a:solidFill>
+            <a:srgbClr val="E7E4E0"/>
+          </a:solidFill>
+          <a:ln>
+            <a:solidFill>
+              <a:srgbClr val="E7E4E0"/>
+            </a:solidFill>
+          </a:ln>
+        </p:spPr>
+        <p:style>
+          <a:lnRef idx="2">
+            <a:schemeClr val="accent1">
+              <a:shade val="15000"/>
+            </a:schemeClr>
+          </a:lnRef>
+          <a:fillRef idx="1">
+            <a:schemeClr val="accent1"/>
+          </a:fillRef>
+          <a:effectRef idx="0">
+            <a:schemeClr val="accent1"/>
+          </a:effectRef>
+          <a:fontRef idx="minor">
+            <a:schemeClr val="lt1"/>
+          </a:fontRef>
+        </p:style>
+        <p:txBody>
+          <a:bodyPr rtlCol="0" anchor="ctr"/>
+          <a:lstStyle/>
+          <a:p>
+            <a:pPr algn="ctr"/>
+            <a:endParaRPr lang="ru-RU"/>
+          </a:p>
+        </p:txBody>
+      </p:sp>
+      <p:sp>
+        <p:nvSpPr>
+          <p:cNvPr id="10" name="TextBox 9">
+            <a:extLst>
+              <a:ext uri="{FF2B5EF4-FFF2-40B4-BE49-F238E27FC236}">
+                <a16:creationId xmlns:a16="http://schemas.microsoft.com/office/drawing/2014/main" id="{DA68C8FC-B339-99EE-C299-363703B54D1B}"/>
+              </a:ext>
+            </a:extLst>
+          </p:cNvPr>
+          <p:cNvSpPr txBox="1"/>
+          <p:nvPr/>
+        </p:nvSpPr>
+        <p:spPr>
+          <a:xfrm rot="16200000">
+            <a:off x="4350470" y="3459964"/>
+            <a:ext cx="2191626" cy="261610"/>
+          </a:xfrm>
+          <a:prstGeom prst="rect">
+            <a:avLst/>
+          </a:prstGeom>
+          <a:noFill/>
+        </p:spPr>
+        <p:txBody>
+          <a:bodyPr wrap="none" rtlCol="0">
+            <a:spAutoFit/>
+          </a:bodyPr>
+          <a:lstStyle/>
+          <a:p>
+            <a:r>
+              <a:rPr lang="ru-RU" sz="1100" dirty="0"/>
+              <a:t>Вносимая задержка этапом</a:t>
+            </a:r>
+          </a:p>
+        </p:txBody>
+      </p:sp>
     </p:spTree>
     <p:extLst>
       <p:ext uri="{BB962C8B-B14F-4D97-AF65-F5344CB8AC3E}">
@@ -6915,8 +6999,8 @@
         </p:nvSpPr>
         <p:spPr>
           <a:xfrm>
-            <a:off x="349527" y="1659284"/>
-            <a:ext cx="11344245" cy="3775777"/>
+            <a:off x="349527" y="1405284"/>
+            <a:ext cx="11344245" cy="4606774"/>
           </a:xfrm>
           <a:prstGeom prst="rect">
             <a:avLst/>
@@ -6971,7 +7055,7 @@
             </a:pPr>
             <a:r>
               <a:rPr lang="ru-RU" dirty="0"/>
-              <a:t>Задержка прокси: ≤ 3,01 мс при нагрузке до 500 RPS</a:t>
+              <a:t>Задержка прокси: ≤ 3,01 мс при нагрузке до 500 RPS;</a:t>
             </a:r>
           </a:p>
           <a:p>
@@ -6992,7 +7076,7 @@
             </a:r>
             <a:r>
               <a:rPr lang="ru-RU" dirty="0"/>
-              <a:t>: отклонение 0,13% от теоретического лимита</a:t>
+              <a:t>: отклонение 0,13% от теоретического лимита;</a:t>
             </a:r>
           </a:p>
           <a:p>
@@ -7005,7 +7089,7 @@
             </a:pPr>
             <a:r>
               <a:rPr lang="ru-RU" dirty="0"/>
-              <a:t>Время обнаружения сбоя: ≤ 30 с</a:t>
+              <a:t>Время обнаружения сбоя: ≤ 30 с;</a:t>
             </a:r>
           </a:p>
           <a:p>
@@ -7018,7 +7102,41 @@
             </a:pPr>
             <a:r>
               <a:rPr lang="ru-RU" dirty="0"/>
-              <a:t>Направления развития: динамическая маршрутизация по содержимому запроса, ролевая модель доступа, поддержка не-JVM артефактов</a:t>
+              <a:t>Впервые реализовано централизованное управление с индивидуальным Rate </a:t>
+            </a:r>
+            <a:r>
+              <a:rPr lang="ru-RU" dirty="0" err="1"/>
+              <a:t>Limiting</a:t>
+            </a:r>
+            <a:r>
+              <a:rPr lang="ru-RU" dirty="0"/>
+              <a:t> и </a:t>
+            </a:r>
+            <a:r>
+              <a:rPr lang="ru-RU" dirty="0" err="1"/>
+              <a:t>агентно</a:t>
+            </a:r>
+            <a:r>
+              <a:rPr lang="ru-RU" dirty="0"/>
+              <a:t>-независимым SSH/SCP-взаимодействием без ПО на целевых узла</a:t>
+            </a:r>
+            <a:r>
+              <a:rPr lang="en-US" dirty="0"/>
+              <a:t>;</a:t>
+            </a:r>
+            <a:endParaRPr lang="ru-RU" dirty="0"/>
+          </a:p>
+          <a:p>
+            <a:pPr marL="285750" indent="-285750">
+              <a:lnSpc>
+                <a:spcPct val="150000"/>
+              </a:lnSpc>
+              <a:buFont typeface="Arial" panose="020B0604020202020204" pitchFamily="34" charset="0"/>
+              <a:buChar char="•"/>
+            </a:pPr>
+            <a:r>
+              <a:rPr lang="ru-RU" dirty="0"/>
+              <a:t>Направления развития: динамическая маршрутизация по содержимому запроса, ролевая модель доступа, поддержка не-JVM артефактов;</a:t>
             </a:r>
           </a:p>
         </p:txBody>
@@ -7906,7 +8024,7 @@
             </a:r>
             <a:r>
               <a:rPr lang="ru-RU" sz="1600" dirty="0"/>
-              <a:t> не управляют инфраструктурой JAR/WAR-процессов </a:t>
+              <a:t> не управляют инфраструктурой JAR/WAR-процессов; </a:t>
             </a:r>
           </a:p>
           <a:p>
@@ -7935,7 +8053,7 @@
             </a:r>
             <a:r>
               <a:rPr lang="ru-RU" sz="1600" dirty="0"/>
-              <a:t> </a:t>
+              <a:t>; </a:t>
             </a:r>
           </a:p>
           <a:p>
@@ -7948,7 +8066,7 @@
             </a:pPr>
             <a:r>
               <a:rPr lang="ru-RU" sz="1600" dirty="0"/>
-              <a:t>Все зарубежные решения косвенно совместимы с ОС Astra Linux</a:t>
+              <a:t>Все зарубежные решения косвенно совместимы с ОС Astra Linux;</a:t>
             </a:r>
           </a:p>
           <a:p>
@@ -7971,7 +8089,7 @@
             </a:r>
             <a:r>
               <a:rPr lang="ru-RU" sz="1600" dirty="0"/>
-              <a:t>-сервисов в условиях импортозамещения</a:t>
+              <a:t>-сервисов в условиях импортозамещения.</a:t>
             </a:r>
           </a:p>
         </p:txBody>
@@ -8363,7 +8481,7 @@
             </a:pPr>
             <a:r>
               <a:rPr lang="ru-RU" dirty="0"/>
-              <a:t>Провести анализ предметной области и существующих подходов</a:t>
+              <a:t> Провести анализ предметной области и существующих подходов.</a:t>
             </a:r>
           </a:p>
           <a:p>
@@ -8376,7 +8494,7 @@
             </a:pPr>
             <a:r>
               <a:rPr lang="ru-RU" dirty="0"/>
-              <a:t>Спроектировать архитектуру программного комплекса</a:t>
+              <a:t> Спроектировать архитектуру программного комплекса.</a:t>
             </a:r>
           </a:p>
           <a:p>
@@ -8389,7 +8507,7 @@
             </a:pPr>
             <a:r>
               <a:rPr lang="ru-RU" dirty="0"/>
-              <a:t>Обосновать выбор технологического стека</a:t>
+              <a:t> Обосновать выбор технологического стека.</a:t>
             </a:r>
           </a:p>
           <a:p>
@@ -8402,7 +8520,7 @@
             </a:pPr>
             <a:r>
               <a:rPr lang="ru-RU" dirty="0"/>
-              <a:t>Разработать алгоритмы </a:t>
+              <a:t> Разработать алгоритмы </a:t>
             </a:r>
             <a:r>
               <a:rPr lang="ru-RU" dirty="0" err="1"/>
@@ -8418,7 +8536,7 @@
             </a:r>
             <a:r>
               <a:rPr lang="ru-RU" dirty="0"/>
-              <a:t> и API управления</a:t>
+              <a:t> и API управления.</a:t>
             </a:r>
           </a:p>
           <a:p>
@@ -8431,7 +8549,7 @@
             </a:pPr>
             <a:r>
               <a:rPr lang="ru-RU" dirty="0"/>
-              <a:t>Реализовать систему хранения конфигураций и контроля состояний</a:t>
+              <a:t> Реализовать систему хранения конфигураций и контроля состояний.</a:t>
             </a:r>
           </a:p>
           <a:p>
@@ -8444,7 +8562,7 @@
             </a:pPr>
             <a:r>
               <a:rPr lang="ru-RU" dirty="0"/>
-              <a:t>Провести тестирование в среде ОС Astra Linux</a:t>
+              <a:t> Провести тестирование в среде ОС Astra Linux.</a:t>
             </a:r>
           </a:p>
         </p:txBody>
@@ -9345,6 +9463,42 @@
           <a:chExt cx="0" cy="0"/>
         </a:xfrm>
       </p:grpSpPr>
+      <p:pic>
+        <p:nvPicPr>
+          <p:cNvPr id="4" name="Рисунок 3" descr="Изображение выглядит как текст, снимок экрана, Шрифт, дизайн&#10;&#10;Контент, сгенерированный ИИ, может содержать ошибки.">
+            <a:extLst>
+              <a:ext uri="{FF2B5EF4-FFF2-40B4-BE49-F238E27FC236}">
+                <a16:creationId xmlns:a16="http://schemas.microsoft.com/office/drawing/2014/main" id="{A336DC11-6039-E2E6-AD68-0E377D16C365}"/>
+              </a:ext>
+            </a:extLst>
+          </p:cNvPr>
+          <p:cNvPicPr>
+            <a:picLocks noChangeAspect="1"/>
+          </p:cNvPicPr>
+          <p:nvPr/>
+        </p:nvPicPr>
+        <p:blipFill>
+          <a:blip r:embed="rId3" cstate="print">
+            <a:extLst>
+              <a:ext uri="{28A0092B-C50C-407E-A947-70E740481C1C}">
+                <a14:useLocalDpi xmlns:a14="http://schemas.microsoft.com/office/drawing/2010/main" val="0"/>
+              </a:ext>
+            </a:extLst>
+          </a:blip>
+          <a:stretch>
+            <a:fillRect/>
+          </a:stretch>
+        </p:blipFill>
+        <p:spPr>
+          <a:xfrm>
+            <a:off x="457200" y="1073065"/>
+            <a:ext cx="7560404" cy="5060464"/>
+          </a:xfrm>
+          <a:prstGeom prst="rect">
+            <a:avLst/>
+          </a:prstGeom>
+        </p:spPr>
+      </p:pic>
       <p:cxnSp>
         <p:nvCxnSpPr>
           <p:cNvPr id="6" name="Прямая соединительная линия 5"/>
@@ -9617,41 +9771,6 @@
       </p:sp>
       <p:pic>
         <p:nvPicPr>
-          <p:cNvPr id="8" name="Рисунок 7" descr="Изображение выглядит как текст, снимок экрана, Шрифт, диаграмма&#10;&#10;Контент, сгенерированный ИИ, может содержать ошибки.">
-            <a:extLst>
-              <a:ext uri="{FF2B5EF4-FFF2-40B4-BE49-F238E27FC236}">
-                <a16:creationId xmlns:a16="http://schemas.microsoft.com/office/drawing/2014/main" id="{891AAAA8-EB26-EB61-1803-37F426256D47}"/>
-              </a:ext>
-            </a:extLst>
-          </p:cNvPr>
-          <p:cNvPicPr>
-            <a:picLocks noChangeAspect="1"/>
-          </p:cNvPicPr>
-          <p:nvPr/>
-        </p:nvPicPr>
-        <p:blipFill>
-          <a:blip r:embed="rId3" cstate="print">
-            <a:extLst>
-              <a:ext uri="{28A0092B-C50C-407E-A947-70E740481C1C}">
-                <a14:useLocalDpi xmlns:a14="http://schemas.microsoft.com/office/drawing/2010/main" val="0"/>
-              </a:ext>
-            </a:extLst>
-          </a:blip>
-          <a:srcRect l="1826" t="2623" r="1301" b="2469"/>
-          <a:stretch/>
-        </p:blipFill>
-        <p:spPr>
-          <a:xfrm>
-            <a:off x="493057" y="1121404"/>
-            <a:ext cx="7712635" cy="5032288"/>
-          </a:xfrm>
-          <a:prstGeom prst="rect">
-            <a:avLst/>
-          </a:prstGeom>
-        </p:spPr>
-      </p:pic>
-      <p:pic>
-        <p:nvPicPr>
           <p:cNvPr id="1026" name="Picture 2">
             <a:extLst>
               <a:ext uri="{FF2B5EF4-FFF2-40B4-BE49-F238E27FC236}">
@@ -9679,7 +9798,7 @@
         </p:blipFill>
         <p:spPr bwMode="auto">
           <a:xfrm>
-            <a:off x="8700848" y="1544028"/>
+            <a:off x="8646222" y="2355405"/>
             <a:ext cx="941542" cy="941542"/>
           </a:xfrm>
           <a:prstGeom prst="rect">
@@ -9773,7 +9892,7 @@
         </p:blipFill>
         <p:spPr bwMode="auto">
           <a:xfrm>
-            <a:off x="9546557" y="5263113"/>
+            <a:off x="6439259" y="1258790"/>
             <a:ext cx="2367897" cy="854110"/>
           </a:xfrm>
           <a:prstGeom prst="rect">
@@ -9820,7 +9939,7 @@
         </p:blipFill>
         <p:spPr bwMode="auto">
           <a:xfrm>
-            <a:off x="9065311" y="3290777"/>
+            <a:off x="8740273" y="3750673"/>
             <a:ext cx="962492" cy="962492"/>
           </a:xfrm>
           <a:prstGeom prst="rect">
@@ -9914,7 +10033,7 @@
         </p:blipFill>
         <p:spPr bwMode="auto">
           <a:xfrm>
-            <a:off x="6690016" y="4952797"/>
+            <a:off x="8697125" y="5166892"/>
             <a:ext cx="2575647" cy="974570"/>
           </a:xfrm>
           <a:prstGeom prst="rect">
@@ -12507,7 +12626,7 @@
             </a:r>
             <a:r>
               <a:rPr lang="ru-RU" sz="1600" dirty="0"/>
-              <a:t>: один управляющий узел координирует несколько удалённых хостов через SSH/SFTP</a:t>
+              <a:t>: один управляющий узел координирует несколько удалённых хостов через SSH/SFTP;</a:t>
             </a:r>
           </a:p>
           <a:p>
@@ -12907,10 +13026,10 @@
       </p:sp>
       <p:pic>
         <p:nvPicPr>
-          <p:cNvPr id="8" name="Рисунок 7" descr="Изображение выглядит как текст, снимок экрана, диаграмма, График&#10;&#10;Контент, сгенерированный ИИ, может содержать ошибки.">
+          <p:cNvPr id="10" name="Рисунок 9" descr="Изображение выглядит как текст, снимок экрана, Шрифт, дизайн&#10;&#10;Контент, сгенерированный ИИ, может содержать ошибки.">
             <a:extLst>
               <a:ext uri="{FF2B5EF4-FFF2-40B4-BE49-F238E27FC236}">
-                <a16:creationId xmlns:a16="http://schemas.microsoft.com/office/drawing/2014/main" id="{4CE38F7F-E48C-9123-6382-1AB58F7F6DCE}"/>
+                <a16:creationId xmlns:a16="http://schemas.microsoft.com/office/drawing/2014/main" id="{ED5AC783-F67F-FDD4-576E-ACC0063AD052}"/>
               </a:ext>
             </a:extLst>
           </p:cNvPr>
@@ -12920,20 +13039,21 @@
           <p:nvPr/>
         </p:nvPicPr>
         <p:blipFill>
-          <a:blip r:embed="rId3" cstate="print">
+          <a:blip r:embed="rId3">
             <a:extLst>
               <a:ext uri="{28A0092B-C50C-407E-A947-70E740481C1C}">
                 <a14:useLocalDpi xmlns:a14="http://schemas.microsoft.com/office/drawing/2010/main" val="0"/>
               </a:ext>
             </a:extLst>
           </a:blip>
-          <a:srcRect t="8564" r="23981" b="4588"/>
-          <a:stretch/>
+          <a:stretch>
+            <a:fillRect/>
+          </a:stretch>
         </p:blipFill>
         <p:spPr>
           <a:xfrm>
-            <a:off x="1162424" y="2045369"/>
-            <a:ext cx="4933576" cy="3052560"/>
+            <a:off x="6998144" y="1024064"/>
+            <a:ext cx="3815968" cy="5296681"/>
           </a:xfrm>
           <a:prstGeom prst="rect">
             <a:avLst/>
@@ -12942,10 +13062,10 @@
       </p:pic>
       <p:pic>
         <p:nvPicPr>
-          <p:cNvPr id="10" name="Рисунок 9" descr="Изображение выглядит как текст, снимок экрана, Шрифт, дизайн&#10;&#10;Контент, сгенерированный ИИ, может содержать ошибки.">
+          <p:cNvPr id="9" name="Рисунок 8" descr="Изображение выглядит как текст, снимок экрана, График, линия&#10;&#10;Контент, сгенерированный ИИ, может содержать ошибки.">
             <a:extLst>
               <a:ext uri="{FF2B5EF4-FFF2-40B4-BE49-F238E27FC236}">
-                <a16:creationId xmlns:a16="http://schemas.microsoft.com/office/drawing/2014/main" id="{ED5AC783-F67F-FDD4-576E-ACC0063AD052}"/>
+                <a16:creationId xmlns:a16="http://schemas.microsoft.com/office/drawing/2014/main" id="{BE4D3A63-67A0-38E0-F789-B8AE9C3085EB}"/>
               </a:ext>
             </a:extLst>
           </p:cNvPr>
@@ -12962,14 +13082,13 @@
               </a:ext>
             </a:extLst>
           </a:blip>
-          <a:stretch>
-            <a:fillRect/>
-          </a:stretch>
+          <a:srcRect l="656" t="1189" r="23539" b="1623"/>
+          <a:stretch/>
         </p:blipFill>
         <p:spPr>
           <a:xfrm>
-            <a:off x="6998144" y="1024064"/>
-            <a:ext cx="3815968" cy="5296681"/>
+            <a:off x="457200" y="1659284"/>
+            <a:ext cx="5990688" cy="4159624"/>
           </a:xfrm>
           <a:prstGeom prst="rect">
             <a:avLst/>
@@ -13278,10 +13397,10 @@
       </p:sp>
       <p:pic>
         <p:nvPicPr>
-          <p:cNvPr id="16" name="Рисунок 15" descr="Изображение выглядит как текст, диаграмма, снимок экрана, Параллельный&#10;&#10;Контент, сгенерированный ИИ, может содержать ошибки.">
+          <p:cNvPr id="4" name="Рисунок 3" descr="Изображение выглядит как текст, диаграмма, снимок экрана, линия&#10;&#10;Контент, сгенерированный ИИ, может содержать ошибки.">
             <a:extLst>
               <a:ext uri="{FF2B5EF4-FFF2-40B4-BE49-F238E27FC236}">
-                <a16:creationId xmlns:a16="http://schemas.microsoft.com/office/drawing/2014/main" id="{4E3491A9-48E7-593B-2B39-4313488462AB}"/>
+                <a16:creationId xmlns:a16="http://schemas.microsoft.com/office/drawing/2014/main" id="{F4A0CBAD-5AC8-3BE7-31EC-E2ABAB338B16}"/>
               </a:ext>
             </a:extLst>
           </p:cNvPr>
@@ -13298,13 +13417,14 @@
               </a:ext>
             </a:extLst>
           </a:blip>
-          <a:srcRect t="3809"/>
-          <a:stretch/>
+          <a:stretch>
+            <a:fillRect/>
+          </a:stretch>
         </p:blipFill>
         <p:spPr>
           <a:xfrm>
-            <a:off x="193420" y="1343223"/>
-            <a:ext cx="11091411" cy="4613836"/>
+            <a:off x="2924488" y="1206979"/>
+            <a:ext cx="5629275" cy="4886325"/>
           </a:xfrm>
           <a:prstGeom prst="rect">
             <a:avLst/>

--- a/Thesis/docs/Презентация.pptx
+++ b/Thesis/docs/Презентация.pptx
@@ -248,7 +248,7 @@
           <a:p>
             <a:fld id="{06B9DC91-30C7-46AB-ADDB-A80A0533D77A}" type="datetimeFigureOut">
               <a:rPr lang="ru-RU" smtClean="0"/>
-              <a:t>29.05.2026</a:t>
+              <a:t>01.06.2026</a:t>
             </a:fld>
             <a:endParaRPr lang="ru-RU"/>
           </a:p>
@@ -2064,7 +2064,7 @@
           <a:p>
             <a:fld id="{D92D3C23-8038-4008-B24E-40A94D79456D}" type="datetime1">
               <a:rPr lang="ru-RU" smtClean="0"/>
-              <a:t>29.05.2026</a:t>
+              <a:t>01.06.2026</a:t>
             </a:fld>
             <a:endParaRPr lang="ru-RU"/>
           </a:p>
@@ -2512,7 +2512,7 @@
           <a:p>
             <a:fld id="{4FBADD92-CC98-4900-BE8A-2068547BBC1A}" type="datetime1">
               <a:rPr lang="ru-RU" smtClean="0"/>
-              <a:t>29.05.2026</a:t>
+              <a:t>01.06.2026</a:t>
             </a:fld>
             <a:endParaRPr lang="ru-RU"/>
           </a:p>
@@ -2830,7 +2830,7 @@
           <a:p>
             <a:fld id="{06738898-160C-4747-9301-0B5702FA49D8}" type="datetime1">
               <a:rPr lang="ru-RU" smtClean="0"/>
-              <a:t>29.05.2026</a:t>
+              <a:t>01.06.2026</a:t>
             </a:fld>
             <a:endParaRPr lang="ru-RU"/>
           </a:p>
@@ -2957,7 +2957,7 @@
           <a:p>
             <a:fld id="{F1EBB16F-DABE-4712-B47F-7722E1CB50FE}" type="datetime1">
               <a:rPr lang="ru-RU" smtClean="0"/>
-              <a:t>29.05.2026</a:t>
+              <a:t>01.06.2026</a:t>
             </a:fld>
             <a:endParaRPr lang="ru-RU" dirty="0"/>
           </a:p>
@@ -3010,7 +3010,7 @@
           <a:p>
             <a:fld id="{2CEBEA22-9938-4273-8C60-D80B349E4BA9}" type="datetime1">
               <a:rPr lang="ru-RU" smtClean="0"/>
-              <a:t>29.05.2026</a:t>
+              <a:t>01.06.2026</a:t>
             </a:fld>
             <a:endParaRPr lang="ru-RU"/>
           </a:p>
@@ -3291,7 +3291,7 @@
           <a:p>
             <a:fld id="{570D790B-F35A-4C90-BC4A-BA7F77964CA4}" type="datetime1">
               <a:rPr lang="ru-RU" smtClean="0"/>
-              <a:t>29.05.2026</a:t>
+              <a:t>01.06.2026</a:t>
             </a:fld>
             <a:endParaRPr lang="ru-RU"/>
           </a:p>
@@ -3528,7 +3528,7 @@
           <a:p>
             <a:fld id="{29AEF080-AA0F-44FA-BA62-A56D8619F7E7}" type="datetime1">
               <a:rPr lang="ru-RU" smtClean="0"/>
-              <a:t>29.05.2026</a:t>
+              <a:t>01.06.2026</a:t>
             </a:fld>
             <a:endParaRPr lang="ru-RU"/>
           </a:p>
@@ -3710,7 +3710,7 @@
           <a:p>
             <a:fld id="{83AB8CDF-4973-4195-91CA-18BA11F1D400}" type="datetime1">
               <a:rPr lang="ru-RU" smtClean="0"/>
-              <a:t>29.05.2026</a:t>
+              <a:t>01.06.2026</a:t>
             </a:fld>
             <a:endParaRPr lang="ru-RU"/>
           </a:p>
@@ -6598,64 +6598,10 @@
       </p:pic>
       <p:sp>
         <p:nvSpPr>
-          <p:cNvPr id="12" name="Прямоугольник 11">
+          <p:cNvPr id="5" name="TextBox 4">
             <a:extLst>
               <a:ext uri="{FF2B5EF4-FFF2-40B4-BE49-F238E27FC236}">
-                <a16:creationId xmlns:a16="http://schemas.microsoft.com/office/drawing/2014/main" id="{6644B028-7817-16DE-B4B7-8B80FDB41158}"/>
-              </a:ext>
-            </a:extLst>
-          </p:cNvPr>
-          <p:cNvSpPr/>
-          <p:nvPr/>
-        </p:nvSpPr>
-        <p:spPr>
-          <a:xfrm>
-            <a:off x="5378824" y="1659286"/>
-            <a:ext cx="155388" cy="3904144"/>
-          </a:xfrm>
-          <a:prstGeom prst="rect">
-            <a:avLst/>
-          </a:prstGeom>
-          <a:solidFill>
-            <a:srgbClr val="E7E4E0"/>
-          </a:solidFill>
-          <a:ln>
-            <a:solidFill>
-              <a:srgbClr val="E7E4E0"/>
-            </a:solidFill>
-          </a:ln>
-        </p:spPr>
-        <p:style>
-          <a:lnRef idx="2">
-            <a:schemeClr val="accent1">
-              <a:shade val="15000"/>
-            </a:schemeClr>
-          </a:lnRef>
-          <a:fillRef idx="1">
-            <a:schemeClr val="accent1"/>
-          </a:fillRef>
-          <a:effectRef idx="0">
-            <a:schemeClr val="accent1"/>
-          </a:effectRef>
-          <a:fontRef idx="minor">
-            <a:schemeClr val="lt1"/>
-          </a:fontRef>
-        </p:style>
-        <p:txBody>
-          <a:bodyPr rtlCol="0" anchor="ctr"/>
-          <a:lstStyle/>
-          <a:p>
-            <a:pPr algn="ctr"/>
-            <a:endParaRPr lang="ru-RU"/>
-          </a:p>
-        </p:txBody>
-      </p:sp>
-      <p:sp>
-        <p:nvSpPr>
-          <p:cNvPr id="10" name="TextBox 9">
-            <a:extLst>
-              <a:ext uri="{FF2B5EF4-FFF2-40B4-BE49-F238E27FC236}">
-                <a16:creationId xmlns:a16="http://schemas.microsoft.com/office/drawing/2014/main" id="{DA68C8FC-B339-99EE-C299-363703B54D1B}"/>
+                <a16:creationId xmlns:a16="http://schemas.microsoft.com/office/drawing/2014/main" id="{A14BA0F6-39A7-D601-8DEA-8D911A94C3B1}"/>
               </a:ext>
             </a:extLst>
           </p:cNvPr>
@@ -6663,9 +6609,9 @@
           <p:nvPr/>
         </p:nvSpPr>
         <p:spPr>
-          <a:xfrm rot="16200000">
-            <a:off x="4350470" y="3459964"/>
-            <a:ext cx="2191626" cy="261610"/>
+          <a:xfrm>
+            <a:off x="8257101" y="5564982"/>
+            <a:ext cx="3595856" cy="276999"/>
           </a:xfrm>
           <a:prstGeom prst="rect">
             <a:avLst/>
@@ -6679,8 +6625,8 @@
           <a:lstStyle/>
           <a:p>
             <a:r>
-              <a:rPr lang="ru-RU" sz="1100" dirty="0"/>
-              <a:t>Вносимая задержка этапом</a:t>
+              <a:rPr lang="ru-RU" sz="1200" dirty="0"/>
+              <a:t>ось X — "Время", ось Y — "Задержка (мс)"</a:t>
             </a:r>
           </a:p>
         </p:txBody>
@@ -7951,8 +7897,8 @@
         </p:nvSpPr>
         <p:spPr>
           <a:xfrm>
-            <a:off x="423877" y="2115050"/>
-            <a:ext cx="11344245" cy="2997231"/>
+            <a:off x="457200" y="1122030"/>
+            <a:ext cx="4909671" cy="4942379"/>
           </a:xfrm>
           <a:prstGeom prst="rect">
             <a:avLst/>
@@ -7967,7 +7913,7 @@
           <a:p>
             <a:pPr>
               <a:lnSpc>
-                <a:spcPct val="150000"/>
+                <a:spcPct val="110000"/>
               </a:lnSpc>
             </a:pPr>
             <a:r>
@@ -7978,7 +7924,7 @@
           <a:p>
             <a:pPr>
               <a:lnSpc>
-                <a:spcPct val="150000"/>
+                <a:spcPct val="110000"/>
               </a:lnSpc>
             </a:pPr>
             <a:r>
@@ -7993,7 +7939,7 @@
           <a:p>
             <a:pPr marL="285750" indent="-285750">
               <a:lnSpc>
-                <a:spcPct val="150000"/>
+                <a:spcPct val="110000"/>
               </a:lnSpc>
               <a:buFont typeface="Arial" panose="020B0604020202020204" pitchFamily="34" charset="0"/>
               <a:buChar char="•"/>
@@ -8030,7 +7976,7 @@
           <a:p>
             <a:pPr marL="285750" indent="-285750">
               <a:lnSpc>
-                <a:spcPct val="150000"/>
+                <a:spcPct val="110000"/>
               </a:lnSpc>
               <a:buFont typeface="Arial" panose="020B0604020202020204" pitchFamily="34" charset="0"/>
               <a:buChar char="•"/>
@@ -8059,7 +8005,7 @@
           <a:p>
             <a:pPr marL="285750" indent="-285750">
               <a:lnSpc>
-                <a:spcPct val="150000"/>
+                <a:spcPct val="110000"/>
               </a:lnSpc>
               <a:buFont typeface="Arial" panose="020B0604020202020204" pitchFamily="34" charset="0"/>
               <a:buChar char="•"/>
@@ -8072,7 +8018,7 @@
           <a:p>
             <a:pPr>
               <a:lnSpc>
-                <a:spcPct val="150000"/>
+                <a:spcPct val="110000"/>
               </a:lnSpc>
             </a:pPr>
             <a:r>
@@ -8094,6 +8040,53 @@
           </a:p>
         </p:txBody>
       </p:sp>
+      <p:pic>
+        <p:nvPicPr>
+          <p:cNvPr id="1026" name="Picture 2" descr="To Mock or not to Mock, that is the question… | Cristiano Cunha personal  blog on automation and testing.">
+            <a:extLst>
+              <a:ext uri="{FF2B5EF4-FFF2-40B4-BE49-F238E27FC236}">
+                <a16:creationId xmlns:a16="http://schemas.microsoft.com/office/drawing/2014/main" id="{1DAB2F8F-3D88-62CD-B9F5-06939CF78EC0}"/>
+              </a:ext>
+            </a:extLst>
+          </p:cNvPr>
+          <p:cNvPicPr>
+            <a:picLocks noChangeAspect="1" noChangeArrowheads="1"/>
+          </p:cNvPicPr>
+          <p:nvPr/>
+        </p:nvPicPr>
+        <p:blipFill>
+          <a:blip r:embed="rId3" cstate="print">
+            <a:extLst>
+              <a:ext uri="{28A0092B-C50C-407E-A947-70E740481C1C}">
+                <a14:useLocalDpi xmlns:a14="http://schemas.microsoft.com/office/drawing/2010/main" val="0"/>
+              </a:ext>
+            </a:extLst>
+          </a:blip>
+          <a:srcRect/>
+          <a:stretch>
+            <a:fillRect/>
+          </a:stretch>
+        </p:blipFill>
+        <p:spPr bwMode="auto">
+          <a:xfrm>
+            <a:off x="5443652" y="1294722"/>
+            <a:ext cx="6341782" cy="4640328"/>
+          </a:xfrm>
+          <a:prstGeom prst="rect">
+            <a:avLst/>
+          </a:prstGeom>
+          <a:noFill/>
+          <a:extLst>
+            <a:ext uri="{909E8E84-426E-40DD-AFC4-6F175D3DCCD1}">
+              <a14:hiddenFill xmlns:a14="http://schemas.microsoft.com/office/drawing/2010/main">
+                <a:solidFill>
+                  <a:srgbClr val="FFFFFF"/>
+                </a:solidFill>
+              </a14:hiddenFill>
+            </a:ext>
+          </a:extLst>
+        </p:spPr>
+      </p:pic>
     </p:spTree>
     <p:extLst>
       <p:ext uri="{BB962C8B-B14F-4D97-AF65-F5344CB8AC3E}">
@@ -13087,7 +13080,7 @@
         </p:blipFill>
         <p:spPr>
           <a:xfrm>
-            <a:off x="457200" y="1659284"/>
+            <a:off x="457200" y="1234954"/>
             <a:ext cx="5990688" cy="4159624"/>
           </a:xfrm>
           <a:prstGeom prst="rect">
@@ -13095,6 +13088,57 @@
           </a:prstGeom>
         </p:spPr>
       </p:pic>
+      <p:sp>
+        <p:nvSpPr>
+          <p:cNvPr id="2" name="TextBox 1">
+            <a:extLst>
+              <a:ext uri="{FF2B5EF4-FFF2-40B4-BE49-F238E27FC236}">
+                <a16:creationId xmlns:a16="http://schemas.microsoft.com/office/drawing/2014/main" id="{3FB37F89-4057-D34E-9133-E401A41AB21D}"/>
+              </a:ext>
+            </a:extLst>
+          </p:cNvPr>
+          <p:cNvSpPr txBox="1"/>
+          <p:nvPr/>
+        </p:nvSpPr>
+        <p:spPr>
+          <a:xfrm>
+            <a:off x="457200" y="5394578"/>
+            <a:ext cx="5246949" cy="276999"/>
+          </a:xfrm>
+          <a:prstGeom prst="rect">
+            <a:avLst/>
+          </a:prstGeom>
+          <a:noFill/>
+        </p:spPr>
+        <p:txBody>
+          <a:bodyPr wrap="none" rtlCol="0">
+            <a:spAutoFit/>
+          </a:bodyPr>
+          <a:lstStyle/>
+          <a:p>
+            <a:r>
+              <a:rPr lang="ru-RU" sz="1200" dirty="0"/>
+              <a:t>ось X — "Время", ось Y — "Интенсивность кодов ответа</a:t>
+            </a:r>
+            <a:r>
+              <a:rPr lang="en-US" sz="1200" dirty="0"/>
+              <a:t> </a:t>
+            </a:r>
+            <a:r>
+              <a:rPr lang="ru-RU" sz="1200" dirty="0"/>
+              <a:t>(</a:t>
+            </a:r>
+            <a:r>
+              <a:rPr lang="en-US" sz="1200" dirty="0"/>
+              <a:t>RPS</a:t>
+            </a:r>
+            <a:r>
+              <a:rPr lang="ru-RU" sz="1200" dirty="0"/>
+              <a:t>)"</a:t>
+            </a:r>
+          </a:p>
+        </p:txBody>
+      </p:sp>
     </p:spTree>
     <p:extLst>
       <p:ext uri="{BB962C8B-B14F-4D97-AF65-F5344CB8AC3E}">

--- a/Thesis/docs/Презентация.pptx
+++ b/Thesis/docs/Презентация.pptx
@@ -248,7 +248,7 @@
           <a:p>
             <a:fld id="{06B9DC91-30C7-46AB-ADDB-A80A0533D77A}" type="datetimeFigureOut">
               <a:rPr lang="ru-RU" smtClean="0"/>
-              <a:t>01.06.2026</a:t>
+              <a:t>02.06.2026</a:t>
             </a:fld>
             <a:endParaRPr lang="ru-RU"/>
           </a:p>
@@ -2064,7 +2064,7 @@
           <a:p>
             <a:fld id="{D92D3C23-8038-4008-B24E-40A94D79456D}" type="datetime1">
               <a:rPr lang="ru-RU" smtClean="0"/>
-              <a:t>01.06.2026</a:t>
+              <a:t>02.06.2026</a:t>
             </a:fld>
             <a:endParaRPr lang="ru-RU"/>
           </a:p>
@@ -2512,7 +2512,7 @@
           <a:p>
             <a:fld id="{4FBADD92-CC98-4900-BE8A-2068547BBC1A}" type="datetime1">
               <a:rPr lang="ru-RU" smtClean="0"/>
-              <a:t>01.06.2026</a:t>
+              <a:t>02.06.2026</a:t>
             </a:fld>
             <a:endParaRPr lang="ru-RU"/>
           </a:p>
@@ -2830,7 +2830,7 @@
           <a:p>
             <a:fld id="{06738898-160C-4747-9301-0B5702FA49D8}" type="datetime1">
               <a:rPr lang="ru-RU" smtClean="0"/>
-              <a:t>01.06.2026</a:t>
+              <a:t>02.06.2026</a:t>
             </a:fld>
             <a:endParaRPr lang="ru-RU"/>
           </a:p>
@@ -2957,7 +2957,7 @@
           <a:p>
             <a:fld id="{F1EBB16F-DABE-4712-B47F-7722E1CB50FE}" type="datetime1">
               <a:rPr lang="ru-RU" smtClean="0"/>
-              <a:t>01.06.2026</a:t>
+              <a:t>02.06.2026</a:t>
             </a:fld>
             <a:endParaRPr lang="ru-RU" dirty="0"/>
           </a:p>
@@ -3010,7 +3010,7 @@
           <a:p>
             <a:fld id="{2CEBEA22-9938-4273-8C60-D80B349E4BA9}" type="datetime1">
               <a:rPr lang="ru-RU" smtClean="0"/>
-              <a:t>01.06.2026</a:t>
+              <a:t>02.06.2026</a:t>
             </a:fld>
             <a:endParaRPr lang="ru-RU"/>
           </a:p>
@@ -3291,7 +3291,7 @@
           <a:p>
             <a:fld id="{570D790B-F35A-4C90-BC4A-BA7F77964CA4}" type="datetime1">
               <a:rPr lang="ru-RU" smtClean="0"/>
-              <a:t>01.06.2026</a:t>
+              <a:t>02.06.2026</a:t>
             </a:fld>
             <a:endParaRPr lang="ru-RU"/>
           </a:p>
@@ -3528,7 +3528,7 @@
           <a:p>
             <a:fld id="{29AEF080-AA0F-44FA-BA62-A56D8619F7E7}" type="datetime1">
               <a:rPr lang="ru-RU" smtClean="0"/>
-              <a:t>01.06.2026</a:t>
+              <a:t>02.06.2026</a:t>
             </a:fld>
             <a:endParaRPr lang="ru-RU"/>
           </a:p>
@@ -3710,7 +3710,7 @@
           <a:p>
             <a:fld id="{83AB8CDF-4973-4195-91CA-18BA11F1D400}" type="datetime1">
               <a:rPr lang="ru-RU" smtClean="0"/>
-              <a:t>01.06.2026</a:t>
+              <a:t>02.06.2026</a:t>
             </a:fld>
             <a:endParaRPr lang="ru-RU"/>
           </a:p>
@@ -6588,7 +6588,7 @@
         </p:blipFill>
         <p:spPr>
           <a:xfrm>
-            <a:off x="5446283" y="1660838"/>
+            <a:off x="5583742" y="1659284"/>
             <a:ext cx="6406674" cy="3904144"/>
           </a:xfrm>
           <a:prstGeom prst="rect">
@@ -6598,10 +6598,10 @@
       </p:pic>
       <p:sp>
         <p:nvSpPr>
-          <p:cNvPr id="5" name="TextBox 4">
+          <p:cNvPr id="10" name="TextBox 9">
             <a:extLst>
               <a:ext uri="{FF2B5EF4-FFF2-40B4-BE49-F238E27FC236}">
-                <a16:creationId xmlns:a16="http://schemas.microsoft.com/office/drawing/2014/main" id="{A14BA0F6-39A7-D601-8DEA-8D911A94C3B1}"/>
+                <a16:creationId xmlns:a16="http://schemas.microsoft.com/office/drawing/2014/main" id="{726D50BE-90CC-0FFA-3F53-15624E28731A}"/>
               </a:ext>
             </a:extLst>
           </p:cNvPr>
@@ -6610,8 +6610,8 @@
         </p:nvSpPr>
         <p:spPr>
           <a:xfrm>
-            <a:off x="8257101" y="5564982"/>
-            <a:ext cx="3595856" cy="276999"/>
+            <a:off x="8434467" y="5563428"/>
+            <a:ext cx="705223" cy="276999"/>
           </a:xfrm>
           <a:prstGeom prst="rect">
             <a:avLst/>
@@ -6619,14 +6619,49 @@
           <a:noFill/>
         </p:spPr>
         <p:txBody>
-          <a:bodyPr wrap="none" rtlCol="0">
+          <a:bodyPr wrap="square">
             <a:spAutoFit/>
           </a:bodyPr>
           <a:lstStyle/>
           <a:p>
             <a:r>
               <a:rPr lang="ru-RU" sz="1200" dirty="0"/>
-              <a:t>ось X — "Время", ось Y — "Задержка (мс)"</a:t>
+              <a:t>Время</a:t>
+            </a:r>
+          </a:p>
+        </p:txBody>
+      </p:sp>
+      <p:sp>
+        <p:nvSpPr>
+          <p:cNvPr id="13" name="TextBox 12">
+            <a:extLst>
+              <a:ext uri="{FF2B5EF4-FFF2-40B4-BE49-F238E27FC236}">
+                <a16:creationId xmlns:a16="http://schemas.microsoft.com/office/drawing/2014/main" id="{C577BD0D-9BD5-7EB3-3494-19AA801A7BE0}"/>
+              </a:ext>
+            </a:extLst>
+          </p:cNvPr>
+          <p:cNvSpPr txBox="1"/>
+          <p:nvPr/>
+        </p:nvSpPr>
+        <p:spPr>
+          <a:xfrm>
+            <a:off x="5307106" y="2894916"/>
+            <a:ext cx="369332" cy="1477103"/>
+          </a:xfrm>
+          <a:prstGeom prst="rect">
+            <a:avLst/>
+          </a:prstGeom>
+          <a:noFill/>
+        </p:spPr>
+        <p:txBody>
+          <a:bodyPr vert="vert270" wrap="square">
+            <a:spAutoFit/>
+          </a:bodyPr>
+          <a:lstStyle/>
+          <a:p>
+            <a:r>
+              <a:rPr lang="ru-RU" sz="1200" dirty="0"/>
+              <a:t>Время этапа (мс)</a:t>
             </a:r>
           </a:p>
         </p:txBody>
@@ -7898,7 +7933,7 @@
         <p:spPr>
           <a:xfrm>
             <a:off x="457200" y="1122030"/>
-            <a:ext cx="4909671" cy="4942379"/>
+            <a:ext cx="4729111" cy="4942379"/>
           </a:xfrm>
           <a:prstGeom prst="rect">
             <a:avLst/>
@@ -8042,49 +8077,38 @@
       </p:sp>
       <p:pic>
         <p:nvPicPr>
-          <p:cNvPr id="1026" name="Picture 2" descr="To Mock or not to Mock, that is the question… | Cristiano Cunha personal  blog on automation and testing.">
+          <p:cNvPr id="5" name="Рисунок 4" descr="Изображение выглядит как текст, снимок экрана, диаграмма, линия&#10;&#10;Контент, сгенерированный ИИ, может содержать ошибки.">
             <a:extLst>
               <a:ext uri="{FF2B5EF4-FFF2-40B4-BE49-F238E27FC236}">
-                <a16:creationId xmlns:a16="http://schemas.microsoft.com/office/drawing/2014/main" id="{1DAB2F8F-3D88-62CD-B9F5-06939CF78EC0}"/>
+                <a16:creationId xmlns:a16="http://schemas.microsoft.com/office/drawing/2014/main" id="{8F7213A9-A074-E9FE-F63A-FE52F9B6DD2A}"/>
               </a:ext>
             </a:extLst>
           </p:cNvPr>
           <p:cNvPicPr>
-            <a:picLocks noChangeAspect="1" noChangeArrowheads="1"/>
+            <a:picLocks noChangeAspect="1"/>
           </p:cNvPicPr>
           <p:nvPr/>
         </p:nvPicPr>
         <p:blipFill>
-          <a:blip r:embed="rId3" cstate="print">
+          <a:blip r:embed="rId3">
             <a:extLst>
               <a:ext uri="{28A0092B-C50C-407E-A947-70E740481C1C}">
                 <a14:useLocalDpi xmlns:a14="http://schemas.microsoft.com/office/drawing/2010/main" val="0"/>
               </a:ext>
             </a:extLst>
           </a:blip>
-          <a:srcRect/>
           <a:stretch>
             <a:fillRect/>
           </a:stretch>
         </p:blipFill>
-        <p:spPr bwMode="auto">
+        <p:spPr>
           <a:xfrm>
-            <a:off x="5443652" y="1294722"/>
-            <a:ext cx="6341782" cy="4640328"/>
+            <a:off x="5186311" y="1284247"/>
+            <a:ext cx="6804105" cy="4731789"/>
           </a:xfrm>
           <a:prstGeom prst="rect">
             <a:avLst/>
           </a:prstGeom>
-          <a:noFill/>
-          <a:extLst>
-            <a:ext uri="{909E8E84-426E-40DD-AFC4-6F175D3DCCD1}">
-              <a14:hiddenFill xmlns:a14="http://schemas.microsoft.com/office/drawing/2010/main">
-                <a:solidFill>
-                  <a:srgbClr val="FFFFFF"/>
-                </a:solidFill>
-              </a14:hiddenFill>
-            </a:ext>
-          </a:extLst>
         </p:spPr>
       </p:pic>
     </p:spTree>
@@ -13090,10 +13114,10 @@
       </p:pic>
       <p:sp>
         <p:nvSpPr>
-          <p:cNvPr id="2" name="TextBox 1">
+          <p:cNvPr id="4" name="TextBox 3">
             <a:extLst>
               <a:ext uri="{FF2B5EF4-FFF2-40B4-BE49-F238E27FC236}">
-                <a16:creationId xmlns:a16="http://schemas.microsoft.com/office/drawing/2014/main" id="{3FB37F89-4057-D34E-9133-E401A41AB21D}"/>
+                <a16:creationId xmlns:a16="http://schemas.microsoft.com/office/drawing/2014/main" id="{4E97C64A-7E39-680D-0736-BFA86D18260D}"/>
               </a:ext>
             </a:extLst>
           </p:cNvPr>
@@ -13102,8 +13126,8 @@
         </p:nvSpPr>
         <p:spPr>
           <a:xfrm>
-            <a:off x="457200" y="5394578"/>
-            <a:ext cx="5246949" cy="276999"/>
+            <a:off x="3113348" y="5369002"/>
+            <a:ext cx="678391" cy="276999"/>
           </a:xfrm>
           <a:prstGeom prst="rect">
             <a:avLst/>
@@ -13118,7 +13142,42 @@
           <a:p>
             <a:r>
               <a:rPr lang="ru-RU" sz="1200" dirty="0"/>
-              <a:t>ось X — "Время", ось Y — "Интенсивность кодов ответа</a:t>
+              <a:t>Время</a:t>
+            </a:r>
+          </a:p>
+        </p:txBody>
+      </p:sp>
+      <p:sp>
+        <p:nvSpPr>
+          <p:cNvPr id="5" name="TextBox 4">
+            <a:extLst>
+              <a:ext uri="{FF2B5EF4-FFF2-40B4-BE49-F238E27FC236}">
+                <a16:creationId xmlns:a16="http://schemas.microsoft.com/office/drawing/2014/main" id="{BF403B05-77AB-44C2-B157-13C9DB2919FF}"/>
+              </a:ext>
+            </a:extLst>
+          </p:cNvPr>
+          <p:cNvSpPr txBox="1"/>
+          <p:nvPr/>
+        </p:nvSpPr>
+        <p:spPr>
+          <a:xfrm>
+            <a:off x="155089" y="1875590"/>
+            <a:ext cx="369332" cy="2878352"/>
+          </a:xfrm>
+          <a:prstGeom prst="rect">
+            <a:avLst/>
+          </a:prstGeom>
+          <a:noFill/>
+        </p:spPr>
+        <p:txBody>
+          <a:bodyPr vert="vert270" wrap="none" rtlCol="0">
+            <a:spAutoFit/>
+          </a:bodyPr>
+          <a:lstStyle/>
+          <a:p>
+            <a:r>
+              <a:rPr lang="ru-RU" sz="1200" dirty="0"/>
+              <a:t>Интенсивность кодов ответа</a:t>
             </a:r>
             <a:r>
               <a:rPr lang="en-US" sz="1200" dirty="0"/>
@@ -13134,7 +13193,7 @@
             </a:r>
             <a:r>
               <a:rPr lang="ru-RU" sz="1200" dirty="0"/>
-              <a:t>)"</a:t>
+              <a:t>)</a:t>
             </a:r>
           </a:p>
         </p:txBody>
